--- a/public/downloads/dg32-lite-tapein.pptx
+++ b/public/downloads/dg32-lite-tapein.pptx
@@ -2,23 +2,23 @@
 <file path=ppt/presentation.xml><?xml version="1.0" encoding="utf-8"?>
 <p:presentation xmlns:p="http://schemas.openxmlformats.org/presentationml/2006/main">
   <p:sldMasterIdLst>
-    <p:sldMasterId xmlns:r="http://schemas.openxmlformats.org/officeDocument/2006/relationships" id="2147483648" r:id="R2fb406c3dd774dad"/>
+    <p:sldMasterId xmlns:r="http://schemas.openxmlformats.org/officeDocument/2006/relationships" id="2147483648" r:id="R4f66c7cb3a6842bb"/>
   </p:sldMasterIdLst>
   <p:notesMasterIdLst>
-    <p:notesMasterId xmlns:r="http://schemas.openxmlformats.org/officeDocument/2006/relationships" r:id="Rb2139143f0194a21"/>
+    <p:notesMasterId xmlns:r="http://schemas.openxmlformats.org/officeDocument/2006/relationships" r:id="R488b796f272746f6"/>
   </p:notesMasterIdLst>
   <p:sldIdLst>
-    <p:sldId xmlns:r="http://schemas.openxmlformats.org/officeDocument/2006/relationships" id="256" r:id="Ra2596fd80e044b72"/>
-    <p:sldId xmlns:r="http://schemas.openxmlformats.org/officeDocument/2006/relationships" id="257" r:id="R7b850924869042f2"/>
-    <p:sldId xmlns:r="http://schemas.openxmlformats.org/officeDocument/2006/relationships" id="258" r:id="R3ee006d2241948a6"/>
-    <p:sldId xmlns:r="http://schemas.openxmlformats.org/officeDocument/2006/relationships" id="259" r:id="R3e41e04876124ebe"/>
-    <p:sldId xmlns:r="http://schemas.openxmlformats.org/officeDocument/2006/relationships" id="260" r:id="R871e5b22132f4cd4"/>
-    <p:sldId xmlns:r="http://schemas.openxmlformats.org/officeDocument/2006/relationships" id="261" r:id="R88949257ebd24e6f"/>
-    <p:sldId xmlns:r="http://schemas.openxmlformats.org/officeDocument/2006/relationships" id="262" r:id="R3d990072b9f940b7"/>
-    <p:sldId xmlns:r="http://schemas.openxmlformats.org/officeDocument/2006/relationships" id="263" r:id="Rc27bd35129d1406f"/>
-    <p:sldId xmlns:r="http://schemas.openxmlformats.org/officeDocument/2006/relationships" id="264" r:id="R99b8bc0a76024100"/>
-    <p:sldId xmlns:r="http://schemas.openxmlformats.org/officeDocument/2006/relationships" id="265" r:id="Rbe6064e0a6cf47ef"/>
-    <p:sldId xmlns:r="http://schemas.openxmlformats.org/officeDocument/2006/relationships" id="266" r:id="R64f0a8d80ed04a48"/>
+    <p:sldId xmlns:r="http://schemas.openxmlformats.org/officeDocument/2006/relationships" id="256" r:id="R94d596965e9e4658"/>
+    <p:sldId xmlns:r="http://schemas.openxmlformats.org/officeDocument/2006/relationships" id="257" r:id="Rcefff6fe401c49d4"/>
+    <p:sldId xmlns:r="http://schemas.openxmlformats.org/officeDocument/2006/relationships" id="258" r:id="Race7cba3d0bf46c5"/>
+    <p:sldId xmlns:r="http://schemas.openxmlformats.org/officeDocument/2006/relationships" id="259" r:id="R243229a902474682"/>
+    <p:sldId xmlns:r="http://schemas.openxmlformats.org/officeDocument/2006/relationships" id="260" r:id="R205dd67548474658"/>
+    <p:sldId xmlns:r="http://schemas.openxmlformats.org/officeDocument/2006/relationships" id="261" r:id="Rd254b3e34bfd4f41"/>
+    <p:sldId xmlns:r="http://schemas.openxmlformats.org/officeDocument/2006/relationships" id="262" r:id="Rbb1ca81408984e40"/>
+    <p:sldId xmlns:r="http://schemas.openxmlformats.org/officeDocument/2006/relationships" id="263" r:id="Rd9b5fa48da854a0a"/>
+    <p:sldId xmlns:r="http://schemas.openxmlformats.org/officeDocument/2006/relationships" id="264" r:id="R587216043d2d447f"/>
+    <p:sldId xmlns:r="http://schemas.openxmlformats.org/officeDocument/2006/relationships" id="265" r:id="R291259c3c1404b0e"/>
+    <p:sldId xmlns:r="http://schemas.openxmlformats.org/officeDocument/2006/relationships" id="266" r:id="R91a267b144784b91"/>
   </p:sldIdLst>
   <p:sldSz cx="12192000" cy="6858000"/>
   <p:notesSz cx="6858000" cy="9144000"/>
@@ -452,7 +452,7 @@
           <a:lstStyle xmlns:a="http://schemas.openxmlformats.org/drawingml/2006/main"/>
           <a:p xmlns:a="http://schemas.openxmlformats.org/drawingml/2006/main">
             <a:r>
-              <a:t>This is DG32-LITE as recorded in its tape-in block diagram: the die as built, block by block. It covers the clock and reset, the lockstep pair, memory and fetch, the bus and the eighteen blocks around it, the pad plan, production test, and the four sign-off gates the die must pass. It is a design record, not a measurement of silicon.</a:t>
+              <a:t>Before a chip goes to the foundry, its block diagram is the most complete record of what will be built. This film walks DG32-LITE through that record: clocking and reset, the lockstep cores, memory, the bus and its peripherals, the pads, production test, and the checks that stand before tape-in. Everything here describes the intended die; nothing has yet been measured on silicon.</a:t>
             </a:r>
           </a:p>
         </p:txBody>
@@ -522,7 +522,7 @@
           <a:lstStyle xmlns:a="http://schemas.openxmlformats.org/drawingml/2006/main"/>
           <a:p xmlns:a="http://schemas.openxmlformats.org/drawingml/2006/main">
             <a:r>
-              <a:t>Four gates must all pass before tape-in. The layout must be design-rule clean. Layout versus schematic must match uniquely, pins included. A connectivity check on the final layout must show every pad reaching logic, with no floating net. And a gate-level simulation of the routed netlist must boot and print the banner. The connectivity gate exists because the first two can pass while a pad pin floats.</a:t>
+              <a:t>Tape-in waits on four checks. The layout must obey every manufacturing rule. It must describe exactly the circuit that was designed, down to its pins. Every pad must be wired through to logic. And the routed netlist, simulated gate by gate, must boot and print its banner. The third check is there because a layout can clear the first two and still leave a pad unconnected. What this film states is the bar, not whether it has been cleared.</a:t>
             </a:r>
           </a:p>
         </p:txBody>
@@ -592,7 +592,7 @@
           <a:lstStyle xmlns:a="http://schemas.openxmlformats.org/drawingml/2006/main"/>
           <a:p xmlns:a="http://schemas.openxmlformats.org/drawingml/2006/main">
             <a:r>
-              <a:t>Three things to take away. One clock and one reset, with eight clock gates and a checker released two cycles late. Nothing hangs and nothing floats: bad accesses return errors, and all forty-four pads are allocated. And four gates stand between the design and tape-in. The next milestone is first silicon, on the September twenty twenty-six shuttle.</a:t>
+              <a:t>If you keep three points from this, make them these. The die has one clock, so its timing has no domain crossings to go wrong. No access can hang it, and no pad is left without a job. And nothing goes to the foundry until four checks all pass. What comes next is first silicon, via the September twenty twenty-six shuttle, where these design records meet measurement.</a:t>
             </a:r>
           </a:p>
         </p:txBody>
@@ -732,7 +732,7 @@
           <a:lstStyle xmlns:a="http://schemas.openxmlformats.org/drawingml/2006/main"/>
           <a:p xmlns:a="http://schemas.openxmlformats.org/drawingml/2006/main">
             <a:r>
-              <a:t>One clock and one reset drive the whole block. The clock arrives from a pad at fifty megahertz. Eight software clock gates switch off idle peripherals: both UARTs, SPI, I squared C, PWM, the timers, the DMA and the CORDIC. Test mode forces every gate open. Reset is asynchronous, the supervisor deglitches the supply-good inputs, and the checker leaves reset two cycles after the main core.</a:t>
+              <a:t>Timing starts simple on purpose. A single fifty megahertz input clocks everything, so there is no crossing between domains to verify. Software can shut off the clock to eight blocks it is not using, from the serial ports to the CORDIC, and in test mode all eight are forced on. Reset is asynchronous, a supervisor cleans up the supply-good signals, and the checker core leaves reset two cycles after the main core.</a:t>
             </a:r>
           </a:p>
         </p:txBody>
@@ -802,7 +802,7 @@
           <a:lstStyle xmlns:a="http://schemas.openxmlformats.org/drawingml/2006/main"/>
           <a:p xmlns:a="http://schemas.openxmlformats.org/drawingml/2006/main">
             <a:r>
-              <a:t>The lockstep pair is built to survive real firmware. The main core runs the code and owns the bus. The checker replays the same work two cycles later, with its inputs and bus responses mirrored, and the comparator checks every committed store. So interrupts are safe, firmware may branch on a peripheral read, and the pair has been verified under interrupts in simulation. A mismatch drives the fault pad.</a:t>
+              <a:t>The hard part of lockstep is not comparing two cores; it is keeping them from disagreeing when nothing is wrong. Interrupts and peripheral reads are the usual culprits, because the second core would see them at a different moment. Here the checker gets a delayed copy of everything the main core saw, so normal code cannot split them. That behaviour has been checked in simulation, and a real mismatch trips the fault pin.</a:t>
             </a:r>
           </a:p>
         </p:txBody>
@@ -872,7 +872,7 @@
           <a:lstStyle xmlns:a="http://schemas.openxmlformats.org/drawingml/2006/main"/>
           <a:p xmlns:a="http://schemas.openxmlformats.org/drawingml/2006/main">
             <a:r>
-              <a:t>Code runs from SRAM through a dedicated fetch port. The fetch decoder sends boot fetches to the ROM and application fetches to the SRAM's second port. Anything else is a bus error and an instruction fault. The ROM is sixteen thousand words of mask-programmed logic that prints the banner, checks the flash header, copies the application and jumps. Blank flash opens a UART monitor.</a:t>
+              <a:t>Instructions never compete with data. Each SRAM block has two ports: the processor fetches code through one while data moves through the other, so data traffic cannot stall execution. A fetch aimed anywhere but the ROM or that code port raises a fault instead of running whatever it finds. The ROM is hard-wired logic that checks the flash image, copies it into SRAM and hands over, or opens a serial monitor if the flash is blank.</a:t>
             </a:r>
           </a:p>
         </p:txBody>
@@ -942,7 +942,7 @@
           <a:lstStyle xmlns:a="http://schemas.openxmlformats.org/drawingml/2006/main"/>
           <a:p xmlns:a="http://schemas.openxmlformats.org/drawingml/2006/main">
             <a:r>
-              <a:t>The bus serves one requester at a time. The CPU has priority over the DMA, and each read or write target is latched at the request and held until the response. Every peripheral is a thirty-two-bit register slave. A clock-gated or undecoded slot answers with an error instead of hanging, and the QSPI window serves data, not code.</a:t>
+              <a:t>The bus is built so that no access can hang the chip. Only two things can drive it, the processor and the DMA, and the processor wins any tie. Once a transfer starts, its destination is locked until the reply comes back. If software touches an address with nothing behind it, or a peripheral whose clock is switched off, it gets an error instead of a hang. Flash is visible only as data; code always runs from SRAM.</a:t>
             </a:r>
           </a:p>
         </p:txBody>
@@ -1012,7 +1012,7 @@
           <a:lstStyle xmlns:a="http://schemas.openxmlformats.org/drawingml/2006/main"/>
           <a:p xmlns:a="http://schemas.openxmlformats.org/drawingml/2006/main">
             <a:r>
-              <a:t>Eighteen blocks sit around that bus. Six handle connectivity: the UARTs, SPI, I squared C, the QSPI window, GPIO and the timers. Six serve the motor: PWM, DShot, encoder and Hall, CORDIC, the ADC and interrupts. And six handle system, safety and test: system control, the watchdog, the fault register, the error slave, scan, and the JTAG port.</a:t>
+              <a:t>Eighteen blocks share that bus, in three groups of six. Six connect the chip to the outside world: the UARTs, SPI, I squared C, the QSPI window, GPIO and the timers. Six serve the motor: PWM, DShot, encoder and Hall, CORDIC, the ADC and interrupts. The last six are there so the chip can be trusted and tested: system control, the watchdog, the fault register, the error slave, scan and JTAG.</a:t>
             </a:r>
           </a:p>
         </p:txBody>
@@ -1152,7 +1152,7 @@
           <a:lstStyle xmlns:a="http://schemas.openxmlformats.org/drawingml/2006/main"/>
           <a:p xmlns:a="http://schemas.openxmlformats.org/drawingml/2006/main">
             <a:r>
-              <a:t>Production test reaches the logic through JTAG. A tester drives the four JTAG pins into a test access port in the wrapper, which selects scan enable, scan mode, a chain, or bypass, and reaches thirteen scan chains inside the hardened block. Test mode forces every clock gate open, so scan reaches every block. Interactive CPU debug over JTAG is a roadmap item.</a:t>
+              <a:t>Every manufactured part needs a production test, and the JTAG port is how DG32-LITE gets one. A tester switches the chip into scan mode and shifts patterns through thirteen chains of flip-flops. Because test mode turns every gated clock back on, no block is hidden from those patterns. The same pins do not offer interactive CPU debugging yet; that is a later roadmap item.</a:t>
             </a:r>
           </a:p>
         </p:txBody>
@@ -1220,7 +1220,7 @@
   </p:cSld>
   <p:clrMap bg1="lt1" tx1="dk1" bg2="lt2" tx2="dk2" accent1="accent1" accent2="accent2" accent3="accent3" accent4="accent4" accent5="accent5" accent6="accent6" hlink="hlink" folHlink="folHlink"/>
   <p:sldLayoutIdLst>
-    <p:sldLayoutId xmlns:r="http://schemas.openxmlformats.org/officeDocument/2006/relationships" id="2147483649" r:id="R2c8ba604eaf440d6"/>
+    <p:sldLayoutId xmlns:r="http://schemas.openxmlformats.org/officeDocument/2006/relationships" id="2147483649" r:id="R2232656115cc4201"/>
   </p:sldLayoutIdLst>
   <p:txStyles>
     <p:titleStyle>
@@ -1764,7 +1764,7 @@
           <p:cNvPr id="107" name="">
             <a:extLst xmlns:a="http://schemas.openxmlformats.org/drawingml/2006/main">
               <a:ext uri="{FF2B5EF4-FFF2-40B4-BE49-F238E27FC236}">
-                <a16:creationId xmlns:a16="http://schemas.microsoft.com/office/drawing/2014/main" id="{101141DE-FBC0-41EF-8062-2761206A021D}"/>
+                <a16:creationId xmlns:a16="http://schemas.microsoft.com/office/drawing/2014/main" id="{64D2EB16-3438-4792-80EF-4A238BDFFD80}"/>
               </a:ext>
             </a:extLst>
           </p:cNvPr>
@@ -1795,7 +1795,7 @@
           <p:cNvPr id="2" name="">
             <a:extLst xmlns:a="http://schemas.openxmlformats.org/drawingml/2006/main">
               <a:ext uri="{FF2B5EF4-FFF2-40B4-BE49-F238E27FC236}">
-                <a16:creationId xmlns:a16="http://schemas.microsoft.com/office/drawing/2014/main" id="{AB1601A0-B2FA-4A7F-8C2E-C96B316110EF}"/>
+                <a16:creationId xmlns:a16="http://schemas.microsoft.com/office/drawing/2014/main" id="{311C8F96-373F-49E4-A90A-C75AD2033E7B}"/>
               </a:ext>
             </a:extLst>
           </p:cNvPr>
@@ -1840,7 +1840,7 @@
           <p:cNvPr id="3" name="">
             <a:extLst xmlns:a="http://schemas.openxmlformats.org/drawingml/2006/main">
               <a:ext uri="{FF2B5EF4-FFF2-40B4-BE49-F238E27FC236}">
-                <a16:creationId xmlns:a16="http://schemas.microsoft.com/office/drawing/2014/main" id="{F342E3B4-723B-4CA3-B862-5B1D7BE9DA6C}"/>
+                <a16:creationId xmlns:a16="http://schemas.microsoft.com/office/drawing/2014/main" id="{35C9D17A-3132-41B9-ADAF-CAF9BEAD553C}"/>
               </a:ext>
             </a:extLst>
           </p:cNvPr>
@@ -1885,7 +1885,7 @@
           <p:cNvPr id="4" name="">
             <a:extLst xmlns:a="http://schemas.openxmlformats.org/drawingml/2006/main">
               <a:ext uri="{FF2B5EF4-FFF2-40B4-BE49-F238E27FC236}">
-                <a16:creationId xmlns:a16="http://schemas.microsoft.com/office/drawing/2014/main" id="{7BB61671-F75C-4880-9384-71970836B1EE}"/>
+                <a16:creationId xmlns:a16="http://schemas.microsoft.com/office/drawing/2014/main" id="{DCCFCC35-BCBF-45BC-AE32-52F26FAEEBB1}"/>
               </a:ext>
             </a:extLst>
           </p:cNvPr>
@@ -1916,7 +1916,7 @@
           <p:cNvPr id="5" name="">
             <a:extLst xmlns:a="http://schemas.openxmlformats.org/drawingml/2006/main">
               <a:ext uri="{FF2B5EF4-FFF2-40B4-BE49-F238E27FC236}">
-                <a16:creationId xmlns:a16="http://schemas.microsoft.com/office/drawing/2014/main" id="{596D3B15-F4E5-4BF3-9471-8789436991A7}"/>
+                <a16:creationId xmlns:a16="http://schemas.microsoft.com/office/drawing/2014/main" id="{21254A82-4F07-4E0F-988C-46533218780E}"/>
               </a:ext>
             </a:extLst>
           </p:cNvPr>
@@ -1961,7 +1961,7 @@
           <p:cNvPr id="6" name="">
             <a:extLst xmlns:a="http://schemas.openxmlformats.org/drawingml/2006/main">
               <a:ext uri="{FF2B5EF4-FFF2-40B4-BE49-F238E27FC236}">
-                <a16:creationId xmlns:a16="http://schemas.microsoft.com/office/drawing/2014/main" id="{750AA672-0D5E-4A47-8121-8B33AFFDCADE}"/>
+                <a16:creationId xmlns:a16="http://schemas.microsoft.com/office/drawing/2014/main" id="{FD6B436E-889E-45FB-89AB-3F5CE047C952}"/>
               </a:ext>
             </a:extLst>
           </p:cNvPr>
@@ -1994,7 +1994,7 @@
           <p:cNvPr id="7" name="">
             <a:extLst xmlns:a="http://schemas.openxmlformats.org/drawingml/2006/main">
               <a:ext uri="{FF2B5EF4-FFF2-40B4-BE49-F238E27FC236}">
-                <a16:creationId xmlns:a16="http://schemas.microsoft.com/office/drawing/2014/main" id="{47A8104A-65F0-4720-BD9D-1722D5BE661A}"/>
+                <a16:creationId xmlns:a16="http://schemas.microsoft.com/office/drawing/2014/main" id="{79A48E26-2C62-4573-8950-DC42021B7C7B}"/>
               </a:ext>
             </a:extLst>
           </p:cNvPr>
@@ -2025,7 +2025,7 @@
           <p:cNvPr id="8" name="">
             <a:extLst xmlns:a="http://schemas.openxmlformats.org/drawingml/2006/main">
               <a:ext uri="{FF2B5EF4-FFF2-40B4-BE49-F238E27FC236}">
-                <a16:creationId xmlns:a16="http://schemas.microsoft.com/office/drawing/2014/main" id="{5ADC6890-2319-48D2-AAFB-33A75B3F8EFE}"/>
+                <a16:creationId xmlns:a16="http://schemas.microsoft.com/office/drawing/2014/main" id="{C8CF08D4-3702-4DDF-8CA6-F693181F8AD1}"/>
               </a:ext>
             </a:extLst>
           </p:cNvPr>
@@ -2056,7 +2056,7 @@
           <p:cNvPr id="9" name="">
             <a:extLst xmlns:a="http://schemas.openxmlformats.org/drawingml/2006/main">
               <a:ext uri="{FF2B5EF4-FFF2-40B4-BE49-F238E27FC236}">
-                <a16:creationId xmlns:a16="http://schemas.microsoft.com/office/drawing/2014/main" id="{1EBEBFB2-1981-4D91-8D4A-D46C085A9C67}"/>
+                <a16:creationId xmlns:a16="http://schemas.microsoft.com/office/drawing/2014/main" id="{49D8D59C-B625-4702-BB09-329266883BE1}"/>
               </a:ext>
             </a:extLst>
           </p:cNvPr>
@@ -2087,7 +2087,7 @@
           <p:cNvPr id="10" name="">
             <a:extLst xmlns:a="http://schemas.openxmlformats.org/drawingml/2006/main">
               <a:ext uri="{FF2B5EF4-FFF2-40B4-BE49-F238E27FC236}">
-                <a16:creationId xmlns:a16="http://schemas.microsoft.com/office/drawing/2014/main" id="{ED887AF8-95CB-4614-94C1-5D54DD6B3E26}"/>
+                <a16:creationId xmlns:a16="http://schemas.microsoft.com/office/drawing/2014/main" id="{57D0D5AB-A468-4127-B85C-55DDF42C9C63}"/>
               </a:ext>
             </a:extLst>
           </p:cNvPr>
@@ -2118,7 +2118,7 @@
           <p:cNvPr id="11" name="">
             <a:extLst xmlns:a="http://schemas.openxmlformats.org/drawingml/2006/main">
               <a:ext uri="{FF2B5EF4-FFF2-40B4-BE49-F238E27FC236}">
-                <a16:creationId xmlns:a16="http://schemas.microsoft.com/office/drawing/2014/main" id="{36840BAC-02E5-4DDA-BC07-FF72C9948F00}"/>
+                <a16:creationId xmlns:a16="http://schemas.microsoft.com/office/drawing/2014/main" id="{EBB1C1C1-CF4B-41C6-B03E-9649C18606D2}"/>
               </a:ext>
             </a:extLst>
           </p:cNvPr>
@@ -2149,7 +2149,7 @@
           <p:cNvPr id="12" name="">
             <a:extLst xmlns:a="http://schemas.openxmlformats.org/drawingml/2006/main">
               <a:ext uri="{FF2B5EF4-FFF2-40B4-BE49-F238E27FC236}">
-                <a16:creationId xmlns:a16="http://schemas.microsoft.com/office/drawing/2014/main" id="{10B1F0E5-887A-4FB8-A536-4BEB9CA72DAF}"/>
+                <a16:creationId xmlns:a16="http://schemas.microsoft.com/office/drawing/2014/main" id="{DE08E272-A5CE-4AAA-9435-12C2939AF9B8}"/>
               </a:ext>
             </a:extLst>
           </p:cNvPr>
@@ -2180,7 +2180,7 @@
           <p:cNvPr id="13" name="">
             <a:extLst xmlns:a="http://schemas.openxmlformats.org/drawingml/2006/main">
               <a:ext uri="{FF2B5EF4-FFF2-40B4-BE49-F238E27FC236}">
-                <a16:creationId xmlns:a16="http://schemas.microsoft.com/office/drawing/2014/main" id="{1140BF75-065B-473B-89BE-DEC641D625E2}"/>
+                <a16:creationId xmlns:a16="http://schemas.microsoft.com/office/drawing/2014/main" id="{EB27F635-3789-4A50-A50B-1D962D6DEE66}"/>
               </a:ext>
             </a:extLst>
           </p:cNvPr>
@@ -2211,7 +2211,7 @@
           <p:cNvPr id="14" name="">
             <a:extLst xmlns:a="http://schemas.openxmlformats.org/drawingml/2006/main">
               <a:ext uri="{FF2B5EF4-FFF2-40B4-BE49-F238E27FC236}">
-                <a16:creationId xmlns:a16="http://schemas.microsoft.com/office/drawing/2014/main" id="{36E768E5-49E2-466F-B5AF-FC299242C61A}"/>
+                <a16:creationId xmlns:a16="http://schemas.microsoft.com/office/drawing/2014/main" id="{9A2B2EB4-A434-4221-91EE-79CC4BDB1733}"/>
               </a:ext>
             </a:extLst>
           </p:cNvPr>
@@ -2242,7 +2242,7 @@
           <p:cNvPr id="15" name="">
             <a:extLst xmlns:a="http://schemas.openxmlformats.org/drawingml/2006/main">
               <a:ext uri="{FF2B5EF4-FFF2-40B4-BE49-F238E27FC236}">
-                <a16:creationId xmlns:a16="http://schemas.microsoft.com/office/drawing/2014/main" id="{20827CBC-DB84-467A-8B7E-14008306977E}"/>
+                <a16:creationId xmlns:a16="http://schemas.microsoft.com/office/drawing/2014/main" id="{73394BDB-0E3A-49CB-B570-0D8498B02616}"/>
               </a:ext>
             </a:extLst>
           </p:cNvPr>
@@ -2273,7 +2273,7 @@
           <p:cNvPr id="16" name="">
             <a:extLst xmlns:a="http://schemas.openxmlformats.org/drawingml/2006/main">
               <a:ext uri="{FF2B5EF4-FFF2-40B4-BE49-F238E27FC236}">
-                <a16:creationId xmlns:a16="http://schemas.microsoft.com/office/drawing/2014/main" id="{833E9568-E884-4F67-86CA-2550C648771E}"/>
+                <a16:creationId xmlns:a16="http://schemas.microsoft.com/office/drawing/2014/main" id="{E707AE05-8A3C-4B19-995A-55B7CF264464}"/>
               </a:ext>
             </a:extLst>
           </p:cNvPr>
@@ -2304,7 +2304,7 @@
           <p:cNvPr id="17" name="">
             <a:extLst xmlns:a="http://schemas.openxmlformats.org/drawingml/2006/main">
               <a:ext uri="{FF2B5EF4-FFF2-40B4-BE49-F238E27FC236}">
-                <a16:creationId xmlns:a16="http://schemas.microsoft.com/office/drawing/2014/main" id="{EFD0C94E-C3B2-452C-895A-DB7377A48C44}"/>
+                <a16:creationId xmlns:a16="http://schemas.microsoft.com/office/drawing/2014/main" id="{C7D5F652-3FED-4A9A-98B9-415560B106D0}"/>
               </a:ext>
             </a:extLst>
           </p:cNvPr>
@@ -2335,7 +2335,7 @@
           <p:cNvPr id="18" name="">
             <a:extLst xmlns:a="http://schemas.openxmlformats.org/drawingml/2006/main">
               <a:ext uri="{FF2B5EF4-FFF2-40B4-BE49-F238E27FC236}">
-                <a16:creationId xmlns:a16="http://schemas.microsoft.com/office/drawing/2014/main" id="{5F9EA539-8E77-42AE-AAD9-BA34E42070E3}"/>
+                <a16:creationId xmlns:a16="http://schemas.microsoft.com/office/drawing/2014/main" id="{48AD578A-5779-4FF7-8DD7-4D05EE385CEE}"/>
               </a:ext>
             </a:extLst>
           </p:cNvPr>
@@ -2366,7 +2366,7 @@
           <p:cNvPr id="19" name="">
             <a:extLst xmlns:a="http://schemas.openxmlformats.org/drawingml/2006/main">
               <a:ext uri="{FF2B5EF4-FFF2-40B4-BE49-F238E27FC236}">
-                <a16:creationId xmlns:a16="http://schemas.microsoft.com/office/drawing/2014/main" id="{7F2B5BE3-5F03-4A1B-B534-209D6C2715AC}"/>
+                <a16:creationId xmlns:a16="http://schemas.microsoft.com/office/drawing/2014/main" id="{E5D64F60-A178-4E6D-A6D0-407134FB3E96}"/>
               </a:ext>
             </a:extLst>
           </p:cNvPr>
@@ -2397,7 +2397,7 @@
           <p:cNvPr id="20" name="">
             <a:extLst xmlns:a="http://schemas.openxmlformats.org/drawingml/2006/main">
               <a:ext uri="{FF2B5EF4-FFF2-40B4-BE49-F238E27FC236}">
-                <a16:creationId xmlns:a16="http://schemas.microsoft.com/office/drawing/2014/main" id="{E2975674-68DE-4319-96E2-B702D6587AD0}"/>
+                <a16:creationId xmlns:a16="http://schemas.microsoft.com/office/drawing/2014/main" id="{C6927D83-887B-4666-8A37-7E23DD79D22A}"/>
               </a:ext>
             </a:extLst>
           </p:cNvPr>
@@ -2428,7 +2428,7 @@
           <p:cNvPr id="21" name="">
             <a:extLst xmlns:a="http://schemas.openxmlformats.org/drawingml/2006/main">
               <a:ext uri="{FF2B5EF4-FFF2-40B4-BE49-F238E27FC236}">
-                <a16:creationId xmlns:a16="http://schemas.microsoft.com/office/drawing/2014/main" id="{DADE6C4A-B2AC-45B8-8A2C-869652B65F3F}"/>
+                <a16:creationId xmlns:a16="http://schemas.microsoft.com/office/drawing/2014/main" id="{9D480CDC-2CA3-407F-B785-018504092171}"/>
               </a:ext>
             </a:extLst>
           </p:cNvPr>
@@ -2459,7 +2459,7 @@
           <p:cNvPr id="22" name="">
             <a:extLst xmlns:a="http://schemas.openxmlformats.org/drawingml/2006/main">
               <a:ext uri="{FF2B5EF4-FFF2-40B4-BE49-F238E27FC236}">
-                <a16:creationId xmlns:a16="http://schemas.microsoft.com/office/drawing/2014/main" id="{F53CE243-95EE-4D30-A6A6-521D458579DC}"/>
+                <a16:creationId xmlns:a16="http://schemas.microsoft.com/office/drawing/2014/main" id="{E6880BEA-E8FD-440E-9E30-F55FB125C14C}"/>
               </a:ext>
             </a:extLst>
           </p:cNvPr>
@@ -2490,7 +2490,7 @@
           <p:cNvPr id="23" name="">
             <a:extLst xmlns:a="http://schemas.openxmlformats.org/drawingml/2006/main">
               <a:ext uri="{FF2B5EF4-FFF2-40B4-BE49-F238E27FC236}">
-                <a16:creationId xmlns:a16="http://schemas.microsoft.com/office/drawing/2014/main" id="{AF59B13E-4077-4A85-8D4B-081A31422C75}"/>
+                <a16:creationId xmlns:a16="http://schemas.microsoft.com/office/drawing/2014/main" id="{FC896D3E-B456-4572-AF9A-621B07ACE391}"/>
               </a:ext>
             </a:extLst>
           </p:cNvPr>
@@ -2521,7 +2521,7 @@
           <p:cNvPr id="24" name="">
             <a:extLst xmlns:a="http://schemas.openxmlformats.org/drawingml/2006/main">
               <a:ext uri="{FF2B5EF4-FFF2-40B4-BE49-F238E27FC236}">
-                <a16:creationId xmlns:a16="http://schemas.microsoft.com/office/drawing/2014/main" id="{9BD4FB50-29DE-462E-AF18-9887B189D769}"/>
+                <a16:creationId xmlns:a16="http://schemas.microsoft.com/office/drawing/2014/main" id="{288F7A1C-5A99-4513-A181-5011A131EC6D}"/>
               </a:ext>
             </a:extLst>
           </p:cNvPr>
@@ -2552,7 +2552,7 @@
           <p:cNvPr id="25" name="">
             <a:extLst xmlns:a="http://schemas.openxmlformats.org/drawingml/2006/main">
               <a:ext uri="{FF2B5EF4-FFF2-40B4-BE49-F238E27FC236}">
-                <a16:creationId xmlns:a16="http://schemas.microsoft.com/office/drawing/2014/main" id="{D44D0EFB-B543-4ED7-AD6A-DDA3379D08CD}"/>
+                <a16:creationId xmlns:a16="http://schemas.microsoft.com/office/drawing/2014/main" id="{F1B478DC-D1D5-419C-B94D-3A18C046DD97}"/>
               </a:ext>
             </a:extLst>
           </p:cNvPr>
@@ -2583,7 +2583,7 @@
           <p:cNvPr id="26" name="">
             <a:extLst xmlns:a="http://schemas.openxmlformats.org/drawingml/2006/main">
               <a:ext uri="{FF2B5EF4-FFF2-40B4-BE49-F238E27FC236}">
-                <a16:creationId xmlns:a16="http://schemas.microsoft.com/office/drawing/2014/main" id="{96CA96D2-69A2-4142-B339-C2B6EDF7C6DB}"/>
+                <a16:creationId xmlns:a16="http://schemas.microsoft.com/office/drawing/2014/main" id="{3BDD1B22-96F2-4FAB-A24D-BBBEEC6992AA}"/>
               </a:ext>
             </a:extLst>
           </p:cNvPr>
@@ -2614,7 +2614,7 @@
           <p:cNvPr id="27" name="">
             <a:extLst xmlns:a="http://schemas.openxmlformats.org/drawingml/2006/main">
               <a:ext uri="{FF2B5EF4-FFF2-40B4-BE49-F238E27FC236}">
-                <a16:creationId xmlns:a16="http://schemas.microsoft.com/office/drawing/2014/main" id="{CB9372E0-31BE-406F-A973-B5887402368E}"/>
+                <a16:creationId xmlns:a16="http://schemas.microsoft.com/office/drawing/2014/main" id="{9824D10A-772C-4879-A135-7FDE8F2C660B}"/>
               </a:ext>
             </a:extLst>
           </p:cNvPr>
@@ -2645,7 +2645,7 @@
           <p:cNvPr id="28" name="">
             <a:extLst xmlns:a="http://schemas.openxmlformats.org/drawingml/2006/main">
               <a:ext uri="{FF2B5EF4-FFF2-40B4-BE49-F238E27FC236}">
-                <a16:creationId xmlns:a16="http://schemas.microsoft.com/office/drawing/2014/main" id="{A5407FCE-1212-486F-A8BB-6013E4C75A48}"/>
+                <a16:creationId xmlns:a16="http://schemas.microsoft.com/office/drawing/2014/main" id="{4D917C65-E149-4546-AB55-EB9BF52E8FF9}"/>
               </a:ext>
             </a:extLst>
           </p:cNvPr>
@@ -2676,7 +2676,7 @@
           <p:cNvPr id="29" name="">
             <a:extLst xmlns:a="http://schemas.openxmlformats.org/drawingml/2006/main">
               <a:ext uri="{FF2B5EF4-FFF2-40B4-BE49-F238E27FC236}">
-                <a16:creationId xmlns:a16="http://schemas.microsoft.com/office/drawing/2014/main" id="{C67C9788-96C1-4260-93DF-40791E753201}"/>
+                <a16:creationId xmlns:a16="http://schemas.microsoft.com/office/drawing/2014/main" id="{B165FFD4-E65E-4186-B7D8-670D67AB9758}"/>
               </a:ext>
             </a:extLst>
           </p:cNvPr>
@@ -2707,7 +2707,7 @@
           <p:cNvPr id="30" name="">
             <a:extLst xmlns:a="http://schemas.openxmlformats.org/drawingml/2006/main">
               <a:ext uri="{FF2B5EF4-FFF2-40B4-BE49-F238E27FC236}">
-                <a16:creationId xmlns:a16="http://schemas.microsoft.com/office/drawing/2014/main" id="{D7917802-06FC-440E-853D-399B68D8DFEB}"/>
+                <a16:creationId xmlns:a16="http://schemas.microsoft.com/office/drawing/2014/main" id="{83E217A5-3824-4BAB-A5D7-ABD37C54DC29}"/>
               </a:ext>
             </a:extLst>
           </p:cNvPr>
@@ -2738,7 +2738,7 @@
           <p:cNvPr id="31" name="">
             <a:extLst xmlns:a="http://schemas.openxmlformats.org/drawingml/2006/main">
               <a:ext uri="{FF2B5EF4-FFF2-40B4-BE49-F238E27FC236}">
-                <a16:creationId xmlns:a16="http://schemas.microsoft.com/office/drawing/2014/main" id="{15BF69E0-551B-4C52-AC68-A7399AAF5BE3}"/>
+                <a16:creationId xmlns:a16="http://schemas.microsoft.com/office/drawing/2014/main" id="{7F9EE96C-3E5C-4B3C-8CE2-6D769F542D80}"/>
               </a:ext>
             </a:extLst>
           </p:cNvPr>
@@ -2769,7 +2769,7 @@
           <p:cNvPr id="32" name="">
             <a:extLst xmlns:a="http://schemas.openxmlformats.org/drawingml/2006/main">
               <a:ext uri="{FF2B5EF4-FFF2-40B4-BE49-F238E27FC236}">
-                <a16:creationId xmlns:a16="http://schemas.microsoft.com/office/drawing/2014/main" id="{8887DB1A-F777-4A20-8D67-90E7B7152E51}"/>
+                <a16:creationId xmlns:a16="http://schemas.microsoft.com/office/drawing/2014/main" id="{A09E641E-8303-4B7A-B155-F73A9DD303AC}"/>
               </a:ext>
             </a:extLst>
           </p:cNvPr>
@@ -2800,7 +2800,7 @@
           <p:cNvPr id="33" name="">
             <a:extLst xmlns:a="http://schemas.openxmlformats.org/drawingml/2006/main">
               <a:ext uri="{FF2B5EF4-FFF2-40B4-BE49-F238E27FC236}">
-                <a16:creationId xmlns:a16="http://schemas.microsoft.com/office/drawing/2014/main" id="{EC058A81-863F-4646-9263-A41E06271281}"/>
+                <a16:creationId xmlns:a16="http://schemas.microsoft.com/office/drawing/2014/main" id="{6FE85E91-E510-46F6-8640-F3158C16BCCA}"/>
               </a:ext>
             </a:extLst>
           </p:cNvPr>
@@ -2831,7 +2831,7 @@
           <p:cNvPr id="34" name="">
             <a:extLst xmlns:a="http://schemas.openxmlformats.org/drawingml/2006/main">
               <a:ext uri="{FF2B5EF4-FFF2-40B4-BE49-F238E27FC236}">
-                <a16:creationId xmlns:a16="http://schemas.microsoft.com/office/drawing/2014/main" id="{F4962197-A33D-4E72-8576-3C0465BB9D43}"/>
+                <a16:creationId xmlns:a16="http://schemas.microsoft.com/office/drawing/2014/main" id="{CE45479D-BB3B-41B9-8E0E-A4BA6B329785}"/>
               </a:ext>
             </a:extLst>
           </p:cNvPr>
@@ -2862,7 +2862,7 @@
           <p:cNvPr id="35" name="">
             <a:extLst xmlns:a="http://schemas.openxmlformats.org/drawingml/2006/main">
               <a:ext uri="{FF2B5EF4-FFF2-40B4-BE49-F238E27FC236}">
-                <a16:creationId xmlns:a16="http://schemas.microsoft.com/office/drawing/2014/main" id="{39C51E08-0C11-4726-A9B6-7AB954D67722}"/>
+                <a16:creationId xmlns:a16="http://schemas.microsoft.com/office/drawing/2014/main" id="{343208FF-7C3C-491A-8DC8-DD3B63908609}"/>
               </a:ext>
             </a:extLst>
           </p:cNvPr>
@@ -2893,7 +2893,7 @@
           <p:cNvPr id="36" name="">
             <a:extLst xmlns:a="http://schemas.openxmlformats.org/drawingml/2006/main">
               <a:ext uri="{FF2B5EF4-FFF2-40B4-BE49-F238E27FC236}">
-                <a16:creationId xmlns:a16="http://schemas.microsoft.com/office/drawing/2014/main" id="{5C7E4002-EDE3-4F29-B390-48F951943764}"/>
+                <a16:creationId xmlns:a16="http://schemas.microsoft.com/office/drawing/2014/main" id="{1B1C2AAD-A2BF-48B0-A066-796B1390B335}"/>
               </a:ext>
             </a:extLst>
           </p:cNvPr>
@@ -2924,7 +2924,7 @@
           <p:cNvPr id="37" name="">
             <a:extLst xmlns:a="http://schemas.openxmlformats.org/drawingml/2006/main">
               <a:ext uri="{FF2B5EF4-FFF2-40B4-BE49-F238E27FC236}">
-                <a16:creationId xmlns:a16="http://schemas.microsoft.com/office/drawing/2014/main" id="{0846A00D-2DE0-4E1E-ABB3-F40F92D3F76D}"/>
+                <a16:creationId xmlns:a16="http://schemas.microsoft.com/office/drawing/2014/main" id="{C751D466-5298-4E1E-A753-3E977D12E102}"/>
               </a:ext>
             </a:extLst>
           </p:cNvPr>
@@ -2955,7 +2955,7 @@
           <p:cNvPr id="38" name="">
             <a:extLst xmlns:a="http://schemas.openxmlformats.org/drawingml/2006/main">
               <a:ext uri="{FF2B5EF4-FFF2-40B4-BE49-F238E27FC236}">
-                <a16:creationId xmlns:a16="http://schemas.microsoft.com/office/drawing/2014/main" id="{DE399F4C-914F-4A2D-A00A-4B8A54289DDD}"/>
+                <a16:creationId xmlns:a16="http://schemas.microsoft.com/office/drawing/2014/main" id="{6D71D67E-26E5-4275-8C62-234F60F0D236}"/>
               </a:ext>
             </a:extLst>
           </p:cNvPr>
@@ -2986,7 +2986,7 @@
           <p:cNvPr id="39" name="">
             <a:extLst xmlns:a="http://schemas.openxmlformats.org/drawingml/2006/main">
               <a:ext uri="{FF2B5EF4-FFF2-40B4-BE49-F238E27FC236}">
-                <a16:creationId xmlns:a16="http://schemas.microsoft.com/office/drawing/2014/main" id="{84FB020D-A21E-4387-9760-81CF7B451567}"/>
+                <a16:creationId xmlns:a16="http://schemas.microsoft.com/office/drawing/2014/main" id="{987F351E-3490-440F-B419-E6EAEA449CEC}"/>
               </a:ext>
             </a:extLst>
           </p:cNvPr>
@@ -3017,7 +3017,7 @@
           <p:cNvPr id="40" name="">
             <a:extLst xmlns:a="http://schemas.openxmlformats.org/drawingml/2006/main">
               <a:ext uri="{FF2B5EF4-FFF2-40B4-BE49-F238E27FC236}">
-                <a16:creationId xmlns:a16="http://schemas.microsoft.com/office/drawing/2014/main" id="{191EF2DC-520B-424C-BB1A-73FF7C5F46E2}"/>
+                <a16:creationId xmlns:a16="http://schemas.microsoft.com/office/drawing/2014/main" id="{5102E447-83DB-4D46-92F4-3BD154767803}"/>
               </a:ext>
             </a:extLst>
           </p:cNvPr>
@@ -3048,7 +3048,7 @@
           <p:cNvPr id="41" name="">
             <a:extLst xmlns:a="http://schemas.openxmlformats.org/drawingml/2006/main">
               <a:ext uri="{FF2B5EF4-FFF2-40B4-BE49-F238E27FC236}">
-                <a16:creationId xmlns:a16="http://schemas.microsoft.com/office/drawing/2014/main" id="{8B8E74E9-FDF1-4F5F-B344-DE3B84177F2C}"/>
+                <a16:creationId xmlns:a16="http://schemas.microsoft.com/office/drawing/2014/main" id="{C7D86B6E-5373-4348-A1CF-D473C277DBC4}"/>
               </a:ext>
             </a:extLst>
           </p:cNvPr>
@@ -3079,7 +3079,7 @@
           <p:cNvPr id="42" name="">
             <a:extLst xmlns:a="http://schemas.openxmlformats.org/drawingml/2006/main">
               <a:ext uri="{FF2B5EF4-FFF2-40B4-BE49-F238E27FC236}">
-                <a16:creationId xmlns:a16="http://schemas.microsoft.com/office/drawing/2014/main" id="{9DA4327B-306E-4E9A-A7AB-457A067C8BA7}"/>
+                <a16:creationId xmlns:a16="http://schemas.microsoft.com/office/drawing/2014/main" id="{B287623D-7856-4BE2-8871-8A16085DC4C0}"/>
               </a:ext>
             </a:extLst>
           </p:cNvPr>
@@ -3110,7 +3110,7 @@
           <p:cNvPr id="43" name="">
             <a:extLst xmlns:a="http://schemas.openxmlformats.org/drawingml/2006/main">
               <a:ext uri="{FF2B5EF4-FFF2-40B4-BE49-F238E27FC236}">
-                <a16:creationId xmlns:a16="http://schemas.microsoft.com/office/drawing/2014/main" id="{48D3C30E-3855-4B88-BD14-AB9DEEA846EA}"/>
+                <a16:creationId xmlns:a16="http://schemas.microsoft.com/office/drawing/2014/main" id="{73A4B5A7-7391-4342-82B8-C02D15804A95}"/>
               </a:ext>
             </a:extLst>
           </p:cNvPr>
@@ -3141,7 +3141,7 @@
           <p:cNvPr id="44" name="">
             <a:extLst xmlns:a="http://schemas.openxmlformats.org/drawingml/2006/main">
               <a:ext uri="{FF2B5EF4-FFF2-40B4-BE49-F238E27FC236}">
-                <a16:creationId xmlns:a16="http://schemas.microsoft.com/office/drawing/2014/main" id="{328A90CC-28B4-4B1B-B826-401111CE07F3}"/>
+                <a16:creationId xmlns:a16="http://schemas.microsoft.com/office/drawing/2014/main" id="{6489D947-97CF-468B-B9BC-B074F9223055}"/>
               </a:ext>
             </a:extLst>
           </p:cNvPr>
@@ -3172,7 +3172,7 @@
           <p:cNvPr id="45" name="">
             <a:extLst xmlns:a="http://schemas.openxmlformats.org/drawingml/2006/main">
               <a:ext uri="{FF2B5EF4-FFF2-40B4-BE49-F238E27FC236}">
-                <a16:creationId xmlns:a16="http://schemas.microsoft.com/office/drawing/2014/main" id="{18BC54B3-A67D-478A-A38F-DA2DAC33FE18}"/>
+                <a16:creationId xmlns:a16="http://schemas.microsoft.com/office/drawing/2014/main" id="{C8F36C76-6EDA-45AB-B506-8625DF592996}"/>
               </a:ext>
             </a:extLst>
           </p:cNvPr>
@@ -3203,7 +3203,7 @@
           <p:cNvPr id="46" name="">
             <a:extLst xmlns:a="http://schemas.openxmlformats.org/drawingml/2006/main">
               <a:ext uri="{FF2B5EF4-FFF2-40B4-BE49-F238E27FC236}">
-                <a16:creationId xmlns:a16="http://schemas.microsoft.com/office/drawing/2014/main" id="{20393F22-98A1-48BF-9E90-92BD4249D7CD}"/>
+                <a16:creationId xmlns:a16="http://schemas.microsoft.com/office/drawing/2014/main" id="{AF654384-9E85-45C5-AE67-F666C7775394}"/>
               </a:ext>
             </a:extLst>
           </p:cNvPr>
@@ -3234,7 +3234,7 @@
           <p:cNvPr id="47" name="">
             <a:extLst xmlns:a="http://schemas.openxmlformats.org/drawingml/2006/main">
               <a:ext uri="{FF2B5EF4-FFF2-40B4-BE49-F238E27FC236}">
-                <a16:creationId xmlns:a16="http://schemas.microsoft.com/office/drawing/2014/main" id="{336B0453-543E-4067-91D6-31847FA6BF9F}"/>
+                <a16:creationId xmlns:a16="http://schemas.microsoft.com/office/drawing/2014/main" id="{341F16B2-AC0F-45AD-9029-B0DB77DBDBAB}"/>
               </a:ext>
             </a:extLst>
           </p:cNvPr>
@@ -3265,7 +3265,7 @@
           <p:cNvPr id="48" name="">
             <a:extLst xmlns:a="http://schemas.openxmlformats.org/drawingml/2006/main">
               <a:ext uri="{FF2B5EF4-FFF2-40B4-BE49-F238E27FC236}">
-                <a16:creationId xmlns:a16="http://schemas.microsoft.com/office/drawing/2014/main" id="{2D2CB3C4-ABB1-4B79-AE69-87F267C631F6}"/>
+                <a16:creationId xmlns:a16="http://schemas.microsoft.com/office/drawing/2014/main" id="{CE901E21-821E-4935-A3DF-E7C0AE51C3E7}"/>
               </a:ext>
             </a:extLst>
           </p:cNvPr>
@@ -3296,7 +3296,7 @@
           <p:cNvPr id="49" name="">
             <a:extLst xmlns:a="http://schemas.openxmlformats.org/drawingml/2006/main">
               <a:ext uri="{FF2B5EF4-FFF2-40B4-BE49-F238E27FC236}">
-                <a16:creationId xmlns:a16="http://schemas.microsoft.com/office/drawing/2014/main" id="{A9A04E0E-CB13-4C9F-9F7E-AD0BB61F3224}"/>
+                <a16:creationId xmlns:a16="http://schemas.microsoft.com/office/drawing/2014/main" id="{47EF0EC6-23DB-4D48-B476-FAF768813CDE}"/>
               </a:ext>
             </a:extLst>
           </p:cNvPr>
@@ -3327,7 +3327,7 @@
           <p:cNvPr id="50" name="">
             <a:extLst xmlns:a="http://schemas.openxmlformats.org/drawingml/2006/main">
               <a:ext uri="{FF2B5EF4-FFF2-40B4-BE49-F238E27FC236}">
-                <a16:creationId xmlns:a16="http://schemas.microsoft.com/office/drawing/2014/main" id="{68493EFE-89FD-48F7-8827-FEB57A29543B}"/>
+                <a16:creationId xmlns:a16="http://schemas.microsoft.com/office/drawing/2014/main" id="{E7A388F5-4DC3-4182-9703-AE5876813AF9}"/>
               </a:ext>
             </a:extLst>
           </p:cNvPr>
@@ -3358,7 +3358,7 @@
           <p:cNvPr id="51" name="">
             <a:extLst xmlns:a="http://schemas.openxmlformats.org/drawingml/2006/main">
               <a:ext uri="{FF2B5EF4-FFF2-40B4-BE49-F238E27FC236}">
-                <a16:creationId xmlns:a16="http://schemas.microsoft.com/office/drawing/2014/main" id="{47917940-6EB2-4965-936B-1B9A64E13D86}"/>
+                <a16:creationId xmlns:a16="http://schemas.microsoft.com/office/drawing/2014/main" id="{AD79ABE3-1718-4780-8023-FDE1F5E9C156}"/>
               </a:ext>
             </a:extLst>
           </p:cNvPr>
@@ -3389,7 +3389,7 @@
           <p:cNvPr id="52" name="">
             <a:extLst xmlns:a="http://schemas.openxmlformats.org/drawingml/2006/main">
               <a:ext uri="{FF2B5EF4-FFF2-40B4-BE49-F238E27FC236}">
-                <a16:creationId xmlns:a16="http://schemas.microsoft.com/office/drawing/2014/main" id="{AF8BDC93-C56C-47F5-AAB5-BD8EACC4CE74}"/>
+                <a16:creationId xmlns:a16="http://schemas.microsoft.com/office/drawing/2014/main" id="{B456B356-390B-4F40-82DC-44FE076A5917}"/>
               </a:ext>
             </a:extLst>
           </p:cNvPr>
@@ -3420,7 +3420,7 @@
           <p:cNvPr id="53" name="">
             <a:extLst xmlns:a="http://schemas.openxmlformats.org/drawingml/2006/main">
               <a:ext uri="{FF2B5EF4-FFF2-40B4-BE49-F238E27FC236}">
-                <a16:creationId xmlns:a16="http://schemas.microsoft.com/office/drawing/2014/main" id="{7C9C09F1-6810-4BC0-89A1-23AA1E35D445}"/>
+                <a16:creationId xmlns:a16="http://schemas.microsoft.com/office/drawing/2014/main" id="{5ECF484A-8584-4BCD-843C-AD69DD23FEF0}"/>
               </a:ext>
             </a:extLst>
           </p:cNvPr>
@@ -3451,7 +3451,7 @@
           <p:cNvPr id="54" name="">
             <a:extLst xmlns:a="http://schemas.openxmlformats.org/drawingml/2006/main">
               <a:ext uri="{FF2B5EF4-FFF2-40B4-BE49-F238E27FC236}">
-                <a16:creationId xmlns:a16="http://schemas.microsoft.com/office/drawing/2014/main" id="{CAE88224-6793-45F7-A711-192A3B74B5D5}"/>
+                <a16:creationId xmlns:a16="http://schemas.microsoft.com/office/drawing/2014/main" id="{9323D01C-4D4A-49BD-A659-79EFB8A2037F}"/>
               </a:ext>
             </a:extLst>
           </p:cNvPr>
@@ -3482,7 +3482,7 @@
           <p:cNvPr id="55" name="">
             <a:extLst xmlns:a="http://schemas.openxmlformats.org/drawingml/2006/main">
               <a:ext uri="{FF2B5EF4-FFF2-40B4-BE49-F238E27FC236}">
-                <a16:creationId xmlns:a16="http://schemas.microsoft.com/office/drawing/2014/main" id="{FDA95FED-8251-4380-A175-3AA8ADAB40FC}"/>
+                <a16:creationId xmlns:a16="http://schemas.microsoft.com/office/drawing/2014/main" id="{FECE7551-06BB-4E4A-BFC5-62D7DB7A5078}"/>
               </a:ext>
             </a:extLst>
           </p:cNvPr>
@@ -3513,7 +3513,7 @@
           <p:cNvPr id="56" name="">
             <a:extLst xmlns:a="http://schemas.openxmlformats.org/drawingml/2006/main">
               <a:ext uri="{FF2B5EF4-FFF2-40B4-BE49-F238E27FC236}">
-                <a16:creationId xmlns:a16="http://schemas.microsoft.com/office/drawing/2014/main" id="{4D09474C-9DEC-4FA9-9B17-85D4B4DAF25C}"/>
+                <a16:creationId xmlns:a16="http://schemas.microsoft.com/office/drawing/2014/main" id="{7CEBFA1E-2BEB-4A9A-BEF3-B5EAD0B86638}"/>
               </a:ext>
             </a:extLst>
           </p:cNvPr>
@@ -3544,7 +3544,7 @@
           <p:cNvPr id="57" name="">
             <a:extLst xmlns:a="http://schemas.openxmlformats.org/drawingml/2006/main">
               <a:ext uri="{FF2B5EF4-FFF2-40B4-BE49-F238E27FC236}">
-                <a16:creationId xmlns:a16="http://schemas.microsoft.com/office/drawing/2014/main" id="{FEA27851-C844-407F-A985-57647AE3F918}"/>
+                <a16:creationId xmlns:a16="http://schemas.microsoft.com/office/drawing/2014/main" id="{EEC789CF-DDB8-43B7-9E37-4C092FEB6F47}"/>
               </a:ext>
             </a:extLst>
           </p:cNvPr>
@@ -3575,7 +3575,7 @@
           <p:cNvPr id="58" name="">
             <a:extLst xmlns:a="http://schemas.openxmlformats.org/drawingml/2006/main">
               <a:ext uri="{FF2B5EF4-FFF2-40B4-BE49-F238E27FC236}">
-                <a16:creationId xmlns:a16="http://schemas.microsoft.com/office/drawing/2014/main" id="{A8577A3D-DCF3-4B3C-A47F-AA68B5768F8D}"/>
+                <a16:creationId xmlns:a16="http://schemas.microsoft.com/office/drawing/2014/main" id="{7B6EC176-F7BB-42CB-8F93-9B025E54343B}"/>
               </a:ext>
             </a:extLst>
           </p:cNvPr>
@@ -3606,7 +3606,7 @@
           <p:cNvPr id="59" name="">
             <a:extLst xmlns:a="http://schemas.openxmlformats.org/drawingml/2006/main">
               <a:ext uri="{FF2B5EF4-FFF2-40B4-BE49-F238E27FC236}">
-                <a16:creationId xmlns:a16="http://schemas.microsoft.com/office/drawing/2014/main" id="{0AE7CDBF-BB61-43F5-9CF1-ED89C9678A83}"/>
+                <a16:creationId xmlns:a16="http://schemas.microsoft.com/office/drawing/2014/main" id="{403F217F-57DE-46B0-8DD4-26D5A0663B47}"/>
               </a:ext>
             </a:extLst>
           </p:cNvPr>
@@ -3637,7 +3637,7 @@
           <p:cNvPr id="60" name="">
             <a:extLst xmlns:a="http://schemas.openxmlformats.org/drawingml/2006/main">
               <a:ext uri="{FF2B5EF4-FFF2-40B4-BE49-F238E27FC236}">
-                <a16:creationId xmlns:a16="http://schemas.microsoft.com/office/drawing/2014/main" id="{7AD798AB-1526-454D-8DBD-62D5DA6B9396}"/>
+                <a16:creationId xmlns:a16="http://schemas.microsoft.com/office/drawing/2014/main" id="{7B1D4B86-1EC0-4DF7-9C3C-1CE3B3380F8F}"/>
               </a:ext>
             </a:extLst>
           </p:cNvPr>
@@ -3668,7 +3668,7 @@
           <p:cNvPr id="61" name="">
             <a:extLst xmlns:a="http://schemas.openxmlformats.org/drawingml/2006/main">
               <a:ext uri="{FF2B5EF4-FFF2-40B4-BE49-F238E27FC236}">
-                <a16:creationId xmlns:a16="http://schemas.microsoft.com/office/drawing/2014/main" id="{6F1131EA-C22E-4059-913E-6EA043B6EC34}"/>
+                <a16:creationId xmlns:a16="http://schemas.microsoft.com/office/drawing/2014/main" id="{E20669D6-A56B-4CD4-A97D-6AFB45D4FC84}"/>
               </a:ext>
             </a:extLst>
           </p:cNvPr>
@@ -3699,7 +3699,7 @@
           <p:cNvPr id="62" name="">
             <a:extLst xmlns:a="http://schemas.openxmlformats.org/drawingml/2006/main">
               <a:ext uri="{FF2B5EF4-FFF2-40B4-BE49-F238E27FC236}">
-                <a16:creationId xmlns:a16="http://schemas.microsoft.com/office/drawing/2014/main" id="{180FB1B0-1454-4585-B3E7-3E268F6F3D74}"/>
+                <a16:creationId xmlns:a16="http://schemas.microsoft.com/office/drawing/2014/main" id="{523E56EC-511E-4966-AC08-661D290BBE09}"/>
               </a:ext>
             </a:extLst>
           </p:cNvPr>
@@ -3730,7 +3730,7 @@
           <p:cNvPr id="63" name="">
             <a:extLst xmlns:a="http://schemas.openxmlformats.org/drawingml/2006/main">
               <a:ext uri="{FF2B5EF4-FFF2-40B4-BE49-F238E27FC236}">
-                <a16:creationId xmlns:a16="http://schemas.microsoft.com/office/drawing/2014/main" id="{D5A45F02-4EE3-4C4D-8213-14F172C95178}"/>
+                <a16:creationId xmlns:a16="http://schemas.microsoft.com/office/drawing/2014/main" id="{6D325292-3219-40E3-9903-D07D29A46755}"/>
               </a:ext>
             </a:extLst>
           </p:cNvPr>
@@ -3761,7 +3761,7 @@
           <p:cNvPr id="64" name="">
             <a:extLst xmlns:a="http://schemas.openxmlformats.org/drawingml/2006/main">
               <a:ext uri="{FF2B5EF4-FFF2-40B4-BE49-F238E27FC236}">
-                <a16:creationId xmlns:a16="http://schemas.microsoft.com/office/drawing/2014/main" id="{ED2D976E-545C-4994-9B25-15A69E8567A2}"/>
+                <a16:creationId xmlns:a16="http://schemas.microsoft.com/office/drawing/2014/main" id="{2E745597-FFB7-433C-B5CB-D6C46F5EA099}"/>
               </a:ext>
             </a:extLst>
           </p:cNvPr>
@@ -3792,7 +3792,7 @@
           <p:cNvPr id="65" name="">
             <a:extLst xmlns:a="http://schemas.openxmlformats.org/drawingml/2006/main">
               <a:ext uri="{FF2B5EF4-FFF2-40B4-BE49-F238E27FC236}">
-                <a16:creationId xmlns:a16="http://schemas.microsoft.com/office/drawing/2014/main" id="{9E8B17E8-02BD-4BB1-90B4-3AA844C1EB3D}"/>
+                <a16:creationId xmlns:a16="http://schemas.microsoft.com/office/drawing/2014/main" id="{3140D1E7-2DD9-40E4-973B-4328F166B475}"/>
               </a:ext>
             </a:extLst>
           </p:cNvPr>
@@ -3823,7 +3823,7 @@
           <p:cNvPr id="66" name="">
             <a:extLst xmlns:a="http://schemas.openxmlformats.org/drawingml/2006/main">
               <a:ext uri="{FF2B5EF4-FFF2-40B4-BE49-F238E27FC236}">
-                <a16:creationId xmlns:a16="http://schemas.microsoft.com/office/drawing/2014/main" id="{DB986DFF-D92A-4234-9EEE-BDFFA1C8085C}"/>
+                <a16:creationId xmlns:a16="http://schemas.microsoft.com/office/drawing/2014/main" id="{CC7BFD28-1BF5-43B5-AE65-D6DFDA8027C7}"/>
               </a:ext>
             </a:extLst>
           </p:cNvPr>
@@ -3854,7 +3854,7 @@
           <p:cNvPr id="67" name="">
             <a:extLst xmlns:a="http://schemas.openxmlformats.org/drawingml/2006/main">
               <a:ext uri="{FF2B5EF4-FFF2-40B4-BE49-F238E27FC236}">
-                <a16:creationId xmlns:a16="http://schemas.microsoft.com/office/drawing/2014/main" id="{BA6080C1-0661-4ECE-9981-0B0E710CF871}"/>
+                <a16:creationId xmlns:a16="http://schemas.microsoft.com/office/drawing/2014/main" id="{BEA4D4C0-A69F-467C-BA73-CF51B23ECE4D}"/>
               </a:ext>
             </a:extLst>
           </p:cNvPr>
@@ -3885,7 +3885,7 @@
           <p:cNvPr id="68" name="">
             <a:extLst xmlns:a="http://schemas.openxmlformats.org/drawingml/2006/main">
               <a:ext uri="{FF2B5EF4-FFF2-40B4-BE49-F238E27FC236}">
-                <a16:creationId xmlns:a16="http://schemas.microsoft.com/office/drawing/2014/main" id="{109B5A9C-A8F7-4119-91A5-B2EABB85D85F}"/>
+                <a16:creationId xmlns:a16="http://schemas.microsoft.com/office/drawing/2014/main" id="{E1FEC5EA-1383-43F9-B207-2F670FC3799E}"/>
               </a:ext>
             </a:extLst>
           </p:cNvPr>
@@ -3916,7 +3916,7 @@
           <p:cNvPr id="69" name="">
             <a:extLst xmlns:a="http://schemas.openxmlformats.org/drawingml/2006/main">
               <a:ext uri="{FF2B5EF4-FFF2-40B4-BE49-F238E27FC236}">
-                <a16:creationId xmlns:a16="http://schemas.microsoft.com/office/drawing/2014/main" id="{56B2F867-6B64-4762-BB0D-EF6A8E8CCEA0}"/>
+                <a16:creationId xmlns:a16="http://schemas.microsoft.com/office/drawing/2014/main" id="{DBB7FA5B-4A0F-4478-907C-443B6C94FA0B}"/>
               </a:ext>
             </a:extLst>
           </p:cNvPr>
@@ -3947,7 +3947,7 @@
           <p:cNvPr id="70" name="">
             <a:extLst xmlns:a="http://schemas.openxmlformats.org/drawingml/2006/main">
               <a:ext uri="{FF2B5EF4-FFF2-40B4-BE49-F238E27FC236}">
-                <a16:creationId xmlns:a16="http://schemas.microsoft.com/office/drawing/2014/main" id="{D903E85C-351F-4187-A42D-A9B6E8B8B42A}"/>
+                <a16:creationId xmlns:a16="http://schemas.microsoft.com/office/drawing/2014/main" id="{782DD976-1129-4BCC-881E-EBDCEAC53B88}"/>
               </a:ext>
             </a:extLst>
           </p:cNvPr>
@@ -3978,7 +3978,7 @@
           <p:cNvPr id="71" name="">
             <a:extLst xmlns:a="http://schemas.openxmlformats.org/drawingml/2006/main">
               <a:ext uri="{FF2B5EF4-FFF2-40B4-BE49-F238E27FC236}">
-                <a16:creationId xmlns:a16="http://schemas.microsoft.com/office/drawing/2014/main" id="{5F163E2B-2099-406E-9BBC-96A0E9EB8A0E}"/>
+                <a16:creationId xmlns:a16="http://schemas.microsoft.com/office/drawing/2014/main" id="{C7DA1F17-C66E-4862-8607-482BB65A37A2}"/>
               </a:ext>
             </a:extLst>
           </p:cNvPr>
@@ -4009,7 +4009,7 @@
           <p:cNvPr id="72" name="">
             <a:extLst xmlns:a="http://schemas.openxmlformats.org/drawingml/2006/main">
               <a:ext uri="{FF2B5EF4-FFF2-40B4-BE49-F238E27FC236}">
-                <a16:creationId xmlns:a16="http://schemas.microsoft.com/office/drawing/2014/main" id="{8AD340CC-6508-4A6D-8D9F-FECE5A2BAE51}"/>
+                <a16:creationId xmlns:a16="http://schemas.microsoft.com/office/drawing/2014/main" id="{5331E272-72B3-483A-8432-04661AEAA361}"/>
               </a:ext>
             </a:extLst>
           </p:cNvPr>
@@ -4042,7 +4042,7 @@
           <p:cNvPr id="73" name="">
             <a:extLst xmlns:a="http://schemas.openxmlformats.org/drawingml/2006/main">
               <a:ext uri="{FF2B5EF4-FFF2-40B4-BE49-F238E27FC236}">
-                <a16:creationId xmlns:a16="http://schemas.microsoft.com/office/drawing/2014/main" id="{464DBE93-7CD4-4037-A2B9-4C4144C7EF03}"/>
+                <a16:creationId xmlns:a16="http://schemas.microsoft.com/office/drawing/2014/main" id="{4CF4D0CF-6BCC-4433-BE4D-BB3135D6E38B}"/>
               </a:ext>
             </a:extLst>
           </p:cNvPr>
@@ -4073,7 +4073,7 @@
           <p:cNvPr id="74" name="">
             <a:extLst xmlns:a="http://schemas.openxmlformats.org/drawingml/2006/main">
               <a:ext uri="{FF2B5EF4-FFF2-40B4-BE49-F238E27FC236}">
-                <a16:creationId xmlns:a16="http://schemas.microsoft.com/office/drawing/2014/main" id="{65C8BFBA-C324-4A60-8C3B-FB58C3E9FB83}"/>
+                <a16:creationId xmlns:a16="http://schemas.microsoft.com/office/drawing/2014/main" id="{1E1DCF25-A8EC-4BE9-B8F6-DB10046D038A}"/>
               </a:ext>
             </a:extLst>
           </p:cNvPr>
@@ -4104,7 +4104,7 @@
           <p:cNvPr id="75" name="">
             <a:extLst xmlns:a="http://schemas.openxmlformats.org/drawingml/2006/main">
               <a:ext uri="{FF2B5EF4-FFF2-40B4-BE49-F238E27FC236}">
-                <a16:creationId xmlns:a16="http://schemas.microsoft.com/office/drawing/2014/main" id="{07B3206A-1DF3-43D5-A6E6-1A8669BC0C57}"/>
+                <a16:creationId xmlns:a16="http://schemas.microsoft.com/office/drawing/2014/main" id="{85D2C9EF-A07D-4F0A-A66A-B12E6C7CA11F}"/>
               </a:ext>
             </a:extLst>
           </p:cNvPr>
@@ -4135,7 +4135,7 @@
           <p:cNvPr id="76" name="">
             <a:extLst xmlns:a="http://schemas.openxmlformats.org/drawingml/2006/main">
               <a:ext uri="{FF2B5EF4-FFF2-40B4-BE49-F238E27FC236}">
-                <a16:creationId xmlns:a16="http://schemas.microsoft.com/office/drawing/2014/main" id="{F75FE709-0561-456D-BB23-3812BA055195}"/>
+                <a16:creationId xmlns:a16="http://schemas.microsoft.com/office/drawing/2014/main" id="{E0AB0BA3-D6BE-481D-B2CD-73715E7F872B}"/>
               </a:ext>
             </a:extLst>
           </p:cNvPr>
@@ -4166,7 +4166,7 @@
           <p:cNvPr id="77" name="">
             <a:extLst xmlns:a="http://schemas.openxmlformats.org/drawingml/2006/main">
               <a:ext uri="{FF2B5EF4-FFF2-40B4-BE49-F238E27FC236}">
-                <a16:creationId xmlns:a16="http://schemas.microsoft.com/office/drawing/2014/main" id="{4ADC09D2-B44F-4BCC-B737-3C2114F2EA16}"/>
+                <a16:creationId xmlns:a16="http://schemas.microsoft.com/office/drawing/2014/main" id="{B716C63B-D2E5-4BD1-9107-A6610A9C73CE}"/>
               </a:ext>
             </a:extLst>
           </p:cNvPr>
@@ -4197,7 +4197,7 @@
           <p:cNvPr id="78" name="">
             <a:extLst xmlns:a="http://schemas.openxmlformats.org/drawingml/2006/main">
               <a:ext uri="{FF2B5EF4-FFF2-40B4-BE49-F238E27FC236}">
-                <a16:creationId xmlns:a16="http://schemas.microsoft.com/office/drawing/2014/main" id="{1DAD8D09-D445-4642-9919-06C0FE32CA38}"/>
+                <a16:creationId xmlns:a16="http://schemas.microsoft.com/office/drawing/2014/main" id="{1D5C0554-C29F-4D21-ACAA-ACFDE171A48C}"/>
               </a:ext>
             </a:extLst>
           </p:cNvPr>
@@ -4228,7 +4228,7 @@
           <p:cNvPr id="79" name="">
             <a:extLst xmlns:a="http://schemas.openxmlformats.org/drawingml/2006/main">
               <a:ext uri="{FF2B5EF4-FFF2-40B4-BE49-F238E27FC236}">
-                <a16:creationId xmlns:a16="http://schemas.microsoft.com/office/drawing/2014/main" id="{795DF226-3CBA-461F-BDDB-C13170B690DE}"/>
+                <a16:creationId xmlns:a16="http://schemas.microsoft.com/office/drawing/2014/main" id="{907D2859-8E68-4304-A77C-E99CDDFDF2DF}"/>
               </a:ext>
             </a:extLst>
           </p:cNvPr>
@@ -4259,7 +4259,7 @@
           <p:cNvPr id="80" name="">
             <a:extLst xmlns:a="http://schemas.openxmlformats.org/drawingml/2006/main">
               <a:ext uri="{FF2B5EF4-FFF2-40B4-BE49-F238E27FC236}">
-                <a16:creationId xmlns:a16="http://schemas.microsoft.com/office/drawing/2014/main" id="{D8D603D3-9D7B-4290-AF20-1DEE6836E407}"/>
+                <a16:creationId xmlns:a16="http://schemas.microsoft.com/office/drawing/2014/main" id="{E6B0261C-81EB-4E23-9055-87523FAA5A89}"/>
               </a:ext>
             </a:extLst>
           </p:cNvPr>
@@ -4290,7 +4290,7 @@
           <p:cNvPr id="81" name="">
             <a:extLst xmlns:a="http://schemas.openxmlformats.org/drawingml/2006/main">
               <a:ext uri="{FF2B5EF4-FFF2-40B4-BE49-F238E27FC236}">
-                <a16:creationId xmlns:a16="http://schemas.microsoft.com/office/drawing/2014/main" id="{B7AA4EB6-058E-4B6C-8032-8082433D1087}"/>
+                <a16:creationId xmlns:a16="http://schemas.microsoft.com/office/drawing/2014/main" id="{AA2A7DF5-D167-40A9-8358-AF118FE81260}"/>
               </a:ext>
             </a:extLst>
           </p:cNvPr>
@@ -4321,7 +4321,7 @@
           <p:cNvPr id="82" name="">
             <a:extLst xmlns:a="http://schemas.openxmlformats.org/drawingml/2006/main">
               <a:ext uri="{FF2B5EF4-FFF2-40B4-BE49-F238E27FC236}">
-                <a16:creationId xmlns:a16="http://schemas.microsoft.com/office/drawing/2014/main" id="{BBB42B5F-C140-4786-BEF0-6C3A87704E02}"/>
+                <a16:creationId xmlns:a16="http://schemas.microsoft.com/office/drawing/2014/main" id="{7ED01C2D-A2A1-460E-9816-7A9B64313F86}"/>
               </a:ext>
             </a:extLst>
           </p:cNvPr>
@@ -4352,7 +4352,7 @@
           <p:cNvPr id="83" name="">
             <a:extLst xmlns:a="http://schemas.openxmlformats.org/drawingml/2006/main">
               <a:ext uri="{FF2B5EF4-FFF2-40B4-BE49-F238E27FC236}">
-                <a16:creationId xmlns:a16="http://schemas.microsoft.com/office/drawing/2014/main" id="{DFF0167A-6847-476F-A156-A74EA3ECF2B0}"/>
+                <a16:creationId xmlns:a16="http://schemas.microsoft.com/office/drawing/2014/main" id="{A24E6A54-2490-4D8E-B6C3-562E58E17F5D}"/>
               </a:ext>
             </a:extLst>
           </p:cNvPr>
@@ -4383,7 +4383,7 @@
           <p:cNvPr id="84" name="">
             <a:extLst xmlns:a="http://schemas.openxmlformats.org/drawingml/2006/main">
               <a:ext uri="{FF2B5EF4-FFF2-40B4-BE49-F238E27FC236}">
-                <a16:creationId xmlns:a16="http://schemas.microsoft.com/office/drawing/2014/main" id="{E34C2A71-12F2-444D-AAB2-5DDC5590FE73}"/>
+                <a16:creationId xmlns:a16="http://schemas.microsoft.com/office/drawing/2014/main" id="{CB694148-E44A-4B5F-B22E-BE6B79D9707C}"/>
               </a:ext>
             </a:extLst>
           </p:cNvPr>
@@ -4414,7 +4414,7 @@
           <p:cNvPr id="85" name="">
             <a:extLst xmlns:a="http://schemas.openxmlformats.org/drawingml/2006/main">
               <a:ext uri="{FF2B5EF4-FFF2-40B4-BE49-F238E27FC236}">
-                <a16:creationId xmlns:a16="http://schemas.microsoft.com/office/drawing/2014/main" id="{D7753D28-78B1-4729-B57F-67673F242797}"/>
+                <a16:creationId xmlns:a16="http://schemas.microsoft.com/office/drawing/2014/main" id="{C89FB4D1-E288-474A-BD41-94B114E428AE}"/>
               </a:ext>
             </a:extLst>
           </p:cNvPr>
@@ -4445,7 +4445,7 @@
           <p:cNvPr id="86" name="">
             <a:extLst xmlns:a="http://schemas.openxmlformats.org/drawingml/2006/main">
               <a:ext uri="{FF2B5EF4-FFF2-40B4-BE49-F238E27FC236}">
-                <a16:creationId xmlns:a16="http://schemas.microsoft.com/office/drawing/2014/main" id="{6221AEA6-574E-4CB6-89A7-148C07A613C3}"/>
+                <a16:creationId xmlns:a16="http://schemas.microsoft.com/office/drawing/2014/main" id="{F1CF5BDE-B8F2-40D9-A7B2-EA027B7DB9A4}"/>
               </a:ext>
             </a:extLst>
           </p:cNvPr>
@@ -4476,7 +4476,7 @@
           <p:cNvPr id="87" name="">
             <a:extLst xmlns:a="http://schemas.openxmlformats.org/drawingml/2006/main">
               <a:ext uri="{FF2B5EF4-FFF2-40B4-BE49-F238E27FC236}">
-                <a16:creationId xmlns:a16="http://schemas.microsoft.com/office/drawing/2014/main" id="{939167AB-0406-4E5C-B63F-7EACDE4ECA07}"/>
+                <a16:creationId xmlns:a16="http://schemas.microsoft.com/office/drawing/2014/main" id="{BA0BFED6-1103-48D2-BA49-81A1A3B5A032}"/>
               </a:ext>
             </a:extLst>
           </p:cNvPr>
@@ -4507,7 +4507,7 @@
           <p:cNvPr id="88" name="">
             <a:extLst xmlns:a="http://schemas.openxmlformats.org/drawingml/2006/main">
               <a:ext uri="{FF2B5EF4-FFF2-40B4-BE49-F238E27FC236}">
-                <a16:creationId xmlns:a16="http://schemas.microsoft.com/office/drawing/2014/main" id="{D78E3CE3-95FC-445C-853E-73E7CBB5BA78}"/>
+                <a16:creationId xmlns:a16="http://schemas.microsoft.com/office/drawing/2014/main" id="{C918359D-6534-431B-A951-1BE6A5DA471B}"/>
               </a:ext>
             </a:extLst>
           </p:cNvPr>
@@ -4538,7 +4538,7 @@
           <p:cNvPr id="89" name="">
             <a:extLst xmlns:a="http://schemas.openxmlformats.org/drawingml/2006/main">
               <a:ext uri="{FF2B5EF4-FFF2-40B4-BE49-F238E27FC236}">
-                <a16:creationId xmlns:a16="http://schemas.microsoft.com/office/drawing/2014/main" id="{14B6D878-54E1-4870-93A4-37FB533504C9}"/>
+                <a16:creationId xmlns:a16="http://schemas.microsoft.com/office/drawing/2014/main" id="{E1AEDEE6-D9DE-482E-8AF9-C00B630310F0}"/>
               </a:ext>
             </a:extLst>
           </p:cNvPr>
@@ -4569,7 +4569,7 @@
           <p:cNvPr id="90" name="">
             <a:extLst xmlns:a="http://schemas.openxmlformats.org/drawingml/2006/main">
               <a:ext uri="{FF2B5EF4-FFF2-40B4-BE49-F238E27FC236}">
-                <a16:creationId xmlns:a16="http://schemas.microsoft.com/office/drawing/2014/main" id="{639E6321-AD9D-4C02-97E1-48FE343D43FD}"/>
+                <a16:creationId xmlns:a16="http://schemas.microsoft.com/office/drawing/2014/main" id="{99296C65-C415-4B98-8418-44973480D854}"/>
               </a:ext>
             </a:extLst>
           </p:cNvPr>
@@ -4614,7 +4614,7 @@
           <p:cNvPr id="91" name="">
             <a:extLst xmlns:a="http://schemas.openxmlformats.org/drawingml/2006/main">
               <a:ext uri="{FF2B5EF4-FFF2-40B4-BE49-F238E27FC236}">
-                <a16:creationId xmlns:a16="http://schemas.microsoft.com/office/drawing/2014/main" id="{0A4EA623-9F9D-4F54-AD0A-37F0724F32B2}"/>
+                <a16:creationId xmlns:a16="http://schemas.microsoft.com/office/drawing/2014/main" id="{B567C515-8A1E-486E-AB61-C7BDB4EDA108}"/>
               </a:ext>
             </a:extLst>
           </p:cNvPr>
@@ -4645,7 +4645,7 @@
           <p:cNvPr id="92" name="">
             <a:extLst xmlns:a="http://schemas.openxmlformats.org/drawingml/2006/main">
               <a:ext uri="{FF2B5EF4-FFF2-40B4-BE49-F238E27FC236}">
-                <a16:creationId xmlns:a16="http://schemas.microsoft.com/office/drawing/2014/main" id="{E06A8804-FCEF-4715-B080-16F8F7885984}"/>
+                <a16:creationId xmlns:a16="http://schemas.microsoft.com/office/drawing/2014/main" id="{4E3C26CB-A634-4A49-84CD-BB1DFC8AFA2D}"/>
               </a:ext>
             </a:extLst>
           </p:cNvPr>
@@ -4690,7 +4690,7 @@
           <p:cNvPr id="93" name="">
             <a:extLst xmlns:a="http://schemas.openxmlformats.org/drawingml/2006/main">
               <a:ext uri="{FF2B5EF4-FFF2-40B4-BE49-F238E27FC236}">
-                <a16:creationId xmlns:a16="http://schemas.microsoft.com/office/drawing/2014/main" id="{42FF8FAB-82DB-4E84-918C-953F19D46E94}"/>
+                <a16:creationId xmlns:a16="http://schemas.microsoft.com/office/drawing/2014/main" id="{E03A33B3-52FE-4BDC-BF0D-ACF448CEF112}"/>
               </a:ext>
             </a:extLst>
           </p:cNvPr>
@@ -4735,7 +4735,7 @@
           <p:cNvPr id="94" name="">
             <a:extLst xmlns:a="http://schemas.openxmlformats.org/drawingml/2006/main">
               <a:ext uri="{FF2B5EF4-FFF2-40B4-BE49-F238E27FC236}">
-                <a16:creationId xmlns:a16="http://schemas.microsoft.com/office/drawing/2014/main" id="{72701EB9-4413-4B84-8321-3D0F2C650531}"/>
+                <a16:creationId xmlns:a16="http://schemas.microsoft.com/office/drawing/2014/main" id="{64460E15-E538-45A8-8303-738B523F0551}"/>
               </a:ext>
             </a:extLst>
           </p:cNvPr>
@@ -4766,7 +4766,7 @@
           <p:cNvPr id="95" name="">
             <a:extLst xmlns:a="http://schemas.openxmlformats.org/drawingml/2006/main">
               <a:ext uri="{FF2B5EF4-FFF2-40B4-BE49-F238E27FC236}">
-                <a16:creationId xmlns:a16="http://schemas.microsoft.com/office/drawing/2014/main" id="{FBEDEEEA-693A-45C0-944F-7BE9F1F83B67}"/>
+                <a16:creationId xmlns:a16="http://schemas.microsoft.com/office/drawing/2014/main" id="{C6517B4B-033D-43EC-A07C-1E963A820B6A}"/>
               </a:ext>
             </a:extLst>
           </p:cNvPr>
@@ -4811,7 +4811,7 @@
           <p:cNvPr id="96" name="">
             <a:extLst xmlns:a="http://schemas.openxmlformats.org/drawingml/2006/main">
               <a:ext uri="{FF2B5EF4-FFF2-40B4-BE49-F238E27FC236}">
-                <a16:creationId xmlns:a16="http://schemas.microsoft.com/office/drawing/2014/main" id="{BB48AC0F-25B9-4764-8183-C8B3BBA3F4B2}"/>
+                <a16:creationId xmlns:a16="http://schemas.microsoft.com/office/drawing/2014/main" id="{9F08D429-9636-45DA-96A2-F1EB96A9C3B8}"/>
               </a:ext>
             </a:extLst>
           </p:cNvPr>
@@ -4856,7 +4856,7 @@
           <p:cNvPr id="97" name="">
             <a:extLst xmlns:a="http://schemas.openxmlformats.org/drawingml/2006/main">
               <a:ext uri="{FF2B5EF4-FFF2-40B4-BE49-F238E27FC236}">
-                <a16:creationId xmlns:a16="http://schemas.microsoft.com/office/drawing/2014/main" id="{B9C3D753-9C19-4967-A4D7-0B2299FE614C}"/>
+                <a16:creationId xmlns:a16="http://schemas.microsoft.com/office/drawing/2014/main" id="{A4976BC7-FEF4-4B09-ADD5-BC02865000F5}"/>
               </a:ext>
             </a:extLst>
           </p:cNvPr>
@@ -4887,7 +4887,7 @@
           <p:cNvPr id="98" name="">
             <a:extLst xmlns:a="http://schemas.openxmlformats.org/drawingml/2006/main">
               <a:ext uri="{FF2B5EF4-FFF2-40B4-BE49-F238E27FC236}">
-                <a16:creationId xmlns:a16="http://schemas.microsoft.com/office/drawing/2014/main" id="{FE2FFCC1-B1C6-4785-B262-A685A2845DB9}"/>
+                <a16:creationId xmlns:a16="http://schemas.microsoft.com/office/drawing/2014/main" id="{11485A52-8D9E-4181-999D-BBBAB6654FAF}"/>
               </a:ext>
             </a:extLst>
           </p:cNvPr>
@@ -4932,7 +4932,7 @@
           <p:cNvPr id="99" name="">
             <a:extLst xmlns:a="http://schemas.openxmlformats.org/drawingml/2006/main">
               <a:ext uri="{FF2B5EF4-FFF2-40B4-BE49-F238E27FC236}">
-                <a16:creationId xmlns:a16="http://schemas.microsoft.com/office/drawing/2014/main" id="{46E7D306-D2D0-4334-A8FC-652B4F425320}"/>
+                <a16:creationId xmlns:a16="http://schemas.microsoft.com/office/drawing/2014/main" id="{A5A41BAB-9FCA-4BDA-A2FF-ADFA5E7C09D7}"/>
               </a:ext>
             </a:extLst>
           </p:cNvPr>
@@ -4977,7 +4977,7 @@
           <p:cNvPr id="100" name="">
             <a:extLst xmlns:a="http://schemas.openxmlformats.org/drawingml/2006/main">
               <a:ext uri="{FF2B5EF4-FFF2-40B4-BE49-F238E27FC236}">
-                <a16:creationId xmlns:a16="http://schemas.microsoft.com/office/drawing/2014/main" id="{8C04428B-65E7-45E6-93E2-539C9B9E68BE}"/>
+                <a16:creationId xmlns:a16="http://schemas.microsoft.com/office/drawing/2014/main" id="{E6D85157-743C-4D74-919C-FCBCBD581745}"/>
               </a:ext>
             </a:extLst>
           </p:cNvPr>
@@ -5008,7 +5008,7 @@
           <p:cNvPr id="101" name="">
             <a:extLst xmlns:a="http://schemas.openxmlformats.org/drawingml/2006/main">
               <a:ext uri="{FF2B5EF4-FFF2-40B4-BE49-F238E27FC236}">
-                <a16:creationId xmlns:a16="http://schemas.microsoft.com/office/drawing/2014/main" id="{7E642329-9473-4B84-BFA1-4ABE536C6F70}"/>
+                <a16:creationId xmlns:a16="http://schemas.microsoft.com/office/drawing/2014/main" id="{7BC7063D-0830-4FA2-A49A-F3481B152B4A}"/>
               </a:ext>
             </a:extLst>
           </p:cNvPr>
@@ -5053,7 +5053,7 @@
           <p:cNvPr id="102" name="">
             <a:extLst xmlns:a="http://schemas.openxmlformats.org/drawingml/2006/main">
               <a:ext uri="{FF2B5EF4-FFF2-40B4-BE49-F238E27FC236}">
-                <a16:creationId xmlns:a16="http://schemas.microsoft.com/office/drawing/2014/main" id="{4B3DDBA3-61BD-45FD-8F53-BF172DC3086A}"/>
+                <a16:creationId xmlns:a16="http://schemas.microsoft.com/office/drawing/2014/main" id="{904C61FC-D4EB-46E8-B79B-2A9394F55B20}"/>
               </a:ext>
             </a:extLst>
           </p:cNvPr>
@@ -5098,7 +5098,7 @@
           <p:cNvPr id="103" name="">
             <a:extLst xmlns:a="http://schemas.openxmlformats.org/drawingml/2006/main">
               <a:ext uri="{FF2B5EF4-FFF2-40B4-BE49-F238E27FC236}">
-                <a16:creationId xmlns:a16="http://schemas.microsoft.com/office/drawing/2014/main" id="{5781C518-4E53-432D-A8AA-2BFEF584B21A}"/>
+                <a16:creationId xmlns:a16="http://schemas.microsoft.com/office/drawing/2014/main" id="{20CA75ED-5497-4E80-8E05-66B76E35619E}"/>
               </a:ext>
             </a:extLst>
           </p:cNvPr>
@@ -5143,7 +5143,7 @@
           <p:cNvPr id="104" name="">
             <a:extLst xmlns:a="http://schemas.openxmlformats.org/drawingml/2006/main">
               <a:ext uri="{FF2B5EF4-FFF2-40B4-BE49-F238E27FC236}">
-                <a16:creationId xmlns:a16="http://schemas.microsoft.com/office/drawing/2014/main" id="{F14389C4-72B8-4F72-91BD-32800C2CD10C}"/>
+                <a16:creationId xmlns:a16="http://schemas.microsoft.com/office/drawing/2014/main" id="{1940C8DE-0234-40B2-B226-D156DDA1D9AE}"/>
               </a:ext>
             </a:extLst>
           </p:cNvPr>
@@ -5174,7 +5174,7 @@
           <p:cNvPr id="105" name="">
             <a:extLst xmlns:a="http://schemas.openxmlformats.org/drawingml/2006/main">
               <a:ext uri="{FF2B5EF4-FFF2-40B4-BE49-F238E27FC236}">
-                <a16:creationId xmlns:a16="http://schemas.microsoft.com/office/drawing/2014/main" id="{9FCBD93D-A058-4358-B122-151804AF73C5}"/>
+                <a16:creationId xmlns:a16="http://schemas.microsoft.com/office/drawing/2014/main" id="{7CBDD006-1104-4142-A5D4-780E746AE207}"/>
               </a:ext>
             </a:extLst>
           </p:cNvPr>
@@ -5219,7 +5219,7 @@
           <p:cNvPr id="106" name="">
             <a:extLst xmlns:a="http://schemas.openxmlformats.org/drawingml/2006/main">
               <a:ext uri="{FF2B5EF4-FFF2-40B4-BE49-F238E27FC236}">
-                <a16:creationId xmlns:a16="http://schemas.microsoft.com/office/drawing/2014/main" id="{20A3C2A0-CDFE-40FD-927D-53421144C7AC}"/>
+                <a16:creationId xmlns:a16="http://schemas.microsoft.com/office/drawing/2014/main" id="{03631FD1-BFB7-4FC2-A4B1-DA45B1CC6F90}"/>
               </a:ext>
             </a:extLst>
           </p:cNvPr>
@@ -5262,7 +5262,7 @@
     </p:spTree>
     <p:extLst>
       <p:ext uri="{BB962C8B-B14F-4D97-AF65-F5344CB8AC3E}">
-        <p14:creationId xmlns:p14="http://schemas.microsoft.com/office/powerpoint/2010/main" val="1408365416"/>
+        <p14:creationId xmlns:p14="http://schemas.microsoft.com/office/powerpoint/2010/main" val="1040557313"/>
       </p:ext>
     </p:extLst>
   </p:cSld>
@@ -5286,7 +5286,7 @@
           <p:cNvPr id="39" name="">
             <a:extLst xmlns:a="http://schemas.openxmlformats.org/drawingml/2006/main">
               <a:ext uri="{FF2B5EF4-FFF2-40B4-BE49-F238E27FC236}">
-                <a16:creationId xmlns:a16="http://schemas.microsoft.com/office/drawing/2014/main" id="{5C33619E-9818-4D62-B8D3-5CFBB271C51A}"/>
+                <a16:creationId xmlns:a16="http://schemas.microsoft.com/office/drawing/2014/main" id="{31A55EBC-BC91-45C3-93DC-1843DEA2274B}"/>
               </a:ext>
             </a:extLst>
           </p:cNvPr>
@@ -5317,7 +5317,7 @@
           <p:cNvPr id="2" name="">
             <a:extLst xmlns:a="http://schemas.openxmlformats.org/drawingml/2006/main">
               <a:ext uri="{FF2B5EF4-FFF2-40B4-BE49-F238E27FC236}">
-                <a16:creationId xmlns:a16="http://schemas.microsoft.com/office/drawing/2014/main" id="{E6492BDF-1674-404B-B665-AD1328CE2435}"/>
+                <a16:creationId xmlns:a16="http://schemas.microsoft.com/office/drawing/2014/main" id="{3A70ABDC-83A8-49DB-A5FF-AD407EEB46B9}"/>
               </a:ext>
             </a:extLst>
           </p:cNvPr>
@@ -5362,7 +5362,7 @@
           <p:cNvPr id="3" name="">
             <a:extLst xmlns:a="http://schemas.openxmlformats.org/drawingml/2006/main">
               <a:ext uri="{FF2B5EF4-FFF2-40B4-BE49-F238E27FC236}">
-                <a16:creationId xmlns:a16="http://schemas.microsoft.com/office/drawing/2014/main" id="{47DFD0F2-D2A3-4E05-AEDC-297B3462E95F}"/>
+                <a16:creationId xmlns:a16="http://schemas.microsoft.com/office/drawing/2014/main" id="{CBA964DA-9BDB-482E-826B-70E0682CEFDF}"/>
               </a:ext>
             </a:extLst>
           </p:cNvPr>
@@ -5407,7 +5407,7 @@
           <p:cNvPr id="4" name="">
             <a:extLst xmlns:a="http://schemas.openxmlformats.org/drawingml/2006/main">
               <a:ext uri="{FF2B5EF4-FFF2-40B4-BE49-F238E27FC236}">
-                <a16:creationId xmlns:a16="http://schemas.microsoft.com/office/drawing/2014/main" id="{8D217E26-EE99-4866-B823-B9EBBD900AE5}"/>
+                <a16:creationId xmlns:a16="http://schemas.microsoft.com/office/drawing/2014/main" id="{6610E310-268D-4254-B7C5-9BE719908616}"/>
               </a:ext>
             </a:extLst>
           </p:cNvPr>
@@ -5452,7 +5452,7 @@
           <p:cNvPr id="5" name="">
             <a:extLst xmlns:a="http://schemas.openxmlformats.org/drawingml/2006/main">
               <a:ext uri="{FF2B5EF4-FFF2-40B4-BE49-F238E27FC236}">
-                <a16:creationId xmlns:a16="http://schemas.microsoft.com/office/drawing/2014/main" id="{4D893A5D-E440-410D-9E31-1FABFEAAAB91}"/>
+                <a16:creationId xmlns:a16="http://schemas.microsoft.com/office/drawing/2014/main" id="{5702EEE9-A748-4654-BC89-8E5D4606A36F}"/>
               </a:ext>
             </a:extLst>
           </p:cNvPr>
@@ -5483,7 +5483,7 @@
           <p:cNvPr id="6" name="">
             <a:extLst xmlns:a="http://schemas.openxmlformats.org/drawingml/2006/main">
               <a:ext uri="{FF2B5EF4-FFF2-40B4-BE49-F238E27FC236}">
-                <a16:creationId xmlns:a16="http://schemas.microsoft.com/office/drawing/2014/main" id="{126E6B04-0E17-40AB-A4DC-ECE91CD53105}"/>
+                <a16:creationId xmlns:a16="http://schemas.microsoft.com/office/drawing/2014/main" id="{49E378EC-A66A-424B-8C75-6A55BF244745}"/>
               </a:ext>
             </a:extLst>
           </p:cNvPr>
@@ -5514,7 +5514,7 @@
           <p:cNvPr id="7" name="">
             <a:extLst xmlns:a="http://schemas.openxmlformats.org/drawingml/2006/main">
               <a:ext uri="{FF2B5EF4-FFF2-40B4-BE49-F238E27FC236}">
-                <a16:creationId xmlns:a16="http://schemas.microsoft.com/office/drawing/2014/main" id="{71AF8E60-8D2E-4618-AF78-07BFED04A8EF}"/>
+                <a16:creationId xmlns:a16="http://schemas.microsoft.com/office/drawing/2014/main" id="{AD80AE37-A542-40D6-AD0B-41D4DAF7ACE3}"/>
               </a:ext>
             </a:extLst>
           </p:cNvPr>
@@ -5559,7 +5559,7 @@
           <p:cNvPr id="8" name="">
             <a:extLst xmlns:a="http://schemas.openxmlformats.org/drawingml/2006/main">
               <a:ext uri="{FF2B5EF4-FFF2-40B4-BE49-F238E27FC236}">
-                <a16:creationId xmlns:a16="http://schemas.microsoft.com/office/drawing/2014/main" id="{7E467C64-0611-4368-A69C-F2F72E789BFC}"/>
+                <a16:creationId xmlns:a16="http://schemas.microsoft.com/office/drawing/2014/main" id="{E2C0FA8C-EBF3-4372-A1A7-5DE5A975F58C}"/>
               </a:ext>
             </a:extLst>
           </p:cNvPr>
@@ -5604,7 +5604,7 @@
           <p:cNvPr id="9" name="">
             <a:extLst xmlns:a="http://schemas.openxmlformats.org/drawingml/2006/main">
               <a:ext uri="{FF2B5EF4-FFF2-40B4-BE49-F238E27FC236}">
-                <a16:creationId xmlns:a16="http://schemas.microsoft.com/office/drawing/2014/main" id="{5822D2B6-70D2-43FD-8DD8-5BA36B5478F8}"/>
+                <a16:creationId xmlns:a16="http://schemas.microsoft.com/office/drawing/2014/main" id="{9D59328D-550F-4242-8C24-18219511CD5E}"/>
               </a:ext>
             </a:extLst>
           </p:cNvPr>
@@ -5635,7 +5635,7 @@
           <p:cNvPr id="10" name="">
             <a:extLst xmlns:a="http://schemas.openxmlformats.org/drawingml/2006/main">
               <a:ext uri="{FF2B5EF4-FFF2-40B4-BE49-F238E27FC236}">
-                <a16:creationId xmlns:a16="http://schemas.microsoft.com/office/drawing/2014/main" id="{83C950C8-8472-4A26-962D-D261FC1067C0}"/>
+                <a16:creationId xmlns:a16="http://schemas.microsoft.com/office/drawing/2014/main" id="{16B16FF4-C340-453D-B923-22DB349B5766}"/>
               </a:ext>
             </a:extLst>
           </p:cNvPr>
@@ -5668,7 +5668,7 @@
           <p:cNvPr id="11" name="">
             <a:extLst xmlns:a="http://schemas.openxmlformats.org/drawingml/2006/main">
               <a:ext uri="{FF2B5EF4-FFF2-40B4-BE49-F238E27FC236}">
-                <a16:creationId xmlns:a16="http://schemas.microsoft.com/office/drawing/2014/main" id="{270A1F1F-3E5A-4D4F-82BC-68774C0BDFD7}"/>
+                <a16:creationId xmlns:a16="http://schemas.microsoft.com/office/drawing/2014/main" id="{D85D85BE-9541-4FA5-88AE-19882E689033}"/>
               </a:ext>
             </a:extLst>
           </p:cNvPr>
@@ -5713,7 +5713,7 @@
           <p:cNvPr id="12" name="">
             <a:extLst xmlns:a="http://schemas.openxmlformats.org/drawingml/2006/main">
               <a:ext uri="{FF2B5EF4-FFF2-40B4-BE49-F238E27FC236}">
-                <a16:creationId xmlns:a16="http://schemas.microsoft.com/office/drawing/2014/main" id="{442D4F76-F6E0-4DC3-BB63-D804E363642A}"/>
+                <a16:creationId xmlns:a16="http://schemas.microsoft.com/office/drawing/2014/main" id="{44C630B0-52EC-4774-8FA4-DC487B2E2035}"/>
               </a:ext>
             </a:extLst>
           </p:cNvPr>
@@ -5746,7 +5746,7 @@
           <p:cNvPr id="13" name="">
             <a:extLst xmlns:a="http://schemas.openxmlformats.org/drawingml/2006/main">
               <a:ext uri="{FF2B5EF4-FFF2-40B4-BE49-F238E27FC236}">
-                <a16:creationId xmlns:a16="http://schemas.microsoft.com/office/drawing/2014/main" id="{253C555E-44E4-48C2-AFE5-D40C3C92FDF4}"/>
+                <a16:creationId xmlns:a16="http://schemas.microsoft.com/office/drawing/2014/main" id="{C6454064-7868-4649-90A4-3CFBF2EAC276}"/>
               </a:ext>
             </a:extLst>
           </p:cNvPr>
@@ -5791,7 +5791,7 @@
           <p:cNvPr id="14" name="">
             <a:extLst xmlns:a="http://schemas.openxmlformats.org/drawingml/2006/main">
               <a:ext uri="{FF2B5EF4-FFF2-40B4-BE49-F238E27FC236}">
-                <a16:creationId xmlns:a16="http://schemas.microsoft.com/office/drawing/2014/main" id="{3789C3BA-D3E1-429E-8F69-437B734B559A}"/>
+                <a16:creationId xmlns:a16="http://schemas.microsoft.com/office/drawing/2014/main" id="{42CD7492-8288-4E93-94C1-DABA8121E0DD}"/>
               </a:ext>
             </a:extLst>
           </p:cNvPr>
@@ -5836,7 +5836,7 @@
           <p:cNvPr id="15" name="">
             <a:extLst xmlns:a="http://schemas.openxmlformats.org/drawingml/2006/main">
               <a:ext uri="{FF2B5EF4-FFF2-40B4-BE49-F238E27FC236}">
-                <a16:creationId xmlns:a16="http://schemas.microsoft.com/office/drawing/2014/main" id="{E12567C9-E7C7-4639-974A-4B062E3E5D34}"/>
+                <a16:creationId xmlns:a16="http://schemas.microsoft.com/office/drawing/2014/main" id="{EE65595B-6051-4465-B82D-C634EEF7AF07}"/>
               </a:ext>
             </a:extLst>
           </p:cNvPr>
@@ -5869,7 +5869,7 @@
           <p:cNvPr id="16" name="">
             <a:extLst xmlns:a="http://schemas.openxmlformats.org/drawingml/2006/main">
               <a:ext uri="{FF2B5EF4-FFF2-40B4-BE49-F238E27FC236}">
-                <a16:creationId xmlns:a16="http://schemas.microsoft.com/office/drawing/2014/main" id="{B3D46BAA-DABA-4E48-8BF5-4193EE7E2341}"/>
+                <a16:creationId xmlns:a16="http://schemas.microsoft.com/office/drawing/2014/main" id="{28BF34A4-C71A-414B-883F-EB7F5752EF38}"/>
               </a:ext>
             </a:extLst>
           </p:cNvPr>
@@ -5914,7 +5914,7 @@
           <p:cNvPr id="17" name="">
             <a:extLst xmlns:a="http://schemas.openxmlformats.org/drawingml/2006/main">
               <a:ext uri="{FF2B5EF4-FFF2-40B4-BE49-F238E27FC236}">
-                <a16:creationId xmlns:a16="http://schemas.microsoft.com/office/drawing/2014/main" id="{B584B46A-1229-4723-9BA5-4C00F6FE4813}"/>
+                <a16:creationId xmlns:a16="http://schemas.microsoft.com/office/drawing/2014/main" id="{AC96A599-5C22-41F3-BCBA-D1C043405FEC}"/>
               </a:ext>
             </a:extLst>
           </p:cNvPr>
@@ -5947,7 +5947,7 @@
           <p:cNvPr id="18" name="">
             <a:extLst xmlns:a="http://schemas.openxmlformats.org/drawingml/2006/main">
               <a:ext uri="{FF2B5EF4-FFF2-40B4-BE49-F238E27FC236}">
-                <a16:creationId xmlns:a16="http://schemas.microsoft.com/office/drawing/2014/main" id="{EADB7F5D-C1B2-49BA-BF43-09FA4CE73334}"/>
+                <a16:creationId xmlns:a16="http://schemas.microsoft.com/office/drawing/2014/main" id="{720CFF36-9A16-4EA6-B38A-6D94F5CB303E}"/>
               </a:ext>
             </a:extLst>
           </p:cNvPr>
@@ -5992,7 +5992,7 @@
           <p:cNvPr id="19" name="">
             <a:extLst xmlns:a="http://schemas.openxmlformats.org/drawingml/2006/main">
               <a:ext uri="{FF2B5EF4-FFF2-40B4-BE49-F238E27FC236}">
-                <a16:creationId xmlns:a16="http://schemas.microsoft.com/office/drawing/2014/main" id="{8B7FDBE1-3FC4-45AD-AAB1-475EA175CC7F}"/>
+                <a16:creationId xmlns:a16="http://schemas.microsoft.com/office/drawing/2014/main" id="{29586C50-54B1-43F7-9CC9-405999B2FA15}"/>
               </a:ext>
             </a:extLst>
           </p:cNvPr>
@@ -6037,7 +6037,7 @@
           <p:cNvPr id="20" name="">
             <a:extLst xmlns:a="http://schemas.openxmlformats.org/drawingml/2006/main">
               <a:ext uri="{FF2B5EF4-FFF2-40B4-BE49-F238E27FC236}">
-                <a16:creationId xmlns:a16="http://schemas.microsoft.com/office/drawing/2014/main" id="{7D520152-BEC3-45B8-B3E0-13308E24A7BF}"/>
+                <a16:creationId xmlns:a16="http://schemas.microsoft.com/office/drawing/2014/main" id="{476EEA28-92FB-4F4E-8593-A96C11631FF1}"/>
               </a:ext>
             </a:extLst>
           </p:cNvPr>
@@ -6070,7 +6070,7 @@
           <p:cNvPr id="21" name="">
             <a:extLst xmlns:a="http://schemas.openxmlformats.org/drawingml/2006/main">
               <a:ext uri="{FF2B5EF4-FFF2-40B4-BE49-F238E27FC236}">
-                <a16:creationId xmlns:a16="http://schemas.microsoft.com/office/drawing/2014/main" id="{01FCAF41-B5FB-4CB1-931C-A8A0E08211FE}"/>
+                <a16:creationId xmlns:a16="http://schemas.microsoft.com/office/drawing/2014/main" id="{1762392E-191A-4A20-AC64-A52F604868A2}"/>
               </a:ext>
             </a:extLst>
           </p:cNvPr>
@@ -6115,7 +6115,7 @@
           <p:cNvPr id="22" name="">
             <a:extLst xmlns:a="http://schemas.openxmlformats.org/drawingml/2006/main">
               <a:ext uri="{FF2B5EF4-FFF2-40B4-BE49-F238E27FC236}">
-                <a16:creationId xmlns:a16="http://schemas.microsoft.com/office/drawing/2014/main" id="{444E4C19-3995-4E83-900C-82EE9AD9641C}"/>
+                <a16:creationId xmlns:a16="http://schemas.microsoft.com/office/drawing/2014/main" id="{E74BE395-3591-4776-BC33-F89E88E06110}"/>
               </a:ext>
             </a:extLst>
           </p:cNvPr>
@@ -6148,7 +6148,7 @@
           <p:cNvPr id="23" name="">
             <a:extLst xmlns:a="http://schemas.openxmlformats.org/drawingml/2006/main">
               <a:ext uri="{FF2B5EF4-FFF2-40B4-BE49-F238E27FC236}">
-                <a16:creationId xmlns:a16="http://schemas.microsoft.com/office/drawing/2014/main" id="{EB014EE7-86CD-477F-A34B-0F351AC492F2}"/>
+                <a16:creationId xmlns:a16="http://schemas.microsoft.com/office/drawing/2014/main" id="{2C903E8E-8AA0-43AB-B816-4C0C774FFB02}"/>
               </a:ext>
             </a:extLst>
           </p:cNvPr>
@@ -6193,7 +6193,7 @@
           <p:cNvPr id="24" name="">
             <a:extLst xmlns:a="http://schemas.openxmlformats.org/drawingml/2006/main">
               <a:ext uri="{FF2B5EF4-FFF2-40B4-BE49-F238E27FC236}">
-                <a16:creationId xmlns:a16="http://schemas.microsoft.com/office/drawing/2014/main" id="{481F0525-2A5F-479E-921D-962D538875B2}"/>
+                <a16:creationId xmlns:a16="http://schemas.microsoft.com/office/drawing/2014/main" id="{7A3796E1-FA25-45B5-8505-F6FB763D6909}"/>
               </a:ext>
             </a:extLst>
           </p:cNvPr>
@@ -6238,7 +6238,7 @@
           <p:cNvPr id="25" name="">
             <a:extLst xmlns:a="http://schemas.openxmlformats.org/drawingml/2006/main">
               <a:ext uri="{FF2B5EF4-FFF2-40B4-BE49-F238E27FC236}">
-                <a16:creationId xmlns:a16="http://schemas.microsoft.com/office/drawing/2014/main" id="{6CA347CC-45B3-4BDB-A199-745BDBDE6937}"/>
+                <a16:creationId xmlns:a16="http://schemas.microsoft.com/office/drawing/2014/main" id="{FD9A57F1-8BE4-4F20-9F89-85C4EA3B4721}"/>
               </a:ext>
             </a:extLst>
           </p:cNvPr>
@@ -6271,7 +6271,7 @@
           <p:cNvPr id="26" name="">
             <a:extLst xmlns:a="http://schemas.openxmlformats.org/drawingml/2006/main">
               <a:ext uri="{FF2B5EF4-FFF2-40B4-BE49-F238E27FC236}">
-                <a16:creationId xmlns:a16="http://schemas.microsoft.com/office/drawing/2014/main" id="{1F977942-230D-43C5-A421-C39B2D80BF5B}"/>
+                <a16:creationId xmlns:a16="http://schemas.microsoft.com/office/drawing/2014/main" id="{2B16FFB9-97D5-4222-9C32-4E67F6ADAE6B}"/>
               </a:ext>
             </a:extLst>
           </p:cNvPr>
@@ -6316,7 +6316,7 @@
           <p:cNvPr id="27" name="">
             <a:extLst xmlns:a="http://schemas.openxmlformats.org/drawingml/2006/main">
               <a:ext uri="{FF2B5EF4-FFF2-40B4-BE49-F238E27FC236}">
-                <a16:creationId xmlns:a16="http://schemas.microsoft.com/office/drawing/2014/main" id="{35D333E5-5BD2-474E-B2C0-A4B6C1583010}"/>
+                <a16:creationId xmlns:a16="http://schemas.microsoft.com/office/drawing/2014/main" id="{DE4ED411-8931-44F4-BE85-21A634A7F36B}"/>
               </a:ext>
             </a:extLst>
           </p:cNvPr>
@@ -6349,7 +6349,7 @@
           <p:cNvPr id="28" name="">
             <a:extLst xmlns:a="http://schemas.openxmlformats.org/drawingml/2006/main">
               <a:ext uri="{FF2B5EF4-FFF2-40B4-BE49-F238E27FC236}">
-                <a16:creationId xmlns:a16="http://schemas.microsoft.com/office/drawing/2014/main" id="{246DAA16-D03C-40FB-A457-E1DF4D609CD5}"/>
+                <a16:creationId xmlns:a16="http://schemas.microsoft.com/office/drawing/2014/main" id="{56867862-404D-4D13-89CE-6FF8BEBCD687}"/>
               </a:ext>
             </a:extLst>
           </p:cNvPr>
@@ -6394,7 +6394,7 @@
           <p:cNvPr id="29" name="">
             <a:extLst xmlns:a="http://schemas.openxmlformats.org/drawingml/2006/main">
               <a:ext uri="{FF2B5EF4-FFF2-40B4-BE49-F238E27FC236}">
-                <a16:creationId xmlns:a16="http://schemas.microsoft.com/office/drawing/2014/main" id="{A93C28A9-D4A6-490A-BEC8-9580C6F3ACAD}"/>
+                <a16:creationId xmlns:a16="http://schemas.microsoft.com/office/drawing/2014/main" id="{0B6B8775-14A8-41FC-BFFB-DBB79D85CF51}"/>
               </a:ext>
             </a:extLst>
           </p:cNvPr>
@@ -6439,7 +6439,7 @@
           <p:cNvPr id="30" name="">
             <a:extLst xmlns:a="http://schemas.openxmlformats.org/drawingml/2006/main">
               <a:ext uri="{FF2B5EF4-FFF2-40B4-BE49-F238E27FC236}">
-                <a16:creationId xmlns:a16="http://schemas.microsoft.com/office/drawing/2014/main" id="{1F270BC4-6A9C-4EB4-929D-BCD2451C5818}"/>
+                <a16:creationId xmlns:a16="http://schemas.microsoft.com/office/drawing/2014/main" id="{A4DD0B6A-A9E0-4728-B597-5014137AECC4}"/>
               </a:ext>
             </a:extLst>
           </p:cNvPr>
@@ -6474,7 +6474,7 @@
           <p:cNvPr id="31" name="">
             <a:extLst xmlns:a="http://schemas.openxmlformats.org/drawingml/2006/main">
               <a:ext uri="{FF2B5EF4-FFF2-40B4-BE49-F238E27FC236}">
-                <a16:creationId xmlns:a16="http://schemas.microsoft.com/office/drawing/2014/main" id="{182A1512-4592-4F4F-9320-1A4F79C98E01}"/>
+                <a16:creationId xmlns:a16="http://schemas.microsoft.com/office/drawing/2014/main" id="{C7159FDF-F8D2-45E3-805C-48B1BF505DE1}"/>
               </a:ext>
             </a:extLst>
           </p:cNvPr>
@@ -6505,7 +6505,7 @@
           <p:cNvPr id="32" name="">
             <a:extLst xmlns:a="http://schemas.openxmlformats.org/drawingml/2006/main">
               <a:ext uri="{FF2B5EF4-FFF2-40B4-BE49-F238E27FC236}">
-                <a16:creationId xmlns:a16="http://schemas.microsoft.com/office/drawing/2014/main" id="{04654988-86AC-40E8-86A0-5DE8185071FE}"/>
+                <a16:creationId xmlns:a16="http://schemas.microsoft.com/office/drawing/2014/main" id="{4328556A-99C1-4028-88F2-0D5FDC54539E}"/>
               </a:ext>
             </a:extLst>
           </p:cNvPr>
@@ -6550,7 +6550,7 @@
           <p:cNvPr id="33" name="">
             <a:extLst xmlns:a="http://schemas.openxmlformats.org/drawingml/2006/main">
               <a:ext uri="{FF2B5EF4-FFF2-40B4-BE49-F238E27FC236}">
-                <a16:creationId xmlns:a16="http://schemas.microsoft.com/office/drawing/2014/main" id="{E7F7EFB7-7ED6-4F54-9455-28C35E616C7E}"/>
+                <a16:creationId xmlns:a16="http://schemas.microsoft.com/office/drawing/2014/main" id="{1FBDE793-4952-425B-987F-2380D2CCD24D}"/>
               </a:ext>
             </a:extLst>
           </p:cNvPr>
@@ -6595,7 +6595,7 @@
           <p:cNvPr id="34" name="">
             <a:extLst xmlns:a="http://schemas.openxmlformats.org/drawingml/2006/main">
               <a:ext uri="{FF2B5EF4-FFF2-40B4-BE49-F238E27FC236}">
-                <a16:creationId xmlns:a16="http://schemas.microsoft.com/office/drawing/2014/main" id="{B3CC61DE-FB0D-45F0-8229-243F39A6FB26}"/>
+                <a16:creationId xmlns:a16="http://schemas.microsoft.com/office/drawing/2014/main" id="{8CFDDDC3-36DA-431B-A299-7E7AD00BDF30}"/>
               </a:ext>
             </a:extLst>
           </p:cNvPr>
@@ -6630,7 +6630,7 @@
           <p:cNvPr id="35" name="">
             <a:extLst xmlns:a="http://schemas.openxmlformats.org/drawingml/2006/main">
               <a:ext uri="{FF2B5EF4-FFF2-40B4-BE49-F238E27FC236}">
-                <a16:creationId xmlns:a16="http://schemas.microsoft.com/office/drawing/2014/main" id="{0F1D1C66-81FF-4CB1-9640-7191F055E6F5}"/>
+                <a16:creationId xmlns:a16="http://schemas.microsoft.com/office/drawing/2014/main" id="{AEB629FB-4A40-45D2-8A5A-544A066A9E17}"/>
               </a:ext>
             </a:extLst>
           </p:cNvPr>
@@ -6661,7 +6661,7 @@
           <p:cNvPr id="36" name="">
             <a:extLst xmlns:a="http://schemas.openxmlformats.org/drawingml/2006/main">
               <a:ext uri="{FF2B5EF4-FFF2-40B4-BE49-F238E27FC236}">
-                <a16:creationId xmlns:a16="http://schemas.microsoft.com/office/drawing/2014/main" id="{CA792C11-372D-4FF1-8107-9BED8A6178C1}"/>
+                <a16:creationId xmlns:a16="http://schemas.microsoft.com/office/drawing/2014/main" id="{700103D7-FFEF-4217-A168-73278984EA06}"/>
               </a:ext>
             </a:extLst>
           </p:cNvPr>
@@ -6706,7 +6706,7 @@
           <p:cNvPr id="37" name="">
             <a:extLst xmlns:a="http://schemas.openxmlformats.org/drawingml/2006/main">
               <a:ext uri="{FF2B5EF4-FFF2-40B4-BE49-F238E27FC236}">
-                <a16:creationId xmlns:a16="http://schemas.microsoft.com/office/drawing/2014/main" id="{C1FC5566-2195-4624-90D2-10B7C496AD77}"/>
+                <a16:creationId xmlns:a16="http://schemas.microsoft.com/office/drawing/2014/main" id="{7052DBB0-1358-41FE-84E2-675C8E7BAFBA}"/>
               </a:ext>
             </a:extLst>
           </p:cNvPr>
@@ -6751,7 +6751,7 @@
           <p:cNvPr id="38" name="">
             <a:extLst xmlns:a="http://schemas.openxmlformats.org/drawingml/2006/main">
               <a:ext uri="{FF2B5EF4-FFF2-40B4-BE49-F238E27FC236}">
-                <a16:creationId xmlns:a16="http://schemas.microsoft.com/office/drawing/2014/main" id="{26D2A7DC-0A8A-42A1-A6FD-E059743BDBD9}"/>
+                <a16:creationId xmlns:a16="http://schemas.microsoft.com/office/drawing/2014/main" id="{E274D109-417D-4147-A02E-63A574C65ED2}"/>
               </a:ext>
             </a:extLst>
           </p:cNvPr>
@@ -6794,7 +6794,7 @@
     </p:spTree>
     <p:extLst>
       <p:ext uri="{BB962C8B-B14F-4D97-AF65-F5344CB8AC3E}">
-        <p14:creationId xmlns:p14="http://schemas.microsoft.com/office/powerpoint/2010/main" val="1070505060"/>
+        <p14:creationId xmlns:p14="http://schemas.microsoft.com/office/powerpoint/2010/main" val="2117959744"/>
       </p:ext>
     </p:extLst>
   </p:cSld>
@@ -6818,7 +6818,7 @@
           <p:cNvPr id="24" name="">
             <a:extLst xmlns:a="http://schemas.openxmlformats.org/drawingml/2006/main">
               <a:ext uri="{FF2B5EF4-FFF2-40B4-BE49-F238E27FC236}">
-                <a16:creationId xmlns:a16="http://schemas.microsoft.com/office/drawing/2014/main" id="{3A9269AD-284E-4C23-884F-E5AB4B7A2792}"/>
+                <a16:creationId xmlns:a16="http://schemas.microsoft.com/office/drawing/2014/main" id="{C88CADEF-A31F-4874-9DC3-40CC64ACC1A8}"/>
               </a:ext>
             </a:extLst>
           </p:cNvPr>
@@ -6849,7 +6849,7 @@
           <p:cNvPr id="2" name="">
             <a:extLst xmlns:a="http://schemas.openxmlformats.org/drawingml/2006/main">
               <a:ext uri="{FF2B5EF4-FFF2-40B4-BE49-F238E27FC236}">
-                <a16:creationId xmlns:a16="http://schemas.microsoft.com/office/drawing/2014/main" id="{F6977E88-8290-44A4-BB8F-D6CEDE42E967}"/>
+                <a16:creationId xmlns:a16="http://schemas.microsoft.com/office/drawing/2014/main" id="{30691857-C683-45F0-AD83-221AFECA983F}"/>
               </a:ext>
             </a:extLst>
           </p:cNvPr>
@@ -6880,7 +6880,7 @@
           <p:cNvPr id="3" name="">
             <a:extLst xmlns:a="http://schemas.openxmlformats.org/drawingml/2006/main">
               <a:ext uri="{FF2B5EF4-FFF2-40B4-BE49-F238E27FC236}">
-                <a16:creationId xmlns:a16="http://schemas.microsoft.com/office/drawing/2014/main" id="{9CDCC95D-F8C1-4B79-A96C-087614ED1BDB}"/>
+                <a16:creationId xmlns:a16="http://schemas.microsoft.com/office/drawing/2014/main" id="{AC871F71-42AA-4B99-822B-61B9DFEC8F9A}"/>
               </a:ext>
             </a:extLst>
           </p:cNvPr>
@@ -6925,7 +6925,7 @@
           <p:cNvPr id="4" name="">
             <a:extLst xmlns:a="http://schemas.openxmlformats.org/drawingml/2006/main">
               <a:ext uri="{FF2B5EF4-FFF2-40B4-BE49-F238E27FC236}">
-                <a16:creationId xmlns:a16="http://schemas.microsoft.com/office/drawing/2014/main" id="{4C382780-B389-4BA9-BD39-ABF50C516CDF}"/>
+                <a16:creationId xmlns:a16="http://schemas.microsoft.com/office/drawing/2014/main" id="{7152C8B2-AAB7-42E8-B38F-3B9AE4A4EA64}"/>
               </a:ext>
             </a:extLst>
           </p:cNvPr>
@@ -6970,7 +6970,7 @@
           <p:cNvPr id="5" name="">
             <a:extLst xmlns:a="http://schemas.openxmlformats.org/drawingml/2006/main">
               <a:ext uri="{FF2B5EF4-FFF2-40B4-BE49-F238E27FC236}">
-                <a16:creationId xmlns:a16="http://schemas.microsoft.com/office/drawing/2014/main" id="{3F7A59F0-8089-41AB-8710-B7EF4D9ED635}"/>
+                <a16:creationId xmlns:a16="http://schemas.microsoft.com/office/drawing/2014/main" id="{6B2D1252-98A7-401E-9F3E-3C89C9D6B670}"/>
               </a:ext>
             </a:extLst>
           </p:cNvPr>
@@ -7001,7 +7001,7 @@
           <p:cNvPr id="6" name="">
             <a:extLst xmlns:a="http://schemas.openxmlformats.org/drawingml/2006/main">
               <a:ext uri="{FF2B5EF4-FFF2-40B4-BE49-F238E27FC236}">
-                <a16:creationId xmlns:a16="http://schemas.microsoft.com/office/drawing/2014/main" id="{B1CACBDC-7F09-4C17-8793-9C3D6A2C21D9}"/>
+                <a16:creationId xmlns:a16="http://schemas.microsoft.com/office/drawing/2014/main" id="{467D7612-6E61-4919-AC96-6EF18BF1C7DD}"/>
               </a:ext>
             </a:extLst>
           </p:cNvPr>
@@ -7046,7 +7046,7 @@
           <p:cNvPr id="7" name="">
             <a:extLst xmlns:a="http://schemas.openxmlformats.org/drawingml/2006/main">
               <a:ext uri="{FF2B5EF4-FFF2-40B4-BE49-F238E27FC236}">
-                <a16:creationId xmlns:a16="http://schemas.microsoft.com/office/drawing/2014/main" id="{47A1DB5A-3C55-427B-914D-7DDAB0428ACA}"/>
+                <a16:creationId xmlns:a16="http://schemas.microsoft.com/office/drawing/2014/main" id="{C694D853-E4D8-4C80-A704-87ED1A33068D}"/>
               </a:ext>
             </a:extLst>
           </p:cNvPr>
@@ -7091,7 +7091,7 @@
           <p:cNvPr id="8" name="">
             <a:extLst xmlns:a="http://schemas.openxmlformats.org/drawingml/2006/main">
               <a:ext uri="{FF2B5EF4-FFF2-40B4-BE49-F238E27FC236}">
-                <a16:creationId xmlns:a16="http://schemas.microsoft.com/office/drawing/2014/main" id="{318B9B65-A31A-4A45-8E11-82C92A893215}"/>
+                <a16:creationId xmlns:a16="http://schemas.microsoft.com/office/drawing/2014/main" id="{F7353BA2-7A85-4184-8979-3377E41A9438}"/>
               </a:ext>
             </a:extLst>
           </p:cNvPr>
@@ -7126,7 +7126,7 @@
           <p:cNvPr id="9" name="">
             <a:extLst xmlns:a="http://schemas.openxmlformats.org/drawingml/2006/main">
               <a:ext uri="{FF2B5EF4-FFF2-40B4-BE49-F238E27FC236}">
-                <a16:creationId xmlns:a16="http://schemas.microsoft.com/office/drawing/2014/main" id="{949366DC-1390-42D7-9CDA-C9BA0201ED32}"/>
+                <a16:creationId xmlns:a16="http://schemas.microsoft.com/office/drawing/2014/main" id="{BA07DE4C-2AA1-4CDE-A490-28B5FCF853EE}"/>
               </a:ext>
             </a:extLst>
           </p:cNvPr>
@@ -7157,7 +7157,7 @@
           <p:cNvPr id="10" name="">
             <a:extLst xmlns:a="http://schemas.openxmlformats.org/drawingml/2006/main">
               <a:ext uri="{FF2B5EF4-FFF2-40B4-BE49-F238E27FC236}">
-                <a16:creationId xmlns:a16="http://schemas.microsoft.com/office/drawing/2014/main" id="{82330D2F-2AA0-4B59-B40F-53B802C555CD}"/>
+                <a16:creationId xmlns:a16="http://schemas.microsoft.com/office/drawing/2014/main" id="{7A7DF146-61E5-49B9-8F58-EABFA68DFBB5}"/>
               </a:ext>
             </a:extLst>
           </p:cNvPr>
@@ -7202,7 +7202,7 @@
           <p:cNvPr id="11" name="">
             <a:extLst xmlns:a="http://schemas.openxmlformats.org/drawingml/2006/main">
               <a:ext uri="{FF2B5EF4-FFF2-40B4-BE49-F238E27FC236}">
-                <a16:creationId xmlns:a16="http://schemas.microsoft.com/office/drawing/2014/main" id="{53A21063-5288-43D3-B641-1C89413AB370}"/>
+                <a16:creationId xmlns:a16="http://schemas.microsoft.com/office/drawing/2014/main" id="{2863960D-28B3-4B80-AB4D-ECCE64EEB954}"/>
               </a:ext>
             </a:extLst>
           </p:cNvPr>
@@ -7247,7 +7247,7 @@
           <p:cNvPr id="12" name="">
             <a:extLst xmlns:a="http://schemas.openxmlformats.org/drawingml/2006/main">
               <a:ext uri="{FF2B5EF4-FFF2-40B4-BE49-F238E27FC236}">
-                <a16:creationId xmlns:a16="http://schemas.microsoft.com/office/drawing/2014/main" id="{CA3EF5E3-D368-40C5-B66C-510DA46781A2}"/>
+                <a16:creationId xmlns:a16="http://schemas.microsoft.com/office/drawing/2014/main" id="{C3C54944-3C6D-456A-9597-5AC259BC645B}"/>
               </a:ext>
             </a:extLst>
           </p:cNvPr>
@@ -7282,7 +7282,7 @@
           <p:cNvPr id="13" name="">
             <a:extLst xmlns:a="http://schemas.openxmlformats.org/drawingml/2006/main">
               <a:ext uri="{FF2B5EF4-FFF2-40B4-BE49-F238E27FC236}">
-                <a16:creationId xmlns:a16="http://schemas.microsoft.com/office/drawing/2014/main" id="{248733A6-F5A7-4436-A47E-3FCC384E84D9}"/>
+                <a16:creationId xmlns:a16="http://schemas.microsoft.com/office/drawing/2014/main" id="{BCB0545E-851C-4E64-BA6D-1B4F1FFB6700}"/>
               </a:ext>
             </a:extLst>
           </p:cNvPr>
@@ -7313,7 +7313,7 @@
           <p:cNvPr id="14" name="">
             <a:extLst xmlns:a="http://schemas.openxmlformats.org/drawingml/2006/main">
               <a:ext uri="{FF2B5EF4-FFF2-40B4-BE49-F238E27FC236}">
-                <a16:creationId xmlns:a16="http://schemas.microsoft.com/office/drawing/2014/main" id="{A7F2A98C-EE6E-45CC-B438-4473CFF49AC3}"/>
+                <a16:creationId xmlns:a16="http://schemas.microsoft.com/office/drawing/2014/main" id="{46E098B0-042F-4C6A-A5BF-84BB5D6454B6}"/>
               </a:ext>
             </a:extLst>
           </p:cNvPr>
@@ -7358,7 +7358,7 @@
           <p:cNvPr id="15" name="">
             <a:extLst xmlns:a="http://schemas.openxmlformats.org/drawingml/2006/main">
               <a:ext uri="{FF2B5EF4-FFF2-40B4-BE49-F238E27FC236}">
-                <a16:creationId xmlns:a16="http://schemas.microsoft.com/office/drawing/2014/main" id="{453023D7-C9BF-43E9-9216-FE6B23379226}"/>
+                <a16:creationId xmlns:a16="http://schemas.microsoft.com/office/drawing/2014/main" id="{4A47DDE0-1FBD-484C-A88B-E9FF04F7A90F}"/>
               </a:ext>
             </a:extLst>
           </p:cNvPr>
@@ -7403,7 +7403,7 @@
           <p:cNvPr id="16" name="">
             <a:extLst xmlns:a="http://schemas.openxmlformats.org/drawingml/2006/main">
               <a:ext uri="{FF2B5EF4-FFF2-40B4-BE49-F238E27FC236}">
-                <a16:creationId xmlns:a16="http://schemas.microsoft.com/office/drawing/2014/main" id="{1C869AE2-68EA-49C1-8B6E-B57792EABE11}"/>
+                <a16:creationId xmlns:a16="http://schemas.microsoft.com/office/drawing/2014/main" id="{D376F8E6-A18B-43ED-9069-904E0F46544D}"/>
               </a:ext>
             </a:extLst>
           </p:cNvPr>
@@ -7438,7 +7438,7 @@
           <p:cNvPr id="17" name="">
             <a:extLst xmlns:a="http://schemas.openxmlformats.org/drawingml/2006/main">
               <a:ext uri="{FF2B5EF4-FFF2-40B4-BE49-F238E27FC236}">
-                <a16:creationId xmlns:a16="http://schemas.microsoft.com/office/drawing/2014/main" id="{5820C644-FC39-45FB-A688-5D883C5501E6}"/>
+                <a16:creationId xmlns:a16="http://schemas.microsoft.com/office/drawing/2014/main" id="{2A5B0233-26C2-4B73-9F9F-7703D2F33F8F}"/>
               </a:ext>
             </a:extLst>
           </p:cNvPr>
@@ -7469,7 +7469,7 @@
           <p:cNvPr id="18" name="">
             <a:extLst xmlns:a="http://schemas.openxmlformats.org/drawingml/2006/main">
               <a:ext uri="{FF2B5EF4-FFF2-40B4-BE49-F238E27FC236}">
-                <a16:creationId xmlns:a16="http://schemas.microsoft.com/office/drawing/2014/main" id="{0C22F056-AACD-4063-83C2-E0471F3A17E9}"/>
+                <a16:creationId xmlns:a16="http://schemas.microsoft.com/office/drawing/2014/main" id="{61C676ED-81F2-48E3-84C3-EC7E7FC64653}"/>
               </a:ext>
             </a:extLst>
           </p:cNvPr>
@@ -7514,7 +7514,7 @@
           <p:cNvPr id="19" name="">
             <a:extLst xmlns:a="http://schemas.openxmlformats.org/drawingml/2006/main">
               <a:ext uri="{FF2B5EF4-FFF2-40B4-BE49-F238E27FC236}">
-                <a16:creationId xmlns:a16="http://schemas.microsoft.com/office/drawing/2014/main" id="{64F41F9F-A6FA-45A8-B2F3-2C02D1719824}"/>
+                <a16:creationId xmlns:a16="http://schemas.microsoft.com/office/drawing/2014/main" id="{C696E365-E03B-410C-925D-3EBA2243F616}"/>
               </a:ext>
             </a:extLst>
           </p:cNvPr>
@@ -7559,7 +7559,7 @@
           <p:cNvPr id="20" name="">
             <a:extLst xmlns:a="http://schemas.openxmlformats.org/drawingml/2006/main">
               <a:ext uri="{FF2B5EF4-FFF2-40B4-BE49-F238E27FC236}">
-                <a16:creationId xmlns:a16="http://schemas.microsoft.com/office/drawing/2014/main" id="{3F13AF5C-E759-4D26-8BDF-CD039A476AC1}"/>
+                <a16:creationId xmlns:a16="http://schemas.microsoft.com/office/drawing/2014/main" id="{21DA808B-67F8-4D4C-A17E-35624FD23BC6}"/>
               </a:ext>
             </a:extLst>
           </p:cNvPr>
@@ -7590,7 +7590,7 @@
           <p:cNvPr id="21" name="">
             <a:extLst xmlns:a="http://schemas.openxmlformats.org/drawingml/2006/main">
               <a:ext uri="{FF2B5EF4-FFF2-40B4-BE49-F238E27FC236}">
-                <a16:creationId xmlns:a16="http://schemas.microsoft.com/office/drawing/2014/main" id="{54D5B5E5-AE73-4A5A-8C77-C72AD94484A6}"/>
+                <a16:creationId xmlns:a16="http://schemas.microsoft.com/office/drawing/2014/main" id="{4841914D-870A-4267-8448-9B89A54FB971}"/>
               </a:ext>
             </a:extLst>
           </p:cNvPr>
@@ -7621,7 +7621,7 @@
           <p:cNvPr id="22" name="">
             <a:extLst xmlns:a="http://schemas.openxmlformats.org/drawingml/2006/main">
               <a:ext uri="{FF2B5EF4-FFF2-40B4-BE49-F238E27FC236}">
-                <a16:creationId xmlns:a16="http://schemas.microsoft.com/office/drawing/2014/main" id="{48AA62ED-A891-4712-81A3-ED632D234D1C}"/>
+                <a16:creationId xmlns:a16="http://schemas.microsoft.com/office/drawing/2014/main" id="{6361FB18-2103-478A-9180-4AA79C9D4463}"/>
               </a:ext>
             </a:extLst>
           </p:cNvPr>
@@ -7666,7 +7666,7 @@
           <p:cNvPr id="23" name="">
             <a:extLst xmlns:a="http://schemas.openxmlformats.org/drawingml/2006/main">
               <a:ext uri="{FF2B5EF4-FFF2-40B4-BE49-F238E27FC236}">
-                <a16:creationId xmlns:a16="http://schemas.microsoft.com/office/drawing/2014/main" id="{E00DAB72-3C7F-40C5-8F20-FE7A7A5601A7}"/>
+                <a16:creationId xmlns:a16="http://schemas.microsoft.com/office/drawing/2014/main" id="{B8796F2A-D628-42C0-929C-635270555418}"/>
               </a:ext>
             </a:extLst>
           </p:cNvPr>
@@ -7709,7 +7709,7 @@
     </p:spTree>
     <p:extLst>
       <p:ext uri="{BB962C8B-B14F-4D97-AF65-F5344CB8AC3E}">
-        <p14:creationId xmlns:p14="http://schemas.microsoft.com/office/powerpoint/2010/main" val="1100082777"/>
+        <p14:creationId xmlns:p14="http://schemas.microsoft.com/office/powerpoint/2010/main" val="1393304128"/>
       </p:ext>
     </p:extLst>
   </p:cSld>
@@ -7733,7 +7733,7 @@
           <p:cNvPr id="41" name="">
             <a:extLst xmlns:a="http://schemas.openxmlformats.org/drawingml/2006/main">
               <a:ext uri="{FF2B5EF4-FFF2-40B4-BE49-F238E27FC236}">
-                <a16:creationId xmlns:a16="http://schemas.microsoft.com/office/drawing/2014/main" id="{C825F515-BBCE-45AF-8CB2-BB426EFC9752}"/>
+                <a16:creationId xmlns:a16="http://schemas.microsoft.com/office/drawing/2014/main" id="{722D2183-BCBE-46B8-8F3A-EDEF45EF5927}"/>
               </a:ext>
             </a:extLst>
           </p:cNvPr>
@@ -7764,7 +7764,7 @@
           <p:cNvPr id="2" name="">
             <a:extLst xmlns:a="http://schemas.openxmlformats.org/drawingml/2006/main">
               <a:ext uri="{FF2B5EF4-FFF2-40B4-BE49-F238E27FC236}">
-                <a16:creationId xmlns:a16="http://schemas.microsoft.com/office/drawing/2014/main" id="{E3D323C7-9CB2-4997-90AB-2706E4FB20BB}"/>
+                <a16:creationId xmlns:a16="http://schemas.microsoft.com/office/drawing/2014/main" id="{10054AEB-614A-4BCF-B104-D5592687466A}"/>
               </a:ext>
             </a:extLst>
           </p:cNvPr>
@@ -7809,7 +7809,7 @@
           <p:cNvPr id="3" name="">
             <a:extLst xmlns:a="http://schemas.openxmlformats.org/drawingml/2006/main">
               <a:ext uri="{FF2B5EF4-FFF2-40B4-BE49-F238E27FC236}">
-                <a16:creationId xmlns:a16="http://schemas.microsoft.com/office/drawing/2014/main" id="{20373439-C34F-40F4-94EB-311ECFD5B174}"/>
+                <a16:creationId xmlns:a16="http://schemas.microsoft.com/office/drawing/2014/main" id="{E007CE29-85AC-4F7D-955F-0B69DDCF4109}"/>
               </a:ext>
             </a:extLst>
           </p:cNvPr>
@@ -7854,7 +7854,7 @@
           <p:cNvPr id="4" name="">
             <a:extLst xmlns:a="http://schemas.openxmlformats.org/drawingml/2006/main">
               <a:ext uri="{FF2B5EF4-FFF2-40B4-BE49-F238E27FC236}">
-                <a16:creationId xmlns:a16="http://schemas.microsoft.com/office/drawing/2014/main" id="{7BC1B045-D9C8-474D-AF4C-022AC7B4E9E6}"/>
+                <a16:creationId xmlns:a16="http://schemas.microsoft.com/office/drawing/2014/main" id="{EBF9EE78-BA8C-4FAF-AF79-4B821380A8D2}"/>
               </a:ext>
             </a:extLst>
           </p:cNvPr>
@@ -7899,7 +7899,7 @@
           <p:cNvPr id="5" name="">
             <a:extLst xmlns:a="http://schemas.openxmlformats.org/drawingml/2006/main">
               <a:ext uri="{FF2B5EF4-FFF2-40B4-BE49-F238E27FC236}">
-                <a16:creationId xmlns:a16="http://schemas.microsoft.com/office/drawing/2014/main" id="{CFA9BED3-1A50-4516-B816-37710B875C8F}"/>
+                <a16:creationId xmlns:a16="http://schemas.microsoft.com/office/drawing/2014/main" id="{8DFEC397-4378-44D5-8400-6F2EEA9AFC0D}"/>
               </a:ext>
             </a:extLst>
           </p:cNvPr>
@@ -7930,7 +7930,7 @@
           <p:cNvPr id="6" name="">
             <a:extLst xmlns:a="http://schemas.openxmlformats.org/drawingml/2006/main">
               <a:ext uri="{FF2B5EF4-FFF2-40B4-BE49-F238E27FC236}">
-                <a16:creationId xmlns:a16="http://schemas.microsoft.com/office/drawing/2014/main" id="{E9130B69-7589-40FF-B378-795A63F229C0}"/>
+                <a16:creationId xmlns:a16="http://schemas.microsoft.com/office/drawing/2014/main" id="{C8696CE8-F107-4287-8306-6571EF0D5B0E}"/>
               </a:ext>
             </a:extLst>
           </p:cNvPr>
@@ -7961,7 +7961,7 @@
           <p:cNvPr id="7" name="">
             <a:extLst xmlns:a="http://schemas.openxmlformats.org/drawingml/2006/main">
               <a:ext uri="{FF2B5EF4-FFF2-40B4-BE49-F238E27FC236}">
-                <a16:creationId xmlns:a16="http://schemas.microsoft.com/office/drawing/2014/main" id="{975977A0-D2CF-42F1-A2D8-C5306E40B163}"/>
+                <a16:creationId xmlns:a16="http://schemas.microsoft.com/office/drawing/2014/main" id="{1EE5444A-4811-427D-92C5-93ABF08CFD98}"/>
               </a:ext>
             </a:extLst>
           </p:cNvPr>
@@ -8006,7 +8006,7 @@
           <p:cNvPr id="8" name="">
             <a:extLst xmlns:a="http://schemas.openxmlformats.org/drawingml/2006/main">
               <a:ext uri="{FF2B5EF4-FFF2-40B4-BE49-F238E27FC236}">
-                <a16:creationId xmlns:a16="http://schemas.microsoft.com/office/drawing/2014/main" id="{65BAD113-876D-4C59-AA15-31FE21607906}"/>
+                <a16:creationId xmlns:a16="http://schemas.microsoft.com/office/drawing/2014/main" id="{F5D2A983-07FC-4FB9-B236-38E95389B7F5}"/>
               </a:ext>
             </a:extLst>
           </p:cNvPr>
@@ -8051,7 +8051,7 @@
           <p:cNvPr id="9" name="">
             <a:extLst xmlns:a="http://schemas.openxmlformats.org/drawingml/2006/main">
               <a:ext uri="{FF2B5EF4-FFF2-40B4-BE49-F238E27FC236}">
-                <a16:creationId xmlns:a16="http://schemas.microsoft.com/office/drawing/2014/main" id="{6B8735ED-8303-4C01-BC19-8553389AD549}"/>
+                <a16:creationId xmlns:a16="http://schemas.microsoft.com/office/drawing/2014/main" id="{367F5420-A96D-45BD-A70E-0AC36E5E5D90}"/>
               </a:ext>
             </a:extLst>
           </p:cNvPr>
@@ -8086,7 +8086,7 @@
           <p:cNvPr id="10" name="">
             <a:extLst xmlns:a="http://schemas.openxmlformats.org/drawingml/2006/main">
               <a:ext uri="{FF2B5EF4-FFF2-40B4-BE49-F238E27FC236}">
-                <a16:creationId xmlns:a16="http://schemas.microsoft.com/office/drawing/2014/main" id="{301BAF48-5604-48A8-80F9-4A6254FF392E}"/>
+                <a16:creationId xmlns:a16="http://schemas.microsoft.com/office/drawing/2014/main" id="{862EA78D-CC74-49B9-8B01-69AE2D3C62B6}"/>
               </a:ext>
             </a:extLst>
           </p:cNvPr>
@@ -8131,7 +8131,7 @@
           <p:cNvPr id="11" name="">
             <a:extLst xmlns:a="http://schemas.openxmlformats.org/drawingml/2006/main">
               <a:ext uri="{FF2B5EF4-FFF2-40B4-BE49-F238E27FC236}">
-                <a16:creationId xmlns:a16="http://schemas.microsoft.com/office/drawing/2014/main" id="{EA71CD8B-1C0C-4DDB-A86E-969B6A132B22}"/>
+                <a16:creationId xmlns:a16="http://schemas.microsoft.com/office/drawing/2014/main" id="{6D6CBA69-9091-40ED-A26D-B8B16512FD41}"/>
               </a:ext>
             </a:extLst>
           </p:cNvPr>
@@ -8176,7 +8176,7 @@
           <p:cNvPr id="12" name="">
             <a:extLst xmlns:a="http://schemas.openxmlformats.org/drawingml/2006/main">
               <a:ext uri="{FF2B5EF4-FFF2-40B4-BE49-F238E27FC236}">
-                <a16:creationId xmlns:a16="http://schemas.microsoft.com/office/drawing/2014/main" id="{A2C9FFD2-9556-4EFA-AFE0-81BCD3A9569A}"/>
+                <a16:creationId xmlns:a16="http://schemas.microsoft.com/office/drawing/2014/main" id="{869D5E8E-16B5-4CEE-8537-71C0A0D5D22B}"/>
               </a:ext>
             </a:extLst>
           </p:cNvPr>
@@ -8221,7 +8221,7 @@
           <p:cNvPr id="13" name="">
             <a:extLst xmlns:a="http://schemas.openxmlformats.org/drawingml/2006/main">
               <a:ext uri="{FF2B5EF4-FFF2-40B4-BE49-F238E27FC236}">
-                <a16:creationId xmlns:a16="http://schemas.microsoft.com/office/drawing/2014/main" id="{DE7BFE31-D551-4B39-9D53-9CBC19D68037}"/>
+                <a16:creationId xmlns:a16="http://schemas.microsoft.com/office/drawing/2014/main" id="{20A5E1CF-35B9-4AC7-8679-84CE77C4BBFD}"/>
               </a:ext>
             </a:extLst>
           </p:cNvPr>
@@ -8256,7 +8256,7 @@
           <p:cNvPr id="14" name="">
             <a:extLst xmlns:a="http://schemas.openxmlformats.org/drawingml/2006/main">
               <a:ext uri="{FF2B5EF4-FFF2-40B4-BE49-F238E27FC236}">
-                <a16:creationId xmlns:a16="http://schemas.microsoft.com/office/drawing/2014/main" id="{0CA37B42-0C6B-4A24-A5B5-BBB2EE606B9F}"/>
+                <a16:creationId xmlns:a16="http://schemas.microsoft.com/office/drawing/2014/main" id="{D4BDA9E3-1054-4D05-B14B-4D149F5D4A17}"/>
               </a:ext>
             </a:extLst>
           </p:cNvPr>
@@ -8301,7 +8301,7 @@
           <p:cNvPr id="15" name="">
             <a:extLst xmlns:a="http://schemas.openxmlformats.org/drawingml/2006/main">
               <a:ext uri="{FF2B5EF4-FFF2-40B4-BE49-F238E27FC236}">
-                <a16:creationId xmlns:a16="http://schemas.microsoft.com/office/drawing/2014/main" id="{E411B614-34AA-4EA3-B148-C630C1FDE7FF}"/>
+                <a16:creationId xmlns:a16="http://schemas.microsoft.com/office/drawing/2014/main" id="{346C6A5E-4FB0-4521-B3C5-133D04627281}"/>
               </a:ext>
             </a:extLst>
           </p:cNvPr>
@@ -8346,7 +8346,7 @@
           <p:cNvPr id="16" name="">
             <a:extLst xmlns:a="http://schemas.openxmlformats.org/drawingml/2006/main">
               <a:ext uri="{FF2B5EF4-FFF2-40B4-BE49-F238E27FC236}">
-                <a16:creationId xmlns:a16="http://schemas.microsoft.com/office/drawing/2014/main" id="{80F8EEB8-B36B-41CF-882F-0EEAE2973027}"/>
+                <a16:creationId xmlns:a16="http://schemas.microsoft.com/office/drawing/2014/main" id="{4052BAAE-90B9-4810-9BF8-5992D35F8F2D}"/>
               </a:ext>
             </a:extLst>
           </p:cNvPr>
@@ -8391,7 +8391,7 @@
           <p:cNvPr id="17" name="">
             <a:extLst xmlns:a="http://schemas.openxmlformats.org/drawingml/2006/main">
               <a:ext uri="{FF2B5EF4-FFF2-40B4-BE49-F238E27FC236}">
-                <a16:creationId xmlns:a16="http://schemas.microsoft.com/office/drawing/2014/main" id="{CD346740-E25C-4B83-88B6-1BE6DEB5C363}"/>
+                <a16:creationId xmlns:a16="http://schemas.microsoft.com/office/drawing/2014/main" id="{D5064E4C-BB00-441F-BA4F-79401DAC222D}"/>
               </a:ext>
             </a:extLst>
           </p:cNvPr>
@@ -8426,7 +8426,7 @@
           <p:cNvPr id="18" name="">
             <a:extLst xmlns:a="http://schemas.openxmlformats.org/drawingml/2006/main">
               <a:ext uri="{FF2B5EF4-FFF2-40B4-BE49-F238E27FC236}">
-                <a16:creationId xmlns:a16="http://schemas.microsoft.com/office/drawing/2014/main" id="{D2A8D4F0-B011-42D0-958D-659B13456E61}"/>
+                <a16:creationId xmlns:a16="http://schemas.microsoft.com/office/drawing/2014/main" id="{D71015FC-4A40-4C0B-9654-DEC66FEDEBE1}"/>
               </a:ext>
             </a:extLst>
           </p:cNvPr>
@@ -8471,7 +8471,7 @@
           <p:cNvPr id="19" name="">
             <a:extLst xmlns:a="http://schemas.openxmlformats.org/drawingml/2006/main">
               <a:ext uri="{FF2B5EF4-FFF2-40B4-BE49-F238E27FC236}">
-                <a16:creationId xmlns:a16="http://schemas.microsoft.com/office/drawing/2014/main" id="{AD959377-7D0A-46E4-87EF-2F196C7168DC}"/>
+                <a16:creationId xmlns:a16="http://schemas.microsoft.com/office/drawing/2014/main" id="{46C87BDD-9C81-42BC-BEB0-C9768A201809}"/>
               </a:ext>
             </a:extLst>
           </p:cNvPr>
@@ -8516,7 +8516,7 @@
           <p:cNvPr id="20" name="">
             <a:extLst xmlns:a="http://schemas.openxmlformats.org/drawingml/2006/main">
               <a:ext uri="{FF2B5EF4-FFF2-40B4-BE49-F238E27FC236}">
-                <a16:creationId xmlns:a16="http://schemas.microsoft.com/office/drawing/2014/main" id="{9BB27FE1-C572-4D0C-922D-A09B380B1D29}"/>
+                <a16:creationId xmlns:a16="http://schemas.microsoft.com/office/drawing/2014/main" id="{A90694C7-F401-4EB6-8DC2-A77BFCAFF31A}"/>
               </a:ext>
             </a:extLst>
           </p:cNvPr>
@@ -8561,7 +8561,7 @@
           <p:cNvPr id="21" name="">
             <a:extLst xmlns:a="http://schemas.openxmlformats.org/drawingml/2006/main">
               <a:ext uri="{FF2B5EF4-FFF2-40B4-BE49-F238E27FC236}">
-                <a16:creationId xmlns:a16="http://schemas.microsoft.com/office/drawing/2014/main" id="{777CD79E-F96A-4E29-A432-F32D569AF416}"/>
+                <a16:creationId xmlns:a16="http://schemas.microsoft.com/office/drawing/2014/main" id="{C9FA824A-5891-4857-B6AA-8901C91AC3E9}"/>
               </a:ext>
             </a:extLst>
           </p:cNvPr>
@@ -8596,7 +8596,7 @@
           <p:cNvPr id="22" name="">
             <a:extLst xmlns:a="http://schemas.openxmlformats.org/drawingml/2006/main">
               <a:ext uri="{FF2B5EF4-FFF2-40B4-BE49-F238E27FC236}">
-                <a16:creationId xmlns:a16="http://schemas.microsoft.com/office/drawing/2014/main" id="{3A3918A9-FC6D-43A3-B066-B03EC346A5B6}"/>
+                <a16:creationId xmlns:a16="http://schemas.microsoft.com/office/drawing/2014/main" id="{2E9BD7B7-3DED-4280-A15D-85844B530369}"/>
               </a:ext>
             </a:extLst>
           </p:cNvPr>
@@ -8641,7 +8641,7 @@
           <p:cNvPr id="23" name="">
             <a:extLst xmlns:a="http://schemas.openxmlformats.org/drawingml/2006/main">
               <a:ext uri="{FF2B5EF4-FFF2-40B4-BE49-F238E27FC236}">
-                <a16:creationId xmlns:a16="http://schemas.microsoft.com/office/drawing/2014/main" id="{BDC7FA02-6AAD-4B6E-A48C-D059A39A5D6F}"/>
+                <a16:creationId xmlns:a16="http://schemas.microsoft.com/office/drawing/2014/main" id="{D0AFAA17-1E1C-450E-A474-B8B3529136E6}"/>
               </a:ext>
             </a:extLst>
           </p:cNvPr>
@@ -8686,7 +8686,7 @@
           <p:cNvPr id="24" name="">
             <a:extLst xmlns:a="http://schemas.openxmlformats.org/drawingml/2006/main">
               <a:ext uri="{FF2B5EF4-FFF2-40B4-BE49-F238E27FC236}">
-                <a16:creationId xmlns:a16="http://schemas.microsoft.com/office/drawing/2014/main" id="{F228F139-CD04-485E-ABDC-29436A09936B}"/>
+                <a16:creationId xmlns:a16="http://schemas.microsoft.com/office/drawing/2014/main" id="{01E3650C-5D46-481E-94AD-7F11B6568BEA}"/>
               </a:ext>
             </a:extLst>
           </p:cNvPr>
@@ -8731,7 +8731,7 @@
           <p:cNvPr id="25" name="">
             <a:extLst xmlns:a="http://schemas.openxmlformats.org/drawingml/2006/main">
               <a:ext uri="{FF2B5EF4-FFF2-40B4-BE49-F238E27FC236}">
-                <a16:creationId xmlns:a16="http://schemas.microsoft.com/office/drawing/2014/main" id="{BAB166A5-1170-4A65-B12C-C641BA0CABAF}"/>
+                <a16:creationId xmlns:a16="http://schemas.microsoft.com/office/drawing/2014/main" id="{4ED410F1-807A-49FD-8D03-E86F4A82BAD4}"/>
               </a:ext>
             </a:extLst>
           </p:cNvPr>
@@ -8766,7 +8766,7 @@
           <p:cNvPr id="26" name="">
             <a:extLst xmlns:a="http://schemas.openxmlformats.org/drawingml/2006/main">
               <a:ext uri="{FF2B5EF4-FFF2-40B4-BE49-F238E27FC236}">
-                <a16:creationId xmlns:a16="http://schemas.microsoft.com/office/drawing/2014/main" id="{08BD381C-88BC-464F-A087-9F3CE7E96EB3}"/>
+                <a16:creationId xmlns:a16="http://schemas.microsoft.com/office/drawing/2014/main" id="{EBC82BB9-A982-4C77-B26E-08451BEAB246}"/>
               </a:ext>
             </a:extLst>
           </p:cNvPr>
@@ -8797,7 +8797,7 @@
           <p:cNvPr id="27" name="">
             <a:extLst xmlns:a="http://schemas.openxmlformats.org/drawingml/2006/main">
               <a:ext uri="{FF2B5EF4-FFF2-40B4-BE49-F238E27FC236}">
-                <a16:creationId xmlns:a16="http://schemas.microsoft.com/office/drawing/2014/main" id="{A8EA6A30-035D-49BE-BA2C-B212585028B4}"/>
+                <a16:creationId xmlns:a16="http://schemas.microsoft.com/office/drawing/2014/main" id="{2C79863E-3E34-45E5-89BE-066E2F392163}"/>
               </a:ext>
             </a:extLst>
           </p:cNvPr>
@@ -8842,7 +8842,7 @@
           <p:cNvPr id="28" name="">
             <a:extLst xmlns:a="http://schemas.openxmlformats.org/drawingml/2006/main">
               <a:ext uri="{FF2B5EF4-FFF2-40B4-BE49-F238E27FC236}">
-                <a16:creationId xmlns:a16="http://schemas.microsoft.com/office/drawing/2014/main" id="{7190F666-DCA1-4F8C-B277-9DCEC88F76D9}"/>
+                <a16:creationId xmlns:a16="http://schemas.microsoft.com/office/drawing/2014/main" id="{CCE37CF9-6803-4CF2-B0EE-7BBF1CE7AAFD}"/>
               </a:ext>
             </a:extLst>
           </p:cNvPr>
@@ -8887,7 +8887,7 @@
           <p:cNvPr id="29" name="">
             <a:extLst xmlns:a="http://schemas.openxmlformats.org/drawingml/2006/main">
               <a:ext uri="{FF2B5EF4-FFF2-40B4-BE49-F238E27FC236}">
-                <a16:creationId xmlns:a16="http://schemas.microsoft.com/office/drawing/2014/main" id="{B7487A92-20FE-4ADC-BFF4-FA57335FFACA}"/>
+                <a16:creationId xmlns:a16="http://schemas.microsoft.com/office/drawing/2014/main" id="{7D827CCC-8AA2-426C-9506-6E62B16BD337}"/>
               </a:ext>
             </a:extLst>
           </p:cNvPr>
@@ -8922,7 +8922,7 @@
           <p:cNvPr id="30" name="">
             <a:extLst xmlns:a="http://schemas.openxmlformats.org/drawingml/2006/main">
               <a:ext uri="{FF2B5EF4-FFF2-40B4-BE49-F238E27FC236}">
-                <a16:creationId xmlns:a16="http://schemas.microsoft.com/office/drawing/2014/main" id="{745AE5EF-9269-4F47-8F16-673DFAE01F21}"/>
+                <a16:creationId xmlns:a16="http://schemas.microsoft.com/office/drawing/2014/main" id="{8B8E78F4-1F53-47B5-95ED-BAEBF33B8D39}"/>
               </a:ext>
             </a:extLst>
           </p:cNvPr>
@@ -8953,7 +8953,7 @@
           <p:cNvPr id="31" name="">
             <a:extLst xmlns:a="http://schemas.openxmlformats.org/drawingml/2006/main">
               <a:ext uri="{FF2B5EF4-FFF2-40B4-BE49-F238E27FC236}">
-                <a16:creationId xmlns:a16="http://schemas.microsoft.com/office/drawing/2014/main" id="{3067D306-2B51-403F-9812-FD319C273C00}"/>
+                <a16:creationId xmlns:a16="http://schemas.microsoft.com/office/drawing/2014/main" id="{32EF4FF1-CDDD-4F29-B40A-383C5AF244F3}"/>
               </a:ext>
             </a:extLst>
           </p:cNvPr>
@@ -8998,7 +8998,7 @@
           <p:cNvPr id="32" name="">
             <a:extLst xmlns:a="http://schemas.openxmlformats.org/drawingml/2006/main">
               <a:ext uri="{FF2B5EF4-FFF2-40B4-BE49-F238E27FC236}">
-                <a16:creationId xmlns:a16="http://schemas.microsoft.com/office/drawing/2014/main" id="{7146821C-D4DA-4D27-8734-44173DD80627}"/>
+                <a16:creationId xmlns:a16="http://schemas.microsoft.com/office/drawing/2014/main" id="{49D746BC-A3CD-427F-BB96-DE843341548C}"/>
               </a:ext>
             </a:extLst>
           </p:cNvPr>
@@ -9043,7 +9043,7 @@
           <p:cNvPr id="33" name="">
             <a:extLst xmlns:a="http://schemas.openxmlformats.org/drawingml/2006/main">
               <a:ext uri="{FF2B5EF4-FFF2-40B4-BE49-F238E27FC236}">
-                <a16:creationId xmlns:a16="http://schemas.microsoft.com/office/drawing/2014/main" id="{D2C0E677-9687-4C3C-A085-A98D143E42DD}"/>
+                <a16:creationId xmlns:a16="http://schemas.microsoft.com/office/drawing/2014/main" id="{4EA58737-02CC-4397-9810-A952A7F7877D}"/>
               </a:ext>
             </a:extLst>
           </p:cNvPr>
@@ -9078,7 +9078,7 @@
           <p:cNvPr id="34" name="">
             <a:extLst xmlns:a="http://schemas.openxmlformats.org/drawingml/2006/main">
               <a:ext uri="{FF2B5EF4-FFF2-40B4-BE49-F238E27FC236}">
-                <a16:creationId xmlns:a16="http://schemas.microsoft.com/office/drawing/2014/main" id="{7CA977BD-FC1F-4C8A-B49A-FCC1C5504D08}"/>
+                <a16:creationId xmlns:a16="http://schemas.microsoft.com/office/drawing/2014/main" id="{0970F6C6-22F9-4323-A007-681C7FD93A6E}"/>
               </a:ext>
             </a:extLst>
           </p:cNvPr>
@@ -9109,7 +9109,7 @@
           <p:cNvPr id="35" name="">
             <a:extLst xmlns:a="http://schemas.openxmlformats.org/drawingml/2006/main">
               <a:ext uri="{FF2B5EF4-FFF2-40B4-BE49-F238E27FC236}">
-                <a16:creationId xmlns:a16="http://schemas.microsoft.com/office/drawing/2014/main" id="{686A3B87-31F7-4BB2-828E-EBC728BEEA7D}"/>
+                <a16:creationId xmlns:a16="http://schemas.microsoft.com/office/drawing/2014/main" id="{92CE9912-4BF0-464F-B874-4EF99EBD3C3E}"/>
               </a:ext>
             </a:extLst>
           </p:cNvPr>
@@ -9154,7 +9154,7 @@
           <p:cNvPr id="36" name="">
             <a:extLst xmlns:a="http://schemas.openxmlformats.org/drawingml/2006/main">
               <a:ext uri="{FF2B5EF4-FFF2-40B4-BE49-F238E27FC236}">
-                <a16:creationId xmlns:a16="http://schemas.microsoft.com/office/drawing/2014/main" id="{508C1B9A-F302-45C9-B3E4-EE2F0463CC8B}"/>
+                <a16:creationId xmlns:a16="http://schemas.microsoft.com/office/drawing/2014/main" id="{9865B634-32A9-45D0-930D-92309B73D4B4}"/>
               </a:ext>
             </a:extLst>
           </p:cNvPr>
@@ -9199,7 +9199,7 @@
           <p:cNvPr id="37" name="">
             <a:extLst xmlns:a="http://schemas.openxmlformats.org/drawingml/2006/main">
               <a:ext uri="{FF2B5EF4-FFF2-40B4-BE49-F238E27FC236}">
-                <a16:creationId xmlns:a16="http://schemas.microsoft.com/office/drawing/2014/main" id="{A3CB66EC-930A-464B-BED7-99528BA342F1}"/>
+                <a16:creationId xmlns:a16="http://schemas.microsoft.com/office/drawing/2014/main" id="{99E55A0E-1453-4DDF-8852-C2F9C288364F}"/>
               </a:ext>
             </a:extLst>
           </p:cNvPr>
@@ -9230,7 +9230,7 @@
           <p:cNvPr id="38" name="">
             <a:extLst xmlns:a="http://schemas.openxmlformats.org/drawingml/2006/main">
               <a:ext uri="{FF2B5EF4-FFF2-40B4-BE49-F238E27FC236}">
-                <a16:creationId xmlns:a16="http://schemas.microsoft.com/office/drawing/2014/main" id="{C5793F35-EECB-4AA3-B666-F563312F0515}"/>
+                <a16:creationId xmlns:a16="http://schemas.microsoft.com/office/drawing/2014/main" id="{D707D5CC-100C-444E-AD27-74908E9A6EAB}"/>
               </a:ext>
             </a:extLst>
           </p:cNvPr>
@@ -9261,7 +9261,7 @@
           <p:cNvPr id="39" name="">
             <a:extLst xmlns:a="http://schemas.openxmlformats.org/drawingml/2006/main">
               <a:ext uri="{FF2B5EF4-FFF2-40B4-BE49-F238E27FC236}">
-                <a16:creationId xmlns:a16="http://schemas.microsoft.com/office/drawing/2014/main" id="{C72DC305-23D3-43CE-99B8-DEF17D9DDDDB}"/>
+                <a16:creationId xmlns:a16="http://schemas.microsoft.com/office/drawing/2014/main" id="{38A4F850-1EF5-4704-9816-D02855BB1C6A}"/>
               </a:ext>
             </a:extLst>
           </p:cNvPr>
@@ -9306,7 +9306,7 @@
           <p:cNvPr id="40" name="">
             <a:extLst xmlns:a="http://schemas.openxmlformats.org/drawingml/2006/main">
               <a:ext uri="{FF2B5EF4-FFF2-40B4-BE49-F238E27FC236}">
-                <a16:creationId xmlns:a16="http://schemas.microsoft.com/office/drawing/2014/main" id="{CF3EA1AD-C79E-43F8-B44C-1C8D0082ED5A}"/>
+                <a16:creationId xmlns:a16="http://schemas.microsoft.com/office/drawing/2014/main" id="{8E02B628-EFB6-4138-830D-F952D1C973F9}"/>
               </a:ext>
             </a:extLst>
           </p:cNvPr>
@@ -9349,7 +9349,7 @@
     </p:spTree>
     <p:extLst>
       <p:ext uri="{BB962C8B-B14F-4D97-AF65-F5344CB8AC3E}">
-        <p14:creationId xmlns:p14="http://schemas.microsoft.com/office/powerpoint/2010/main" val="1593590032"/>
+        <p14:creationId xmlns:p14="http://schemas.microsoft.com/office/powerpoint/2010/main" val="757341995"/>
       </p:ext>
     </p:extLst>
   </p:cSld>
@@ -9373,7 +9373,7 @@
           <p:cNvPr id="42" name="">
             <a:extLst xmlns:a="http://schemas.openxmlformats.org/drawingml/2006/main">
               <a:ext uri="{FF2B5EF4-FFF2-40B4-BE49-F238E27FC236}">
-                <a16:creationId xmlns:a16="http://schemas.microsoft.com/office/drawing/2014/main" id="{A2AEE01B-0CD1-4C96-83F2-CB3B97B0CAE7}"/>
+                <a16:creationId xmlns:a16="http://schemas.microsoft.com/office/drawing/2014/main" id="{D5582181-3087-4839-9C20-8E44D4121627}"/>
               </a:ext>
             </a:extLst>
           </p:cNvPr>
@@ -9404,7 +9404,7 @@
           <p:cNvPr id="2" name="">
             <a:extLst xmlns:a="http://schemas.openxmlformats.org/drawingml/2006/main">
               <a:ext uri="{FF2B5EF4-FFF2-40B4-BE49-F238E27FC236}">
-                <a16:creationId xmlns:a16="http://schemas.microsoft.com/office/drawing/2014/main" id="{9597EB69-4C66-416E-B656-7815944B19D2}"/>
+                <a16:creationId xmlns:a16="http://schemas.microsoft.com/office/drawing/2014/main" id="{29842596-ECA8-4963-B238-3B49ECE8B1B5}"/>
               </a:ext>
             </a:extLst>
           </p:cNvPr>
@@ -9449,7 +9449,7 @@
           <p:cNvPr id="3" name="">
             <a:extLst xmlns:a="http://schemas.openxmlformats.org/drawingml/2006/main">
               <a:ext uri="{FF2B5EF4-FFF2-40B4-BE49-F238E27FC236}">
-                <a16:creationId xmlns:a16="http://schemas.microsoft.com/office/drawing/2014/main" id="{FB7744EB-DE4D-4434-8E3D-AC57E806DB3B}"/>
+                <a16:creationId xmlns:a16="http://schemas.microsoft.com/office/drawing/2014/main" id="{1944E0AF-B80C-418A-96B4-54DDA4C353A9}"/>
               </a:ext>
             </a:extLst>
           </p:cNvPr>
@@ -9494,7 +9494,7 @@
           <p:cNvPr id="4" name="">
             <a:extLst xmlns:a="http://schemas.openxmlformats.org/drawingml/2006/main">
               <a:ext uri="{FF2B5EF4-FFF2-40B4-BE49-F238E27FC236}">
-                <a16:creationId xmlns:a16="http://schemas.microsoft.com/office/drawing/2014/main" id="{A566CF42-3B6B-433E-82B7-AF1339CF13B3}"/>
+                <a16:creationId xmlns:a16="http://schemas.microsoft.com/office/drawing/2014/main" id="{4955FE97-0CCE-4A98-AB83-81E33FA75B5B}"/>
               </a:ext>
             </a:extLst>
           </p:cNvPr>
@@ -9539,7 +9539,7 @@
           <p:cNvPr id="5" name="">
             <a:extLst xmlns:a="http://schemas.openxmlformats.org/drawingml/2006/main">
               <a:ext uri="{FF2B5EF4-FFF2-40B4-BE49-F238E27FC236}">
-                <a16:creationId xmlns:a16="http://schemas.microsoft.com/office/drawing/2014/main" id="{9F2D2A19-70DF-4EB4-9CB9-7108BD64141C}"/>
+                <a16:creationId xmlns:a16="http://schemas.microsoft.com/office/drawing/2014/main" id="{CF0DFE3D-1663-437A-943D-6290037FD7F8}"/>
               </a:ext>
             </a:extLst>
           </p:cNvPr>
@@ -9570,7 +9570,7 @@
           <p:cNvPr id="6" name="">
             <a:extLst xmlns:a="http://schemas.openxmlformats.org/drawingml/2006/main">
               <a:ext uri="{FF2B5EF4-FFF2-40B4-BE49-F238E27FC236}">
-                <a16:creationId xmlns:a16="http://schemas.microsoft.com/office/drawing/2014/main" id="{DF1DB1A9-1EC7-4A2F-B9D8-74D974A09C86}"/>
+                <a16:creationId xmlns:a16="http://schemas.microsoft.com/office/drawing/2014/main" id="{6BAA4A88-C4DE-4754-8A93-E3DE261C3463}"/>
               </a:ext>
             </a:extLst>
           </p:cNvPr>
@@ -9601,7 +9601,7 @@
           <p:cNvPr id="7" name="">
             <a:extLst xmlns:a="http://schemas.openxmlformats.org/drawingml/2006/main">
               <a:ext uri="{FF2B5EF4-FFF2-40B4-BE49-F238E27FC236}">
-                <a16:creationId xmlns:a16="http://schemas.microsoft.com/office/drawing/2014/main" id="{5A849936-4F26-4D0A-B876-0F05EBCAB384}"/>
+                <a16:creationId xmlns:a16="http://schemas.microsoft.com/office/drawing/2014/main" id="{50E17962-0D30-4B5D-ACDA-B1438D3BF6B3}"/>
               </a:ext>
             </a:extLst>
           </p:cNvPr>
@@ -9646,7 +9646,7 @@
           <p:cNvPr id="8" name="">
             <a:extLst xmlns:a="http://schemas.openxmlformats.org/drawingml/2006/main">
               <a:ext uri="{FF2B5EF4-FFF2-40B4-BE49-F238E27FC236}">
-                <a16:creationId xmlns:a16="http://schemas.microsoft.com/office/drawing/2014/main" id="{2E659989-661A-4CD1-A991-833718D25C8E}"/>
+                <a16:creationId xmlns:a16="http://schemas.microsoft.com/office/drawing/2014/main" id="{468AC256-E8D8-4AD5-96B6-0C3675ADF79D}"/>
               </a:ext>
             </a:extLst>
           </p:cNvPr>
@@ -9691,7 +9691,7 @@
           <p:cNvPr id="9" name="">
             <a:extLst xmlns:a="http://schemas.openxmlformats.org/drawingml/2006/main">
               <a:ext uri="{FF2B5EF4-FFF2-40B4-BE49-F238E27FC236}">
-                <a16:creationId xmlns:a16="http://schemas.microsoft.com/office/drawing/2014/main" id="{91428731-C2EA-4F53-92F0-33051ACC5C1F}"/>
+                <a16:creationId xmlns:a16="http://schemas.microsoft.com/office/drawing/2014/main" id="{433CC9DA-F277-4684-9CD3-386F59CDF559}"/>
               </a:ext>
             </a:extLst>
           </p:cNvPr>
@@ -9724,7 +9724,7 @@
           <p:cNvPr id="10" name="">
             <a:extLst xmlns:a="http://schemas.openxmlformats.org/drawingml/2006/main">
               <a:ext uri="{FF2B5EF4-FFF2-40B4-BE49-F238E27FC236}">
-                <a16:creationId xmlns:a16="http://schemas.microsoft.com/office/drawing/2014/main" id="{FF86FD5D-0ECD-4B4B-8703-13FE4D48D190}"/>
+                <a16:creationId xmlns:a16="http://schemas.microsoft.com/office/drawing/2014/main" id="{02E4C5E9-3460-485E-84EF-7DAA3E6E9F3E}"/>
               </a:ext>
             </a:extLst>
           </p:cNvPr>
@@ -9755,7 +9755,7 @@
           <p:cNvPr id="11" name="">
             <a:extLst xmlns:a="http://schemas.openxmlformats.org/drawingml/2006/main">
               <a:ext uri="{FF2B5EF4-FFF2-40B4-BE49-F238E27FC236}">
-                <a16:creationId xmlns:a16="http://schemas.microsoft.com/office/drawing/2014/main" id="{E1CF9531-BA82-4E01-A19E-35DB92F59B70}"/>
+                <a16:creationId xmlns:a16="http://schemas.microsoft.com/office/drawing/2014/main" id="{B5F43283-C59D-4787-9572-58ED79CF4801}"/>
               </a:ext>
             </a:extLst>
           </p:cNvPr>
@@ -9800,7 +9800,7 @@
           <p:cNvPr id="12" name="">
             <a:extLst xmlns:a="http://schemas.openxmlformats.org/drawingml/2006/main">
               <a:ext uri="{FF2B5EF4-FFF2-40B4-BE49-F238E27FC236}">
-                <a16:creationId xmlns:a16="http://schemas.microsoft.com/office/drawing/2014/main" id="{E87265DF-B218-4D24-8B75-4DC417876580}"/>
+                <a16:creationId xmlns:a16="http://schemas.microsoft.com/office/drawing/2014/main" id="{369F6638-30E5-428D-8D1A-1857218FBEA8}"/>
               </a:ext>
             </a:extLst>
           </p:cNvPr>
@@ -9845,7 +9845,7 @@
           <p:cNvPr id="13" name="">
             <a:extLst xmlns:a="http://schemas.openxmlformats.org/drawingml/2006/main">
               <a:ext uri="{FF2B5EF4-FFF2-40B4-BE49-F238E27FC236}">
-                <a16:creationId xmlns:a16="http://schemas.microsoft.com/office/drawing/2014/main" id="{F20FFC6D-0EF9-4A4D-BB08-5FD8C5C69EE3}"/>
+                <a16:creationId xmlns:a16="http://schemas.microsoft.com/office/drawing/2014/main" id="{236F4B84-32FA-4D21-B73C-A1D9B958684F}"/>
               </a:ext>
             </a:extLst>
           </p:cNvPr>
@@ -9878,7 +9878,7 @@
           <p:cNvPr id="14" name="">
             <a:extLst xmlns:a="http://schemas.openxmlformats.org/drawingml/2006/main">
               <a:ext uri="{FF2B5EF4-FFF2-40B4-BE49-F238E27FC236}">
-                <a16:creationId xmlns:a16="http://schemas.microsoft.com/office/drawing/2014/main" id="{BBCBA980-E192-4CF8-8516-717509CCD676}"/>
+                <a16:creationId xmlns:a16="http://schemas.microsoft.com/office/drawing/2014/main" id="{1FD0C464-4299-46B0-BC24-0D6526C35CCA}"/>
               </a:ext>
             </a:extLst>
           </p:cNvPr>
@@ -9911,7 +9911,7 @@
           <p:cNvPr id="15" name="">
             <a:extLst xmlns:a="http://schemas.openxmlformats.org/drawingml/2006/main">
               <a:ext uri="{FF2B5EF4-FFF2-40B4-BE49-F238E27FC236}">
-                <a16:creationId xmlns:a16="http://schemas.microsoft.com/office/drawing/2014/main" id="{ED70A9B1-C05D-4C9F-BB43-AC1E23F7BC25}"/>
+                <a16:creationId xmlns:a16="http://schemas.microsoft.com/office/drawing/2014/main" id="{9ECDC127-FF35-4741-BE02-6BC4A1E38E71}"/>
               </a:ext>
             </a:extLst>
           </p:cNvPr>
@@ -9942,7 +9942,7 @@
           <p:cNvPr id="16" name="">
             <a:extLst xmlns:a="http://schemas.openxmlformats.org/drawingml/2006/main">
               <a:ext uri="{FF2B5EF4-FFF2-40B4-BE49-F238E27FC236}">
-                <a16:creationId xmlns:a16="http://schemas.microsoft.com/office/drawing/2014/main" id="{72814BB1-30C4-4982-A467-E47EFA8CCD5C}"/>
+                <a16:creationId xmlns:a16="http://schemas.microsoft.com/office/drawing/2014/main" id="{132CA0C3-8E45-421A-AE5F-C9FDF9141BA7}"/>
               </a:ext>
             </a:extLst>
           </p:cNvPr>
@@ -9987,7 +9987,7 @@
           <p:cNvPr id="17" name="">
             <a:extLst xmlns:a="http://schemas.openxmlformats.org/drawingml/2006/main">
               <a:ext uri="{FF2B5EF4-FFF2-40B4-BE49-F238E27FC236}">
-                <a16:creationId xmlns:a16="http://schemas.microsoft.com/office/drawing/2014/main" id="{8BD44073-D7EB-47B7-93C6-AB38CE51F12C}"/>
+                <a16:creationId xmlns:a16="http://schemas.microsoft.com/office/drawing/2014/main" id="{CB750033-8B98-4588-9DBA-DB52A97FDA84}"/>
               </a:ext>
             </a:extLst>
           </p:cNvPr>
@@ -10032,7 +10032,7 @@
           <p:cNvPr id="18" name="">
             <a:extLst xmlns:a="http://schemas.openxmlformats.org/drawingml/2006/main">
               <a:ext uri="{FF2B5EF4-FFF2-40B4-BE49-F238E27FC236}">
-                <a16:creationId xmlns:a16="http://schemas.microsoft.com/office/drawing/2014/main" id="{47C01BE9-CBF5-47FC-B451-A7A2D86774D2}"/>
+                <a16:creationId xmlns:a16="http://schemas.microsoft.com/office/drawing/2014/main" id="{697BFE5C-0E15-4E3B-8109-8CA45056D65E}"/>
               </a:ext>
             </a:extLst>
           </p:cNvPr>
@@ -10065,7 +10065,7 @@
           <p:cNvPr id="19" name="">
             <a:extLst xmlns:a="http://schemas.openxmlformats.org/drawingml/2006/main">
               <a:ext uri="{FF2B5EF4-FFF2-40B4-BE49-F238E27FC236}">
-                <a16:creationId xmlns:a16="http://schemas.microsoft.com/office/drawing/2014/main" id="{31F8D4AD-E35B-406B-83A0-3968A146B6ED}"/>
+                <a16:creationId xmlns:a16="http://schemas.microsoft.com/office/drawing/2014/main" id="{98369047-1B6C-401F-9673-C76EB42B27A6}"/>
               </a:ext>
             </a:extLst>
           </p:cNvPr>
@@ -10098,7 +10098,7 @@
           <p:cNvPr id="20" name="">
             <a:extLst xmlns:a="http://schemas.openxmlformats.org/drawingml/2006/main">
               <a:ext uri="{FF2B5EF4-FFF2-40B4-BE49-F238E27FC236}">
-                <a16:creationId xmlns:a16="http://schemas.microsoft.com/office/drawing/2014/main" id="{199C0F92-D090-419A-9D26-84A38D7679E5}"/>
+                <a16:creationId xmlns:a16="http://schemas.microsoft.com/office/drawing/2014/main" id="{156900B8-0A3A-4F97-83FA-4770B9FD397E}"/>
               </a:ext>
             </a:extLst>
           </p:cNvPr>
@@ -10129,7 +10129,7 @@
           <p:cNvPr id="21" name="">
             <a:extLst xmlns:a="http://schemas.openxmlformats.org/drawingml/2006/main">
               <a:ext uri="{FF2B5EF4-FFF2-40B4-BE49-F238E27FC236}">
-                <a16:creationId xmlns:a16="http://schemas.microsoft.com/office/drawing/2014/main" id="{82B9CFA5-5CAA-41E6-A66A-AA769CC7634E}"/>
+                <a16:creationId xmlns:a16="http://schemas.microsoft.com/office/drawing/2014/main" id="{3977AB3E-C086-4A33-A3C6-B7B5108FFBF6}"/>
               </a:ext>
             </a:extLst>
           </p:cNvPr>
@@ -10174,7 +10174,7 @@
           <p:cNvPr id="22" name="">
             <a:extLst xmlns:a="http://schemas.openxmlformats.org/drawingml/2006/main">
               <a:ext uri="{FF2B5EF4-FFF2-40B4-BE49-F238E27FC236}">
-                <a16:creationId xmlns:a16="http://schemas.microsoft.com/office/drawing/2014/main" id="{971A0906-8704-41AA-9DBA-D930C7EF48AD}"/>
+                <a16:creationId xmlns:a16="http://schemas.microsoft.com/office/drawing/2014/main" id="{20FC7D77-3FEF-4311-B859-23A491BC61F8}"/>
               </a:ext>
             </a:extLst>
           </p:cNvPr>
@@ -10219,7 +10219,7 @@
           <p:cNvPr id="23" name="">
             <a:extLst xmlns:a="http://schemas.openxmlformats.org/drawingml/2006/main">
               <a:ext uri="{FF2B5EF4-FFF2-40B4-BE49-F238E27FC236}">
-                <a16:creationId xmlns:a16="http://schemas.microsoft.com/office/drawing/2014/main" id="{061E2DB0-6ABC-46EC-A11B-E325A08690A8}"/>
+                <a16:creationId xmlns:a16="http://schemas.microsoft.com/office/drawing/2014/main" id="{4C0C42EE-61C3-4546-898D-98CA55BD1E8C}"/>
               </a:ext>
             </a:extLst>
           </p:cNvPr>
@@ -10252,7 +10252,7 @@
           <p:cNvPr id="24" name="">
             <a:extLst xmlns:a="http://schemas.openxmlformats.org/drawingml/2006/main">
               <a:ext uri="{FF2B5EF4-FFF2-40B4-BE49-F238E27FC236}">
-                <a16:creationId xmlns:a16="http://schemas.microsoft.com/office/drawing/2014/main" id="{B91D5085-6CAA-48D8-9702-46EE83FCEFE8}"/>
+                <a16:creationId xmlns:a16="http://schemas.microsoft.com/office/drawing/2014/main" id="{C369F4D6-6FFC-483E-863F-8D99FAF2AF71}"/>
               </a:ext>
             </a:extLst>
           </p:cNvPr>
@@ -10283,7 +10283,7 @@
           <p:cNvPr id="25" name="">
             <a:extLst xmlns:a="http://schemas.openxmlformats.org/drawingml/2006/main">
               <a:ext uri="{FF2B5EF4-FFF2-40B4-BE49-F238E27FC236}">
-                <a16:creationId xmlns:a16="http://schemas.microsoft.com/office/drawing/2014/main" id="{4B35CB3A-EA13-4568-8EC3-D0EC6D7352A0}"/>
+                <a16:creationId xmlns:a16="http://schemas.microsoft.com/office/drawing/2014/main" id="{44BF0EF8-A3A1-42FC-A464-55F796285F5E}"/>
               </a:ext>
             </a:extLst>
           </p:cNvPr>
@@ -10328,7 +10328,7 @@
           <p:cNvPr id="26" name="">
             <a:extLst xmlns:a="http://schemas.openxmlformats.org/drawingml/2006/main">
               <a:ext uri="{FF2B5EF4-FFF2-40B4-BE49-F238E27FC236}">
-                <a16:creationId xmlns:a16="http://schemas.microsoft.com/office/drawing/2014/main" id="{337F6421-858B-4FDA-AF21-FC00CA5C9E36}"/>
+                <a16:creationId xmlns:a16="http://schemas.microsoft.com/office/drawing/2014/main" id="{056CE229-CEDE-4D96-8A8C-9DA5FA3D1CE0}"/>
               </a:ext>
             </a:extLst>
           </p:cNvPr>
@@ -10373,7 +10373,7 @@
           <p:cNvPr id="27" name="">
             <a:extLst xmlns:a="http://schemas.openxmlformats.org/drawingml/2006/main">
               <a:ext uri="{FF2B5EF4-FFF2-40B4-BE49-F238E27FC236}">
-                <a16:creationId xmlns:a16="http://schemas.microsoft.com/office/drawing/2014/main" id="{2898258B-997F-45E3-A958-AEA85C11D5E4}"/>
+                <a16:creationId xmlns:a16="http://schemas.microsoft.com/office/drawing/2014/main" id="{3A132890-EB9B-4902-B64C-CBB1A8F6532A}"/>
               </a:ext>
             </a:extLst>
           </p:cNvPr>
@@ -10406,7 +10406,7 @@
           <p:cNvPr id="28" name="">
             <a:extLst xmlns:a="http://schemas.openxmlformats.org/drawingml/2006/main">
               <a:ext uri="{FF2B5EF4-FFF2-40B4-BE49-F238E27FC236}">
-                <a16:creationId xmlns:a16="http://schemas.microsoft.com/office/drawing/2014/main" id="{F94A2387-134D-4D86-8134-3B993947A521}"/>
+                <a16:creationId xmlns:a16="http://schemas.microsoft.com/office/drawing/2014/main" id="{4838A68C-7E3D-455B-9E9A-70A0CB396D53}"/>
               </a:ext>
             </a:extLst>
           </p:cNvPr>
@@ -10439,7 +10439,7 @@
           <p:cNvPr id="29" name="">
             <a:extLst xmlns:a="http://schemas.openxmlformats.org/drawingml/2006/main">
               <a:ext uri="{FF2B5EF4-FFF2-40B4-BE49-F238E27FC236}">
-                <a16:creationId xmlns:a16="http://schemas.microsoft.com/office/drawing/2014/main" id="{74CEFCB6-5B83-4D6E-BF31-9F63B31C66D2}"/>
+                <a16:creationId xmlns:a16="http://schemas.microsoft.com/office/drawing/2014/main" id="{6884EC25-E1BF-4C2B-B03E-8B1D027326DE}"/>
               </a:ext>
             </a:extLst>
           </p:cNvPr>
@@ -10470,7 +10470,7 @@
           <p:cNvPr id="30" name="">
             <a:extLst xmlns:a="http://schemas.openxmlformats.org/drawingml/2006/main">
               <a:ext uri="{FF2B5EF4-FFF2-40B4-BE49-F238E27FC236}">
-                <a16:creationId xmlns:a16="http://schemas.microsoft.com/office/drawing/2014/main" id="{F6ACDEE0-A92E-4FF5-A1A7-E7787C5F6209}"/>
+                <a16:creationId xmlns:a16="http://schemas.microsoft.com/office/drawing/2014/main" id="{1FDCD06E-6C95-4AE5-BD4B-1807724E7EEB}"/>
               </a:ext>
             </a:extLst>
           </p:cNvPr>
@@ -10515,7 +10515,7 @@
           <p:cNvPr id="31" name="">
             <a:extLst xmlns:a="http://schemas.openxmlformats.org/drawingml/2006/main">
               <a:ext uri="{FF2B5EF4-FFF2-40B4-BE49-F238E27FC236}">
-                <a16:creationId xmlns:a16="http://schemas.microsoft.com/office/drawing/2014/main" id="{C2BA39C0-1E77-4C02-A7EC-D15422E71091}"/>
+                <a16:creationId xmlns:a16="http://schemas.microsoft.com/office/drawing/2014/main" id="{52DCE57A-05A9-4A0C-9BE0-A6585D88CDE0}"/>
               </a:ext>
             </a:extLst>
           </p:cNvPr>
@@ -10560,7 +10560,7 @@
           <p:cNvPr id="32" name="">
             <a:extLst xmlns:a="http://schemas.openxmlformats.org/drawingml/2006/main">
               <a:ext uri="{FF2B5EF4-FFF2-40B4-BE49-F238E27FC236}">
-                <a16:creationId xmlns:a16="http://schemas.microsoft.com/office/drawing/2014/main" id="{277F3AB6-DF2E-4A57-A26C-1B3871A0D499}"/>
+                <a16:creationId xmlns:a16="http://schemas.microsoft.com/office/drawing/2014/main" id="{44C0A407-ACCF-49CF-A234-16AFFC824C66}"/>
               </a:ext>
             </a:extLst>
           </p:cNvPr>
@@ -10593,7 +10593,7 @@
           <p:cNvPr id="33" name="">
             <a:extLst xmlns:a="http://schemas.openxmlformats.org/drawingml/2006/main">
               <a:ext uri="{FF2B5EF4-FFF2-40B4-BE49-F238E27FC236}">
-                <a16:creationId xmlns:a16="http://schemas.microsoft.com/office/drawing/2014/main" id="{0326F1B1-9303-46FD-AB93-FE86BEA85EC5}"/>
+                <a16:creationId xmlns:a16="http://schemas.microsoft.com/office/drawing/2014/main" id="{1F238B0C-D7ED-4427-96F5-4801022A9C7C}"/>
               </a:ext>
             </a:extLst>
           </p:cNvPr>
@@ -10626,7 +10626,7 @@
           <p:cNvPr id="34" name="">
             <a:extLst xmlns:a="http://schemas.openxmlformats.org/drawingml/2006/main">
               <a:ext uri="{FF2B5EF4-FFF2-40B4-BE49-F238E27FC236}">
-                <a16:creationId xmlns:a16="http://schemas.microsoft.com/office/drawing/2014/main" id="{3A5A0331-C9EB-4D28-8138-BEB1AA8B5115}"/>
+                <a16:creationId xmlns:a16="http://schemas.microsoft.com/office/drawing/2014/main" id="{EADF8444-7F24-464E-958C-535C6C711932}"/>
               </a:ext>
             </a:extLst>
           </p:cNvPr>
@@ -10657,7 +10657,7 @@
           <p:cNvPr id="35" name="">
             <a:extLst xmlns:a="http://schemas.openxmlformats.org/drawingml/2006/main">
               <a:ext uri="{FF2B5EF4-FFF2-40B4-BE49-F238E27FC236}">
-                <a16:creationId xmlns:a16="http://schemas.microsoft.com/office/drawing/2014/main" id="{68F0B41F-8196-4CE0-BAA7-367153A2F925}"/>
+                <a16:creationId xmlns:a16="http://schemas.microsoft.com/office/drawing/2014/main" id="{910065EF-7665-4214-8265-722232626D8D}"/>
               </a:ext>
             </a:extLst>
           </p:cNvPr>
@@ -10702,7 +10702,7 @@
           <p:cNvPr id="36" name="">
             <a:extLst xmlns:a="http://schemas.openxmlformats.org/drawingml/2006/main">
               <a:ext uri="{FF2B5EF4-FFF2-40B4-BE49-F238E27FC236}">
-                <a16:creationId xmlns:a16="http://schemas.microsoft.com/office/drawing/2014/main" id="{428F33D5-EE45-4BFF-9CC1-868BE8C208AF}"/>
+                <a16:creationId xmlns:a16="http://schemas.microsoft.com/office/drawing/2014/main" id="{FAF3767A-E970-485E-97BA-5E7C10EE7C83}"/>
               </a:ext>
             </a:extLst>
           </p:cNvPr>
@@ -10747,7 +10747,7 @@
           <p:cNvPr id="37" name="">
             <a:extLst xmlns:a="http://schemas.openxmlformats.org/drawingml/2006/main">
               <a:ext uri="{FF2B5EF4-FFF2-40B4-BE49-F238E27FC236}">
-                <a16:creationId xmlns:a16="http://schemas.microsoft.com/office/drawing/2014/main" id="{97639C66-BCB2-49BB-9611-97FB08BE532A}"/>
+                <a16:creationId xmlns:a16="http://schemas.microsoft.com/office/drawing/2014/main" id="{9C643CC6-39DE-4560-B6E1-B1E5AC5B2EDE}"/>
               </a:ext>
             </a:extLst>
           </p:cNvPr>
@@ -10782,7 +10782,7 @@
           <p:cNvPr id="38" name="">
             <a:extLst xmlns:a="http://schemas.openxmlformats.org/drawingml/2006/main">
               <a:ext uri="{FF2B5EF4-FFF2-40B4-BE49-F238E27FC236}">
-                <a16:creationId xmlns:a16="http://schemas.microsoft.com/office/drawing/2014/main" id="{FC23C2C1-4CCD-424A-A5BA-48F7AF61FAD5}"/>
+                <a16:creationId xmlns:a16="http://schemas.microsoft.com/office/drawing/2014/main" id="{A66AC627-169C-48E2-80C9-F7A875EC4FF6}"/>
               </a:ext>
             </a:extLst>
           </p:cNvPr>
@@ -10813,7 +10813,7 @@
           <p:cNvPr id="39" name="">
             <a:extLst xmlns:a="http://schemas.openxmlformats.org/drawingml/2006/main">
               <a:ext uri="{FF2B5EF4-FFF2-40B4-BE49-F238E27FC236}">
-                <a16:creationId xmlns:a16="http://schemas.microsoft.com/office/drawing/2014/main" id="{B0F8155C-47B5-4124-97B0-9F2D0CB650E9}"/>
+                <a16:creationId xmlns:a16="http://schemas.microsoft.com/office/drawing/2014/main" id="{771098C3-4EAD-404B-8551-E5A06DA70034}"/>
               </a:ext>
             </a:extLst>
           </p:cNvPr>
@@ -10858,7 +10858,7 @@
           <p:cNvPr id="40" name="">
             <a:extLst xmlns:a="http://schemas.openxmlformats.org/drawingml/2006/main">
               <a:ext uri="{FF2B5EF4-FFF2-40B4-BE49-F238E27FC236}">
-                <a16:creationId xmlns:a16="http://schemas.microsoft.com/office/drawing/2014/main" id="{334A2366-8E30-4CAF-B168-FC10959C9C5B}"/>
+                <a16:creationId xmlns:a16="http://schemas.microsoft.com/office/drawing/2014/main" id="{B5EA994C-9748-46FE-9400-3C9A67FCB4C8}"/>
               </a:ext>
             </a:extLst>
           </p:cNvPr>
@@ -10903,7 +10903,7 @@
           <p:cNvPr id="41" name="">
             <a:extLst xmlns:a="http://schemas.openxmlformats.org/drawingml/2006/main">
               <a:ext uri="{FF2B5EF4-FFF2-40B4-BE49-F238E27FC236}">
-                <a16:creationId xmlns:a16="http://schemas.microsoft.com/office/drawing/2014/main" id="{03513929-6A48-49F6-ADEA-52DC1D863560}"/>
+                <a16:creationId xmlns:a16="http://schemas.microsoft.com/office/drawing/2014/main" id="{C2C07DE8-4115-4AF9-BBF9-F06769CB6D03}"/>
               </a:ext>
             </a:extLst>
           </p:cNvPr>
@@ -10946,7 +10946,7 @@
     </p:spTree>
     <p:extLst>
       <p:ext uri="{BB962C8B-B14F-4D97-AF65-F5344CB8AC3E}">
-        <p14:creationId xmlns:p14="http://schemas.microsoft.com/office/powerpoint/2010/main" val="842507134"/>
+        <p14:creationId xmlns:p14="http://schemas.microsoft.com/office/powerpoint/2010/main" val="1310669497"/>
       </p:ext>
     </p:extLst>
   </p:cSld>
@@ -10970,7 +10970,7 @@
           <p:cNvPr id="42" name="">
             <a:extLst xmlns:a="http://schemas.openxmlformats.org/drawingml/2006/main">
               <a:ext uri="{FF2B5EF4-FFF2-40B4-BE49-F238E27FC236}">
-                <a16:creationId xmlns:a16="http://schemas.microsoft.com/office/drawing/2014/main" id="{997C8C3D-AAFB-4F80-B2B8-23A54F7CC5BC}"/>
+                <a16:creationId xmlns:a16="http://schemas.microsoft.com/office/drawing/2014/main" id="{0A9796AC-1A95-4B34-9D98-67C6BA1197EE}"/>
               </a:ext>
             </a:extLst>
           </p:cNvPr>
@@ -11001,7 +11001,7 @@
           <p:cNvPr id="2" name="">
             <a:extLst xmlns:a="http://schemas.openxmlformats.org/drawingml/2006/main">
               <a:ext uri="{FF2B5EF4-FFF2-40B4-BE49-F238E27FC236}">
-                <a16:creationId xmlns:a16="http://schemas.microsoft.com/office/drawing/2014/main" id="{0FFF97F8-A389-4425-B691-361E46DB7513}"/>
+                <a16:creationId xmlns:a16="http://schemas.microsoft.com/office/drawing/2014/main" id="{9A3A199F-C09D-4EDE-A66E-1666B3D9016B}"/>
               </a:ext>
             </a:extLst>
           </p:cNvPr>
@@ -11046,7 +11046,7 @@
           <p:cNvPr id="3" name="">
             <a:extLst xmlns:a="http://schemas.openxmlformats.org/drawingml/2006/main">
               <a:ext uri="{FF2B5EF4-FFF2-40B4-BE49-F238E27FC236}">
-                <a16:creationId xmlns:a16="http://schemas.microsoft.com/office/drawing/2014/main" id="{1533E9DF-8C2E-4549-A24B-FA1AE5F04E42}"/>
+                <a16:creationId xmlns:a16="http://schemas.microsoft.com/office/drawing/2014/main" id="{9D58D5E0-8BE5-4B41-AAA6-DE35EF8AF702}"/>
               </a:ext>
             </a:extLst>
           </p:cNvPr>
@@ -11091,7 +11091,7 @@
           <p:cNvPr id="4" name="">
             <a:extLst xmlns:a="http://schemas.openxmlformats.org/drawingml/2006/main">
               <a:ext uri="{FF2B5EF4-FFF2-40B4-BE49-F238E27FC236}">
-                <a16:creationId xmlns:a16="http://schemas.microsoft.com/office/drawing/2014/main" id="{D96F2532-376C-4DA1-BB14-7226553E3AC8}"/>
+                <a16:creationId xmlns:a16="http://schemas.microsoft.com/office/drawing/2014/main" id="{C5E2DA30-1F38-4378-A36A-1D1123B0B3B2}"/>
               </a:ext>
             </a:extLst>
           </p:cNvPr>
@@ -11136,7 +11136,7 @@
           <p:cNvPr id="5" name="">
             <a:extLst xmlns:a="http://schemas.openxmlformats.org/drawingml/2006/main">
               <a:ext uri="{FF2B5EF4-FFF2-40B4-BE49-F238E27FC236}">
-                <a16:creationId xmlns:a16="http://schemas.microsoft.com/office/drawing/2014/main" id="{10A68FFC-05DF-4AC7-8171-D053B10E32B7}"/>
+                <a16:creationId xmlns:a16="http://schemas.microsoft.com/office/drawing/2014/main" id="{7E543981-1D85-4C36-8CBD-03E568414340}"/>
               </a:ext>
             </a:extLst>
           </p:cNvPr>
@@ -11167,7 +11167,7 @@
           <p:cNvPr id="6" name="">
             <a:extLst xmlns:a="http://schemas.openxmlformats.org/drawingml/2006/main">
               <a:ext uri="{FF2B5EF4-FFF2-40B4-BE49-F238E27FC236}">
-                <a16:creationId xmlns:a16="http://schemas.microsoft.com/office/drawing/2014/main" id="{1DDC0DE2-D100-4E2A-A410-EC605BF63165}"/>
+                <a16:creationId xmlns:a16="http://schemas.microsoft.com/office/drawing/2014/main" id="{8A3202A9-3CB4-4C8F-8256-8D63AA19694F}"/>
               </a:ext>
             </a:extLst>
           </p:cNvPr>
@@ -11198,7 +11198,7 @@
           <p:cNvPr id="7" name="">
             <a:extLst xmlns:a="http://schemas.openxmlformats.org/drawingml/2006/main">
               <a:ext uri="{FF2B5EF4-FFF2-40B4-BE49-F238E27FC236}">
-                <a16:creationId xmlns:a16="http://schemas.microsoft.com/office/drawing/2014/main" id="{B28DCD75-5D91-4658-8996-8BDCCB485A1D}"/>
+                <a16:creationId xmlns:a16="http://schemas.microsoft.com/office/drawing/2014/main" id="{2E0CDABB-726A-4820-AD7C-ED72C2D332C3}"/>
               </a:ext>
             </a:extLst>
           </p:cNvPr>
@@ -11243,7 +11243,7 @@
           <p:cNvPr id="8" name="">
             <a:extLst xmlns:a="http://schemas.openxmlformats.org/drawingml/2006/main">
               <a:ext uri="{FF2B5EF4-FFF2-40B4-BE49-F238E27FC236}">
-                <a16:creationId xmlns:a16="http://schemas.microsoft.com/office/drawing/2014/main" id="{D2942B4C-2210-45FA-8CCB-EFE403C022BF}"/>
+                <a16:creationId xmlns:a16="http://schemas.microsoft.com/office/drawing/2014/main" id="{4A1EC8EF-6589-4326-A4EA-EEB870D893B3}"/>
               </a:ext>
             </a:extLst>
           </p:cNvPr>
@@ -11288,7 +11288,7 @@
           <p:cNvPr id="9" name="">
             <a:extLst xmlns:a="http://schemas.openxmlformats.org/drawingml/2006/main">
               <a:ext uri="{FF2B5EF4-FFF2-40B4-BE49-F238E27FC236}">
-                <a16:creationId xmlns:a16="http://schemas.microsoft.com/office/drawing/2014/main" id="{E28E4C70-69E0-4934-87AA-56E5A46C0086}"/>
+                <a16:creationId xmlns:a16="http://schemas.microsoft.com/office/drawing/2014/main" id="{B5FB561F-4238-4CE4-B3B3-C3A8F99571D3}"/>
               </a:ext>
             </a:extLst>
           </p:cNvPr>
@@ -11321,7 +11321,7 @@
           <p:cNvPr id="10" name="">
             <a:extLst xmlns:a="http://schemas.openxmlformats.org/drawingml/2006/main">
               <a:ext uri="{FF2B5EF4-FFF2-40B4-BE49-F238E27FC236}">
-                <a16:creationId xmlns:a16="http://schemas.microsoft.com/office/drawing/2014/main" id="{97E09ED6-48D5-42E9-A26C-D5CEFA21E255}"/>
+                <a16:creationId xmlns:a16="http://schemas.microsoft.com/office/drawing/2014/main" id="{D2FE2EE6-5A32-4DDD-8832-553B9791F73D}"/>
               </a:ext>
             </a:extLst>
           </p:cNvPr>
@@ -11352,7 +11352,7 @@
           <p:cNvPr id="11" name="">
             <a:extLst xmlns:a="http://schemas.openxmlformats.org/drawingml/2006/main">
               <a:ext uri="{FF2B5EF4-FFF2-40B4-BE49-F238E27FC236}">
-                <a16:creationId xmlns:a16="http://schemas.microsoft.com/office/drawing/2014/main" id="{4B8AB72C-366D-4B3A-B23D-F1F5DC014DE7}"/>
+                <a16:creationId xmlns:a16="http://schemas.microsoft.com/office/drawing/2014/main" id="{9C96BC6E-BA91-4DE5-BF42-B8FD2A889CEF}"/>
               </a:ext>
             </a:extLst>
           </p:cNvPr>
@@ -11397,7 +11397,7 @@
           <p:cNvPr id="12" name="">
             <a:extLst xmlns:a="http://schemas.openxmlformats.org/drawingml/2006/main">
               <a:ext uri="{FF2B5EF4-FFF2-40B4-BE49-F238E27FC236}">
-                <a16:creationId xmlns:a16="http://schemas.microsoft.com/office/drawing/2014/main" id="{B7CDD1F9-77C7-45D8-9ED3-CECE19A44021}"/>
+                <a16:creationId xmlns:a16="http://schemas.microsoft.com/office/drawing/2014/main" id="{E044C809-9C32-4E18-AC66-D28C89BD9A74}"/>
               </a:ext>
             </a:extLst>
           </p:cNvPr>
@@ -11442,7 +11442,7 @@
           <p:cNvPr id="13" name="">
             <a:extLst xmlns:a="http://schemas.openxmlformats.org/drawingml/2006/main">
               <a:ext uri="{FF2B5EF4-FFF2-40B4-BE49-F238E27FC236}">
-                <a16:creationId xmlns:a16="http://schemas.microsoft.com/office/drawing/2014/main" id="{DB51D34E-F460-42E6-99C8-0C265435A91F}"/>
+                <a16:creationId xmlns:a16="http://schemas.microsoft.com/office/drawing/2014/main" id="{5A88D64E-B786-457E-AE6F-F62943F7BC67}"/>
               </a:ext>
             </a:extLst>
           </p:cNvPr>
@@ -11475,7 +11475,7 @@
           <p:cNvPr id="14" name="">
             <a:extLst xmlns:a="http://schemas.openxmlformats.org/drawingml/2006/main">
               <a:ext uri="{FF2B5EF4-FFF2-40B4-BE49-F238E27FC236}">
-                <a16:creationId xmlns:a16="http://schemas.microsoft.com/office/drawing/2014/main" id="{FDAAE93A-7EA0-42EB-A3BF-79D9BDD2F61C}"/>
+                <a16:creationId xmlns:a16="http://schemas.microsoft.com/office/drawing/2014/main" id="{A4A70335-6CC7-4B33-AD78-8B33672C612D}"/>
               </a:ext>
             </a:extLst>
           </p:cNvPr>
@@ -11508,7 +11508,7 @@
           <p:cNvPr id="15" name="">
             <a:extLst xmlns:a="http://schemas.openxmlformats.org/drawingml/2006/main">
               <a:ext uri="{FF2B5EF4-FFF2-40B4-BE49-F238E27FC236}">
-                <a16:creationId xmlns:a16="http://schemas.microsoft.com/office/drawing/2014/main" id="{90ED8DB8-4E6A-4F29-A379-8D4DE8BC7392}"/>
+                <a16:creationId xmlns:a16="http://schemas.microsoft.com/office/drawing/2014/main" id="{44742AEC-5680-47D5-9502-05D1A0651445}"/>
               </a:ext>
             </a:extLst>
           </p:cNvPr>
@@ -11539,7 +11539,7 @@
           <p:cNvPr id="16" name="">
             <a:extLst xmlns:a="http://schemas.openxmlformats.org/drawingml/2006/main">
               <a:ext uri="{FF2B5EF4-FFF2-40B4-BE49-F238E27FC236}">
-                <a16:creationId xmlns:a16="http://schemas.microsoft.com/office/drawing/2014/main" id="{D81434AF-8B55-4FC3-8213-A626EA00088F}"/>
+                <a16:creationId xmlns:a16="http://schemas.microsoft.com/office/drawing/2014/main" id="{0E46E2A2-DC8F-4D9B-A8C0-9EF8019F8F7C}"/>
               </a:ext>
             </a:extLst>
           </p:cNvPr>
@@ -11584,7 +11584,7 @@
           <p:cNvPr id="17" name="">
             <a:extLst xmlns:a="http://schemas.openxmlformats.org/drawingml/2006/main">
               <a:ext uri="{FF2B5EF4-FFF2-40B4-BE49-F238E27FC236}">
-                <a16:creationId xmlns:a16="http://schemas.microsoft.com/office/drawing/2014/main" id="{22FDEDEA-2B4E-46C8-88DB-55D0D0C04AA8}"/>
+                <a16:creationId xmlns:a16="http://schemas.microsoft.com/office/drawing/2014/main" id="{5548019C-C62B-48AF-9DAF-FBE644E90C07}"/>
               </a:ext>
             </a:extLst>
           </p:cNvPr>
@@ -11629,7 +11629,7 @@
           <p:cNvPr id="18" name="">
             <a:extLst xmlns:a="http://schemas.openxmlformats.org/drawingml/2006/main">
               <a:ext uri="{FF2B5EF4-FFF2-40B4-BE49-F238E27FC236}">
-                <a16:creationId xmlns:a16="http://schemas.microsoft.com/office/drawing/2014/main" id="{1C6D7799-DF88-4E1F-A5A6-BF1F003D8238}"/>
+                <a16:creationId xmlns:a16="http://schemas.microsoft.com/office/drawing/2014/main" id="{8AFA6063-94E0-4197-8728-50A3EBC3D0B9}"/>
               </a:ext>
             </a:extLst>
           </p:cNvPr>
@@ -11662,7 +11662,7 @@
           <p:cNvPr id="19" name="">
             <a:extLst xmlns:a="http://schemas.openxmlformats.org/drawingml/2006/main">
               <a:ext uri="{FF2B5EF4-FFF2-40B4-BE49-F238E27FC236}">
-                <a16:creationId xmlns:a16="http://schemas.microsoft.com/office/drawing/2014/main" id="{F27125AF-71CD-4A57-BB61-9E73AB3B8DAE}"/>
+                <a16:creationId xmlns:a16="http://schemas.microsoft.com/office/drawing/2014/main" id="{29479934-D3F0-40DB-8E60-0E3CD19D374C}"/>
               </a:ext>
             </a:extLst>
           </p:cNvPr>
@@ -11695,7 +11695,7 @@
           <p:cNvPr id="20" name="">
             <a:extLst xmlns:a="http://schemas.openxmlformats.org/drawingml/2006/main">
               <a:ext uri="{FF2B5EF4-FFF2-40B4-BE49-F238E27FC236}">
-                <a16:creationId xmlns:a16="http://schemas.microsoft.com/office/drawing/2014/main" id="{C4C9D4F1-994C-4DB1-BEDA-33015E5AB25D}"/>
+                <a16:creationId xmlns:a16="http://schemas.microsoft.com/office/drawing/2014/main" id="{7C3F152B-9F2F-4193-A3B3-35D4CA012701}"/>
               </a:ext>
             </a:extLst>
           </p:cNvPr>
@@ -11726,7 +11726,7 @@
           <p:cNvPr id="21" name="">
             <a:extLst xmlns:a="http://schemas.openxmlformats.org/drawingml/2006/main">
               <a:ext uri="{FF2B5EF4-FFF2-40B4-BE49-F238E27FC236}">
-                <a16:creationId xmlns:a16="http://schemas.microsoft.com/office/drawing/2014/main" id="{B38B974D-6584-4FB1-B9C2-D5EF7FCFCDD1}"/>
+                <a16:creationId xmlns:a16="http://schemas.microsoft.com/office/drawing/2014/main" id="{8B871B4C-D036-4043-8D7D-731D3FA11582}"/>
               </a:ext>
             </a:extLst>
           </p:cNvPr>
@@ -11771,7 +11771,7 @@
           <p:cNvPr id="22" name="">
             <a:extLst xmlns:a="http://schemas.openxmlformats.org/drawingml/2006/main">
               <a:ext uri="{FF2B5EF4-FFF2-40B4-BE49-F238E27FC236}">
-                <a16:creationId xmlns:a16="http://schemas.microsoft.com/office/drawing/2014/main" id="{DAE5F39D-49D9-4975-90D2-A59426F3D7B0}"/>
+                <a16:creationId xmlns:a16="http://schemas.microsoft.com/office/drawing/2014/main" id="{5CC20D15-5D61-448A-B720-BFB2FA458B04}"/>
               </a:ext>
             </a:extLst>
           </p:cNvPr>
@@ -11816,7 +11816,7 @@
           <p:cNvPr id="23" name="">
             <a:extLst xmlns:a="http://schemas.openxmlformats.org/drawingml/2006/main">
               <a:ext uri="{FF2B5EF4-FFF2-40B4-BE49-F238E27FC236}">
-                <a16:creationId xmlns:a16="http://schemas.microsoft.com/office/drawing/2014/main" id="{955D774E-BEA5-472A-BB95-E5D399D9E16D}"/>
+                <a16:creationId xmlns:a16="http://schemas.microsoft.com/office/drawing/2014/main" id="{B80AA10F-5B27-4EE5-AE68-D2CE527412E7}"/>
               </a:ext>
             </a:extLst>
           </p:cNvPr>
@@ -11849,7 +11849,7 @@
           <p:cNvPr id="24" name="">
             <a:extLst xmlns:a="http://schemas.openxmlformats.org/drawingml/2006/main">
               <a:ext uri="{FF2B5EF4-FFF2-40B4-BE49-F238E27FC236}">
-                <a16:creationId xmlns:a16="http://schemas.microsoft.com/office/drawing/2014/main" id="{CA2DB04E-7E11-46B5-861A-07C0BFC36570}"/>
+                <a16:creationId xmlns:a16="http://schemas.microsoft.com/office/drawing/2014/main" id="{F1E3EB35-6E04-493A-9819-2F1D5269D914}"/>
               </a:ext>
             </a:extLst>
           </p:cNvPr>
@@ -11882,7 +11882,7 @@
           <p:cNvPr id="25" name="">
             <a:extLst xmlns:a="http://schemas.openxmlformats.org/drawingml/2006/main">
               <a:ext uri="{FF2B5EF4-FFF2-40B4-BE49-F238E27FC236}">
-                <a16:creationId xmlns:a16="http://schemas.microsoft.com/office/drawing/2014/main" id="{CB91D8E6-DE63-4F49-AAF5-3C5B265EDE74}"/>
+                <a16:creationId xmlns:a16="http://schemas.microsoft.com/office/drawing/2014/main" id="{F33C5CC0-A52A-4AD5-A2E5-610C73151C7F}"/>
               </a:ext>
             </a:extLst>
           </p:cNvPr>
@@ -11913,7 +11913,7 @@
           <p:cNvPr id="26" name="">
             <a:extLst xmlns:a="http://schemas.openxmlformats.org/drawingml/2006/main">
               <a:ext uri="{FF2B5EF4-FFF2-40B4-BE49-F238E27FC236}">
-                <a16:creationId xmlns:a16="http://schemas.microsoft.com/office/drawing/2014/main" id="{D3457C70-6A44-4611-A850-13171EBAA625}"/>
+                <a16:creationId xmlns:a16="http://schemas.microsoft.com/office/drawing/2014/main" id="{B9119046-F43D-4EFE-A3E0-55D5CA256B08}"/>
               </a:ext>
             </a:extLst>
           </p:cNvPr>
@@ -11958,7 +11958,7 @@
           <p:cNvPr id="27" name="">
             <a:extLst xmlns:a="http://schemas.openxmlformats.org/drawingml/2006/main">
               <a:ext uri="{FF2B5EF4-FFF2-40B4-BE49-F238E27FC236}">
-                <a16:creationId xmlns:a16="http://schemas.microsoft.com/office/drawing/2014/main" id="{E4CF15E6-AC35-45D7-9AD8-FAB0A6CDA7EB}"/>
+                <a16:creationId xmlns:a16="http://schemas.microsoft.com/office/drawing/2014/main" id="{AA4C8356-F199-4BE8-9381-64EAADB49903}"/>
               </a:ext>
             </a:extLst>
           </p:cNvPr>
@@ -12003,7 +12003,7 @@
           <p:cNvPr id="28" name="">
             <a:extLst xmlns:a="http://schemas.openxmlformats.org/drawingml/2006/main">
               <a:ext uri="{FF2B5EF4-FFF2-40B4-BE49-F238E27FC236}">
-                <a16:creationId xmlns:a16="http://schemas.microsoft.com/office/drawing/2014/main" id="{1B49A9FC-5734-4806-932F-DB81C5E698A7}"/>
+                <a16:creationId xmlns:a16="http://schemas.microsoft.com/office/drawing/2014/main" id="{93B5FF56-6648-4FFB-AEF7-A7DD975AE900}"/>
               </a:ext>
             </a:extLst>
           </p:cNvPr>
@@ -12038,7 +12038,7 @@
           <p:cNvPr id="29" name="">
             <a:extLst xmlns:a="http://schemas.openxmlformats.org/drawingml/2006/main">
               <a:ext uri="{FF2B5EF4-FFF2-40B4-BE49-F238E27FC236}">
-                <a16:creationId xmlns:a16="http://schemas.microsoft.com/office/drawing/2014/main" id="{37F26191-B319-476E-94E1-CB5DEA9923DD}"/>
+                <a16:creationId xmlns:a16="http://schemas.microsoft.com/office/drawing/2014/main" id="{77734C92-6CCC-409D-A8C3-B3CC93072CE7}"/>
               </a:ext>
             </a:extLst>
           </p:cNvPr>
@@ -12069,7 +12069,7 @@
           <p:cNvPr id="30" name="">
             <a:extLst xmlns:a="http://schemas.openxmlformats.org/drawingml/2006/main">
               <a:ext uri="{FF2B5EF4-FFF2-40B4-BE49-F238E27FC236}">
-                <a16:creationId xmlns:a16="http://schemas.microsoft.com/office/drawing/2014/main" id="{A40C2F21-4276-4084-893F-4249800E65B5}"/>
+                <a16:creationId xmlns:a16="http://schemas.microsoft.com/office/drawing/2014/main" id="{A5304F49-E63F-4CA0-8B12-3EA4D5BB6113}"/>
               </a:ext>
             </a:extLst>
           </p:cNvPr>
@@ -12114,7 +12114,7 @@
           <p:cNvPr id="31" name="">
             <a:extLst xmlns:a="http://schemas.openxmlformats.org/drawingml/2006/main">
               <a:ext uri="{FF2B5EF4-FFF2-40B4-BE49-F238E27FC236}">
-                <a16:creationId xmlns:a16="http://schemas.microsoft.com/office/drawing/2014/main" id="{629C0698-D889-40DE-9405-36E37AF7038D}"/>
+                <a16:creationId xmlns:a16="http://schemas.microsoft.com/office/drawing/2014/main" id="{35A2202C-EC74-4562-9F7C-5C2EE077C90C}"/>
               </a:ext>
             </a:extLst>
           </p:cNvPr>
@@ -12159,7 +12159,7 @@
           <p:cNvPr id="32" name="">
             <a:extLst xmlns:a="http://schemas.openxmlformats.org/drawingml/2006/main">
               <a:ext uri="{FF2B5EF4-FFF2-40B4-BE49-F238E27FC236}">
-                <a16:creationId xmlns:a16="http://schemas.microsoft.com/office/drawing/2014/main" id="{83B3A619-C75B-4CA5-8090-F2A233F8CD83}"/>
+                <a16:creationId xmlns:a16="http://schemas.microsoft.com/office/drawing/2014/main" id="{6B537809-A0DC-4665-BCE1-18DAC94867FD}"/>
               </a:ext>
             </a:extLst>
           </p:cNvPr>
@@ -12194,7 +12194,7 @@
           <p:cNvPr id="33" name="">
             <a:extLst xmlns:a="http://schemas.openxmlformats.org/drawingml/2006/main">
               <a:ext uri="{FF2B5EF4-FFF2-40B4-BE49-F238E27FC236}">
-                <a16:creationId xmlns:a16="http://schemas.microsoft.com/office/drawing/2014/main" id="{782DC751-A9C2-4C49-B6B2-7B3454C88E27}"/>
+                <a16:creationId xmlns:a16="http://schemas.microsoft.com/office/drawing/2014/main" id="{FEF07323-D57F-494E-BD4E-E9700CC55722}"/>
               </a:ext>
             </a:extLst>
           </p:cNvPr>
@@ -12225,7 +12225,7 @@
           <p:cNvPr id="34" name="">
             <a:extLst xmlns:a="http://schemas.openxmlformats.org/drawingml/2006/main">
               <a:ext uri="{FF2B5EF4-FFF2-40B4-BE49-F238E27FC236}">
-                <a16:creationId xmlns:a16="http://schemas.microsoft.com/office/drawing/2014/main" id="{15A0B944-406B-4642-AE32-9E9BEA1F4925}"/>
+                <a16:creationId xmlns:a16="http://schemas.microsoft.com/office/drawing/2014/main" id="{98B603C6-9D0B-4D18-8457-86124CFDE6EF}"/>
               </a:ext>
             </a:extLst>
           </p:cNvPr>
@@ -12270,7 +12270,7 @@
           <p:cNvPr id="35" name="">
             <a:extLst xmlns:a="http://schemas.openxmlformats.org/drawingml/2006/main">
               <a:ext uri="{FF2B5EF4-FFF2-40B4-BE49-F238E27FC236}">
-                <a16:creationId xmlns:a16="http://schemas.microsoft.com/office/drawing/2014/main" id="{AD68A65D-4D1A-4C66-ABF8-BFD0C43D4A8A}"/>
+                <a16:creationId xmlns:a16="http://schemas.microsoft.com/office/drawing/2014/main" id="{354C1DA7-3DFC-456D-9C08-E474AC8E0DD1}"/>
               </a:ext>
             </a:extLst>
           </p:cNvPr>
@@ -12315,7 +12315,7 @@
           <p:cNvPr id="36" name="">
             <a:extLst xmlns:a="http://schemas.openxmlformats.org/drawingml/2006/main">
               <a:ext uri="{FF2B5EF4-FFF2-40B4-BE49-F238E27FC236}">
-                <a16:creationId xmlns:a16="http://schemas.microsoft.com/office/drawing/2014/main" id="{B4B6B0D4-5837-47C1-A8E6-9B1769117211}"/>
+                <a16:creationId xmlns:a16="http://schemas.microsoft.com/office/drawing/2014/main" id="{6E96E9CB-DFDB-4C6F-BA75-91706FBD514D}"/>
               </a:ext>
             </a:extLst>
           </p:cNvPr>
@@ -12350,7 +12350,7 @@
           <p:cNvPr id="37" name="">
             <a:extLst xmlns:a="http://schemas.openxmlformats.org/drawingml/2006/main">
               <a:ext uri="{FF2B5EF4-FFF2-40B4-BE49-F238E27FC236}">
-                <a16:creationId xmlns:a16="http://schemas.microsoft.com/office/drawing/2014/main" id="{B4494A9D-0ADC-4D33-85EB-00C6F3521FE2}"/>
+                <a16:creationId xmlns:a16="http://schemas.microsoft.com/office/drawing/2014/main" id="{7F22D439-FF4B-4350-A778-4F5C19CB167F}"/>
               </a:ext>
             </a:extLst>
           </p:cNvPr>
@@ -12381,7 +12381,7 @@
           <p:cNvPr id="38" name="">
             <a:extLst xmlns:a="http://schemas.openxmlformats.org/drawingml/2006/main">
               <a:ext uri="{FF2B5EF4-FFF2-40B4-BE49-F238E27FC236}">
-                <a16:creationId xmlns:a16="http://schemas.microsoft.com/office/drawing/2014/main" id="{569433A1-720E-43A0-AC21-D54466CB5A69}"/>
+                <a16:creationId xmlns:a16="http://schemas.microsoft.com/office/drawing/2014/main" id="{87CE7672-C570-43BD-8DFA-3C20936C231B}"/>
               </a:ext>
             </a:extLst>
           </p:cNvPr>
@@ -12426,7 +12426,7 @@
           <p:cNvPr id="39" name="">
             <a:extLst xmlns:a="http://schemas.openxmlformats.org/drawingml/2006/main">
               <a:ext uri="{FF2B5EF4-FFF2-40B4-BE49-F238E27FC236}">
-                <a16:creationId xmlns:a16="http://schemas.microsoft.com/office/drawing/2014/main" id="{65133F08-57D9-41C3-8144-ED2EEF4F15EE}"/>
+                <a16:creationId xmlns:a16="http://schemas.microsoft.com/office/drawing/2014/main" id="{FD54EFE3-66A6-4FDF-A150-09C8681448BD}"/>
               </a:ext>
             </a:extLst>
           </p:cNvPr>
@@ -12471,7 +12471,7 @@
           <p:cNvPr id="40" name="">
             <a:extLst xmlns:a="http://schemas.openxmlformats.org/drawingml/2006/main">
               <a:ext uri="{FF2B5EF4-FFF2-40B4-BE49-F238E27FC236}">
-                <a16:creationId xmlns:a16="http://schemas.microsoft.com/office/drawing/2014/main" id="{75818171-8E8E-4D2A-A826-CAAC29E373BB}"/>
+                <a16:creationId xmlns:a16="http://schemas.microsoft.com/office/drawing/2014/main" id="{05EA2FFA-00B0-428D-B534-F33DD24441D1}"/>
               </a:ext>
             </a:extLst>
           </p:cNvPr>
@@ -12516,7 +12516,7 @@
           <p:cNvPr id="41" name="">
             <a:extLst xmlns:a="http://schemas.openxmlformats.org/drawingml/2006/main">
               <a:ext uri="{FF2B5EF4-FFF2-40B4-BE49-F238E27FC236}">
-                <a16:creationId xmlns:a16="http://schemas.microsoft.com/office/drawing/2014/main" id="{440968A5-E70C-4593-8D2E-B0A6D0731694}"/>
+                <a16:creationId xmlns:a16="http://schemas.microsoft.com/office/drawing/2014/main" id="{3FECD52D-6ED6-44DD-A4E1-F59DE811B948}"/>
               </a:ext>
             </a:extLst>
           </p:cNvPr>
@@ -12559,7 +12559,7 @@
     </p:spTree>
     <p:extLst>
       <p:ext uri="{BB962C8B-B14F-4D97-AF65-F5344CB8AC3E}">
-        <p14:creationId xmlns:p14="http://schemas.microsoft.com/office/powerpoint/2010/main" val="1999054390"/>
+        <p14:creationId xmlns:p14="http://schemas.microsoft.com/office/powerpoint/2010/main" val="748609950"/>
       </p:ext>
     </p:extLst>
   </p:cSld>
@@ -12583,7 +12583,7 @@
           <p:cNvPr id="33" name="">
             <a:extLst xmlns:a="http://schemas.openxmlformats.org/drawingml/2006/main">
               <a:ext uri="{FF2B5EF4-FFF2-40B4-BE49-F238E27FC236}">
-                <a16:creationId xmlns:a16="http://schemas.microsoft.com/office/drawing/2014/main" id="{881ED714-2197-406D-9CE4-B9F0D75BD785}"/>
+                <a16:creationId xmlns:a16="http://schemas.microsoft.com/office/drawing/2014/main" id="{802CBA9F-487D-49F9-9BC3-A6C3D20F0E55}"/>
               </a:ext>
             </a:extLst>
           </p:cNvPr>
@@ -12614,7 +12614,7 @@
           <p:cNvPr id="2" name="">
             <a:extLst xmlns:a="http://schemas.openxmlformats.org/drawingml/2006/main">
               <a:ext uri="{FF2B5EF4-FFF2-40B4-BE49-F238E27FC236}">
-                <a16:creationId xmlns:a16="http://schemas.microsoft.com/office/drawing/2014/main" id="{9D21DE60-1861-4CB0-A87E-72A75C212BE3}"/>
+                <a16:creationId xmlns:a16="http://schemas.microsoft.com/office/drawing/2014/main" id="{1A0AA924-74E5-4EAA-BE48-3F993A7F9D2F}"/>
               </a:ext>
             </a:extLst>
           </p:cNvPr>
@@ -12659,7 +12659,7 @@
           <p:cNvPr id="3" name="">
             <a:extLst xmlns:a="http://schemas.openxmlformats.org/drawingml/2006/main">
               <a:ext uri="{FF2B5EF4-FFF2-40B4-BE49-F238E27FC236}">
-                <a16:creationId xmlns:a16="http://schemas.microsoft.com/office/drawing/2014/main" id="{6B6FE49A-438F-404F-B767-6F9F4B658A3C}"/>
+                <a16:creationId xmlns:a16="http://schemas.microsoft.com/office/drawing/2014/main" id="{B2D8F589-0231-4F2B-B9F7-33FE875A4680}"/>
               </a:ext>
             </a:extLst>
           </p:cNvPr>
@@ -12704,7 +12704,7 @@
           <p:cNvPr id="4" name="">
             <a:extLst xmlns:a="http://schemas.openxmlformats.org/drawingml/2006/main">
               <a:ext uri="{FF2B5EF4-FFF2-40B4-BE49-F238E27FC236}">
-                <a16:creationId xmlns:a16="http://schemas.microsoft.com/office/drawing/2014/main" id="{3A43D632-925E-46C0-83A5-B8F4DD4A96AC}"/>
+                <a16:creationId xmlns:a16="http://schemas.microsoft.com/office/drawing/2014/main" id="{7F06FCFB-2E00-4ACC-83A8-7DE96461A961}"/>
               </a:ext>
             </a:extLst>
           </p:cNvPr>
@@ -12749,7 +12749,7 @@
           <p:cNvPr id="5" name="">
             <a:extLst xmlns:a="http://schemas.openxmlformats.org/drawingml/2006/main">
               <a:ext uri="{FF2B5EF4-FFF2-40B4-BE49-F238E27FC236}">
-                <a16:creationId xmlns:a16="http://schemas.microsoft.com/office/drawing/2014/main" id="{797F0BED-98CF-4AA5-A1A4-C68F290A5ADD}"/>
+                <a16:creationId xmlns:a16="http://schemas.microsoft.com/office/drawing/2014/main" id="{55FD81B5-4423-4820-9310-7C988F0EE8D9}"/>
               </a:ext>
             </a:extLst>
           </p:cNvPr>
@@ -12780,7 +12780,7 @@
           <p:cNvPr id="6" name="">
             <a:extLst xmlns:a="http://schemas.openxmlformats.org/drawingml/2006/main">
               <a:ext uri="{FF2B5EF4-FFF2-40B4-BE49-F238E27FC236}">
-                <a16:creationId xmlns:a16="http://schemas.microsoft.com/office/drawing/2014/main" id="{17CDC4AD-A7F5-4F27-A20D-4023F8C51436}"/>
+                <a16:creationId xmlns:a16="http://schemas.microsoft.com/office/drawing/2014/main" id="{E4B9A2B7-3A58-4587-99D0-D91FD4C5516C}"/>
               </a:ext>
             </a:extLst>
           </p:cNvPr>
@@ -12811,7 +12811,7 @@
           <p:cNvPr id="7" name="">
             <a:extLst xmlns:a="http://schemas.openxmlformats.org/drawingml/2006/main">
               <a:ext uri="{FF2B5EF4-FFF2-40B4-BE49-F238E27FC236}">
-                <a16:creationId xmlns:a16="http://schemas.microsoft.com/office/drawing/2014/main" id="{628CBAE0-CB6B-466F-95C2-FF058AA54C0A}"/>
+                <a16:creationId xmlns:a16="http://schemas.microsoft.com/office/drawing/2014/main" id="{DAB02C3B-E086-4D34-BCEE-DF51FBBCE8C4}"/>
               </a:ext>
             </a:extLst>
           </p:cNvPr>
@@ -12856,7 +12856,7 @@
           <p:cNvPr id="8" name="">
             <a:extLst xmlns:a="http://schemas.openxmlformats.org/drawingml/2006/main">
               <a:ext uri="{FF2B5EF4-FFF2-40B4-BE49-F238E27FC236}">
-                <a16:creationId xmlns:a16="http://schemas.microsoft.com/office/drawing/2014/main" id="{02A36EB3-28D1-4AB4-9A35-5CC731CB97D8}"/>
+                <a16:creationId xmlns:a16="http://schemas.microsoft.com/office/drawing/2014/main" id="{2DB9C14E-3E25-43A5-82B5-67B01885B04D}"/>
               </a:ext>
             </a:extLst>
           </p:cNvPr>
@@ -12901,7 +12901,7 @@
           <p:cNvPr id="9" name="">
             <a:extLst xmlns:a="http://schemas.openxmlformats.org/drawingml/2006/main">
               <a:ext uri="{FF2B5EF4-FFF2-40B4-BE49-F238E27FC236}">
-                <a16:creationId xmlns:a16="http://schemas.microsoft.com/office/drawing/2014/main" id="{83E32F46-AB87-468D-AAEF-2F61D97E236F}"/>
+                <a16:creationId xmlns:a16="http://schemas.microsoft.com/office/drawing/2014/main" id="{B4743CCC-77B0-46E8-BE18-AA536CF481CD}"/>
               </a:ext>
             </a:extLst>
           </p:cNvPr>
@@ -12934,7 +12934,7 @@
           <p:cNvPr id="10" name="">
             <a:extLst xmlns:a="http://schemas.openxmlformats.org/drawingml/2006/main">
               <a:ext uri="{FF2B5EF4-FFF2-40B4-BE49-F238E27FC236}">
-                <a16:creationId xmlns:a16="http://schemas.microsoft.com/office/drawing/2014/main" id="{C7DF6ED3-1D01-4E02-ABF4-57E3968EFBAA}"/>
+                <a16:creationId xmlns:a16="http://schemas.microsoft.com/office/drawing/2014/main" id="{584805F7-A50A-4AB3-B8AF-AD27ABCA097F}"/>
               </a:ext>
             </a:extLst>
           </p:cNvPr>
@@ -12965,7 +12965,7 @@
           <p:cNvPr id="11" name="">
             <a:extLst xmlns:a="http://schemas.openxmlformats.org/drawingml/2006/main">
               <a:ext uri="{FF2B5EF4-FFF2-40B4-BE49-F238E27FC236}">
-                <a16:creationId xmlns:a16="http://schemas.microsoft.com/office/drawing/2014/main" id="{8827A084-715E-4AB5-8D7F-66F92C8676F8}"/>
+                <a16:creationId xmlns:a16="http://schemas.microsoft.com/office/drawing/2014/main" id="{60C92D1F-9E9D-47F8-98A1-B0209751C98D}"/>
               </a:ext>
             </a:extLst>
           </p:cNvPr>
@@ -13010,7 +13010,7 @@
           <p:cNvPr id="12" name="">
             <a:extLst xmlns:a="http://schemas.openxmlformats.org/drawingml/2006/main">
               <a:ext uri="{FF2B5EF4-FFF2-40B4-BE49-F238E27FC236}">
-                <a16:creationId xmlns:a16="http://schemas.microsoft.com/office/drawing/2014/main" id="{D6E720F9-E4FD-4EAC-B077-B313190332DD}"/>
+                <a16:creationId xmlns:a16="http://schemas.microsoft.com/office/drawing/2014/main" id="{BC235C52-4207-474E-A251-791008FEACEC}"/>
               </a:ext>
             </a:extLst>
           </p:cNvPr>
@@ -13055,7 +13055,7 @@
           <p:cNvPr id="13" name="">
             <a:extLst xmlns:a="http://schemas.openxmlformats.org/drawingml/2006/main">
               <a:ext uri="{FF2B5EF4-FFF2-40B4-BE49-F238E27FC236}">
-                <a16:creationId xmlns:a16="http://schemas.microsoft.com/office/drawing/2014/main" id="{96371B0B-7EF9-430F-A0E8-7C57471F2434}"/>
+                <a16:creationId xmlns:a16="http://schemas.microsoft.com/office/drawing/2014/main" id="{F53E66C6-86CC-4BC6-A98F-1A8527053113}"/>
               </a:ext>
             </a:extLst>
           </p:cNvPr>
@@ -13088,7 +13088,7 @@
           <p:cNvPr id="14" name="">
             <a:extLst xmlns:a="http://schemas.openxmlformats.org/drawingml/2006/main">
               <a:ext uri="{FF2B5EF4-FFF2-40B4-BE49-F238E27FC236}">
-                <a16:creationId xmlns:a16="http://schemas.microsoft.com/office/drawing/2014/main" id="{26BD4543-3489-4D74-9205-AED5EA6A123F}"/>
+                <a16:creationId xmlns:a16="http://schemas.microsoft.com/office/drawing/2014/main" id="{36ADBFF9-E4BC-49B8-949F-BE815CAB2B5B}"/>
               </a:ext>
             </a:extLst>
           </p:cNvPr>
@@ -13121,7 +13121,7 @@
           <p:cNvPr id="15" name="">
             <a:extLst xmlns:a="http://schemas.openxmlformats.org/drawingml/2006/main">
               <a:ext uri="{FF2B5EF4-FFF2-40B4-BE49-F238E27FC236}">
-                <a16:creationId xmlns:a16="http://schemas.microsoft.com/office/drawing/2014/main" id="{B5A83051-AA4C-4578-AEEA-B3775CB078AC}"/>
+                <a16:creationId xmlns:a16="http://schemas.microsoft.com/office/drawing/2014/main" id="{1CAA3CB4-BA60-4535-B8E9-2D1818C52F43}"/>
               </a:ext>
             </a:extLst>
           </p:cNvPr>
@@ -13152,7 +13152,7 @@
           <p:cNvPr id="16" name="">
             <a:extLst xmlns:a="http://schemas.openxmlformats.org/drawingml/2006/main">
               <a:ext uri="{FF2B5EF4-FFF2-40B4-BE49-F238E27FC236}">
-                <a16:creationId xmlns:a16="http://schemas.microsoft.com/office/drawing/2014/main" id="{B8B67DF8-37C0-4CD4-A2B2-4BACBF186AF8}"/>
+                <a16:creationId xmlns:a16="http://schemas.microsoft.com/office/drawing/2014/main" id="{95222977-709C-4B0C-8616-D358A64DCE97}"/>
               </a:ext>
             </a:extLst>
           </p:cNvPr>
@@ -13197,7 +13197,7 @@
           <p:cNvPr id="17" name="">
             <a:extLst xmlns:a="http://schemas.openxmlformats.org/drawingml/2006/main">
               <a:ext uri="{FF2B5EF4-FFF2-40B4-BE49-F238E27FC236}">
-                <a16:creationId xmlns:a16="http://schemas.microsoft.com/office/drawing/2014/main" id="{A3CFF7F0-E69A-4AE3-9BCA-01B5CE9C05C9}"/>
+                <a16:creationId xmlns:a16="http://schemas.microsoft.com/office/drawing/2014/main" id="{0119644A-4C1B-4DE7-957C-E7196338E64D}"/>
               </a:ext>
             </a:extLst>
           </p:cNvPr>
@@ -13242,7 +13242,7 @@
           <p:cNvPr id="18" name="">
             <a:extLst xmlns:a="http://schemas.openxmlformats.org/drawingml/2006/main">
               <a:ext uri="{FF2B5EF4-FFF2-40B4-BE49-F238E27FC236}">
-                <a16:creationId xmlns:a16="http://schemas.microsoft.com/office/drawing/2014/main" id="{8BB9C602-4967-4C57-95E0-214D743E7D84}"/>
+                <a16:creationId xmlns:a16="http://schemas.microsoft.com/office/drawing/2014/main" id="{5D383456-C08A-4CD6-9764-E76C209D8C81}"/>
               </a:ext>
             </a:extLst>
           </p:cNvPr>
@@ -13275,7 +13275,7 @@
           <p:cNvPr id="19" name="">
             <a:extLst xmlns:a="http://schemas.openxmlformats.org/drawingml/2006/main">
               <a:ext uri="{FF2B5EF4-FFF2-40B4-BE49-F238E27FC236}">
-                <a16:creationId xmlns:a16="http://schemas.microsoft.com/office/drawing/2014/main" id="{0F718438-4816-4171-9263-77F26FBED30B}"/>
+                <a16:creationId xmlns:a16="http://schemas.microsoft.com/office/drawing/2014/main" id="{53F10321-6873-4E11-98FD-675AEB0CDA99}"/>
               </a:ext>
             </a:extLst>
           </p:cNvPr>
@@ -13308,7 +13308,7 @@
           <p:cNvPr id="20" name="">
             <a:extLst xmlns:a="http://schemas.openxmlformats.org/drawingml/2006/main">
               <a:ext uri="{FF2B5EF4-FFF2-40B4-BE49-F238E27FC236}">
-                <a16:creationId xmlns:a16="http://schemas.microsoft.com/office/drawing/2014/main" id="{04CBA795-A8F8-463B-BC89-C39EFE5D8022}"/>
+                <a16:creationId xmlns:a16="http://schemas.microsoft.com/office/drawing/2014/main" id="{40ABA13D-752D-4373-AC31-462596006556}"/>
               </a:ext>
             </a:extLst>
           </p:cNvPr>
@@ -13339,7 +13339,7 @@
           <p:cNvPr id="21" name="">
             <a:extLst xmlns:a="http://schemas.openxmlformats.org/drawingml/2006/main">
               <a:ext uri="{FF2B5EF4-FFF2-40B4-BE49-F238E27FC236}">
-                <a16:creationId xmlns:a16="http://schemas.microsoft.com/office/drawing/2014/main" id="{F28AA664-9B5C-464F-A20F-63F808FF3D46}"/>
+                <a16:creationId xmlns:a16="http://schemas.microsoft.com/office/drawing/2014/main" id="{BF74E0BF-B58D-40A6-9786-E9F47EC869E2}"/>
               </a:ext>
             </a:extLst>
           </p:cNvPr>
@@ -13384,7 +13384,7 @@
           <p:cNvPr id="22" name="">
             <a:extLst xmlns:a="http://schemas.openxmlformats.org/drawingml/2006/main">
               <a:ext uri="{FF2B5EF4-FFF2-40B4-BE49-F238E27FC236}">
-                <a16:creationId xmlns:a16="http://schemas.microsoft.com/office/drawing/2014/main" id="{752E7BF7-0A4D-4ECA-891E-F8154BEB65BD}"/>
+                <a16:creationId xmlns:a16="http://schemas.microsoft.com/office/drawing/2014/main" id="{1C30986B-DFF9-41A5-817A-30286EB6E9B6}"/>
               </a:ext>
             </a:extLst>
           </p:cNvPr>
@@ -13429,7 +13429,7 @@
           <p:cNvPr id="23" name="">
             <a:extLst xmlns:a="http://schemas.openxmlformats.org/drawingml/2006/main">
               <a:ext uri="{FF2B5EF4-FFF2-40B4-BE49-F238E27FC236}">
-                <a16:creationId xmlns:a16="http://schemas.microsoft.com/office/drawing/2014/main" id="{5E7E45CD-6B0C-4D33-B04B-3443E707F042}"/>
+                <a16:creationId xmlns:a16="http://schemas.microsoft.com/office/drawing/2014/main" id="{6EC39D4F-B372-45B1-A993-B6A8B44299CF}"/>
               </a:ext>
             </a:extLst>
           </p:cNvPr>
@@ -13464,7 +13464,7 @@
           <p:cNvPr id="24" name="">
             <a:extLst xmlns:a="http://schemas.openxmlformats.org/drawingml/2006/main">
               <a:ext uri="{FF2B5EF4-FFF2-40B4-BE49-F238E27FC236}">
-                <a16:creationId xmlns:a16="http://schemas.microsoft.com/office/drawing/2014/main" id="{D784B22F-3AEC-4FE5-8D15-134424BB4E75}"/>
+                <a16:creationId xmlns:a16="http://schemas.microsoft.com/office/drawing/2014/main" id="{618A1D7B-B6E5-4FC9-924C-CD3FD464C17A}"/>
               </a:ext>
             </a:extLst>
           </p:cNvPr>
@@ -13495,7 +13495,7 @@
           <p:cNvPr id="25" name="">
             <a:extLst xmlns:a="http://schemas.openxmlformats.org/drawingml/2006/main">
               <a:ext uri="{FF2B5EF4-FFF2-40B4-BE49-F238E27FC236}">
-                <a16:creationId xmlns:a16="http://schemas.microsoft.com/office/drawing/2014/main" id="{0907C6D6-6EAF-45C6-89DA-D7B47652323F}"/>
+                <a16:creationId xmlns:a16="http://schemas.microsoft.com/office/drawing/2014/main" id="{95F9D61F-BF42-42AB-8222-86E97185A79F}"/>
               </a:ext>
             </a:extLst>
           </p:cNvPr>
@@ -13540,7 +13540,7 @@
           <p:cNvPr id="26" name="">
             <a:extLst xmlns:a="http://schemas.openxmlformats.org/drawingml/2006/main">
               <a:ext uri="{FF2B5EF4-FFF2-40B4-BE49-F238E27FC236}">
-                <a16:creationId xmlns:a16="http://schemas.microsoft.com/office/drawing/2014/main" id="{E12908F6-3585-44D1-B4EF-ACD21C885C2C}"/>
+                <a16:creationId xmlns:a16="http://schemas.microsoft.com/office/drawing/2014/main" id="{C3560E15-576C-4EF9-9708-00B84DF5ACC0}"/>
               </a:ext>
             </a:extLst>
           </p:cNvPr>
@@ -13585,7 +13585,7 @@
           <p:cNvPr id="27" name="">
             <a:extLst xmlns:a="http://schemas.openxmlformats.org/drawingml/2006/main">
               <a:ext uri="{FF2B5EF4-FFF2-40B4-BE49-F238E27FC236}">
-                <a16:creationId xmlns:a16="http://schemas.microsoft.com/office/drawing/2014/main" id="{6292B995-FBAC-4FEC-BBFE-B69D490E136B}"/>
+                <a16:creationId xmlns:a16="http://schemas.microsoft.com/office/drawing/2014/main" id="{7664F48F-6C46-457E-82A0-92946E294F65}"/>
               </a:ext>
             </a:extLst>
           </p:cNvPr>
@@ -13620,7 +13620,7 @@
           <p:cNvPr id="28" name="">
             <a:extLst xmlns:a="http://schemas.openxmlformats.org/drawingml/2006/main">
               <a:ext uri="{FF2B5EF4-FFF2-40B4-BE49-F238E27FC236}">
-                <a16:creationId xmlns:a16="http://schemas.microsoft.com/office/drawing/2014/main" id="{FF55A2A4-E9F9-4A81-9741-990EE736455C}"/>
+                <a16:creationId xmlns:a16="http://schemas.microsoft.com/office/drawing/2014/main" id="{7B09B3C1-1DDB-4327-B829-D66861AA7D00}"/>
               </a:ext>
             </a:extLst>
           </p:cNvPr>
@@ -13651,7 +13651,7 @@
           <p:cNvPr id="29" name="">
             <a:extLst xmlns:a="http://schemas.openxmlformats.org/drawingml/2006/main">
               <a:ext uri="{FF2B5EF4-FFF2-40B4-BE49-F238E27FC236}">
-                <a16:creationId xmlns:a16="http://schemas.microsoft.com/office/drawing/2014/main" id="{8473FAC8-5117-453C-9F3D-A48C26594DE2}"/>
+                <a16:creationId xmlns:a16="http://schemas.microsoft.com/office/drawing/2014/main" id="{E380D936-4815-4668-B02B-FF1AAFF9DD78}"/>
               </a:ext>
             </a:extLst>
           </p:cNvPr>
@@ -13696,7 +13696,7 @@
           <p:cNvPr id="30" name="">
             <a:extLst xmlns:a="http://schemas.openxmlformats.org/drawingml/2006/main">
               <a:ext uri="{FF2B5EF4-FFF2-40B4-BE49-F238E27FC236}">
-                <a16:creationId xmlns:a16="http://schemas.microsoft.com/office/drawing/2014/main" id="{01C01AB7-1FD3-41D4-8780-D9F1E2925DEA}"/>
+                <a16:creationId xmlns:a16="http://schemas.microsoft.com/office/drawing/2014/main" id="{67447541-A9BC-48EF-A71D-91B3454DFF1A}"/>
               </a:ext>
             </a:extLst>
           </p:cNvPr>
@@ -13741,7 +13741,7 @@
           <p:cNvPr id="31" name="">
             <a:extLst xmlns:a="http://schemas.openxmlformats.org/drawingml/2006/main">
               <a:ext uri="{FF2B5EF4-FFF2-40B4-BE49-F238E27FC236}">
-                <a16:creationId xmlns:a16="http://schemas.microsoft.com/office/drawing/2014/main" id="{EB48A945-E03A-4225-907F-D731914F72B9}"/>
+                <a16:creationId xmlns:a16="http://schemas.microsoft.com/office/drawing/2014/main" id="{89FC491A-B6B9-4E26-9167-D422ECCCF8FE}"/>
               </a:ext>
             </a:extLst>
           </p:cNvPr>
@@ -13786,7 +13786,7 @@
           <p:cNvPr id="32" name="">
             <a:extLst xmlns:a="http://schemas.openxmlformats.org/drawingml/2006/main">
               <a:ext uri="{FF2B5EF4-FFF2-40B4-BE49-F238E27FC236}">
-                <a16:creationId xmlns:a16="http://schemas.microsoft.com/office/drawing/2014/main" id="{FE69BCF8-9E6B-4E01-AA0C-DF1F8128D74B}"/>
+                <a16:creationId xmlns:a16="http://schemas.microsoft.com/office/drawing/2014/main" id="{937752EB-0C84-4F0E-8D5F-8D3707D30028}"/>
               </a:ext>
             </a:extLst>
           </p:cNvPr>
@@ -13829,7 +13829,7 @@
     </p:spTree>
     <p:extLst>
       <p:ext uri="{BB962C8B-B14F-4D97-AF65-F5344CB8AC3E}">
-        <p14:creationId xmlns:p14="http://schemas.microsoft.com/office/powerpoint/2010/main" val="502665649"/>
+        <p14:creationId xmlns:p14="http://schemas.microsoft.com/office/powerpoint/2010/main" val="1423348076"/>
       </p:ext>
     </p:extLst>
   </p:cSld>
@@ -13853,7 +13853,7 @@
           <p:cNvPr id="49" name="">
             <a:extLst xmlns:a="http://schemas.openxmlformats.org/drawingml/2006/main">
               <a:ext uri="{FF2B5EF4-FFF2-40B4-BE49-F238E27FC236}">
-                <a16:creationId xmlns:a16="http://schemas.microsoft.com/office/drawing/2014/main" id="{762FEF95-8A47-4A36-9F4F-AAA7240FED06}"/>
+                <a16:creationId xmlns:a16="http://schemas.microsoft.com/office/drawing/2014/main" id="{E87C0F73-0367-4947-BF05-4BB8DE508C99}"/>
               </a:ext>
             </a:extLst>
           </p:cNvPr>
@@ -13884,7 +13884,7 @@
           <p:cNvPr id="2" name="">
             <a:extLst xmlns:a="http://schemas.openxmlformats.org/drawingml/2006/main">
               <a:ext uri="{FF2B5EF4-FFF2-40B4-BE49-F238E27FC236}">
-                <a16:creationId xmlns:a16="http://schemas.microsoft.com/office/drawing/2014/main" id="{7E402BC0-AF72-4AC2-B0A7-C3E0371A3396}"/>
+                <a16:creationId xmlns:a16="http://schemas.microsoft.com/office/drawing/2014/main" id="{4834B567-9729-4B97-ABB0-7FD9C22209F9}"/>
               </a:ext>
             </a:extLst>
           </p:cNvPr>
@@ -13929,7 +13929,7 @@
           <p:cNvPr id="3" name="">
             <a:extLst xmlns:a="http://schemas.openxmlformats.org/drawingml/2006/main">
               <a:ext uri="{FF2B5EF4-FFF2-40B4-BE49-F238E27FC236}">
-                <a16:creationId xmlns:a16="http://schemas.microsoft.com/office/drawing/2014/main" id="{843066AB-0A77-43CE-B311-3AB52D17539C}"/>
+                <a16:creationId xmlns:a16="http://schemas.microsoft.com/office/drawing/2014/main" id="{D1F47C1C-B998-430D-96EC-2B551C8C98BE}"/>
               </a:ext>
             </a:extLst>
           </p:cNvPr>
@@ -13974,7 +13974,7 @@
           <p:cNvPr id="4" name="">
             <a:extLst xmlns:a="http://schemas.openxmlformats.org/drawingml/2006/main">
               <a:ext uri="{FF2B5EF4-FFF2-40B4-BE49-F238E27FC236}">
-                <a16:creationId xmlns:a16="http://schemas.microsoft.com/office/drawing/2014/main" id="{5CA85D7D-7744-4AD6-A02E-64139E99351A}"/>
+                <a16:creationId xmlns:a16="http://schemas.microsoft.com/office/drawing/2014/main" id="{ED696EB2-2AF8-4015-83C4-3C370143C89C}"/>
               </a:ext>
             </a:extLst>
           </p:cNvPr>
@@ -14019,7 +14019,7 @@
           <p:cNvPr id="5" name="">
             <a:extLst xmlns:a="http://schemas.openxmlformats.org/drawingml/2006/main">
               <a:ext uri="{FF2B5EF4-FFF2-40B4-BE49-F238E27FC236}">
-                <a16:creationId xmlns:a16="http://schemas.microsoft.com/office/drawing/2014/main" id="{E6199FDB-CB06-4D15-A64A-12B867C22851}"/>
+                <a16:creationId xmlns:a16="http://schemas.microsoft.com/office/drawing/2014/main" id="{D0CC2629-6B0E-45D9-A807-2BC26E8A3F68}"/>
               </a:ext>
             </a:extLst>
           </p:cNvPr>
@@ -14050,7 +14050,7 @@
           <p:cNvPr id="6" name="">
             <a:extLst xmlns:a="http://schemas.openxmlformats.org/drawingml/2006/main">
               <a:ext uri="{FF2B5EF4-FFF2-40B4-BE49-F238E27FC236}">
-                <a16:creationId xmlns:a16="http://schemas.microsoft.com/office/drawing/2014/main" id="{9E3FB945-CFAC-4B04-885F-B8EAD332C3D5}"/>
+                <a16:creationId xmlns:a16="http://schemas.microsoft.com/office/drawing/2014/main" id="{7E5FC1EA-0E6B-433C-9719-A0C094A114C1}"/>
               </a:ext>
             </a:extLst>
           </p:cNvPr>
@@ -14081,7 +14081,7 @@
           <p:cNvPr id="7" name="">
             <a:extLst xmlns:a="http://schemas.openxmlformats.org/drawingml/2006/main">
               <a:ext uri="{FF2B5EF4-FFF2-40B4-BE49-F238E27FC236}">
-                <a16:creationId xmlns:a16="http://schemas.microsoft.com/office/drawing/2014/main" id="{569A4A69-3510-4307-98CA-28866B63DAAC}"/>
+                <a16:creationId xmlns:a16="http://schemas.microsoft.com/office/drawing/2014/main" id="{56578C68-4DC1-4AAE-ABE9-126C15BC6068}"/>
               </a:ext>
             </a:extLst>
           </p:cNvPr>
@@ -14126,7 +14126,7 @@
           <p:cNvPr id="8" name="">
             <a:extLst xmlns:a="http://schemas.openxmlformats.org/drawingml/2006/main">
               <a:ext uri="{FF2B5EF4-FFF2-40B4-BE49-F238E27FC236}">
-                <a16:creationId xmlns:a16="http://schemas.microsoft.com/office/drawing/2014/main" id="{CD9D3429-6970-4E96-9A69-B15D0D3B744C}"/>
+                <a16:creationId xmlns:a16="http://schemas.microsoft.com/office/drawing/2014/main" id="{48C2527E-6962-4B86-B77E-1A00B24740AB}"/>
               </a:ext>
             </a:extLst>
           </p:cNvPr>
@@ -14171,7 +14171,7 @@
           <p:cNvPr id="9" name="">
             <a:extLst xmlns:a="http://schemas.openxmlformats.org/drawingml/2006/main">
               <a:ext uri="{FF2B5EF4-FFF2-40B4-BE49-F238E27FC236}">
-                <a16:creationId xmlns:a16="http://schemas.microsoft.com/office/drawing/2014/main" id="{C30EF84E-8489-4456-BA18-3F54A75BB45A}"/>
+                <a16:creationId xmlns:a16="http://schemas.microsoft.com/office/drawing/2014/main" id="{B951DEF7-0748-4155-818D-E31DE0ABBDF7}"/>
               </a:ext>
             </a:extLst>
           </p:cNvPr>
@@ -14204,7 +14204,7 @@
           <p:cNvPr id="10" name="">
             <a:extLst xmlns:a="http://schemas.openxmlformats.org/drawingml/2006/main">
               <a:ext uri="{FF2B5EF4-FFF2-40B4-BE49-F238E27FC236}">
-                <a16:creationId xmlns:a16="http://schemas.microsoft.com/office/drawing/2014/main" id="{EF8AD115-677E-47B2-B32F-53D4DBBD2F81}"/>
+                <a16:creationId xmlns:a16="http://schemas.microsoft.com/office/drawing/2014/main" id="{B420B4F2-5B7E-4093-8513-826865FC4B2B}"/>
               </a:ext>
             </a:extLst>
           </p:cNvPr>
@@ -14235,7 +14235,7 @@
           <p:cNvPr id="11" name="">
             <a:extLst xmlns:a="http://schemas.openxmlformats.org/drawingml/2006/main">
               <a:ext uri="{FF2B5EF4-FFF2-40B4-BE49-F238E27FC236}">
-                <a16:creationId xmlns:a16="http://schemas.microsoft.com/office/drawing/2014/main" id="{55037341-C9A6-402B-9D79-3CEED2834DE8}"/>
+                <a16:creationId xmlns:a16="http://schemas.microsoft.com/office/drawing/2014/main" id="{6C000D30-451C-406D-90E3-6D7CC5363070}"/>
               </a:ext>
             </a:extLst>
           </p:cNvPr>
@@ -14280,7 +14280,7 @@
           <p:cNvPr id="12" name="">
             <a:extLst xmlns:a="http://schemas.openxmlformats.org/drawingml/2006/main">
               <a:ext uri="{FF2B5EF4-FFF2-40B4-BE49-F238E27FC236}">
-                <a16:creationId xmlns:a16="http://schemas.microsoft.com/office/drawing/2014/main" id="{B8EB4914-B284-4A87-96A6-86A13AB8D6AE}"/>
+                <a16:creationId xmlns:a16="http://schemas.microsoft.com/office/drawing/2014/main" id="{CDABE479-6F2D-453D-AF1B-7274F248C90E}"/>
               </a:ext>
             </a:extLst>
           </p:cNvPr>
@@ -14325,7 +14325,7 @@
           <p:cNvPr id="13" name="">
             <a:extLst xmlns:a="http://schemas.openxmlformats.org/drawingml/2006/main">
               <a:ext uri="{FF2B5EF4-FFF2-40B4-BE49-F238E27FC236}">
-                <a16:creationId xmlns:a16="http://schemas.microsoft.com/office/drawing/2014/main" id="{3347A5A3-8B4D-4AEA-97F0-FFB43CC615C6}"/>
+                <a16:creationId xmlns:a16="http://schemas.microsoft.com/office/drawing/2014/main" id="{95CEF463-23A5-431B-8003-EC1CCB46A789}"/>
               </a:ext>
             </a:extLst>
           </p:cNvPr>
@@ -14358,7 +14358,7 @@
           <p:cNvPr id="14" name="">
             <a:extLst xmlns:a="http://schemas.openxmlformats.org/drawingml/2006/main">
               <a:ext uri="{FF2B5EF4-FFF2-40B4-BE49-F238E27FC236}">
-                <a16:creationId xmlns:a16="http://schemas.microsoft.com/office/drawing/2014/main" id="{01F3ABA1-159D-4848-9B61-A40F45A4C746}"/>
+                <a16:creationId xmlns:a16="http://schemas.microsoft.com/office/drawing/2014/main" id="{822A4347-8EA9-4881-B2B6-9BE7C73CDEB4}"/>
               </a:ext>
             </a:extLst>
           </p:cNvPr>
@@ -14391,7 +14391,7 @@
           <p:cNvPr id="15" name="">
             <a:extLst xmlns:a="http://schemas.openxmlformats.org/drawingml/2006/main">
               <a:ext uri="{FF2B5EF4-FFF2-40B4-BE49-F238E27FC236}">
-                <a16:creationId xmlns:a16="http://schemas.microsoft.com/office/drawing/2014/main" id="{54F31B65-106C-45DD-8C1D-3BB8FC5339AB}"/>
+                <a16:creationId xmlns:a16="http://schemas.microsoft.com/office/drawing/2014/main" id="{A7FB73EB-B414-4E82-ADA7-7987BC41FE5C}"/>
               </a:ext>
             </a:extLst>
           </p:cNvPr>
@@ -14422,7 +14422,7 @@
           <p:cNvPr id="16" name="">
             <a:extLst xmlns:a="http://schemas.openxmlformats.org/drawingml/2006/main">
               <a:ext uri="{FF2B5EF4-FFF2-40B4-BE49-F238E27FC236}">
-                <a16:creationId xmlns:a16="http://schemas.microsoft.com/office/drawing/2014/main" id="{641B12EA-4D43-4BAB-84FA-C83688B3D1D7}"/>
+                <a16:creationId xmlns:a16="http://schemas.microsoft.com/office/drawing/2014/main" id="{AB24B5AF-89D7-46A2-BEC3-F1E9E32DB202}"/>
               </a:ext>
             </a:extLst>
           </p:cNvPr>
@@ -14467,7 +14467,7 @@
           <p:cNvPr id="17" name="">
             <a:extLst xmlns:a="http://schemas.openxmlformats.org/drawingml/2006/main">
               <a:ext uri="{FF2B5EF4-FFF2-40B4-BE49-F238E27FC236}">
-                <a16:creationId xmlns:a16="http://schemas.microsoft.com/office/drawing/2014/main" id="{32EFFFE0-3D37-4526-AE7B-AE1E6401FEAC}"/>
+                <a16:creationId xmlns:a16="http://schemas.microsoft.com/office/drawing/2014/main" id="{6CC84E6F-FE78-47B3-AD1A-452FFC0CD073}"/>
               </a:ext>
             </a:extLst>
           </p:cNvPr>
@@ -14512,7 +14512,7 @@
           <p:cNvPr id="18" name="">
             <a:extLst xmlns:a="http://schemas.openxmlformats.org/drawingml/2006/main">
               <a:ext uri="{FF2B5EF4-FFF2-40B4-BE49-F238E27FC236}">
-                <a16:creationId xmlns:a16="http://schemas.microsoft.com/office/drawing/2014/main" id="{AB4B6957-4AE8-4210-A237-334DB52C269E}"/>
+                <a16:creationId xmlns:a16="http://schemas.microsoft.com/office/drawing/2014/main" id="{C52FA09E-875B-40A1-81E6-2DAAB8C92E99}"/>
               </a:ext>
             </a:extLst>
           </p:cNvPr>
@@ -14545,7 +14545,7 @@
           <p:cNvPr id="19" name="">
             <a:extLst xmlns:a="http://schemas.openxmlformats.org/drawingml/2006/main">
               <a:ext uri="{FF2B5EF4-FFF2-40B4-BE49-F238E27FC236}">
-                <a16:creationId xmlns:a16="http://schemas.microsoft.com/office/drawing/2014/main" id="{F5105D83-E9EE-48E1-B6FB-D0CA205F2020}"/>
+                <a16:creationId xmlns:a16="http://schemas.microsoft.com/office/drawing/2014/main" id="{D1917973-2A60-41C3-9753-12F860D2DA63}"/>
               </a:ext>
             </a:extLst>
           </p:cNvPr>
@@ -14578,7 +14578,7 @@
           <p:cNvPr id="20" name="">
             <a:extLst xmlns:a="http://schemas.openxmlformats.org/drawingml/2006/main">
               <a:ext uri="{FF2B5EF4-FFF2-40B4-BE49-F238E27FC236}">
-                <a16:creationId xmlns:a16="http://schemas.microsoft.com/office/drawing/2014/main" id="{3CF0E464-DB21-44EA-A467-D34A45616F89}"/>
+                <a16:creationId xmlns:a16="http://schemas.microsoft.com/office/drawing/2014/main" id="{2D7E8271-C8EC-41FC-A7AE-9FAFC62CED4E}"/>
               </a:ext>
             </a:extLst>
           </p:cNvPr>
@@ -14609,7 +14609,7 @@
           <p:cNvPr id="21" name="">
             <a:extLst xmlns:a="http://schemas.openxmlformats.org/drawingml/2006/main">
               <a:ext uri="{FF2B5EF4-FFF2-40B4-BE49-F238E27FC236}">
-                <a16:creationId xmlns:a16="http://schemas.microsoft.com/office/drawing/2014/main" id="{E1A6D8CF-DE90-4E38-9A4D-A55B16A7CFBC}"/>
+                <a16:creationId xmlns:a16="http://schemas.microsoft.com/office/drawing/2014/main" id="{701BF20A-E302-4FFB-A78C-1BDA28DEC376}"/>
               </a:ext>
             </a:extLst>
           </p:cNvPr>
@@ -14654,7 +14654,7 @@
           <p:cNvPr id="22" name="">
             <a:extLst xmlns:a="http://schemas.openxmlformats.org/drawingml/2006/main">
               <a:ext uri="{FF2B5EF4-FFF2-40B4-BE49-F238E27FC236}">
-                <a16:creationId xmlns:a16="http://schemas.microsoft.com/office/drawing/2014/main" id="{3CF6F8EF-FEBF-4EBB-BB83-6F79FB83AA07}"/>
+                <a16:creationId xmlns:a16="http://schemas.microsoft.com/office/drawing/2014/main" id="{E84E94BB-11D3-4463-909C-9DA05CF63B41}"/>
               </a:ext>
             </a:extLst>
           </p:cNvPr>
@@ -14699,7 +14699,7 @@
           <p:cNvPr id="23" name="">
             <a:extLst xmlns:a="http://schemas.openxmlformats.org/drawingml/2006/main">
               <a:ext uri="{FF2B5EF4-FFF2-40B4-BE49-F238E27FC236}">
-                <a16:creationId xmlns:a16="http://schemas.microsoft.com/office/drawing/2014/main" id="{F0EC4160-8E91-4482-B534-C5E7C69F2923}"/>
+                <a16:creationId xmlns:a16="http://schemas.microsoft.com/office/drawing/2014/main" id="{CE09C399-77C9-4DEE-B5F6-BC0B09A1E7BC}"/>
               </a:ext>
             </a:extLst>
           </p:cNvPr>
@@ -14732,7 +14732,7 @@
           <p:cNvPr id="24" name="">
             <a:extLst xmlns:a="http://schemas.openxmlformats.org/drawingml/2006/main">
               <a:ext uri="{FF2B5EF4-FFF2-40B4-BE49-F238E27FC236}">
-                <a16:creationId xmlns:a16="http://schemas.microsoft.com/office/drawing/2014/main" id="{7641D3C3-8932-4B9E-B604-AB57147258C0}"/>
+                <a16:creationId xmlns:a16="http://schemas.microsoft.com/office/drawing/2014/main" id="{AFC4D2FD-1E57-4A0B-9363-7C22839525BB}"/>
               </a:ext>
             </a:extLst>
           </p:cNvPr>
@@ -14765,7 +14765,7 @@
           <p:cNvPr id="25" name="">
             <a:extLst xmlns:a="http://schemas.openxmlformats.org/drawingml/2006/main">
               <a:ext uri="{FF2B5EF4-FFF2-40B4-BE49-F238E27FC236}">
-                <a16:creationId xmlns:a16="http://schemas.microsoft.com/office/drawing/2014/main" id="{8DF98F09-624C-4416-9127-36A11AD14DF0}"/>
+                <a16:creationId xmlns:a16="http://schemas.microsoft.com/office/drawing/2014/main" id="{18C6F97B-83DA-46C8-8B3D-251623DA28F0}"/>
               </a:ext>
             </a:extLst>
           </p:cNvPr>
@@ -14796,7 +14796,7 @@
           <p:cNvPr id="26" name="">
             <a:extLst xmlns:a="http://schemas.openxmlformats.org/drawingml/2006/main">
               <a:ext uri="{FF2B5EF4-FFF2-40B4-BE49-F238E27FC236}">
-                <a16:creationId xmlns:a16="http://schemas.microsoft.com/office/drawing/2014/main" id="{70E80CE6-67A8-4276-9C52-504894825A42}"/>
+                <a16:creationId xmlns:a16="http://schemas.microsoft.com/office/drawing/2014/main" id="{EB05B059-15E5-4292-8C72-BF8D69EA56E9}"/>
               </a:ext>
             </a:extLst>
           </p:cNvPr>
@@ -14841,7 +14841,7 @@
           <p:cNvPr id="27" name="">
             <a:extLst xmlns:a="http://schemas.openxmlformats.org/drawingml/2006/main">
               <a:ext uri="{FF2B5EF4-FFF2-40B4-BE49-F238E27FC236}">
-                <a16:creationId xmlns:a16="http://schemas.microsoft.com/office/drawing/2014/main" id="{689DE4B9-D6E1-4678-8488-FA3488CB99A0}"/>
+                <a16:creationId xmlns:a16="http://schemas.microsoft.com/office/drawing/2014/main" id="{FC2E260E-DC10-4A0F-BF74-7FC4813B3977}"/>
               </a:ext>
             </a:extLst>
           </p:cNvPr>
@@ -14886,7 +14886,7 @@
           <p:cNvPr id="28" name="">
             <a:extLst xmlns:a="http://schemas.openxmlformats.org/drawingml/2006/main">
               <a:ext uri="{FF2B5EF4-FFF2-40B4-BE49-F238E27FC236}">
-                <a16:creationId xmlns:a16="http://schemas.microsoft.com/office/drawing/2014/main" id="{CD69096F-8757-4995-9A1E-7776EFB06226}"/>
+                <a16:creationId xmlns:a16="http://schemas.microsoft.com/office/drawing/2014/main" id="{FDE2212C-E1CB-4A9C-A1D3-F5DC935FE33A}"/>
               </a:ext>
             </a:extLst>
           </p:cNvPr>
@@ -14921,7 +14921,7 @@
           <p:cNvPr id="29" name="">
             <a:extLst xmlns:a="http://schemas.openxmlformats.org/drawingml/2006/main">
               <a:ext uri="{FF2B5EF4-FFF2-40B4-BE49-F238E27FC236}">
-                <a16:creationId xmlns:a16="http://schemas.microsoft.com/office/drawing/2014/main" id="{C049E068-D151-48EA-A78B-C94FBFE2061A}"/>
+                <a16:creationId xmlns:a16="http://schemas.microsoft.com/office/drawing/2014/main" id="{D378532F-94BF-4D50-8864-6129FDF87BB7}"/>
               </a:ext>
             </a:extLst>
           </p:cNvPr>
@@ -14952,7 +14952,7 @@
           <p:cNvPr id="30" name="">
             <a:extLst xmlns:a="http://schemas.openxmlformats.org/drawingml/2006/main">
               <a:ext uri="{FF2B5EF4-FFF2-40B4-BE49-F238E27FC236}">
-                <a16:creationId xmlns:a16="http://schemas.microsoft.com/office/drawing/2014/main" id="{3FACE07D-A293-461D-B54C-70CAF758F674}"/>
+                <a16:creationId xmlns:a16="http://schemas.microsoft.com/office/drawing/2014/main" id="{6C999DD0-4300-4A59-9169-7DC68ABB12FC}"/>
               </a:ext>
             </a:extLst>
           </p:cNvPr>
@@ -14997,7 +14997,7 @@
           <p:cNvPr id="31" name="">
             <a:extLst xmlns:a="http://schemas.openxmlformats.org/drawingml/2006/main">
               <a:ext uri="{FF2B5EF4-FFF2-40B4-BE49-F238E27FC236}">
-                <a16:creationId xmlns:a16="http://schemas.microsoft.com/office/drawing/2014/main" id="{18830757-91B8-469F-9556-4FD90FBC4F9C}"/>
+                <a16:creationId xmlns:a16="http://schemas.microsoft.com/office/drawing/2014/main" id="{2A650A3C-F51D-4202-9E60-D08528D8F71E}"/>
               </a:ext>
             </a:extLst>
           </p:cNvPr>
@@ -15042,7 +15042,7 @@
           <p:cNvPr id="32" name="">
             <a:extLst xmlns:a="http://schemas.openxmlformats.org/drawingml/2006/main">
               <a:ext uri="{FF2B5EF4-FFF2-40B4-BE49-F238E27FC236}">
-                <a16:creationId xmlns:a16="http://schemas.microsoft.com/office/drawing/2014/main" id="{087BE8EA-79BC-47C4-8F59-5A870357A0B0}"/>
+                <a16:creationId xmlns:a16="http://schemas.microsoft.com/office/drawing/2014/main" id="{62E46621-6906-4880-930C-B7D49D4A4A56}"/>
               </a:ext>
             </a:extLst>
           </p:cNvPr>
@@ -15077,7 +15077,7 @@
           <p:cNvPr id="33" name="">
             <a:extLst xmlns:a="http://schemas.openxmlformats.org/drawingml/2006/main">
               <a:ext uri="{FF2B5EF4-FFF2-40B4-BE49-F238E27FC236}">
-                <a16:creationId xmlns:a16="http://schemas.microsoft.com/office/drawing/2014/main" id="{F11FFB65-3AE0-4E45-8494-B7E9CDDE2A73}"/>
+                <a16:creationId xmlns:a16="http://schemas.microsoft.com/office/drawing/2014/main" id="{45B4444B-116E-468E-B7AC-48199B2D98B4}"/>
               </a:ext>
             </a:extLst>
           </p:cNvPr>
@@ -15108,7 +15108,7 @@
           <p:cNvPr id="34" name="">
             <a:extLst xmlns:a="http://schemas.openxmlformats.org/drawingml/2006/main">
               <a:ext uri="{FF2B5EF4-FFF2-40B4-BE49-F238E27FC236}">
-                <a16:creationId xmlns:a16="http://schemas.microsoft.com/office/drawing/2014/main" id="{F21A54B1-EA63-44C5-8DF6-A16784938E99}"/>
+                <a16:creationId xmlns:a16="http://schemas.microsoft.com/office/drawing/2014/main" id="{62937A6A-4FA2-4CEE-96A5-1B9DB408B399}"/>
               </a:ext>
             </a:extLst>
           </p:cNvPr>
@@ -15153,7 +15153,7 @@
           <p:cNvPr id="35" name="">
             <a:extLst xmlns:a="http://schemas.openxmlformats.org/drawingml/2006/main">
               <a:ext uri="{FF2B5EF4-FFF2-40B4-BE49-F238E27FC236}">
-                <a16:creationId xmlns:a16="http://schemas.microsoft.com/office/drawing/2014/main" id="{5C022B71-8155-4855-AED3-4879886CB035}"/>
+                <a16:creationId xmlns:a16="http://schemas.microsoft.com/office/drawing/2014/main" id="{CE2401C5-47C8-40C9-AFB8-033FA89FC214}"/>
               </a:ext>
             </a:extLst>
           </p:cNvPr>
@@ -15198,7 +15198,7 @@
           <p:cNvPr id="36" name="">
             <a:extLst xmlns:a="http://schemas.openxmlformats.org/drawingml/2006/main">
               <a:ext uri="{FF2B5EF4-FFF2-40B4-BE49-F238E27FC236}">
-                <a16:creationId xmlns:a16="http://schemas.microsoft.com/office/drawing/2014/main" id="{9C786080-A9E2-4578-985C-A2621F8073ED}"/>
+                <a16:creationId xmlns:a16="http://schemas.microsoft.com/office/drawing/2014/main" id="{6F7050B5-E69B-40DD-8520-BD8498E20FBE}"/>
               </a:ext>
             </a:extLst>
           </p:cNvPr>
@@ -15233,7 +15233,7 @@
           <p:cNvPr id="37" name="">
             <a:extLst xmlns:a="http://schemas.openxmlformats.org/drawingml/2006/main">
               <a:ext uri="{FF2B5EF4-FFF2-40B4-BE49-F238E27FC236}">
-                <a16:creationId xmlns:a16="http://schemas.microsoft.com/office/drawing/2014/main" id="{577D3E60-4644-40DB-81F9-A8F355EE51A3}"/>
+                <a16:creationId xmlns:a16="http://schemas.microsoft.com/office/drawing/2014/main" id="{128CDE39-99DD-462F-AB4E-DF0135345092}"/>
               </a:ext>
             </a:extLst>
           </p:cNvPr>
@@ -15278,7 +15278,7 @@
           <p:cNvPr id="38" name="">
             <a:extLst xmlns:a="http://schemas.openxmlformats.org/drawingml/2006/main">
               <a:ext uri="{FF2B5EF4-FFF2-40B4-BE49-F238E27FC236}">
-                <a16:creationId xmlns:a16="http://schemas.microsoft.com/office/drawing/2014/main" id="{30F3BF75-7685-49CC-A794-AAA45D1EC329}"/>
+                <a16:creationId xmlns:a16="http://schemas.microsoft.com/office/drawing/2014/main" id="{3059BDD4-8626-4EA8-AAFF-A082E72B4BBF}"/>
               </a:ext>
             </a:extLst>
           </p:cNvPr>
@@ -15323,7 +15323,7 @@
           <p:cNvPr id="39" name="">
             <a:extLst xmlns:a="http://schemas.openxmlformats.org/drawingml/2006/main">
               <a:ext uri="{FF2B5EF4-FFF2-40B4-BE49-F238E27FC236}">
-                <a16:creationId xmlns:a16="http://schemas.microsoft.com/office/drawing/2014/main" id="{9ECED353-7D25-454B-8D8A-83DA82818958}"/>
+                <a16:creationId xmlns:a16="http://schemas.microsoft.com/office/drawing/2014/main" id="{C68C8445-60B3-4C2E-8BE8-A933F1A59CA0}"/>
               </a:ext>
             </a:extLst>
           </p:cNvPr>
@@ -15368,7 +15368,7 @@
           <p:cNvPr id="40" name="">
             <a:extLst xmlns:a="http://schemas.openxmlformats.org/drawingml/2006/main">
               <a:ext uri="{FF2B5EF4-FFF2-40B4-BE49-F238E27FC236}">
-                <a16:creationId xmlns:a16="http://schemas.microsoft.com/office/drawing/2014/main" id="{3DF6B319-85BF-417E-B3F6-7091D722DEA5}"/>
+                <a16:creationId xmlns:a16="http://schemas.microsoft.com/office/drawing/2014/main" id="{77728D96-1606-47C5-97AE-D3C7B57B3233}"/>
               </a:ext>
             </a:extLst>
           </p:cNvPr>
@@ -15403,7 +15403,7 @@
           <p:cNvPr id="41" name="">
             <a:extLst xmlns:a="http://schemas.openxmlformats.org/drawingml/2006/main">
               <a:ext uri="{FF2B5EF4-FFF2-40B4-BE49-F238E27FC236}">
-                <a16:creationId xmlns:a16="http://schemas.microsoft.com/office/drawing/2014/main" id="{B50B9AA7-0536-4AEA-AA5C-578DC82B5AB6}"/>
+                <a16:creationId xmlns:a16="http://schemas.microsoft.com/office/drawing/2014/main" id="{8BA29EB9-975A-42B0-AF08-D421E627CEC2}"/>
               </a:ext>
             </a:extLst>
           </p:cNvPr>
@@ -15448,7 +15448,7 @@
           <p:cNvPr id="42" name="">
             <a:extLst xmlns:a="http://schemas.openxmlformats.org/drawingml/2006/main">
               <a:ext uri="{FF2B5EF4-FFF2-40B4-BE49-F238E27FC236}">
-                <a16:creationId xmlns:a16="http://schemas.microsoft.com/office/drawing/2014/main" id="{B9ACAF96-BE0C-4F94-9A7A-BFFE45A22A05}"/>
+                <a16:creationId xmlns:a16="http://schemas.microsoft.com/office/drawing/2014/main" id="{C81C5C77-110E-4E35-A9CB-CFE555CA42CF}"/>
               </a:ext>
             </a:extLst>
           </p:cNvPr>
@@ -15493,7 +15493,7 @@
           <p:cNvPr id="43" name="">
             <a:extLst xmlns:a="http://schemas.openxmlformats.org/drawingml/2006/main">
               <a:ext uri="{FF2B5EF4-FFF2-40B4-BE49-F238E27FC236}">
-                <a16:creationId xmlns:a16="http://schemas.microsoft.com/office/drawing/2014/main" id="{D3D19397-89DD-4C24-BD6F-45D86F0B4A75}"/>
+                <a16:creationId xmlns:a16="http://schemas.microsoft.com/office/drawing/2014/main" id="{58DDE99F-46CA-405B-B2E2-7C2502D234B1}"/>
               </a:ext>
             </a:extLst>
           </p:cNvPr>
@@ -15538,7 +15538,7 @@
           <p:cNvPr id="44" name="">
             <a:extLst xmlns:a="http://schemas.openxmlformats.org/drawingml/2006/main">
               <a:ext uri="{FF2B5EF4-FFF2-40B4-BE49-F238E27FC236}">
-                <a16:creationId xmlns:a16="http://schemas.microsoft.com/office/drawing/2014/main" id="{B0DC994C-8054-49E2-B67F-464572FC3920}"/>
+                <a16:creationId xmlns:a16="http://schemas.microsoft.com/office/drawing/2014/main" id="{6410E078-7AFE-43CE-8B73-BA960E7BAE5E}"/>
               </a:ext>
             </a:extLst>
           </p:cNvPr>
@@ -15573,7 +15573,7 @@
           <p:cNvPr id="45" name="">
             <a:extLst xmlns:a="http://schemas.openxmlformats.org/drawingml/2006/main">
               <a:ext uri="{FF2B5EF4-FFF2-40B4-BE49-F238E27FC236}">
-                <a16:creationId xmlns:a16="http://schemas.microsoft.com/office/drawing/2014/main" id="{D0BE8879-16BD-4907-9E28-A8982216C263}"/>
+                <a16:creationId xmlns:a16="http://schemas.microsoft.com/office/drawing/2014/main" id="{91D8B5A7-2B56-472A-BD52-B98EF8E09753}"/>
               </a:ext>
             </a:extLst>
           </p:cNvPr>
@@ -15618,7 +15618,7 @@
           <p:cNvPr id="46" name="">
             <a:extLst xmlns:a="http://schemas.openxmlformats.org/drawingml/2006/main">
               <a:ext uri="{FF2B5EF4-FFF2-40B4-BE49-F238E27FC236}">
-                <a16:creationId xmlns:a16="http://schemas.microsoft.com/office/drawing/2014/main" id="{7E5B34B1-477C-49C7-A792-ED4A3B7B7BF8}"/>
+                <a16:creationId xmlns:a16="http://schemas.microsoft.com/office/drawing/2014/main" id="{3313B3B4-012C-4654-A032-2BE2F11CDDD0}"/>
               </a:ext>
             </a:extLst>
           </p:cNvPr>
@@ -15663,7 +15663,7 @@
           <p:cNvPr id="47" name="">
             <a:extLst xmlns:a="http://schemas.openxmlformats.org/drawingml/2006/main">
               <a:ext uri="{FF2B5EF4-FFF2-40B4-BE49-F238E27FC236}">
-                <a16:creationId xmlns:a16="http://schemas.microsoft.com/office/drawing/2014/main" id="{9C5ECBC3-96EF-4CAE-8E1E-DBD986C717A8}"/>
+                <a16:creationId xmlns:a16="http://schemas.microsoft.com/office/drawing/2014/main" id="{B7F961C3-059F-4969-9E48-E20D4B4D80E9}"/>
               </a:ext>
             </a:extLst>
           </p:cNvPr>
@@ -15708,7 +15708,7 @@
           <p:cNvPr id="48" name="">
             <a:extLst xmlns:a="http://schemas.openxmlformats.org/drawingml/2006/main">
               <a:ext uri="{FF2B5EF4-FFF2-40B4-BE49-F238E27FC236}">
-                <a16:creationId xmlns:a16="http://schemas.microsoft.com/office/drawing/2014/main" id="{5BFB42CC-A45E-4C5C-AED5-B206A104A1D3}"/>
+                <a16:creationId xmlns:a16="http://schemas.microsoft.com/office/drawing/2014/main" id="{C79FD192-6988-43C9-913E-54D72EE4BF2D}"/>
               </a:ext>
             </a:extLst>
           </p:cNvPr>
@@ -15751,7 +15751,7 @@
     </p:spTree>
     <p:extLst>
       <p:ext uri="{BB962C8B-B14F-4D97-AF65-F5344CB8AC3E}">
-        <p14:creationId xmlns:p14="http://schemas.microsoft.com/office/powerpoint/2010/main" val="382697208"/>
+        <p14:creationId xmlns:p14="http://schemas.microsoft.com/office/powerpoint/2010/main" val="276218064"/>
       </p:ext>
     </p:extLst>
   </p:cSld>
@@ -15775,7 +15775,7 @@
           <p:cNvPr id="88" name="">
             <a:extLst xmlns:a="http://schemas.openxmlformats.org/drawingml/2006/main">
               <a:ext uri="{FF2B5EF4-FFF2-40B4-BE49-F238E27FC236}">
-                <a16:creationId xmlns:a16="http://schemas.microsoft.com/office/drawing/2014/main" id="{B73019EF-0366-4948-9DE3-F3C9DC607116}"/>
+                <a16:creationId xmlns:a16="http://schemas.microsoft.com/office/drawing/2014/main" id="{517B12F0-E537-4F59-943B-B5AA29D5CBBE}"/>
               </a:ext>
             </a:extLst>
           </p:cNvPr>
@@ -15806,7 +15806,7 @@
           <p:cNvPr id="2" name="">
             <a:extLst xmlns:a="http://schemas.openxmlformats.org/drawingml/2006/main">
               <a:ext uri="{FF2B5EF4-FFF2-40B4-BE49-F238E27FC236}">
-                <a16:creationId xmlns:a16="http://schemas.microsoft.com/office/drawing/2014/main" id="{74C4ACAA-1E8D-444C-92F7-10E7551B97CF}"/>
+                <a16:creationId xmlns:a16="http://schemas.microsoft.com/office/drawing/2014/main" id="{7E6AB6A2-CB23-49C6-A2A8-692E097EE655}"/>
               </a:ext>
             </a:extLst>
           </p:cNvPr>
@@ -15851,7 +15851,7 @@
           <p:cNvPr id="3" name="">
             <a:extLst xmlns:a="http://schemas.openxmlformats.org/drawingml/2006/main">
               <a:ext uri="{FF2B5EF4-FFF2-40B4-BE49-F238E27FC236}">
-                <a16:creationId xmlns:a16="http://schemas.microsoft.com/office/drawing/2014/main" id="{9E828E09-2A33-455F-98C6-6DB5A503BAC0}"/>
+                <a16:creationId xmlns:a16="http://schemas.microsoft.com/office/drawing/2014/main" id="{5BF1AE0F-D235-4E2A-B2E0-62F667CA47BB}"/>
               </a:ext>
             </a:extLst>
           </p:cNvPr>
@@ -15896,7 +15896,7 @@
           <p:cNvPr id="4" name="">
             <a:extLst xmlns:a="http://schemas.openxmlformats.org/drawingml/2006/main">
               <a:ext uri="{FF2B5EF4-FFF2-40B4-BE49-F238E27FC236}">
-                <a16:creationId xmlns:a16="http://schemas.microsoft.com/office/drawing/2014/main" id="{7A6121EB-A662-4C82-B94D-4A5C4DCA224E}"/>
+                <a16:creationId xmlns:a16="http://schemas.microsoft.com/office/drawing/2014/main" id="{89ABC0CB-7E77-462F-8120-CC90C1C0A8F2}"/>
               </a:ext>
             </a:extLst>
           </p:cNvPr>
@@ -15941,7 +15941,7 @@
           <p:cNvPr id="5" name="">
             <a:extLst xmlns:a="http://schemas.openxmlformats.org/drawingml/2006/main">
               <a:ext uri="{FF2B5EF4-FFF2-40B4-BE49-F238E27FC236}">
-                <a16:creationId xmlns:a16="http://schemas.microsoft.com/office/drawing/2014/main" id="{C0AB3D8A-A8D4-43E1-8099-AA218CA099AD}"/>
+                <a16:creationId xmlns:a16="http://schemas.microsoft.com/office/drawing/2014/main" id="{9BC6FE89-1188-4773-B29E-9A1C0D9E5A49}"/>
               </a:ext>
             </a:extLst>
           </p:cNvPr>
@@ -15972,7 +15972,7 @@
           <p:cNvPr id="6" name="">
             <a:extLst xmlns:a="http://schemas.openxmlformats.org/drawingml/2006/main">
               <a:ext uri="{FF2B5EF4-FFF2-40B4-BE49-F238E27FC236}">
-                <a16:creationId xmlns:a16="http://schemas.microsoft.com/office/drawing/2014/main" id="{B9A1ED22-09E5-4178-B84A-077F6CE6CDAE}"/>
+                <a16:creationId xmlns:a16="http://schemas.microsoft.com/office/drawing/2014/main" id="{AEA62CDA-48F0-433F-AA8A-1A3881D82871}"/>
               </a:ext>
             </a:extLst>
           </p:cNvPr>
@@ -16003,7 +16003,7 @@
           <p:cNvPr id="7" name="">
             <a:extLst xmlns:a="http://schemas.openxmlformats.org/drawingml/2006/main">
               <a:ext uri="{FF2B5EF4-FFF2-40B4-BE49-F238E27FC236}">
-                <a16:creationId xmlns:a16="http://schemas.microsoft.com/office/drawing/2014/main" id="{BAD522CC-CDAE-4ABB-9204-4D17BF350A0D}"/>
+                <a16:creationId xmlns:a16="http://schemas.microsoft.com/office/drawing/2014/main" id="{11DD5E90-1C62-4C66-9FE9-3CA2FA8F7534}"/>
               </a:ext>
             </a:extLst>
           </p:cNvPr>
@@ -16048,7 +16048,7 @@
           <p:cNvPr id="8" name="">
             <a:extLst xmlns:a="http://schemas.openxmlformats.org/drawingml/2006/main">
               <a:ext uri="{FF2B5EF4-FFF2-40B4-BE49-F238E27FC236}">
-                <a16:creationId xmlns:a16="http://schemas.microsoft.com/office/drawing/2014/main" id="{E7D8E20A-4D44-4169-ABD6-AE05FD10ACC3}"/>
+                <a16:creationId xmlns:a16="http://schemas.microsoft.com/office/drawing/2014/main" id="{25B0D169-6434-487A-A365-4F9713593A52}"/>
               </a:ext>
             </a:extLst>
           </p:cNvPr>
@@ -16093,7 +16093,7 @@
           <p:cNvPr id="9" name="">
             <a:extLst xmlns:a="http://schemas.openxmlformats.org/drawingml/2006/main">
               <a:ext uri="{FF2B5EF4-FFF2-40B4-BE49-F238E27FC236}">
-                <a16:creationId xmlns:a16="http://schemas.microsoft.com/office/drawing/2014/main" id="{22B9F807-EB09-45AB-9563-E9FEDCBC0712}"/>
+                <a16:creationId xmlns:a16="http://schemas.microsoft.com/office/drawing/2014/main" id="{791EFC07-376E-4944-83E8-95C78A3FB326}"/>
               </a:ext>
             </a:extLst>
           </p:cNvPr>
@@ -16128,7 +16128,7 @@
           <p:cNvPr id="10" name="">
             <a:extLst xmlns:a="http://schemas.openxmlformats.org/drawingml/2006/main">
               <a:ext uri="{FF2B5EF4-FFF2-40B4-BE49-F238E27FC236}">
-                <a16:creationId xmlns:a16="http://schemas.microsoft.com/office/drawing/2014/main" id="{C18ECDB0-B251-4ED3-BF8B-C147F1AB8980}"/>
+                <a16:creationId xmlns:a16="http://schemas.microsoft.com/office/drawing/2014/main" id="{A3355BBA-D6A1-419D-8B24-4940FFE32E7B}"/>
               </a:ext>
             </a:extLst>
           </p:cNvPr>
@@ -16159,7 +16159,7 @@
           <p:cNvPr id="11" name="">
             <a:extLst xmlns:a="http://schemas.openxmlformats.org/drawingml/2006/main">
               <a:ext uri="{FF2B5EF4-FFF2-40B4-BE49-F238E27FC236}">
-                <a16:creationId xmlns:a16="http://schemas.microsoft.com/office/drawing/2014/main" id="{13D4AE8B-7DB8-4454-93AB-11A0FEE8A05C}"/>
+                <a16:creationId xmlns:a16="http://schemas.microsoft.com/office/drawing/2014/main" id="{628363BD-4272-4128-B12A-A09269564F96}"/>
               </a:ext>
             </a:extLst>
           </p:cNvPr>
@@ -16204,7 +16204,7 @@
           <p:cNvPr id="12" name="">
             <a:extLst xmlns:a="http://schemas.openxmlformats.org/drawingml/2006/main">
               <a:ext uri="{FF2B5EF4-FFF2-40B4-BE49-F238E27FC236}">
-                <a16:creationId xmlns:a16="http://schemas.microsoft.com/office/drawing/2014/main" id="{F6620AB1-E16C-4D18-BD27-99EF46346A9F}"/>
+                <a16:creationId xmlns:a16="http://schemas.microsoft.com/office/drawing/2014/main" id="{2FCCC6A2-F902-4F04-924B-515DCE1EF310}"/>
               </a:ext>
             </a:extLst>
           </p:cNvPr>
@@ -16249,7 +16249,7 @@
           <p:cNvPr id="13" name="">
             <a:extLst xmlns:a="http://schemas.openxmlformats.org/drawingml/2006/main">
               <a:ext uri="{FF2B5EF4-FFF2-40B4-BE49-F238E27FC236}">
-                <a16:creationId xmlns:a16="http://schemas.microsoft.com/office/drawing/2014/main" id="{63D944F3-1163-4036-AA51-6C272255ABC4}"/>
+                <a16:creationId xmlns:a16="http://schemas.microsoft.com/office/drawing/2014/main" id="{B1194D24-84C3-4A35-BE81-BE38C85BF7E5}"/>
               </a:ext>
             </a:extLst>
           </p:cNvPr>
@@ -16284,7 +16284,7 @@
           <p:cNvPr id="14" name="">
             <a:extLst xmlns:a="http://schemas.openxmlformats.org/drawingml/2006/main">
               <a:ext uri="{FF2B5EF4-FFF2-40B4-BE49-F238E27FC236}">
-                <a16:creationId xmlns:a16="http://schemas.microsoft.com/office/drawing/2014/main" id="{6D33545D-08A3-4A04-AA2E-A267D2613F88}"/>
+                <a16:creationId xmlns:a16="http://schemas.microsoft.com/office/drawing/2014/main" id="{28125E38-2D51-4214-A68A-D6E92D0FAA32}"/>
               </a:ext>
             </a:extLst>
           </p:cNvPr>
@@ -16315,7 +16315,7 @@
           <p:cNvPr id="15" name="">
             <a:extLst xmlns:a="http://schemas.openxmlformats.org/drawingml/2006/main">
               <a:ext uri="{FF2B5EF4-FFF2-40B4-BE49-F238E27FC236}">
-                <a16:creationId xmlns:a16="http://schemas.microsoft.com/office/drawing/2014/main" id="{A8BC85A6-6FE5-4CFD-8B73-DB5931DCBA36}"/>
+                <a16:creationId xmlns:a16="http://schemas.microsoft.com/office/drawing/2014/main" id="{275B6BC7-BAD9-421C-84B4-3F441B9612D2}"/>
               </a:ext>
             </a:extLst>
           </p:cNvPr>
@@ -16360,7 +16360,7 @@
           <p:cNvPr id="16" name="">
             <a:extLst xmlns:a="http://schemas.openxmlformats.org/drawingml/2006/main">
               <a:ext uri="{FF2B5EF4-FFF2-40B4-BE49-F238E27FC236}">
-                <a16:creationId xmlns:a16="http://schemas.microsoft.com/office/drawing/2014/main" id="{896F06C7-BC6F-46D7-9B67-DDC6D6D7562C}"/>
+                <a16:creationId xmlns:a16="http://schemas.microsoft.com/office/drawing/2014/main" id="{F3701C71-613C-49AD-A51D-C8040AE2706A}"/>
               </a:ext>
             </a:extLst>
           </p:cNvPr>
@@ -16405,7 +16405,7 @@
           <p:cNvPr id="17" name="">
             <a:extLst xmlns:a="http://schemas.openxmlformats.org/drawingml/2006/main">
               <a:ext uri="{FF2B5EF4-FFF2-40B4-BE49-F238E27FC236}">
-                <a16:creationId xmlns:a16="http://schemas.microsoft.com/office/drawing/2014/main" id="{8A54E1F9-3A8E-4A78-BA62-300AC6E95FD4}"/>
+                <a16:creationId xmlns:a16="http://schemas.microsoft.com/office/drawing/2014/main" id="{7540780F-4687-4914-8191-15E12BA6CB95}"/>
               </a:ext>
             </a:extLst>
           </p:cNvPr>
@@ -16440,7 +16440,7 @@
           <p:cNvPr id="18" name="">
             <a:extLst xmlns:a="http://schemas.openxmlformats.org/drawingml/2006/main">
               <a:ext uri="{FF2B5EF4-FFF2-40B4-BE49-F238E27FC236}">
-                <a16:creationId xmlns:a16="http://schemas.microsoft.com/office/drawing/2014/main" id="{121D0E4D-09E7-4264-98D8-DEF3A785A63B}"/>
+                <a16:creationId xmlns:a16="http://schemas.microsoft.com/office/drawing/2014/main" id="{D1188944-A557-47FC-82F0-85FA4FF5B677}"/>
               </a:ext>
             </a:extLst>
           </p:cNvPr>
@@ -16471,7 +16471,7 @@
           <p:cNvPr id="19" name="">
             <a:extLst xmlns:a="http://schemas.openxmlformats.org/drawingml/2006/main">
               <a:ext uri="{FF2B5EF4-FFF2-40B4-BE49-F238E27FC236}">
-                <a16:creationId xmlns:a16="http://schemas.microsoft.com/office/drawing/2014/main" id="{372A5E76-9813-4445-874A-DA159258461A}"/>
+                <a16:creationId xmlns:a16="http://schemas.microsoft.com/office/drawing/2014/main" id="{C5A54255-6ABE-46FC-8D32-B60F4DA1C3DA}"/>
               </a:ext>
             </a:extLst>
           </p:cNvPr>
@@ -16516,7 +16516,7 @@
           <p:cNvPr id="20" name="">
             <a:extLst xmlns:a="http://schemas.openxmlformats.org/drawingml/2006/main">
               <a:ext uri="{FF2B5EF4-FFF2-40B4-BE49-F238E27FC236}">
-                <a16:creationId xmlns:a16="http://schemas.microsoft.com/office/drawing/2014/main" id="{BEDCD45C-EDED-4375-AFF1-54697EDBEAE8}"/>
+                <a16:creationId xmlns:a16="http://schemas.microsoft.com/office/drawing/2014/main" id="{91B3DD3B-0302-4E1C-9C0E-F1E2FC2FA9C4}"/>
               </a:ext>
             </a:extLst>
           </p:cNvPr>
@@ -16561,7 +16561,7 @@
           <p:cNvPr id="21" name="">
             <a:extLst xmlns:a="http://schemas.openxmlformats.org/drawingml/2006/main">
               <a:ext uri="{FF2B5EF4-FFF2-40B4-BE49-F238E27FC236}">
-                <a16:creationId xmlns:a16="http://schemas.microsoft.com/office/drawing/2014/main" id="{6FF7E8D5-B0A4-4EEF-96B2-49634D41BB8A}"/>
+                <a16:creationId xmlns:a16="http://schemas.microsoft.com/office/drawing/2014/main" id="{4C609D6B-D3BD-44A5-9E9D-36EC85D6C354}"/>
               </a:ext>
             </a:extLst>
           </p:cNvPr>
@@ -16596,7 +16596,7 @@
           <p:cNvPr id="22" name="">
             <a:extLst xmlns:a="http://schemas.openxmlformats.org/drawingml/2006/main">
               <a:ext uri="{FF2B5EF4-FFF2-40B4-BE49-F238E27FC236}">
-                <a16:creationId xmlns:a16="http://schemas.microsoft.com/office/drawing/2014/main" id="{356E64D9-CCA2-49F5-A627-BCF64FEC3131}"/>
+                <a16:creationId xmlns:a16="http://schemas.microsoft.com/office/drawing/2014/main" id="{01944CE6-ADD2-48C3-8813-721A65D8C284}"/>
               </a:ext>
             </a:extLst>
           </p:cNvPr>
@@ -16627,7 +16627,7 @@
           <p:cNvPr id="23" name="">
             <a:extLst xmlns:a="http://schemas.openxmlformats.org/drawingml/2006/main">
               <a:ext uri="{FF2B5EF4-FFF2-40B4-BE49-F238E27FC236}">
-                <a16:creationId xmlns:a16="http://schemas.microsoft.com/office/drawing/2014/main" id="{C9C05986-9280-43EF-8B2B-7F3081EB7EA3}"/>
+                <a16:creationId xmlns:a16="http://schemas.microsoft.com/office/drawing/2014/main" id="{3190A39B-A70E-4999-9E4C-63A20D4F511B}"/>
               </a:ext>
             </a:extLst>
           </p:cNvPr>
@@ -16672,7 +16672,7 @@
           <p:cNvPr id="24" name="">
             <a:extLst xmlns:a="http://schemas.openxmlformats.org/drawingml/2006/main">
               <a:ext uri="{FF2B5EF4-FFF2-40B4-BE49-F238E27FC236}">
-                <a16:creationId xmlns:a16="http://schemas.microsoft.com/office/drawing/2014/main" id="{946FFFF1-281F-4458-A09D-11F0CF19B926}"/>
+                <a16:creationId xmlns:a16="http://schemas.microsoft.com/office/drawing/2014/main" id="{D7E225BC-863D-42DA-B30B-5E0CD3A76F16}"/>
               </a:ext>
             </a:extLst>
           </p:cNvPr>
@@ -16717,7 +16717,7 @@
           <p:cNvPr id="25" name="">
             <a:extLst xmlns:a="http://schemas.openxmlformats.org/drawingml/2006/main">
               <a:ext uri="{FF2B5EF4-FFF2-40B4-BE49-F238E27FC236}">
-                <a16:creationId xmlns:a16="http://schemas.microsoft.com/office/drawing/2014/main" id="{F0BE71C8-99FF-4A24-AFD3-2E86C8523F50}"/>
+                <a16:creationId xmlns:a16="http://schemas.microsoft.com/office/drawing/2014/main" id="{D0283AE9-257A-450F-B4BF-232410FA0BA8}"/>
               </a:ext>
             </a:extLst>
           </p:cNvPr>
@@ -16752,7 +16752,7 @@
           <p:cNvPr id="26" name="">
             <a:extLst xmlns:a="http://schemas.openxmlformats.org/drawingml/2006/main">
               <a:ext uri="{FF2B5EF4-FFF2-40B4-BE49-F238E27FC236}">
-                <a16:creationId xmlns:a16="http://schemas.microsoft.com/office/drawing/2014/main" id="{E1C6A734-97A8-4DD4-A3B6-59086A23F4A5}"/>
+                <a16:creationId xmlns:a16="http://schemas.microsoft.com/office/drawing/2014/main" id="{ED7625F8-DA8E-44F5-BC4A-D83632C2E8D7}"/>
               </a:ext>
             </a:extLst>
           </p:cNvPr>
@@ -16783,7 +16783,7 @@
           <p:cNvPr id="27" name="">
             <a:extLst xmlns:a="http://schemas.openxmlformats.org/drawingml/2006/main">
               <a:ext uri="{FF2B5EF4-FFF2-40B4-BE49-F238E27FC236}">
-                <a16:creationId xmlns:a16="http://schemas.microsoft.com/office/drawing/2014/main" id="{DED30815-44B3-4045-9D14-AF1B2D5B9DB0}"/>
+                <a16:creationId xmlns:a16="http://schemas.microsoft.com/office/drawing/2014/main" id="{4FBF37E3-F893-48AA-8A11-AAE04C9B3154}"/>
               </a:ext>
             </a:extLst>
           </p:cNvPr>
@@ -16828,7 +16828,7 @@
           <p:cNvPr id="28" name="">
             <a:extLst xmlns:a="http://schemas.openxmlformats.org/drawingml/2006/main">
               <a:ext uri="{FF2B5EF4-FFF2-40B4-BE49-F238E27FC236}">
-                <a16:creationId xmlns:a16="http://schemas.microsoft.com/office/drawing/2014/main" id="{F2E03188-D780-4406-A3AC-A5D0A80119E3}"/>
+                <a16:creationId xmlns:a16="http://schemas.microsoft.com/office/drawing/2014/main" id="{41037466-DC3D-43C8-AE54-F777BED524A8}"/>
               </a:ext>
             </a:extLst>
           </p:cNvPr>
@@ -16873,7 +16873,7 @@
           <p:cNvPr id="29" name="">
             <a:extLst xmlns:a="http://schemas.openxmlformats.org/drawingml/2006/main">
               <a:ext uri="{FF2B5EF4-FFF2-40B4-BE49-F238E27FC236}">
-                <a16:creationId xmlns:a16="http://schemas.microsoft.com/office/drawing/2014/main" id="{6A21824A-3E5B-40A9-B981-77BCA6C073F2}"/>
+                <a16:creationId xmlns:a16="http://schemas.microsoft.com/office/drawing/2014/main" id="{38271FF1-C7CD-4AF2-9DB4-D565D43EDA29}"/>
               </a:ext>
             </a:extLst>
           </p:cNvPr>
@@ -16908,7 +16908,7 @@
           <p:cNvPr id="30" name="">
             <a:extLst xmlns:a="http://schemas.openxmlformats.org/drawingml/2006/main">
               <a:ext uri="{FF2B5EF4-FFF2-40B4-BE49-F238E27FC236}">
-                <a16:creationId xmlns:a16="http://schemas.microsoft.com/office/drawing/2014/main" id="{BDAF5FCA-D320-464B-AE09-48063CB66DCA}"/>
+                <a16:creationId xmlns:a16="http://schemas.microsoft.com/office/drawing/2014/main" id="{416A69FD-DDFA-4DBE-A36F-1AACCBDFE254}"/>
               </a:ext>
             </a:extLst>
           </p:cNvPr>
@@ -16939,7 +16939,7 @@
           <p:cNvPr id="31" name="">
             <a:extLst xmlns:a="http://schemas.openxmlformats.org/drawingml/2006/main">
               <a:ext uri="{FF2B5EF4-FFF2-40B4-BE49-F238E27FC236}">
-                <a16:creationId xmlns:a16="http://schemas.microsoft.com/office/drawing/2014/main" id="{20330A8C-9BD2-4D57-ADF2-6CB8D1F7697C}"/>
+                <a16:creationId xmlns:a16="http://schemas.microsoft.com/office/drawing/2014/main" id="{31B3ABA7-521C-4EB9-A058-A441BA85A626}"/>
               </a:ext>
             </a:extLst>
           </p:cNvPr>
@@ -16984,7 +16984,7 @@
           <p:cNvPr id="32" name="">
             <a:extLst xmlns:a="http://schemas.openxmlformats.org/drawingml/2006/main">
               <a:ext uri="{FF2B5EF4-FFF2-40B4-BE49-F238E27FC236}">
-                <a16:creationId xmlns:a16="http://schemas.microsoft.com/office/drawing/2014/main" id="{5477A217-0F4E-47C3-8D23-09F8F53CEA66}"/>
+                <a16:creationId xmlns:a16="http://schemas.microsoft.com/office/drawing/2014/main" id="{B8CFE137-199A-4146-B552-BAAF4D4B0A4A}"/>
               </a:ext>
             </a:extLst>
           </p:cNvPr>
@@ -17029,7 +17029,7 @@
           <p:cNvPr id="33" name="">
             <a:extLst xmlns:a="http://schemas.openxmlformats.org/drawingml/2006/main">
               <a:ext uri="{FF2B5EF4-FFF2-40B4-BE49-F238E27FC236}">
-                <a16:creationId xmlns:a16="http://schemas.microsoft.com/office/drawing/2014/main" id="{9428EE77-181A-4557-BDA9-8FEE4E7A90DE}"/>
+                <a16:creationId xmlns:a16="http://schemas.microsoft.com/office/drawing/2014/main" id="{582B60E5-88D6-4587-8CA3-3A0839C42D21}"/>
               </a:ext>
             </a:extLst>
           </p:cNvPr>
@@ -17064,7 +17064,7 @@
           <p:cNvPr id="34" name="">
             <a:extLst xmlns:a="http://schemas.openxmlformats.org/drawingml/2006/main">
               <a:ext uri="{FF2B5EF4-FFF2-40B4-BE49-F238E27FC236}">
-                <a16:creationId xmlns:a16="http://schemas.microsoft.com/office/drawing/2014/main" id="{90D19B03-51E2-4B52-A586-93180C7E8ECE}"/>
+                <a16:creationId xmlns:a16="http://schemas.microsoft.com/office/drawing/2014/main" id="{E64F3EDD-EA44-40AE-81E7-0C6FDEF98C3A}"/>
               </a:ext>
             </a:extLst>
           </p:cNvPr>
@@ -17095,7 +17095,7 @@
           <p:cNvPr id="35" name="">
             <a:extLst xmlns:a="http://schemas.openxmlformats.org/drawingml/2006/main">
               <a:ext uri="{FF2B5EF4-FFF2-40B4-BE49-F238E27FC236}">
-                <a16:creationId xmlns:a16="http://schemas.microsoft.com/office/drawing/2014/main" id="{698CA530-9888-46EB-9851-188CE9ECD179}"/>
+                <a16:creationId xmlns:a16="http://schemas.microsoft.com/office/drawing/2014/main" id="{DB43903B-4FEF-4ABA-B599-E4BB1344571B}"/>
               </a:ext>
             </a:extLst>
           </p:cNvPr>
@@ -17140,7 +17140,7 @@
           <p:cNvPr id="36" name="">
             <a:extLst xmlns:a="http://schemas.openxmlformats.org/drawingml/2006/main">
               <a:ext uri="{FF2B5EF4-FFF2-40B4-BE49-F238E27FC236}">
-                <a16:creationId xmlns:a16="http://schemas.microsoft.com/office/drawing/2014/main" id="{14F7B48E-0FA3-4216-94C8-0FC66D72F0A3}"/>
+                <a16:creationId xmlns:a16="http://schemas.microsoft.com/office/drawing/2014/main" id="{78FB70D4-3EDB-4BEE-86A1-CB543B561579}"/>
               </a:ext>
             </a:extLst>
           </p:cNvPr>
@@ -17185,7 +17185,7 @@
           <p:cNvPr id="37" name="">
             <a:extLst xmlns:a="http://schemas.openxmlformats.org/drawingml/2006/main">
               <a:ext uri="{FF2B5EF4-FFF2-40B4-BE49-F238E27FC236}">
-                <a16:creationId xmlns:a16="http://schemas.microsoft.com/office/drawing/2014/main" id="{157B74AB-31A6-4A4D-BF72-F67CBF35E60A}"/>
+                <a16:creationId xmlns:a16="http://schemas.microsoft.com/office/drawing/2014/main" id="{869BF569-B298-4551-A503-86CAA4702DB4}"/>
               </a:ext>
             </a:extLst>
           </p:cNvPr>
@@ -17220,7 +17220,7 @@
           <p:cNvPr id="38" name="">
             <a:extLst xmlns:a="http://schemas.openxmlformats.org/drawingml/2006/main">
               <a:ext uri="{FF2B5EF4-FFF2-40B4-BE49-F238E27FC236}">
-                <a16:creationId xmlns:a16="http://schemas.microsoft.com/office/drawing/2014/main" id="{7EBE2326-6FC8-4F7C-875A-0B3741B508F6}"/>
+                <a16:creationId xmlns:a16="http://schemas.microsoft.com/office/drawing/2014/main" id="{A5A052F8-7DE7-4163-8527-3CB7DE6422F3}"/>
               </a:ext>
             </a:extLst>
           </p:cNvPr>
@@ -17251,7 +17251,7 @@
           <p:cNvPr id="39" name="">
             <a:extLst xmlns:a="http://schemas.openxmlformats.org/drawingml/2006/main">
               <a:ext uri="{FF2B5EF4-FFF2-40B4-BE49-F238E27FC236}">
-                <a16:creationId xmlns:a16="http://schemas.microsoft.com/office/drawing/2014/main" id="{D31FD3C9-C9F1-4203-958A-686B66DB535B}"/>
+                <a16:creationId xmlns:a16="http://schemas.microsoft.com/office/drawing/2014/main" id="{7A40727A-6875-462C-BB0A-3CCA26EEA3E8}"/>
               </a:ext>
             </a:extLst>
           </p:cNvPr>
@@ -17296,7 +17296,7 @@
           <p:cNvPr id="40" name="">
             <a:extLst xmlns:a="http://schemas.openxmlformats.org/drawingml/2006/main">
               <a:ext uri="{FF2B5EF4-FFF2-40B4-BE49-F238E27FC236}">
-                <a16:creationId xmlns:a16="http://schemas.microsoft.com/office/drawing/2014/main" id="{DA99BF75-826A-45B8-AB75-04740FDCFB8D}"/>
+                <a16:creationId xmlns:a16="http://schemas.microsoft.com/office/drawing/2014/main" id="{AC672F3B-080F-42F0-8E99-60A7B83E5F42}"/>
               </a:ext>
             </a:extLst>
           </p:cNvPr>
@@ -17341,7 +17341,7 @@
           <p:cNvPr id="41" name="">
             <a:extLst xmlns:a="http://schemas.openxmlformats.org/drawingml/2006/main">
               <a:ext uri="{FF2B5EF4-FFF2-40B4-BE49-F238E27FC236}">
-                <a16:creationId xmlns:a16="http://schemas.microsoft.com/office/drawing/2014/main" id="{F5DFD114-676A-4D34-B2C6-CFE757F2FA2C}"/>
+                <a16:creationId xmlns:a16="http://schemas.microsoft.com/office/drawing/2014/main" id="{A57B19A4-7C09-4EA6-8A68-B9795F639BF5}"/>
               </a:ext>
             </a:extLst>
           </p:cNvPr>
@@ -17376,7 +17376,7 @@
           <p:cNvPr id="42" name="">
             <a:extLst xmlns:a="http://schemas.openxmlformats.org/drawingml/2006/main">
               <a:ext uri="{FF2B5EF4-FFF2-40B4-BE49-F238E27FC236}">
-                <a16:creationId xmlns:a16="http://schemas.microsoft.com/office/drawing/2014/main" id="{7CC93234-F66F-446A-B83F-38D05B9463F9}"/>
+                <a16:creationId xmlns:a16="http://schemas.microsoft.com/office/drawing/2014/main" id="{4B30C7BF-98C3-4C4D-B84A-E787113A13AC}"/>
               </a:ext>
             </a:extLst>
           </p:cNvPr>
@@ -17407,7 +17407,7 @@
           <p:cNvPr id="43" name="">
             <a:extLst xmlns:a="http://schemas.openxmlformats.org/drawingml/2006/main">
               <a:ext uri="{FF2B5EF4-FFF2-40B4-BE49-F238E27FC236}">
-                <a16:creationId xmlns:a16="http://schemas.microsoft.com/office/drawing/2014/main" id="{5CD00425-501A-43F0-A8EF-43EEF980BD1E}"/>
+                <a16:creationId xmlns:a16="http://schemas.microsoft.com/office/drawing/2014/main" id="{C71146FB-6C6C-45B0-B424-9EEDF03E9157}"/>
               </a:ext>
             </a:extLst>
           </p:cNvPr>
@@ -17452,7 +17452,7 @@
           <p:cNvPr id="44" name="">
             <a:extLst xmlns:a="http://schemas.openxmlformats.org/drawingml/2006/main">
               <a:ext uri="{FF2B5EF4-FFF2-40B4-BE49-F238E27FC236}">
-                <a16:creationId xmlns:a16="http://schemas.microsoft.com/office/drawing/2014/main" id="{2EA393A2-F8E4-4D4C-B678-7F1423D6B247}"/>
+                <a16:creationId xmlns:a16="http://schemas.microsoft.com/office/drawing/2014/main" id="{4663129A-7E8B-49E9-AEF0-C8B139686DFC}"/>
               </a:ext>
             </a:extLst>
           </p:cNvPr>
@@ -17497,7 +17497,7 @@
           <p:cNvPr id="45" name="">
             <a:extLst xmlns:a="http://schemas.openxmlformats.org/drawingml/2006/main">
               <a:ext uri="{FF2B5EF4-FFF2-40B4-BE49-F238E27FC236}">
-                <a16:creationId xmlns:a16="http://schemas.microsoft.com/office/drawing/2014/main" id="{13B21DA2-E42F-4DA5-A81E-6DD18A850B3D}"/>
+                <a16:creationId xmlns:a16="http://schemas.microsoft.com/office/drawing/2014/main" id="{0450CA3F-BD3B-472D-9D23-E4EF522F29E2}"/>
               </a:ext>
             </a:extLst>
           </p:cNvPr>
@@ -17532,7 +17532,7 @@
           <p:cNvPr id="46" name="">
             <a:extLst xmlns:a="http://schemas.openxmlformats.org/drawingml/2006/main">
               <a:ext uri="{FF2B5EF4-FFF2-40B4-BE49-F238E27FC236}">
-                <a16:creationId xmlns:a16="http://schemas.microsoft.com/office/drawing/2014/main" id="{D7A12011-0765-4FBC-A5D4-0A14E970F17E}"/>
+                <a16:creationId xmlns:a16="http://schemas.microsoft.com/office/drawing/2014/main" id="{3A0E6EFF-4741-4231-B844-44D916991893}"/>
               </a:ext>
             </a:extLst>
           </p:cNvPr>
@@ -17563,7 +17563,7 @@
           <p:cNvPr id="47" name="">
             <a:extLst xmlns:a="http://schemas.openxmlformats.org/drawingml/2006/main">
               <a:ext uri="{FF2B5EF4-FFF2-40B4-BE49-F238E27FC236}">
-                <a16:creationId xmlns:a16="http://schemas.microsoft.com/office/drawing/2014/main" id="{A74CBD57-9A58-4980-9A95-607A9DA01D32}"/>
+                <a16:creationId xmlns:a16="http://schemas.microsoft.com/office/drawing/2014/main" id="{24F8E122-21B7-4EB3-AB64-1F642AC78B81}"/>
               </a:ext>
             </a:extLst>
           </p:cNvPr>
@@ -17608,7 +17608,7 @@
           <p:cNvPr id="48" name="">
             <a:extLst xmlns:a="http://schemas.openxmlformats.org/drawingml/2006/main">
               <a:ext uri="{FF2B5EF4-FFF2-40B4-BE49-F238E27FC236}">
-                <a16:creationId xmlns:a16="http://schemas.microsoft.com/office/drawing/2014/main" id="{5E7B22E1-A877-4A89-8841-FE75B571E7B1}"/>
+                <a16:creationId xmlns:a16="http://schemas.microsoft.com/office/drawing/2014/main" id="{36FF801D-5AA2-4927-A53C-649A6E7DAD59}"/>
               </a:ext>
             </a:extLst>
           </p:cNvPr>
@@ -17653,7 +17653,7 @@
           <p:cNvPr id="49" name="">
             <a:extLst xmlns:a="http://schemas.openxmlformats.org/drawingml/2006/main">
               <a:ext uri="{FF2B5EF4-FFF2-40B4-BE49-F238E27FC236}">
-                <a16:creationId xmlns:a16="http://schemas.microsoft.com/office/drawing/2014/main" id="{6B8CCDC7-B9E1-4730-9D3D-0F6439441BAF}"/>
+                <a16:creationId xmlns:a16="http://schemas.microsoft.com/office/drawing/2014/main" id="{21539016-1169-4E00-82E5-E8B6272C9291}"/>
               </a:ext>
             </a:extLst>
           </p:cNvPr>
@@ -17688,7 +17688,7 @@
           <p:cNvPr id="50" name="">
             <a:extLst xmlns:a="http://schemas.openxmlformats.org/drawingml/2006/main">
               <a:ext uri="{FF2B5EF4-FFF2-40B4-BE49-F238E27FC236}">
-                <a16:creationId xmlns:a16="http://schemas.microsoft.com/office/drawing/2014/main" id="{668972D6-A4DA-4453-99F5-520240667203}"/>
+                <a16:creationId xmlns:a16="http://schemas.microsoft.com/office/drawing/2014/main" id="{9214E148-DA90-422D-BCE4-4CB08B10A4DB}"/>
               </a:ext>
             </a:extLst>
           </p:cNvPr>
@@ -17719,7 +17719,7 @@
           <p:cNvPr id="51" name="">
             <a:extLst xmlns:a="http://schemas.openxmlformats.org/drawingml/2006/main">
               <a:ext uri="{FF2B5EF4-FFF2-40B4-BE49-F238E27FC236}">
-                <a16:creationId xmlns:a16="http://schemas.microsoft.com/office/drawing/2014/main" id="{505AABFD-4A23-4206-AE49-8DB2B9DF4A51}"/>
+                <a16:creationId xmlns:a16="http://schemas.microsoft.com/office/drawing/2014/main" id="{06F8226D-61D8-41B5-82E3-8352D8FEF0D4}"/>
               </a:ext>
             </a:extLst>
           </p:cNvPr>
@@ -17764,7 +17764,7 @@
           <p:cNvPr id="52" name="">
             <a:extLst xmlns:a="http://schemas.openxmlformats.org/drawingml/2006/main">
               <a:ext uri="{FF2B5EF4-FFF2-40B4-BE49-F238E27FC236}">
-                <a16:creationId xmlns:a16="http://schemas.microsoft.com/office/drawing/2014/main" id="{922DE971-7E1B-4079-B94A-D8000765CBEB}"/>
+                <a16:creationId xmlns:a16="http://schemas.microsoft.com/office/drawing/2014/main" id="{BED05500-D9A0-408B-99C6-53A39A876B63}"/>
               </a:ext>
             </a:extLst>
           </p:cNvPr>
@@ -17809,7 +17809,7 @@
           <p:cNvPr id="53" name="">
             <a:extLst xmlns:a="http://schemas.openxmlformats.org/drawingml/2006/main">
               <a:ext uri="{FF2B5EF4-FFF2-40B4-BE49-F238E27FC236}">
-                <a16:creationId xmlns:a16="http://schemas.microsoft.com/office/drawing/2014/main" id="{E0CA08D6-ECE4-4944-B6EB-6A9F8FF925E0}"/>
+                <a16:creationId xmlns:a16="http://schemas.microsoft.com/office/drawing/2014/main" id="{69FB3979-21E2-4AEB-91B1-01535E402425}"/>
               </a:ext>
             </a:extLst>
           </p:cNvPr>
@@ -17844,7 +17844,7 @@
           <p:cNvPr id="54" name="">
             <a:extLst xmlns:a="http://schemas.openxmlformats.org/drawingml/2006/main">
               <a:ext uri="{FF2B5EF4-FFF2-40B4-BE49-F238E27FC236}">
-                <a16:creationId xmlns:a16="http://schemas.microsoft.com/office/drawing/2014/main" id="{4551AB7A-EDF8-48F5-A0E3-9A8DE0E942B8}"/>
+                <a16:creationId xmlns:a16="http://schemas.microsoft.com/office/drawing/2014/main" id="{1C989230-CA7E-4FD7-A24F-6D6700CA106C}"/>
               </a:ext>
             </a:extLst>
           </p:cNvPr>
@@ -17875,7 +17875,7 @@
           <p:cNvPr id="55" name="">
             <a:extLst xmlns:a="http://schemas.openxmlformats.org/drawingml/2006/main">
               <a:ext uri="{FF2B5EF4-FFF2-40B4-BE49-F238E27FC236}">
-                <a16:creationId xmlns:a16="http://schemas.microsoft.com/office/drawing/2014/main" id="{80743E48-B847-41F1-A6F2-7E59FD07A91F}"/>
+                <a16:creationId xmlns:a16="http://schemas.microsoft.com/office/drawing/2014/main" id="{4586A64F-BA6E-4637-8CCE-EDF8569530AE}"/>
               </a:ext>
             </a:extLst>
           </p:cNvPr>
@@ -17920,7 +17920,7 @@
           <p:cNvPr id="56" name="">
             <a:extLst xmlns:a="http://schemas.openxmlformats.org/drawingml/2006/main">
               <a:ext uri="{FF2B5EF4-FFF2-40B4-BE49-F238E27FC236}">
-                <a16:creationId xmlns:a16="http://schemas.microsoft.com/office/drawing/2014/main" id="{5AC29595-46B8-4D8B-8745-ECA8575C2790}"/>
+                <a16:creationId xmlns:a16="http://schemas.microsoft.com/office/drawing/2014/main" id="{8160E1A4-3091-47F3-B2DF-5847F7721DE6}"/>
               </a:ext>
             </a:extLst>
           </p:cNvPr>
@@ -17965,7 +17965,7 @@
           <p:cNvPr id="57" name="">
             <a:extLst xmlns:a="http://schemas.openxmlformats.org/drawingml/2006/main">
               <a:ext uri="{FF2B5EF4-FFF2-40B4-BE49-F238E27FC236}">
-                <a16:creationId xmlns:a16="http://schemas.microsoft.com/office/drawing/2014/main" id="{5327F0E6-F57E-4F4A-AF93-D69826E6B267}"/>
+                <a16:creationId xmlns:a16="http://schemas.microsoft.com/office/drawing/2014/main" id="{74224AD5-91FC-4A20-9476-379B66F4AFEB}"/>
               </a:ext>
             </a:extLst>
           </p:cNvPr>
@@ -18000,7 +18000,7 @@
           <p:cNvPr id="58" name="">
             <a:extLst xmlns:a="http://schemas.openxmlformats.org/drawingml/2006/main">
               <a:ext uri="{FF2B5EF4-FFF2-40B4-BE49-F238E27FC236}">
-                <a16:creationId xmlns:a16="http://schemas.microsoft.com/office/drawing/2014/main" id="{D05549D2-32C8-4082-8E4C-0874EB95E522}"/>
+                <a16:creationId xmlns:a16="http://schemas.microsoft.com/office/drawing/2014/main" id="{4079F23F-E967-4EE4-8C02-081D0931345E}"/>
               </a:ext>
             </a:extLst>
           </p:cNvPr>
@@ -18031,7 +18031,7 @@
           <p:cNvPr id="59" name="">
             <a:extLst xmlns:a="http://schemas.openxmlformats.org/drawingml/2006/main">
               <a:ext uri="{FF2B5EF4-FFF2-40B4-BE49-F238E27FC236}">
-                <a16:creationId xmlns:a16="http://schemas.microsoft.com/office/drawing/2014/main" id="{8B2F6E1D-D506-4E46-9899-2D1A172111C9}"/>
+                <a16:creationId xmlns:a16="http://schemas.microsoft.com/office/drawing/2014/main" id="{600ED5A2-C4F5-4385-9AB9-83B3430CAACA}"/>
               </a:ext>
             </a:extLst>
           </p:cNvPr>
@@ -18076,7 +18076,7 @@
           <p:cNvPr id="60" name="">
             <a:extLst xmlns:a="http://schemas.openxmlformats.org/drawingml/2006/main">
               <a:ext uri="{FF2B5EF4-FFF2-40B4-BE49-F238E27FC236}">
-                <a16:creationId xmlns:a16="http://schemas.microsoft.com/office/drawing/2014/main" id="{F4BE467A-D2F7-4344-8708-9C37C3E26869}"/>
+                <a16:creationId xmlns:a16="http://schemas.microsoft.com/office/drawing/2014/main" id="{E7A750C1-3FBB-44BA-8EA5-F2174419E575}"/>
               </a:ext>
             </a:extLst>
           </p:cNvPr>
@@ -18121,7 +18121,7 @@
           <p:cNvPr id="61" name="">
             <a:extLst xmlns:a="http://schemas.openxmlformats.org/drawingml/2006/main">
               <a:ext uri="{FF2B5EF4-FFF2-40B4-BE49-F238E27FC236}">
-                <a16:creationId xmlns:a16="http://schemas.microsoft.com/office/drawing/2014/main" id="{BCAB7B4D-8AB2-44C0-B044-ADCB7FC0576A}"/>
+                <a16:creationId xmlns:a16="http://schemas.microsoft.com/office/drawing/2014/main" id="{670E8F45-5109-412F-B093-68867BD868B6}"/>
               </a:ext>
             </a:extLst>
           </p:cNvPr>
@@ -18156,7 +18156,7 @@
           <p:cNvPr id="62" name="">
             <a:extLst xmlns:a="http://schemas.openxmlformats.org/drawingml/2006/main">
               <a:ext uri="{FF2B5EF4-FFF2-40B4-BE49-F238E27FC236}">
-                <a16:creationId xmlns:a16="http://schemas.microsoft.com/office/drawing/2014/main" id="{83500423-A90A-4F80-A99A-66A9F9F723AB}"/>
+                <a16:creationId xmlns:a16="http://schemas.microsoft.com/office/drawing/2014/main" id="{33D51AAD-CAA8-45DD-A180-1566B45664B5}"/>
               </a:ext>
             </a:extLst>
           </p:cNvPr>
@@ -18187,7 +18187,7 @@
           <p:cNvPr id="63" name="">
             <a:extLst xmlns:a="http://schemas.openxmlformats.org/drawingml/2006/main">
               <a:ext uri="{FF2B5EF4-FFF2-40B4-BE49-F238E27FC236}">
-                <a16:creationId xmlns:a16="http://schemas.microsoft.com/office/drawing/2014/main" id="{926910A5-6FCE-4F33-A598-F2A130B71CDC}"/>
+                <a16:creationId xmlns:a16="http://schemas.microsoft.com/office/drawing/2014/main" id="{9676FB67-3F15-4401-9F94-EEF00B993A98}"/>
               </a:ext>
             </a:extLst>
           </p:cNvPr>
@@ -18232,7 +18232,7 @@
           <p:cNvPr id="64" name="">
             <a:extLst xmlns:a="http://schemas.openxmlformats.org/drawingml/2006/main">
               <a:ext uri="{FF2B5EF4-FFF2-40B4-BE49-F238E27FC236}">
-                <a16:creationId xmlns:a16="http://schemas.microsoft.com/office/drawing/2014/main" id="{4A374442-C8E1-4D67-8973-05F739E3C12F}"/>
+                <a16:creationId xmlns:a16="http://schemas.microsoft.com/office/drawing/2014/main" id="{CABBC908-17B3-4CC3-9050-964E4688BB7F}"/>
               </a:ext>
             </a:extLst>
           </p:cNvPr>
@@ -18277,7 +18277,7 @@
           <p:cNvPr id="65" name="">
             <a:extLst xmlns:a="http://schemas.openxmlformats.org/drawingml/2006/main">
               <a:ext uri="{FF2B5EF4-FFF2-40B4-BE49-F238E27FC236}">
-                <a16:creationId xmlns:a16="http://schemas.microsoft.com/office/drawing/2014/main" id="{93F2DDC4-B55F-461F-AFE4-2CF2770FEA05}"/>
+                <a16:creationId xmlns:a16="http://schemas.microsoft.com/office/drawing/2014/main" id="{CF6E4E39-9678-43C1-AB4B-D0ABA31A795F}"/>
               </a:ext>
             </a:extLst>
           </p:cNvPr>
@@ -18312,7 +18312,7 @@
           <p:cNvPr id="66" name="">
             <a:extLst xmlns:a="http://schemas.openxmlformats.org/drawingml/2006/main">
               <a:ext uri="{FF2B5EF4-FFF2-40B4-BE49-F238E27FC236}">
-                <a16:creationId xmlns:a16="http://schemas.microsoft.com/office/drawing/2014/main" id="{3169592F-CFE3-4A6F-ADE2-A785A20A4BDB}"/>
+                <a16:creationId xmlns:a16="http://schemas.microsoft.com/office/drawing/2014/main" id="{5B8D3067-C310-44E6-B766-2C02CFB68F55}"/>
               </a:ext>
             </a:extLst>
           </p:cNvPr>
@@ -18343,7 +18343,7 @@
           <p:cNvPr id="67" name="">
             <a:extLst xmlns:a="http://schemas.openxmlformats.org/drawingml/2006/main">
               <a:ext uri="{FF2B5EF4-FFF2-40B4-BE49-F238E27FC236}">
-                <a16:creationId xmlns:a16="http://schemas.microsoft.com/office/drawing/2014/main" id="{A6418FC1-70C5-4FA8-B039-2EA173626746}"/>
+                <a16:creationId xmlns:a16="http://schemas.microsoft.com/office/drawing/2014/main" id="{3FCB3A83-4A31-4627-BF59-9440C68DBD5D}"/>
               </a:ext>
             </a:extLst>
           </p:cNvPr>
@@ -18388,7 +18388,7 @@
           <p:cNvPr id="68" name="">
             <a:extLst xmlns:a="http://schemas.openxmlformats.org/drawingml/2006/main">
               <a:ext uri="{FF2B5EF4-FFF2-40B4-BE49-F238E27FC236}">
-                <a16:creationId xmlns:a16="http://schemas.microsoft.com/office/drawing/2014/main" id="{75E52931-3654-4E30-A473-C8901D6D1008}"/>
+                <a16:creationId xmlns:a16="http://schemas.microsoft.com/office/drawing/2014/main" id="{D5E37685-0463-423D-A242-F70EC3B8FD2A}"/>
               </a:ext>
             </a:extLst>
           </p:cNvPr>
@@ -18433,7 +18433,7 @@
           <p:cNvPr id="69" name="">
             <a:extLst xmlns:a="http://schemas.openxmlformats.org/drawingml/2006/main">
               <a:ext uri="{FF2B5EF4-FFF2-40B4-BE49-F238E27FC236}">
-                <a16:creationId xmlns:a16="http://schemas.microsoft.com/office/drawing/2014/main" id="{A331566C-8419-4788-B09A-DB310342B97A}"/>
+                <a16:creationId xmlns:a16="http://schemas.microsoft.com/office/drawing/2014/main" id="{4AD50D7B-1D86-4AC2-ADCE-C2B1A43DE401}"/>
               </a:ext>
             </a:extLst>
           </p:cNvPr>
@@ -18468,7 +18468,7 @@
           <p:cNvPr id="70" name="">
             <a:extLst xmlns:a="http://schemas.openxmlformats.org/drawingml/2006/main">
               <a:ext uri="{FF2B5EF4-FFF2-40B4-BE49-F238E27FC236}">
-                <a16:creationId xmlns:a16="http://schemas.microsoft.com/office/drawing/2014/main" id="{0EA76105-FF19-49B9-A4FD-D6F1BA601251}"/>
+                <a16:creationId xmlns:a16="http://schemas.microsoft.com/office/drawing/2014/main" id="{89CC665D-85CA-44EE-8319-12CE200E3665}"/>
               </a:ext>
             </a:extLst>
           </p:cNvPr>
@@ -18499,7 +18499,7 @@
           <p:cNvPr id="71" name="">
             <a:extLst xmlns:a="http://schemas.openxmlformats.org/drawingml/2006/main">
               <a:ext uri="{FF2B5EF4-FFF2-40B4-BE49-F238E27FC236}">
-                <a16:creationId xmlns:a16="http://schemas.microsoft.com/office/drawing/2014/main" id="{48C7BBF5-2539-44B7-9666-1C31BFF50402}"/>
+                <a16:creationId xmlns:a16="http://schemas.microsoft.com/office/drawing/2014/main" id="{86BC0B82-2FE7-49AE-9E3E-1A52AA2E0E7D}"/>
               </a:ext>
             </a:extLst>
           </p:cNvPr>
@@ -18544,7 +18544,7 @@
           <p:cNvPr id="72" name="">
             <a:extLst xmlns:a="http://schemas.openxmlformats.org/drawingml/2006/main">
               <a:ext uri="{FF2B5EF4-FFF2-40B4-BE49-F238E27FC236}">
-                <a16:creationId xmlns:a16="http://schemas.microsoft.com/office/drawing/2014/main" id="{1A51D448-A752-42A6-A9C7-9C1AC2EA16F2}"/>
+                <a16:creationId xmlns:a16="http://schemas.microsoft.com/office/drawing/2014/main" id="{674B19BF-808E-43F4-963C-139570BB5DC6}"/>
               </a:ext>
             </a:extLst>
           </p:cNvPr>
@@ -18589,7 +18589,7 @@
           <p:cNvPr id="73" name="">
             <a:extLst xmlns:a="http://schemas.openxmlformats.org/drawingml/2006/main">
               <a:ext uri="{FF2B5EF4-FFF2-40B4-BE49-F238E27FC236}">
-                <a16:creationId xmlns:a16="http://schemas.microsoft.com/office/drawing/2014/main" id="{CF1FE4C9-E4EE-45C9-A4B8-90E10D49AFA0}"/>
+                <a16:creationId xmlns:a16="http://schemas.microsoft.com/office/drawing/2014/main" id="{B6471F4A-B354-4EF0-BBE9-3354ABE754D4}"/>
               </a:ext>
             </a:extLst>
           </p:cNvPr>
@@ -18624,7 +18624,7 @@
           <p:cNvPr id="74" name="">
             <a:extLst xmlns:a="http://schemas.openxmlformats.org/drawingml/2006/main">
               <a:ext uri="{FF2B5EF4-FFF2-40B4-BE49-F238E27FC236}">
-                <a16:creationId xmlns:a16="http://schemas.microsoft.com/office/drawing/2014/main" id="{FC9CA892-E8B5-4D4D-AF91-209A13C37855}"/>
+                <a16:creationId xmlns:a16="http://schemas.microsoft.com/office/drawing/2014/main" id="{92FE6509-F2E6-4761-96E9-6955FFEE49B2}"/>
               </a:ext>
             </a:extLst>
           </p:cNvPr>
@@ -18655,7 +18655,7 @@
           <p:cNvPr id="75" name="">
             <a:extLst xmlns:a="http://schemas.openxmlformats.org/drawingml/2006/main">
               <a:ext uri="{FF2B5EF4-FFF2-40B4-BE49-F238E27FC236}">
-                <a16:creationId xmlns:a16="http://schemas.microsoft.com/office/drawing/2014/main" id="{E367A293-D562-45C6-8310-17E7118B0E4B}"/>
+                <a16:creationId xmlns:a16="http://schemas.microsoft.com/office/drawing/2014/main" id="{18CA6537-3831-47E3-977A-C748FFC53F11}"/>
               </a:ext>
             </a:extLst>
           </p:cNvPr>
@@ -18700,7 +18700,7 @@
           <p:cNvPr id="76" name="">
             <a:extLst xmlns:a="http://schemas.openxmlformats.org/drawingml/2006/main">
               <a:ext uri="{FF2B5EF4-FFF2-40B4-BE49-F238E27FC236}">
-                <a16:creationId xmlns:a16="http://schemas.microsoft.com/office/drawing/2014/main" id="{CCAFC7AB-3445-492F-8D46-839C2CF55503}"/>
+                <a16:creationId xmlns:a16="http://schemas.microsoft.com/office/drawing/2014/main" id="{73F16A3B-2EDF-420C-9A8F-612A2069CEFD}"/>
               </a:ext>
             </a:extLst>
           </p:cNvPr>
@@ -18745,7 +18745,7 @@
           <p:cNvPr id="77" name="">
             <a:extLst xmlns:a="http://schemas.openxmlformats.org/drawingml/2006/main">
               <a:ext uri="{FF2B5EF4-FFF2-40B4-BE49-F238E27FC236}">
-                <a16:creationId xmlns:a16="http://schemas.microsoft.com/office/drawing/2014/main" id="{BC20CE9F-A936-455F-8262-9525FF250923}"/>
+                <a16:creationId xmlns:a16="http://schemas.microsoft.com/office/drawing/2014/main" id="{67FA4765-71F3-4793-9E19-F817EEE280D2}"/>
               </a:ext>
             </a:extLst>
           </p:cNvPr>
@@ -18780,7 +18780,7 @@
           <p:cNvPr id="78" name="">
             <a:extLst xmlns:a="http://schemas.openxmlformats.org/drawingml/2006/main">
               <a:ext uri="{FF2B5EF4-FFF2-40B4-BE49-F238E27FC236}">
-                <a16:creationId xmlns:a16="http://schemas.microsoft.com/office/drawing/2014/main" id="{C3E4C1FF-4AF3-42EF-BC7A-3E4B15F9F039}"/>
+                <a16:creationId xmlns:a16="http://schemas.microsoft.com/office/drawing/2014/main" id="{E50263CA-A7EE-422B-8415-4BC419EE2446}"/>
               </a:ext>
             </a:extLst>
           </p:cNvPr>
@@ -18811,7 +18811,7 @@
           <p:cNvPr id="79" name="">
             <a:extLst xmlns:a="http://schemas.openxmlformats.org/drawingml/2006/main">
               <a:ext uri="{FF2B5EF4-FFF2-40B4-BE49-F238E27FC236}">
-                <a16:creationId xmlns:a16="http://schemas.microsoft.com/office/drawing/2014/main" id="{20BEC9E2-7C1E-4E01-BCC9-71035D9DBDA8}"/>
+                <a16:creationId xmlns:a16="http://schemas.microsoft.com/office/drawing/2014/main" id="{370C1D33-10C0-46FF-ADFE-77787D60D700}"/>
               </a:ext>
             </a:extLst>
           </p:cNvPr>
@@ -18856,7 +18856,7 @@
           <p:cNvPr id="80" name="">
             <a:extLst xmlns:a="http://schemas.openxmlformats.org/drawingml/2006/main">
               <a:ext uri="{FF2B5EF4-FFF2-40B4-BE49-F238E27FC236}">
-                <a16:creationId xmlns:a16="http://schemas.microsoft.com/office/drawing/2014/main" id="{523A7ACD-947E-45EA-B3B2-31AF9351CD65}"/>
+                <a16:creationId xmlns:a16="http://schemas.microsoft.com/office/drawing/2014/main" id="{2AD55012-C9E3-4B2E-BD48-61CDBD577167}"/>
               </a:ext>
             </a:extLst>
           </p:cNvPr>
@@ -18901,7 +18901,7 @@
           <p:cNvPr id="81" name="">
             <a:extLst xmlns:a="http://schemas.openxmlformats.org/drawingml/2006/main">
               <a:ext uri="{FF2B5EF4-FFF2-40B4-BE49-F238E27FC236}">
-                <a16:creationId xmlns:a16="http://schemas.microsoft.com/office/drawing/2014/main" id="{6429D0AB-0B39-4271-B2E0-B8B8BB2A3FBB}"/>
+                <a16:creationId xmlns:a16="http://schemas.microsoft.com/office/drawing/2014/main" id="{ED0D2F97-750E-4DF0-81DD-60E358FB8A9D}"/>
               </a:ext>
             </a:extLst>
           </p:cNvPr>
@@ -18932,7 +18932,7 @@
           <p:cNvPr id="82" name="">
             <a:extLst xmlns:a="http://schemas.openxmlformats.org/drawingml/2006/main">
               <a:ext uri="{FF2B5EF4-FFF2-40B4-BE49-F238E27FC236}">
-                <a16:creationId xmlns:a16="http://schemas.microsoft.com/office/drawing/2014/main" id="{55F315C4-299B-4F1D-8599-A2D931113FCE}"/>
+                <a16:creationId xmlns:a16="http://schemas.microsoft.com/office/drawing/2014/main" id="{8EEAB802-74D8-45C1-93FF-D93318A01797}"/>
               </a:ext>
             </a:extLst>
           </p:cNvPr>
@@ -18977,7 +18977,7 @@
           <p:cNvPr id="83" name="">
             <a:extLst xmlns:a="http://schemas.openxmlformats.org/drawingml/2006/main">
               <a:ext uri="{FF2B5EF4-FFF2-40B4-BE49-F238E27FC236}">
-                <a16:creationId xmlns:a16="http://schemas.microsoft.com/office/drawing/2014/main" id="{763F4219-6C07-4599-B25F-743EF2188770}"/>
+                <a16:creationId xmlns:a16="http://schemas.microsoft.com/office/drawing/2014/main" id="{34B120E4-4676-45FD-B742-94111696B48D}"/>
               </a:ext>
             </a:extLst>
           </p:cNvPr>
@@ -19008,7 +19008,7 @@
           <p:cNvPr id="84" name="">
             <a:extLst xmlns:a="http://schemas.openxmlformats.org/drawingml/2006/main">
               <a:ext uri="{FF2B5EF4-FFF2-40B4-BE49-F238E27FC236}">
-                <a16:creationId xmlns:a16="http://schemas.microsoft.com/office/drawing/2014/main" id="{D1EC80C1-E09C-4A68-8612-7CDF5BB44C19}"/>
+                <a16:creationId xmlns:a16="http://schemas.microsoft.com/office/drawing/2014/main" id="{5C4C1DA5-466B-40A3-8D2D-6EDC68EA6AB3}"/>
               </a:ext>
             </a:extLst>
           </p:cNvPr>
@@ -19053,7 +19053,7 @@
           <p:cNvPr id="85" name="">
             <a:extLst xmlns:a="http://schemas.openxmlformats.org/drawingml/2006/main">
               <a:ext uri="{FF2B5EF4-FFF2-40B4-BE49-F238E27FC236}">
-                <a16:creationId xmlns:a16="http://schemas.microsoft.com/office/drawing/2014/main" id="{7ECC5EAF-6970-4422-8645-E2B6EE9B0982}"/>
+                <a16:creationId xmlns:a16="http://schemas.microsoft.com/office/drawing/2014/main" id="{221FD334-DA53-46A3-88F6-0F0DAB8DE8DF}"/>
               </a:ext>
             </a:extLst>
           </p:cNvPr>
@@ -19084,7 +19084,7 @@
           <p:cNvPr id="86" name="">
             <a:extLst xmlns:a="http://schemas.openxmlformats.org/drawingml/2006/main">
               <a:ext uri="{FF2B5EF4-FFF2-40B4-BE49-F238E27FC236}">
-                <a16:creationId xmlns:a16="http://schemas.microsoft.com/office/drawing/2014/main" id="{D186F01A-951D-4283-A3B5-218A5BBEFD8D}"/>
+                <a16:creationId xmlns:a16="http://schemas.microsoft.com/office/drawing/2014/main" id="{CF9A6BE9-4B82-449C-85AD-3336E81903F3}"/>
               </a:ext>
             </a:extLst>
           </p:cNvPr>
@@ -19129,7 +19129,7 @@
           <p:cNvPr id="87" name="">
             <a:extLst xmlns:a="http://schemas.openxmlformats.org/drawingml/2006/main">
               <a:ext uri="{FF2B5EF4-FFF2-40B4-BE49-F238E27FC236}">
-                <a16:creationId xmlns:a16="http://schemas.microsoft.com/office/drawing/2014/main" id="{77900940-2F39-44DF-9E96-D24934A11009}"/>
+                <a16:creationId xmlns:a16="http://schemas.microsoft.com/office/drawing/2014/main" id="{C4A682E9-030F-4732-8EBD-29F811AC2CC5}"/>
               </a:ext>
             </a:extLst>
           </p:cNvPr>
@@ -19172,7 +19172,7 @@
     </p:spTree>
     <p:extLst>
       <p:ext uri="{BB962C8B-B14F-4D97-AF65-F5344CB8AC3E}">
-        <p14:creationId xmlns:p14="http://schemas.microsoft.com/office/powerpoint/2010/main" val="741497677"/>
+        <p14:creationId xmlns:p14="http://schemas.microsoft.com/office/powerpoint/2010/main" val="726238943"/>
       </p:ext>
     </p:extLst>
   </p:cSld>
@@ -19196,7 +19196,7 @@
           <p:cNvPr id="92" name="">
             <a:extLst xmlns:a="http://schemas.openxmlformats.org/drawingml/2006/main">
               <a:ext uri="{FF2B5EF4-FFF2-40B4-BE49-F238E27FC236}">
-                <a16:creationId xmlns:a16="http://schemas.microsoft.com/office/drawing/2014/main" id="{E15FCC05-E0AD-4724-9C20-7903A2F2E8E3}"/>
+                <a16:creationId xmlns:a16="http://schemas.microsoft.com/office/drawing/2014/main" id="{5F0D4C89-0B64-419E-9F2A-4F14F11BE8B3}"/>
               </a:ext>
             </a:extLst>
           </p:cNvPr>
@@ -19227,7 +19227,7 @@
           <p:cNvPr id="2" name="">
             <a:extLst xmlns:a="http://schemas.openxmlformats.org/drawingml/2006/main">
               <a:ext uri="{FF2B5EF4-FFF2-40B4-BE49-F238E27FC236}">
-                <a16:creationId xmlns:a16="http://schemas.microsoft.com/office/drawing/2014/main" id="{EE2FCBAD-6E5A-470A-875A-DD6E2D828ED6}"/>
+                <a16:creationId xmlns:a16="http://schemas.microsoft.com/office/drawing/2014/main" id="{1C030722-7585-4F23-AC0C-FFB38555263E}"/>
               </a:ext>
             </a:extLst>
           </p:cNvPr>
@@ -19272,7 +19272,7 @@
           <p:cNvPr id="3" name="">
             <a:extLst xmlns:a="http://schemas.openxmlformats.org/drawingml/2006/main">
               <a:ext uri="{FF2B5EF4-FFF2-40B4-BE49-F238E27FC236}">
-                <a16:creationId xmlns:a16="http://schemas.microsoft.com/office/drawing/2014/main" id="{59ADD777-43DB-4E23-917C-45FC420F5079}"/>
+                <a16:creationId xmlns:a16="http://schemas.microsoft.com/office/drawing/2014/main" id="{B0663B3F-7033-4D26-8585-0728A6136918}"/>
               </a:ext>
             </a:extLst>
           </p:cNvPr>
@@ -19317,7 +19317,7 @@
           <p:cNvPr id="4" name="">
             <a:extLst xmlns:a="http://schemas.openxmlformats.org/drawingml/2006/main">
               <a:ext uri="{FF2B5EF4-FFF2-40B4-BE49-F238E27FC236}">
-                <a16:creationId xmlns:a16="http://schemas.microsoft.com/office/drawing/2014/main" id="{3813F51B-A876-4CD6-ACE3-ABA6093669D5}"/>
+                <a16:creationId xmlns:a16="http://schemas.microsoft.com/office/drawing/2014/main" id="{6DDA2AF1-47EE-4807-B17D-67779E2FFCDF}"/>
               </a:ext>
             </a:extLst>
           </p:cNvPr>
@@ -19362,7 +19362,7 @@
           <p:cNvPr id="5" name="">
             <a:extLst xmlns:a="http://schemas.openxmlformats.org/drawingml/2006/main">
               <a:ext uri="{FF2B5EF4-FFF2-40B4-BE49-F238E27FC236}">
-                <a16:creationId xmlns:a16="http://schemas.microsoft.com/office/drawing/2014/main" id="{3FDECB36-7F47-41E4-AE33-4B488AB0B3E6}"/>
+                <a16:creationId xmlns:a16="http://schemas.microsoft.com/office/drawing/2014/main" id="{A5CFBDED-9069-498D-85CF-F264AE52223A}"/>
               </a:ext>
             </a:extLst>
           </p:cNvPr>
@@ -19393,7 +19393,7 @@
           <p:cNvPr id="6" name="">
             <a:extLst xmlns:a="http://schemas.openxmlformats.org/drawingml/2006/main">
               <a:ext uri="{FF2B5EF4-FFF2-40B4-BE49-F238E27FC236}">
-                <a16:creationId xmlns:a16="http://schemas.microsoft.com/office/drawing/2014/main" id="{95681DE0-AA5A-43AF-BA65-DC631BDA6F2A}"/>
+                <a16:creationId xmlns:a16="http://schemas.microsoft.com/office/drawing/2014/main" id="{35680F5F-68A4-4BFC-8455-63359F6B96F7}"/>
               </a:ext>
             </a:extLst>
           </p:cNvPr>
@@ -19424,7 +19424,7 @@
           <p:cNvPr id="7" name="">
             <a:extLst xmlns:a="http://schemas.openxmlformats.org/drawingml/2006/main">
               <a:ext uri="{FF2B5EF4-FFF2-40B4-BE49-F238E27FC236}">
-                <a16:creationId xmlns:a16="http://schemas.microsoft.com/office/drawing/2014/main" id="{D51F9697-4752-4391-9786-AE086CCBCD87}"/>
+                <a16:creationId xmlns:a16="http://schemas.microsoft.com/office/drawing/2014/main" id="{18285F19-90AC-45D6-A83F-433508F30795}"/>
               </a:ext>
             </a:extLst>
           </p:cNvPr>
@@ -19469,7 +19469,7 @@
           <p:cNvPr id="8" name="">
             <a:extLst xmlns:a="http://schemas.openxmlformats.org/drawingml/2006/main">
               <a:ext uri="{FF2B5EF4-FFF2-40B4-BE49-F238E27FC236}">
-                <a16:creationId xmlns:a16="http://schemas.microsoft.com/office/drawing/2014/main" id="{FB56594F-68CB-43C4-8552-314B145DB838}"/>
+                <a16:creationId xmlns:a16="http://schemas.microsoft.com/office/drawing/2014/main" id="{7A19C9B4-4902-4371-A1C6-5ABC4641EA80}"/>
               </a:ext>
             </a:extLst>
           </p:cNvPr>
@@ -19514,7 +19514,7 @@
           <p:cNvPr id="9" name="">
             <a:extLst xmlns:a="http://schemas.openxmlformats.org/drawingml/2006/main">
               <a:ext uri="{FF2B5EF4-FFF2-40B4-BE49-F238E27FC236}">
-                <a16:creationId xmlns:a16="http://schemas.microsoft.com/office/drawing/2014/main" id="{22E4A05F-E7AD-49D7-817C-978985C772D7}"/>
+                <a16:creationId xmlns:a16="http://schemas.microsoft.com/office/drawing/2014/main" id="{B34EAC85-55F9-4428-B159-39FEA4254C88}"/>
               </a:ext>
             </a:extLst>
           </p:cNvPr>
@@ -19559,7 +19559,7 @@
           <p:cNvPr id="10" name="">
             <a:extLst xmlns:a="http://schemas.openxmlformats.org/drawingml/2006/main">
               <a:ext uri="{FF2B5EF4-FFF2-40B4-BE49-F238E27FC236}">
-                <a16:creationId xmlns:a16="http://schemas.microsoft.com/office/drawing/2014/main" id="{AAE3FF0E-CFD5-4F4D-AFAA-8BE1FB387BBE}"/>
+                <a16:creationId xmlns:a16="http://schemas.microsoft.com/office/drawing/2014/main" id="{ACD3018E-A641-40AC-AAA2-4681D0DA941F}"/>
               </a:ext>
             </a:extLst>
           </p:cNvPr>
@@ -19590,7 +19590,7 @@
           <p:cNvPr id="11" name="">
             <a:extLst xmlns:a="http://schemas.openxmlformats.org/drawingml/2006/main">
               <a:ext uri="{FF2B5EF4-FFF2-40B4-BE49-F238E27FC236}">
-                <a16:creationId xmlns:a16="http://schemas.microsoft.com/office/drawing/2014/main" id="{2F4F1188-1102-4E75-996E-703B8F5A0AA8}"/>
+                <a16:creationId xmlns:a16="http://schemas.microsoft.com/office/drawing/2014/main" id="{C478A74B-9705-4AD7-BE6B-702DCC77E568}"/>
               </a:ext>
             </a:extLst>
           </p:cNvPr>
@@ -19635,7 +19635,7 @@
           <p:cNvPr id="12" name="">
             <a:extLst xmlns:a="http://schemas.openxmlformats.org/drawingml/2006/main">
               <a:ext uri="{FF2B5EF4-FFF2-40B4-BE49-F238E27FC236}">
-                <a16:creationId xmlns:a16="http://schemas.microsoft.com/office/drawing/2014/main" id="{3711A8EB-7D67-47D6-AAE1-222F13BA374E}"/>
+                <a16:creationId xmlns:a16="http://schemas.microsoft.com/office/drawing/2014/main" id="{1D6AD2A7-3D88-4B4C-A62C-F12EFA8EA8A1}"/>
               </a:ext>
             </a:extLst>
           </p:cNvPr>
@@ -19666,7 +19666,7 @@
           <p:cNvPr id="13" name="">
             <a:extLst xmlns:a="http://schemas.openxmlformats.org/drawingml/2006/main">
               <a:ext uri="{FF2B5EF4-FFF2-40B4-BE49-F238E27FC236}">
-                <a16:creationId xmlns:a16="http://schemas.microsoft.com/office/drawing/2014/main" id="{70D62F40-B41D-487F-8871-21B718A1C0B5}"/>
+                <a16:creationId xmlns:a16="http://schemas.microsoft.com/office/drawing/2014/main" id="{E5C8205B-5292-42E3-8336-77EA318B3B3F}"/>
               </a:ext>
             </a:extLst>
           </p:cNvPr>
@@ -19711,7 +19711,7 @@
           <p:cNvPr id="14" name="">
             <a:extLst xmlns:a="http://schemas.openxmlformats.org/drawingml/2006/main">
               <a:ext uri="{FF2B5EF4-FFF2-40B4-BE49-F238E27FC236}">
-                <a16:creationId xmlns:a16="http://schemas.microsoft.com/office/drawing/2014/main" id="{3EF70D26-3DF4-401B-952C-6AAABB482B35}"/>
+                <a16:creationId xmlns:a16="http://schemas.microsoft.com/office/drawing/2014/main" id="{DE4FB2C1-AC9F-4C6D-8F29-36601BFC61FF}"/>
               </a:ext>
             </a:extLst>
           </p:cNvPr>
@@ -19742,7 +19742,7 @@
           <p:cNvPr id="15" name="">
             <a:extLst xmlns:a="http://schemas.openxmlformats.org/drawingml/2006/main">
               <a:ext uri="{FF2B5EF4-FFF2-40B4-BE49-F238E27FC236}">
-                <a16:creationId xmlns:a16="http://schemas.microsoft.com/office/drawing/2014/main" id="{AB35D6A1-426A-4392-A4DE-9A7BDAF3A53E}"/>
+                <a16:creationId xmlns:a16="http://schemas.microsoft.com/office/drawing/2014/main" id="{AE7E4D6A-CDB6-4B06-BB8F-BEFA770ECFA5}"/>
               </a:ext>
             </a:extLst>
           </p:cNvPr>
@@ -19787,7 +19787,7 @@
           <p:cNvPr id="16" name="">
             <a:extLst xmlns:a="http://schemas.openxmlformats.org/drawingml/2006/main">
               <a:ext uri="{FF2B5EF4-FFF2-40B4-BE49-F238E27FC236}">
-                <a16:creationId xmlns:a16="http://schemas.microsoft.com/office/drawing/2014/main" id="{DF6ACCAF-EA4D-4933-BF00-522446BBB8B8}"/>
+                <a16:creationId xmlns:a16="http://schemas.microsoft.com/office/drawing/2014/main" id="{90214525-AE40-4856-BDF1-26F694ED153C}"/>
               </a:ext>
             </a:extLst>
           </p:cNvPr>
@@ -19818,7 +19818,7 @@
           <p:cNvPr id="17" name="">
             <a:extLst xmlns:a="http://schemas.openxmlformats.org/drawingml/2006/main">
               <a:ext uri="{FF2B5EF4-FFF2-40B4-BE49-F238E27FC236}">
-                <a16:creationId xmlns:a16="http://schemas.microsoft.com/office/drawing/2014/main" id="{7FCE4A82-AF0C-4B3D-B348-D315156C754C}"/>
+                <a16:creationId xmlns:a16="http://schemas.microsoft.com/office/drawing/2014/main" id="{EDC2FFA6-FE0C-4D17-96CF-E2A53A38A815}"/>
               </a:ext>
             </a:extLst>
           </p:cNvPr>
@@ -19863,7 +19863,7 @@
           <p:cNvPr id="18" name="">
             <a:extLst xmlns:a="http://schemas.openxmlformats.org/drawingml/2006/main">
               <a:ext uri="{FF2B5EF4-FFF2-40B4-BE49-F238E27FC236}">
-                <a16:creationId xmlns:a16="http://schemas.microsoft.com/office/drawing/2014/main" id="{1985A4DE-FFE7-4BAA-8EA6-A7764E25512C}"/>
+                <a16:creationId xmlns:a16="http://schemas.microsoft.com/office/drawing/2014/main" id="{90553498-8034-482F-9C67-C8C153CD567C}"/>
               </a:ext>
             </a:extLst>
           </p:cNvPr>
@@ -19894,7 +19894,7 @@
           <p:cNvPr id="19" name="">
             <a:extLst xmlns:a="http://schemas.openxmlformats.org/drawingml/2006/main">
               <a:ext uri="{FF2B5EF4-FFF2-40B4-BE49-F238E27FC236}">
-                <a16:creationId xmlns:a16="http://schemas.microsoft.com/office/drawing/2014/main" id="{B4C80030-10AC-4B0B-9DC1-1236A5080536}"/>
+                <a16:creationId xmlns:a16="http://schemas.microsoft.com/office/drawing/2014/main" id="{1F52F750-99E2-44D7-8C42-9D4B2CEE7464}"/>
               </a:ext>
             </a:extLst>
           </p:cNvPr>
@@ -19939,7 +19939,7 @@
           <p:cNvPr id="20" name="">
             <a:extLst xmlns:a="http://schemas.openxmlformats.org/drawingml/2006/main">
               <a:ext uri="{FF2B5EF4-FFF2-40B4-BE49-F238E27FC236}">
-                <a16:creationId xmlns:a16="http://schemas.microsoft.com/office/drawing/2014/main" id="{A17E9BBF-6459-47D2-9B5F-E8180C9E1FBB}"/>
+                <a16:creationId xmlns:a16="http://schemas.microsoft.com/office/drawing/2014/main" id="{B588398A-7B96-4392-8280-2B047B4A2DD5}"/>
               </a:ext>
             </a:extLst>
           </p:cNvPr>
@@ -19970,7 +19970,7 @@
           <p:cNvPr id="21" name="">
             <a:extLst xmlns:a="http://schemas.openxmlformats.org/drawingml/2006/main">
               <a:ext uri="{FF2B5EF4-FFF2-40B4-BE49-F238E27FC236}">
-                <a16:creationId xmlns:a16="http://schemas.microsoft.com/office/drawing/2014/main" id="{D55A38B6-B7C8-4113-8840-AB5DF0D1B57A}"/>
+                <a16:creationId xmlns:a16="http://schemas.microsoft.com/office/drawing/2014/main" id="{55C61BC2-FCA5-425B-877C-8751D183295A}"/>
               </a:ext>
             </a:extLst>
           </p:cNvPr>
@@ -20015,7 +20015,7 @@
           <p:cNvPr id="22" name="">
             <a:extLst xmlns:a="http://schemas.openxmlformats.org/drawingml/2006/main">
               <a:ext uri="{FF2B5EF4-FFF2-40B4-BE49-F238E27FC236}">
-                <a16:creationId xmlns:a16="http://schemas.microsoft.com/office/drawing/2014/main" id="{8491F4F1-B7BC-42EA-9767-538AC17E2A44}"/>
+                <a16:creationId xmlns:a16="http://schemas.microsoft.com/office/drawing/2014/main" id="{2299E486-7A04-43AD-8AA1-F9B154291F97}"/>
               </a:ext>
             </a:extLst>
           </p:cNvPr>
@@ -20046,7 +20046,7 @@
           <p:cNvPr id="23" name="">
             <a:extLst xmlns:a="http://schemas.openxmlformats.org/drawingml/2006/main">
               <a:ext uri="{FF2B5EF4-FFF2-40B4-BE49-F238E27FC236}">
-                <a16:creationId xmlns:a16="http://schemas.microsoft.com/office/drawing/2014/main" id="{A78F84FC-B38F-4E5C-8A42-F5E601E1214C}"/>
+                <a16:creationId xmlns:a16="http://schemas.microsoft.com/office/drawing/2014/main" id="{C82D5C24-4DEA-4A2B-9B88-43444F99CFB3}"/>
               </a:ext>
             </a:extLst>
           </p:cNvPr>
@@ -20091,7 +20091,7 @@
           <p:cNvPr id="24" name="">
             <a:extLst xmlns:a="http://schemas.openxmlformats.org/drawingml/2006/main">
               <a:ext uri="{FF2B5EF4-FFF2-40B4-BE49-F238E27FC236}">
-                <a16:creationId xmlns:a16="http://schemas.microsoft.com/office/drawing/2014/main" id="{BCAA2AFE-4D0F-4BCF-8DD7-7925EF5C93AB}"/>
+                <a16:creationId xmlns:a16="http://schemas.microsoft.com/office/drawing/2014/main" id="{30A62165-203A-4230-9A35-65014500B75E}"/>
               </a:ext>
             </a:extLst>
           </p:cNvPr>
@@ -20122,7 +20122,7 @@
           <p:cNvPr id="25" name="">
             <a:extLst xmlns:a="http://schemas.openxmlformats.org/drawingml/2006/main">
               <a:ext uri="{FF2B5EF4-FFF2-40B4-BE49-F238E27FC236}">
-                <a16:creationId xmlns:a16="http://schemas.microsoft.com/office/drawing/2014/main" id="{0D821B2A-7300-4DE3-BE9C-701378105146}"/>
+                <a16:creationId xmlns:a16="http://schemas.microsoft.com/office/drawing/2014/main" id="{7F8493DB-06A8-4C5D-BC62-A68B5B076F5B}"/>
               </a:ext>
             </a:extLst>
           </p:cNvPr>
@@ -20153,7 +20153,7 @@
           <p:cNvPr id="26" name="">
             <a:extLst xmlns:a="http://schemas.openxmlformats.org/drawingml/2006/main">
               <a:ext uri="{FF2B5EF4-FFF2-40B4-BE49-F238E27FC236}">
-                <a16:creationId xmlns:a16="http://schemas.microsoft.com/office/drawing/2014/main" id="{75227DDF-255A-477C-B289-16C7AA71B83B}"/>
+                <a16:creationId xmlns:a16="http://schemas.microsoft.com/office/drawing/2014/main" id="{895F5378-4105-4F40-9C50-A05F2354105A}"/>
               </a:ext>
             </a:extLst>
           </p:cNvPr>
@@ -20184,7 +20184,7 @@
           <p:cNvPr id="27" name="">
             <a:extLst xmlns:a="http://schemas.openxmlformats.org/drawingml/2006/main">
               <a:ext uri="{FF2B5EF4-FFF2-40B4-BE49-F238E27FC236}">
-                <a16:creationId xmlns:a16="http://schemas.microsoft.com/office/drawing/2014/main" id="{F2DDF723-C384-4BB2-B7FB-F4603295F3B4}"/>
+                <a16:creationId xmlns:a16="http://schemas.microsoft.com/office/drawing/2014/main" id="{316726CE-ADB0-4C92-8FFB-4335DDDB2255}"/>
               </a:ext>
             </a:extLst>
           </p:cNvPr>
@@ -20215,7 +20215,7 @@
           <p:cNvPr id="28" name="">
             <a:extLst xmlns:a="http://schemas.openxmlformats.org/drawingml/2006/main">
               <a:ext uri="{FF2B5EF4-FFF2-40B4-BE49-F238E27FC236}">
-                <a16:creationId xmlns:a16="http://schemas.microsoft.com/office/drawing/2014/main" id="{10F9A90B-1AD0-404C-8655-19A78E15C958}"/>
+                <a16:creationId xmlns:a16="http://schemas.microsoft.com/office/drawing/2014/main" id="{77F7F770-FE01-4222-B183-6848E8E54C4D}"/>
               </a:ext>
             </a:extLst>
           </p:cNvPr>
@@ -20246,7 +20246,7 @@
           <p:cNvPr id="29" name="">
             <a:extLst xmlns:a="http://schemas.openxmlformats.org/drawingml/2006/main">
               <a:ext uri="{FF2B5EF4-FFF2-40B4-BE49-F238E27FC236}">
-                <a16:creationId xmlns:a16="http://schemas.microsoft.com/office/drawing/2014/main" id="{B3687147-BFDC-4E11-BC7B-79891C621488}"/>
+                <a16:creationId xmlns:a16="http://schemas.microsoft.com/office/drawing/2014/main" id="{5D529789-6598-4E9E-8051-EA804576196D}"/>
               </a:ext>
             </a:extLst>
           </p:cNvPr>
@@ -20277,7 +20277,7 @@
           <p:cNvPr id="30" name="">
             <a:extLst xmlns:a="http://schemas.openxmlformats.org/drawingml/2006/main">
               <a:ext uri="{FF2B5EF4-FFF2-40B4-BE49-F238E27FC236}">
-                <a16:creationId xmlns:a16="http://schemas.microsoft.com/office/drawing/2014/main" id="{CC40B02A-99B2-44A5-A606-52A1812B79FD}"/>
+                <a16:creationId xmlns:a16="http://schemas.microsoft.com/office/drawing/2014/main" id="{094522CE-6735-4050-AAA4-CBE50FAED880}"/>
               </a:ext>
             </a:extLst>
           </p:cNvPr>
@@ -20308,7 +20308,7 @@
           <p:cNvPr id="31" name="">
             <a:extLst xmlns:a="http://schemas.openxmlformats.org/drawingml/2006/main">
               <a:ext uri="{FF2B5EF4-FFF2-40B4-BE49-F238E27FC236}">
-                <a16:creationId xmlns:a16="http://schemas.microsoft.com/office/drawing/2014/main" id="{2EF88D20-629D-4EA2-A8F0-B098FF832F73}"/>
+                <a16:creationId xmlns:a16="http://schemas.microsoft.com/office/drawing/2014/main" id="{0B86EA70-48CD-4346-95B9-4E341E05D522}"/>
               </a:ext>
             </a:extLst>
           </p:cNvPr>
@@ -20353,7 +20353,7 @@
           <p:cNvPr id="32" name="">
             <a:extLst xmlns:a="http://schemas.openxmlformats.org/drawingml/2006/main">
               <a:ext uri="{FF2B5EF4-FFF2-40B4-BE49-F238E27FC236}">
-                <a16:creationId xmlns:a16="http://schemas.microsoft.com/office/drawing/2014/main" id="{F344E624-19E3-4050-82D1-68B718C0337A}"/>
+                <a16:creationId xmlns:a16="http://schemas.microsoft.com/office/drawing/2014/main" id="{79E12C87-6095-4722-890D-8AB7CA18F288}"/>
               </a:ext>
             </a:extLst>
           </p:cNvPr>
@@ -20398,7 +20398,7 @@
           <p:cNvPr id="33" name="">
             <a:extLst xmlns:a="http://schemas.openxmlformats.org/drawingml/2006/main">
               <a:ext uri="{FF2B5EF4-FFF2-40B4-BE49-F238E27FC236}">
-                <a16:creationId xmlns:a16="http://schemas.microsoft.com/office/drawing/2014/main" id="{9AFD7640-CFA6-4462-88BE-32114A909981}"/>
+                <a16:creationId xmlns:a16="http://schemas.microsoft.com/office/drawing/2014/main" id="{4FC58645-29D1-4416-93A5-4BE349312DC9}"/>
               </a:ext>
             </a:extLst>
           </p:cNvPr>
@@ -20443,7 +20443,7 @@
           <p:cNvPr id="34" name="">
             <a:extLst xmlns:a="http://schemas.openxmlformats.org/drawingml/2006/main">
               <a:ext uri="{FF2B5EF4-FFF2-40B4-BE49-F238E27FC236}">
-                <a16:creationId xmlns:a16="http://schemas.microsoft.com/office/drawing/2014/main" id="{E297AFDB-68FF-43C8-9E70-5AC4149A6E4B}"/>
+                <a16:creationId xmlns:a16="http://schemas.microsoft.com/office/drawing/2014/main" id="{A9041892-F946-47EF-8D8F-900115872C13}"/>
               </a:ext>
             </a:extLst>
           </p:cNvPr>
@@ -20476,7 +20476,7 @@
           <p:cNvPr id="35" name="">
             <a:extLst xmlns:a="http://schemas.openxmlformats.org/drawingml/2006/main">
               <a:ext uri="{FF2B5EF4-FFF2-40B4-BE49-F238E27FC236}">
-                <a16:creationId xmlns:a16="http://schemas.microsoft.com/office/drawing/2014/main" id="{6122B38D-4F3C-43AF-ADA2-93D73E6CBC17}"/>
+                <a16:creationId xmlns:a16="http://schemas.microsoft.com/office/drawing/2014/main" id="{E0138488-AA4B-4D64-8A20-4A8FA547F3D0}"/>
               </a:ext>
             </a:extLst>
           </p:cNvPr>
@@ -20521,7 +20521,7 @@
           <p:cNvPr id="36" name="">
             <a:extLst xmlns:a="http://schemas.openxmlformats.org/drawingml/2006/main">
               <a:ext uri="{FF2B5EF4-FFF2-40B4-BE49-F238E27FC236}">
-                <a16:creationId xmlns:a16="http://schemas.microsoft.com/office/drawing/2014/main" id="{E439614C-1C9E-42F5-AF4C-6FAD21890812}"/>
+                <a16:creationId xmlns:a16="http://schemas.microsoft.com/office/drawing/2014/main" id="{4F2455DF-471B-415F-8515-D57B63F29948}"/>
               </a:ext>
             </a:extLst>
           </p:cNvPr>
@@ -20566,7 +20566,7 @@
           <p:cNvPr id="37" name="">
             <a:extLst xmlns:a="http://schemas.openxmlformats.org/drawingml/2006/main">
               <a:ext uri="{FF2B5EF4-FFF2-40B4-BE49-F238E27FC236}">
-                <a16:creationId xmlns:a16="http://schemas.microsoft.com/office/drawing/2014/main" id="{00355CC6-AF47-473A-9E0E-AFE166A63565}"/>
+                <a16:creationId xmlns:a16="http://schemas.microsoft.com/office/drawing/2014/main" id="{3157AB88-9002-4189-8EFC-D898B9969BF4}"/>
               </a:ext>
             </a:extLst>
           </p:cNvPr>
@@ -20611,7 +20611,7 @@
           <p:cNvPr id="38" name="">
             <a:extLst xmlns:a="http://schemas.openxmlformats.org/drawingml/2006/main">
               <a:ext uri="{FF2B5EF4-FFF2-40B4-BE49-F238E27FC236}">
-                <a16:creationId xmlns:a16="http://schemas.microsoft.com/office/drawing/2014/main" id="{3D1766C1-97EB-49F2-8B57-6C570563F3B4}"/>
+                <a16:creationId xmlns:a16="http://schemas.microsoft.com/office/drawing/2014/main" id="{1E81BB46-5CB5-4B20-BAE0-792832EA35D5}"/>
               </a:ext>
             </a:extLst>
           </p:cNvPr>
@@ -20644,7 +20644,7 @@
           <p:cNvPr id="39" name="">
             <a:extLst xmlns:a="http://schemas.openxmlformats.org/drawingml/2006/main">
               <a:ext uri="{FF2B5EF4-FFF2-40B4-BE49-F238E27FC236}">
-                <a16:creationId xmlns:a16="http://schemas.microsoft.com/office/drawing/2014/main" id="{B6F17486-B2BF-4B82-9E3E-813AA7071BC3}"/>
+                <a16:creationId xmlns:a16="http://schemas.microsoft.com/office/drawing/2014/main" id="{0AE682F2-40C8-4C27-BBC4-24B2443E4F0C}"/>
               </a:ext>
             </a:extLst>
           </p:cNvPr>
@@ -20689,7 +20689,7 @@
           <p:cNvPr id="40" name="">
             <a:extLst xmlns:a="http://schemas.openxmlformats.org/drawingml/2006/main">
               <a:ext uri="{FF2B5EF4-FFF2-40B4-BE49-F238E27FC236}">
-                <a16:creationId xmlns:a16="http://schemas.microsoft.com/office/drawing/2014/main" id="{E65C60CF-E147-46BA-BA13-3DC4B2A9F89B}"/>
+                <a16:creationId xmlns:a16="http://schemas.microsoft.com/office/drawing/2014/main" id="{7302D5C9-13FB-408A-BC7A-C75F52EB6000}"/>
               </a:ext>
             </a:extLst>
           </p:cNvPr>
@@ -20734,7 +20734,7 @@
           <p:cNvPr id="41" name="">
             <a:extLst xmlns:a="http://schemas.openxmlformats.org/drawingml/2006/main">
               <a:ext uri="{FF2B5EF4-FFF2-40B4-BE49-F238E27FC236}">
-                <a16:creationId xmlns:a16="http://schemas.microsoft.com/office/drawing/2014/main" id="{8ECF0BB5-671B-4A69-A7BE-27B5D19614F0}"/>
+                <a16:creationId xmlns:a16="http://schemas.microsoft.com/office/drawing/2014/main" id="{957BA7B5-6242-4584-BFCE-AED00BD81DA1}"/>
               </a:ext>
             </a:extLst>
           </p:cNvPr>
@@ -20779,7 +20779,7 @@
           <p:cNvPr id="42" name="">
             <a:extLst xmlns:a="http://schemas.openxmlformats.org/drawingml/2006/main">
               <a:ext uri="{FF2B5EF4-FFF2-40B4-BE49-F238E27FC236}">
-                <a16:creationId xmlns:a16="http://schemas.microsoft.com/office/drawing/2014/main" id="{01F0AABF-ED18-4AA6-B4B7-5652D5F0747F}"/>
+                <a16:creationId xmlns:a16="http://schemas.microsoft.com/office/drawing/2014/main" id="{4D155027-2C22-47A3-826D-1A113FE18A45}"/>
               </a:ext>
             </a:extLst>
           </p:cNvPr>
@@ -20812,7 +20812,7 @@
           <p:cNvPr id="43" name="">
             <a:extLst xmlns:a="http://schemas.openxmlformats.org/drawingml/2006/main">
               <a:ext uri="{FF2B5EF4-FFF2-40B4-BE49-F238E27FC236}">
-                <a16:creationId xmlns:a16="http://schemas.microsoft.com/office/drawing/2014/main" id="{EBD0786E-CB61-4A1E-86C2-E14674231595}"/>
+                <a16:creationId xmlns:a16="http://schemas.microsoft.com/office/drawing/2014/main" id="{4D09372C-B2CB-40DA-8E57-7661087581C1}"/>
               </a:ext>
             </a:extLst>
           </p:cNvPr>
@@ -20857,7 +20857,7 @@
           <p:cNvPr id="44" name="">
             <a:extLst xmlns:a="http://schemas.openxmlformats.org/drawingml/2006/main">
               <a:ext uri="{FF2B5EF4-FFF2-40B4-BE49-F238E27FC236}">
-                <a16:creationId xmlns:a16="http://schemas.microsoft.com/office/drawing/2014/main" id="{BD709727-7084-4953-B8E1-1EF11FBF4D57}"/>
+                <a16:creationId xmlns:a16="http://schemas.microsoft.com/office/drawing/2014/main" id="{18A213F8-5C71-4CC3-8F48-1D4511683ED9}"/>
               </a:ext>
             </a:extLst>
           </p:cNvPr>
@@ -20902,7 +20902,7 @@
           <p:cNvPr id="45" name="">
             <a:extLst xmlns:a="http://schemas.openxmlformats.org/drawingml/2006/main">
               <a:ext uri="{FF2B5EF4-FFF2-40B4-BE49-F238E27FC236}">
-                <a16:creationId xmlns:a16="http://schemas.microsoft.com/office/drawing/2014/main" id="{C2371986-ECD6-45E7-AF5F-6F12DD718E70}"/>
+                <a16:creationId xmlns:a16="http://schemas.microsoft.com/office/drawing/2014/main" id="{B605D7D3-DC80-4B34-B67A-8E3D37335098}"/>
               </a:ext>
             </a:extLst>
           </p:cNvPr>
@@ -20947,7 +20947,7 @@
           <p:cNvPr id="46" name="">
             <a:extLst xmlns:a="http://schemas.openxmlformats.org/drawingml/2006/main">
               <a:ext uri="{FF2B5EF4-FFF2-40B4-BE49-F238E27FC236}">
-                <a16:creationId xmlns:a16="http://schemas.microsoft.com/office/drawing/2014/main" id="{7190A2B3-54DF-46CB-B50F-1E79401CB839}"/>
+                <a16:creationId xmlns:a16="http://schemas.microsoft.com/office/drawing/2014/main" id="{8046623C-C57B-4714-813B-85EBD07799D2}"/>
               </a:ext>
             </a:extLst>
           </p:cNvPr>
@@ -20980,7 +20980,7 @@
           <p:cNvPr id="47" name="">
             <a:extLst xmlns:a="http://schemas.openxmlformats.org/drawingml/2006/main">
               <a:ext uri="{FF2B5EF4-FFF2-40B4-BE49-F238E27FC236}">
-                <a16:creationId xmlns:a16="http://schemas.microsoft.com/office/drawing/2014/main" id="{612C8271-15A5-4E5A-8DD3-B3E548C4DC85}"/>
+                <a16:creationId xmlns:a16="http://schemas.microsoft.com/office/drawing/2014/main" id="{D84C519F-999E-4BB4-8C3C-470B1DA81917}"/>
               </a:ext>
             </a:extLst>
           </p:cNvPr>
@@ -21025,7 +21025,7 @@
           <p:cNvPr id="48" name="">
             <a:extLst xmlns:a="http://schemas.openxmlformats.org/drawingml/2006/main">
               <a:ext uri="{FF2B5EF4-FFF2-40B4-BE49-F238E27FC236}">
-                <a16:creationId xmlns:a16="http://schemas.microsoft.com/office/drawing/2014/main" id="{5AF8335F-0C03-40AC-811A-24D05D284289}"/>
+                <a16:creationId xmlns:a16="http://schemas.microsoft.com/office/drawing/2014/main" id="{7496635E-90D3-494C-B7A1-BB8AD05CC017}"/>
               </a:ext>
             </a:extLst>
           </p:cNvPr>
@@ -21070,7 +21070,7 @@
           <p:cNvPr id="49" name="">
             <a:extLst xmlns:a="http://schemas.openxmlformats.org/drawingml/2006/main">
               <a:ext uri="{FF2B5EF4-FFF2-40B4-BE49-F238E27FC236}">
-                <a16:creationId xmlns:a16="http://schemas.microsoft.com/office/drawing/2014/main" id="{902E7C9C-3329-4A18-B156-650315512D47}"/>
+                <a16:creationId xmlns:a16="http://schemas.microsoft.com/office/drawing/2014/main" id="{B9F4B6EE-50F5-486E-A141-484EADC9D4D8}"/>
               </a:ext>
             </a:extLst>
           </p:cNvPr>
@@ -21115,7 +21115,7 @@
           <p:cNvPr id="50" name="">
             <a:extLst xmlns:a="http://schemas.openxmlformats.org/drawingml/2006/main">
               <a:ext uri="{FF2B5EF4-FFF2-40B4-BE49-F238E27FC236}">
-                <a16:creationId xmlns:a16="http://schemas.microsoft.com/office/drawing/2014/main" id="{3BA58B92-F92D-4DB7-8341-499469614137}"/>
+                <a16:creationId xmlns:a16="http://schemas.microsoft.com/office/drawing/2014/main" id="{0F7BBFC8-180B-41D0-998C-6EFC4B35B6C5}"/>
               </a:ext>
             </a:extLst>
           </p:cNvPr>
@@ -21148,7 +21148,7 @@
           <p:cNvPr id="51" name="">
             <a:extLst xmlns:a="http://schemas.openxmlformats.org/drawingml/2006/main">
               <a:ext uri="{FF2B5EF4-FFF2-40B4-BE49-F238E27FC236}">
-                <a16:creationId xmlns:a16="http://schemas.microsoft.com/office/drawing/2014/main" id="{EA6873DD-77FA-46BD-A09E-B1C68C20F09B}"/>
+                <a16:creationId xmlns:a16="http://schemas.microsoft.com/office/drawing/2014/main" id="{BA664F61-E7A1-40EB-9C96-BE9529B67A4D}"/>
               </a:ext>
             </a:extLst>
           </p:cNvPr>
@@ -21193,7 +21193,7 @@
           <p:cNvPr id="52" name="">
             <a:extLst xmlns:a="http://schemas.openxmlformats.org/drawingml/2006/main">
               <a:ext uri="{FF2B5EF4-FFF2-40B4-BE49-F238E27FC236}">
-                <a16:creationId xmlns:a16="http://schemas.microsoft.com/office/drawing/2014/main" id="{5BCB543F-01C9-416B-BF81-041EAC79425C}"/>
+                <a16:creationId xmlns:a16="http://schemas.microsoft.com/office/drawing/2014/main" id="{30BC968B-828E-435C-82DC-D19A90A80579}"/>
               </a:ext>
             </a:extLst>
           </p:cNvPr>
@@ -21238,7 +21238,7 @@
           <p:cNvPr id="53" name="">
             <a:extLst xmlns:a="http://schemas.openxmlformats.org/drawingml/2006/main">
               <a:ext uri="{FF2B5EF4-FFF2-40B4-BE49-F238E27FC236}">
-                <a16:creationId xmlns:a16="http://schemas.microsoft.com/office/drawing/2014/main" id="{923A8C57-67BD-4BD8-A1E4-10D2FD9237CF}"/>
+                <a16:creationId xmlns:a16="http://schemas.microsoft.com/office/drawing/2014/main" id="{7179FDC2-5C1C-4DBD-A658-33B09D775607}"/>
               </a:ext>
             </a:extLst>
           </p:cNvPr>
@@ -21283,7 +21283,7 @@
           <p:cNvPr id="54" name="">
             <a:extLst xmlns:a="http://schemas.openxmlformats.org/drawingml/2006/main">
               <a:ext uri="{FF2B5EF4-FFF2-40B4-BE49-F238E27FC236}">
-                <a16:creationId xmlns:a16="http://schemas.microsoft.com/office/drawing/2014/main" id="{EBD95C93-8296-4A04-82D3-969C6DB20D64}"/>
+                <a16:creationId xmlns:a16="http://schemas.microsoft.com/office/drawing/2014/main" id="{F5480825-D990-46B0-A2F3-FC41C9F5EC88}"/>
               </a:ext>
             </a:extLst>
           </p:cNvPr>
@@ -21316,7 +21316,7 @@
           <p:cNvPr id="55" name="">
             <a:extLst xmlns:a="http://schemas.openxmlformats.org/drawingml/2006/main">
               <a:ext uri="{FF2B5EF4-FFF2-40B4-BE49-F238E27FC236}">
-                <a16:creationId xmlns:a16="http://schemas.microsoft.com/office/drawing/2014/main" id="{A8B01F3A-3DE4-4B6A-A9AD-AB8343CBDE9F}"/>
+                <a16:creationId xmlns:a16="http://schemas.microsoft.com/office/drawing/2014/main" id="{98224524-9254-4927-A12A-318CC67D06A3}"/>
               </a:ext>
             </a:extLst>
           </p:cNvPr>
@@ -21361,7 +21361,7 @@
           <p:cNvPr id="56" name="">
             <a:extLst xmlns:a="http://schemas.openxmlformats.org/drawingml/2006/main">
               <a:ext uri="{FF2B5EF4-FFF2-40B4-BE49-F238E27FC236}">
-                <a16:creationId xmlns:a16="http://schemas.microsoft.com/office/drawing/2014/main" id="{9C59CCCC-6996-4B05-A916-BE7F5EE5B08E}"/>
+                <a16:creationId xmlns:a16="http://schemas.microsoft.com/office/drawing/2014/main" id="{BB70301F-FA0F-4FC9-92DD-CF1A277DBC2D}"/>
               </a:ext>
             </a:extLst>
           </p:cNvPr>
@@ -21406,7 +21406,7 @@
           <p:cNvPr id="57" name="">
             <a:extLst xmlns:a="http://schemas.openxmlformats.org/drawingml/2006/main">
               <a:ext uri="{FF2B5EF4-FFF2-40B4-BE49-F238E27FC236}">
-                <a16:creationId xmlns:a16="http://schemas.microsoft.com/office/drawing/2014/main" id="{98AC9748-6C83-4B98-BB67-2F8C33A8CF2D}"/>
+                <a16:creationId xmlns:a16="http://schemas.microsoft.com/office/drawing/2014/main" id="{0C4BABD5-87D5-48A2-A79E-B889359C70BA}"/>
               </a:ext>
             </a:extLst>
           </p:cNvPr>
@@ -21451,7 +21451,7 @@
           <p:cNvPr id="58" name="">
             <a:extLst xmlns:a="http://schemas.openxmlformats.org/drawingml/2006/main">
               <a:ext uri="{FF2B5EF4-FFF2-40B4-BE49-F238E27FC236}">
-                <a16:creationId xmlns:a16="http://schemas.microsoft.com/office/drawing/2014/main" id="{B9C77FE4-EA4D-4282-AB59-E2BD7102970D}"/>
+                <a16:creationId xmlns:a16="http://schemas.microsoft.com/office/drawing/2014/main" id="{8E2D7E7C-F280-49FC-B5DA-D5CFE489BB63}"/>
               </a:ext>
             </a:extLst>
           </p:cNvPr>
@@ -21484,7 +21484,7 @@
           <p:cNvPr id="59" name="">
             <a:extLst xmlns:a="http://schemas.openxmlformats.org/drawingml/2006/main">
               <a:ext uri="{FF2B5EF4-FFF2-40B4-BE49-F238E27FC236}">
-                <a16:creationId xmlns:a16="http://schemas.microsoft.com/office/drawing/2014/main" id="{5CFDAD5B-7F5C-47AD-8469-EEB1414994C0}"/>
+                <a16:creationId xmlns:a16="http://schemas.microsoft.com/office/drawing/2014/main" id="{DD2BD12A-F246-4562-9BF5-03B16A6FFE9D}"/>
               </a:ext>
             </a:extLst>
           </p:cNvPr>
@@ -21529,7 +21529,7 @@
           <p:cNvPr id="60" name="">
             <a:extLst xmlns:a="http://schemas.openxmlformats.org/drawingml/2006/main">
               <a:ext uri="{FF2B5EF4-FFF2-40B4-BE49-F238E27FC236}">
-                <a16:creationId xmlns:a16="http://schemas.microsoft.com/office/drawing/2014/main" id="{70A904B6-94BF-4CE6-AF3F-B4E5C3B006E4}"/>
+                <a16:creationId xmlns:a16="http://schemas.microsoft.com/office/drawing/2014/main" id="{D8A0FFA2-F1AF-4E1F-A876-D3C60128D6D2}"/>
               </a:ext>
             </a:extLst>
           </p:cNvPr>
@@ -21574,7 +21574,7 @@
           <p:cNvPr id="61" name="">
             <a:extLst xmlns:a="http://schemas.openxmlformats.org/drawingml/2006/main">
               <a:ext uri="{FF2B5EF4-FFF2-40B4-BE49-F238E27FC236}">
-                <a16:creationId xmlns:a16="http://schemas.microsoft.com/office/drawing/2014/main" id="{B7DC4110-616E-4952-8DF9-C1673F679FD2}"/>
+                <a16:creationId xmlns:a16="http://schemas.microsoft.com/office/drawing/2014/main" id="{B2F6C394-3043-4FCB-96C6-AF982F83B08D}"/>
               </a:ext>
             </a:extLst>
           </p:cNvPr>
@@ -21619,7 +21619,7 @@
           <p:cNvPr id="62" name="">
             <a:extLst xmlns:a="http://schemas.openxmlformats.org/drawingml/2006/main">
               <a:ext uri="{FF2B5EF4-FFF2-40B4-BE49-F238E27FC236}">
-                <a16:creationId xmlns:a16="http://schemas.microsoft.com/office/drawing/2014/main" id="{5E648F65-13C8-47B7-B179-2E9F72E126A1}"/>
+                <a16:creationId xmlns:a16="http://schemas.microsoft.com/office/drawing/2014/main" id="{15AFE44D-DFFD-440B-97FB-0279CB927E26}"/>
               </a:ext>
             </a:extLst>
           </p:cNvPr>
@@ -21650,7 +21650,7 @@
           <p:cNvPr id="63" name="">
             <a:extLst xmlns:a="http://schemas.openxmlformats.org/drawingml/2006/main">
               <a:ext uri="{FF2B5EF4-FFF2-40B4-BE49-F238E27FC236}">
-                <a16:creationId xmlns:a16="http://schemas.microsoft.com/office/drawing/2014/main" id="{CEB79E4B-2A0C-4C56-9CE3-BBCFB4D6425A}"/>
+                <a16:creationId xmlns:a16="http://schemas.microsoft.com/office/drawing/2014/main" id="{EE7352D2-D925-413B-A3B8-3FBF42C8E53F}"/>
               </a:ext>
             </a:extLst>
           </p:cNvPr>
@@ -21695,7 +21695,7 @@
           <p:cNvPr id="64" name="">
             <a:extLst xmlns:a="http://schemas.openxmlformats.org/drawingml/2006/main">
               <a:ext uri="{FF2B5EF4-FFF2-40B4-BE49-F238E27FC236}">
-                <a16:creationId xmlns:a16="http://schemas.microsoft.com/office/drawing/2014/main" id="{CCA4F33C-F770-4E28-A8AB-5120EF29ED88}"/>
+                <a16:creationId xmlns:a16="http://schemas.microsoft.com/office/drawing/2014/main" id="{44985051-703F-43A5-92BA-2C4140C532C8}"/>
               </a:ext>
             </a:extLst>
           </p:cNvPr>
@@ -21740,7 +21740,7 @@
           <p:cNvPr id="65" name="">
             <a:extLst xmlns:a="http://schemas.openxmlformats.org/drawingml/2006/main">
               <a:ext uri="{FF2B5EF4-FFF2-40B4-BE49-F238E27FC236}">
-                <a16:creationId xmlns:a16="http://schemas.microsoft.com/office/drawing/2014/main" id="{8D1AA399-E08A-4E0F-9337-F269BEE9990D}"/>
+                <a16:creationId xmlns:a16="http://schemas.microsoft.com/office/drawing/2014/main" id="{650FFB46-58EE-4A69-82F3-2D0829A77211}"/>
               </a:ext>
             </a:extLst>
           </p:cNvPr>
@@ -21785,7 +21785,7 @@
           <p:cNvPr id="66" name="">
             <a:extLst xmlns:a="http://schemas.openxmlformats.org/drawingml/2006/main">
               <a:ext uri="{FF2B5EF4-FFF2-40B4-BE49-F238E27FC236}">
-                <a16:creationId xmlns:a16="http://schemas.microsoft.com/office/drawing/2014/main" id="{8741EFB2-DE36-4C5A-8DA6-796E1095D551}"/>
+                <a16:creationId xmlns:a16="http://schemas.microsoft.com/office/drawing/2014/main" id="{74877598-03C2-4C8D-89BF-98851A91F64F}"/>
               </a:ext>
             </a:extLst>
           </p:cNvPr>
@@ -21818,7 +21818,7 @@
           <p:cNvPr id="67" name="">
             <a:extLst xmlns:a="http://schemas.openxmlformats.org/drawingml/2006/main">
               <a:ext uri="{FF2B5EF4-FFF2-40B4-BE49-F238E27FC236}">
-                <a16:creationId xmlns:a16="http://schemas.microsoft.com/office/drawing/2014/main" id="{759B0B9D-74F1-442B-9D73-38E4DB24DA3E}"/>
+                <a16:creationId xmlns:a16="http://schemas.microsoft.com/office/drawing/2014/main" id="{77C8470D-76B3-4A95-B01D-A07C21DAD68E}"/>
               </a:ext>
             </a:extLst>
           </p:cNvPr>
@@ -21863,7 +21863,7 @@
           <p:cNvPr id="68" name="">
             <a:extLst xmlns:a="http://schemas.openxmlformats.org/drawingml/2006/main">
               <a:ext uri="{FF2B5EF4-FFF2-40B4-BE49-F238E27FC236}">
-                <a16:creationId xmlns:a16="http://schemas.microsoft.com/office/drawing/2014/main" id="{52832CE1-3C72-4E8C-9C7C-165E2CC78C84}"/>
+                <a16:creationId xmlns:a16="http://schemas.microsoft.com/office/drawing/2014/main" id="{DE04925A-AB54-43D0-A90F-582FA7E5A178}"/>
               </a:ext>
             </a:extLst>
           </p:cNvPr>
@@ -21908,7 +21908,7 @@
           <p:cNvPr id="69" name="">
             <a:extLst xmlns:a="http://schemas.openxmlformats.org/drawingml/2006/main">
               <a:ext uri="{FF2B5EF4-FFF2-40B4-BE49-F238E27FC236}">
-                <a16:creationId xmlns:a16="http://schemas.microsoft.com/office/drawing/2014/main" id="{4E05B11D-0321-49EE-B3D7-FE0D4E0D63EB}"/>
+                <a16:creationId xmlns:a16="http://schemas.microsoft.com/office/drawing/2014/main" id="{9E3E6CB1-86F0-440A-9E32-972FECD19FC0}"/>
               </a:ext>
             </a:extLst>
           </p:cNvPr>
@@ -21953,7 +21953,7 @@
           <p:cNvPr id="70" name="">
             <a:extLst xmlns:a="http://schemas.openxmlformats.org/drawingml/2006/main">
               <a:ext uri="{FF2B5EF4-FFF2-40B4-BE49-F238E27FC236}">
-                <a16:creationId xmlns:a16="http://schemas.microsoft.com/office/drawing/2014/main" id="{22A68354-BFEA-41EB-93BA-3BA6207135F7}"/>
+                <a16:creationId xmlns:a16="http://schemas.microsoft.com/office/drawing/2014/main" id="{9DE684A8-E862-4956-AB68-7FBAEC79A16B}"/>
               </a:ext>
             </a:extLst>
           </p:cNvPr>
@@ -21986,7 +21986,7 @@
           <p:cNvPr id="71" name="">
             <a:extLst xmlns:a="http://schemas.openxmlformats.org/drawingml/2006/main">
               <a:ext uri="{FF2B5EF4-FFF2-40B4-BE49-F238E27FC236}">
-                <a16:creationId xmlns:a16="http://schemas.microsoft.com/office/drawing/2014/main" id="{83E02CCC-20CD-4C33-A8A4-9F89A3127F63}"/>
+                <a16:creationId xmlns:a16="http://schemas.microsoft.com/office/drawing/2014/main" id="{0F8912A6-A157-47B8-B38B-3FAC057345BF}"/>
               </a:ext>
             </a:extLst>
           </p:cNvPr>
@@ -22031,7 +22031,7 @@
           <p:cNvPr id="72" name="">
             <a:extLst xmlns:a="http://schemas.openxmlformats.org/drawingml/2006/main">
               <a:ext uri="{FF2B5EF4-FFF2-40B4-BE49-F238E27FC236}">
-                <a16:creationId xmlns:a16="http://schemas.microsoft.com/office/drawing/2014/main" id="{CC760786-BF67-4EBE-8702-4FA123690924}"/>
+                <a16:creationId xmlns:a16="http://schemas.microsoft.com/office/drawing/2014/main" id="{77640C1B-FD55-4898-8726-9DEACC9FCE45}"/>
               </a:ext>
             </a:extLst>
           </p:cNvPr>
@@ -22076,7 +22076,7 @@
           <p:cNvPr id="73" name="">
             <a:extLst xmlns:a="http://schemas.openxmlformats.org/drawingml/2006/main">
               <a:ext uri="{FF2B5EF4-FFF2-40B4-BE49-F238E27FC236}">
-                <a16:creationId xmlns:a16="http://schemas.microsoft.com/office/drawing/2014/main" id="{DBBA2404-7468-473F-9AF7-F3C90D97AC8B}"/>
+                <a16:creationId xmlns:a16="http://schemas.microsoft.com/office/drawing/2014/main" id="{A9E6D4FA-25C4-4055-AB50-50F7F051CC2A}"/>
               </a:ext>
             </a:extLst>
           </p:cNvPr>
@@ -22121,7 +22121,7 @@
           <p:cNvPr id="74" name="">
             <a:extLst xmlns:a="http://schemas.openxmlformats.org/drawingml/2006/main">
               <a:ext uri="{FF2B5EF4-FFF2-40B4-BE49-F238E27FC236}">
-                <a16:creationId xmlns:a16="http://schemas.microsoft.com/office/drawing/2014/main" id="{60A61883-AACF-4638-839F-6015C2AB96FD}"/>
+                <a16:creationId xmlns:a16="http://schemas.microsoft.com/office/drawing/2014/main" id="{E77854DE-0F06-4943-A04A-621FA31E82D0}"/>
               </a:ext>
             </a:extLst>
           </p:cNvPr>
@@ -22154,7 +22154,7 @@
           <p:cNvPr id="75" name="">
             <a:extLst xmlns:a="http://schemas.openxmlformats.org/drawingml/2006/main">
               <a:ext uri="{FF2B5EF4-FFF2-40B4-BE49-F238E27FC236}">
-                <a16:creationId xmlns:a16="http://schemas.microsoft.com/office/drawing/2014/main" id="{D3BE000A-B7DA-4F08-9582-9C01BC291E95}"/>
+                <a16:creationId xmlns:a16="http://schemas.microsoft.com/office/drawing/2014/main" id="{DA69C646-82F3-4743-AF91-A872360BF9C0}"/>
               </a:ext>
             </a:extLst>
           </p:cNvPr>
@@ -22199,7 +22199,7 @@
           <p:cNvPr id="76" name="">
             <a:extLst xmlns:a="http://schemas.openxmlformats.org/drawingml/2006/main">
               <a:ext uri="{FF2B5EF4-FFF2-40B4-BE49-F238E27FC236}">
-                <a16:creationId xmlns:a16="http://schemas.microsoft.com/office/drawing/2014/main" id="{7BB126E0-58C3-4B5D-AA68-81AF9675F113}"/>
+                <a16:creationId xmlns:a16="http://schemas.microsoft.com/office/drawing/2014/main" id="{4B375738-6EB3-468E-911C-238A7588B459}"/>
               </a:ext>
             </a:extLst>
           </p:cNvPr>
@@ -22244,7 +22244,7 @@
           <p:cNvPr id="77" name="">
             <a:extLst xmlns:a="http://schemas.openxmlformats.org/drawingml/2006/main">
               <a:ext uri="{FF2B5EF4-FFF2-40B4-BE49-F238E27FC236}">
-                <a16:creationId xmlns:a16="http://schemas.microsoft.com/office/drawing/2014/main" id="{7885E97D-A0E4-4C3A-A9AF-5EB7F9B58100}"/>
+                <a16:creationId xmlns:a16="http://schemas.microsoft.com/office/drawing/2014/main" id="{2DC8997F-E5A6-470D-B9CC-EF4D32DD4C18}"/>
               </a:ext>
             </a:extLst>
           </p:cNvPr>
@@ -22289,7 +22289,7 @@
           <p:cNvPr id="78" name="">
             <a:extLst xmlns:a="http://schemas.openxmlformats.org/drawingml/2006/main">
               <a:ext uri="{FF2B5EF4-FFF2-40B4-BE49-F238E27FC236}">
-                <a16:creationId xmlns:a16="http://schemas.microsoft.com/office/drawing/2014/main" id="{87F90280-05E6-4060-948A-0B9A6C27D056}"/>
+                <a16:creationId xmlns:a16="http://schemas.microsoft.com/office/drawing/2014/main" id="{5F50F2E7-E7ED-4B3F-BC51-F6F3D06B8921}"/>
               </a:ext>
             </a:extLst>
           </p:cNvPr>
@@ -22322,7 +22322,7 @@
           <p:cNvPr id="79" name="">
             <a:extLst xmlns:a="http://schemas.openxmlformats.org/drawingml/2006/main">
               <a:ext uri="{FF2B5EF4-FFF2-40B4-BE49-F238E27FC236}">
-                <a16:creationId xmlns:a16="http://schemas.microsoft.com/office/drawing/2014/main" id="{BFF5CE97-6E03-4A5F-AD84-C59F87AC0A71}"/>
+                <a16:creationId xmlns:a16="http://schemas.microsoft.com/office/drawing/2014/main" id="{66EEAFAE-156E-43B0-87D3-5503EE47A86B}"/>
               </a:ext>
             </a:extLst>
           </p:cNvPr>
@@ -22367,7 +22367,7 @@
           <p:cNvPr id="80" name="">
             <a:extLst xmlns:a="http://schemas.openxmlformats.org/drawingml/2006/main">
               <a:ext uri="{FF2B5EF4-FFF2-40B4-BE49-F238E27FC236}">
-                <a16:creationId xmlns:a16="http://schemas.microsoft.com/office/drawing/2014/main" id="{159E63B9-5BB7-4AA5-9180-1E4BAF9477AA}"/>
+                <a16:creationId xmlns:a16="http://schemas.microsoft.com/office/drawing/2014/main" id="{71543475-F240-4CC4-9697-4FBEA99D4019}"/>
               </a:ext>
             </a:extLst>
           </p:cNvPr>
@@ -22412,7 +22412,7 @@
           <p:cNvPr id="81" name="">
             <a:extLst xmlns:a="http://schemas.openxmlformats.org/drawingml/2006/main">
               <a:ext uri="{FF2B5EF4-FFF2-40B4-BE49-F238E27FC236}">
-                <a16:creationId xmlns:a16="http://schemas.microsoft.com/office/drawing/2014/main" id="{7C5B19D5-7F07-40DB-ACC2-F95DE5E7516E}"/>
+                <a16:creationId xmlns:a16="http://schemas.microsoft.com/office/drawing/2014/main" id="{AD7D2AE9-01BF-4B2F-BA7E-3DFF96E4F11D}"/>
               </a:ext>
             </a:extLst>
           </p:cNvPr>
@@ -22457,7 +22457,7 @@
           <p:cNvPr id="82" name="">
             <a:extLst xmlns:a="http://schemas.openxmlformats.org/drawingml/2006/main">
               <a:ext uri="{FF2B5EF4-FFF2-40B4-BE49-F238E27FC236}">
-                <a16:creationId xmlns:a16="http://schemas.microsoft.com/office/drawing/2014/main" id="{D4D00237-5433-462C-9E5F-3ED36357E784}"/>
+                <a16:creationId xmlns:a16="http://schemas.microsoft.com/office/drawing/2014/main" id="{B5295AB3-12E9-4A62-BD99-B9BDC24B9EE4}"/>
               </a:ext>
             </a:extLst>
           </p:cNvPr>
@@ -22490,7 +22490,7 @@
           <p:cNvPr id="83" name="">
             <a:extLst xmlns:a="http://schemas.openxmlformats.org/drawingml/2006/main">
               <a:ext uri="{FF2B5EF4-FFF2-40B4-BE49-F238E27FC236}">
-                <a16:creationId xmlns:a16="http://schemas.microsoft.com/office/drawing/2014/main" id="{C9083E43-FD06-4D6B-96CA-33E590695FD3}"/>
+                <a16:creationId xmlns:a16="http://schemas.microsoft.com/office/drawing/2014/main" id="{E86C13BD-8BD9-4D5D-98F3-9C2CF7944E8C}"/>
               </a:ext>
             </a:extLst>
           </p:cNvPr>
@@ -22535,7 +22535,7 @@
           <p:cNvPr id="84" name="">
             <a:extLst xmlns:a="http://schemas.openxmlformats.org/drawingml/2006/main">
               <a:ext uri="{FF2B5EF4-FFF2-40B4-BE49-F238E27FC236}">
-                <a16:creationId xmlns:a16="http://schemas.microsoft.com/office/drawing/2014/main" id="{264F1783-4583-49F8-B183-54573ADCF633}"/>
+                <a16:creationId xmlns:a16="http://schemas.microsoft.com/office/drawing/2014/main" id="{BCD92F4F-7295-4E73-B209-55103BEE41B0}"/>
               </a:ext>
             </a:extLst>
           </p:cNvPr>
@@ -22580,7 +22580,7 @@
           <p:cNvPr id="85" name="">
             <a:extLst xmlns:a="http://schemas.openxmlformats.org/drawingml/2006/main">
               <a:ext uri="{FF2B5EF4-FFF2-40B4-BE49-F238E27FC236}">
-                <a16:creationId xmlns:a16="http://schemas.microsoft.com/office/drawing/2014/main" id="{1A6BA389-F633-41EA-8F93-A4EF8DBD38C3}"/>
+                <a16:creationId xmlns:a16="http://schemas.microsoft.com/office/drawing/2014/main" id="{0A7E45B2-4FED-42D5-B871-740812331337}"/>
               </a:ext>
             </a:extLst>
           </p:cNvPr>
@@ -22625,7 +22625,7 @@
           <p:cNvPr id="86" name="">
             <a:extLst xmlns:a="http://schemas.openxmlformats.org/drawingml/2006/main">
               <a:ext uri="{FF2B5EF4-FFF2-40B4-BE49-F238E27FC236}">
-                <a16:creationId xmlns:a16="http://schemas.microsoft.com/office/drawing/2014/main" id="{218979A0-8D65-49EB-B667-88E874B925BA}"/>
+                <a16:creationId xmlns:a16="http://schemas.microsoft.com/office/drawing/2014/main" id="{C1736065-62C0-413A-ACAC-C089D3EBEC76}"/>
               </a:ext>
             </a:extLst>
           </p:cNvPr>
@@ -22658,7 +22658,7 @@
           <p:cNvPr id="87" name="">
             <a:extLst xmlns:a="http://schemas.openxmlformats.org/drawingml/2006/main">
               <a:ext uri="{FF2B5EF4-FFF2-40B4-BE49-F238E27FC236}">
-                <a16:creationId xmlns:a16="http://schemas.microsoft.com/office/drawing/2014/main" id="{EADD9FC1-1354-4136-B789-FD7DCD1229F8}"/>
+                <a16:creationId xmlns:a16="http://schemas.microsoft.com/office/drawing/2014/main" id="{DDC2C059-E6C0-40A7-9BF0-8000D228818F}"/>
               </a:ext>
             </a:extLst>
           </p:cNvPr>
@@ -22703,7 +22703,7 @@
           <p:cNvPr id="88" name="">
             <a:extLst xmlns:a="http://schemas.openxmlformats.org/drawingml/2006/main">
               <a:ext uri="{FF2B5EF4-FFF2-40B4-BE49-F238E27FC236}">
-                <a16:creationId xmlns:a16="http://schemas.microsoft.com/office/drawing/2014/main" id="{75E44F9B-F6B0-4D22-8664-42BB3FE08CD6}"/>
+                <a16:creationId xmlns:a16="http://schemas.microsoft.com/office/drawing/2014/main" id="{1A61BC63-39A3-494B-A6A1-7D944C476867}"/>
               </a:ext>
             </a:extLst>
           </p:cNvPr>
@@ -22748,7 +22748,7 @@
           <p:cNvPr id="89" name="">
             <a:extLst xmlns:a="http://schemas.openxmlformats.org/drawingml/2006/main">
               <a:ext uri="{FF2B5EF4-FFF2-40B4-BE49-F238E27FC236}">
-                <a16:creationId xmlns:a16="http://schemas.microsoft.com/office/drawing/2014/main" id="{9FC002DF-492F-4EBB-A27C-D65A008D4A94}"/>
+                <a16:creationId xmlns:a16="http://schemas.microsoft.com/office/drawing/2014/main" id="{CB0787A3-298A-4FA3-9F23-C0032CB5840B}"/>
               </a:ext>
             </a:extLst>
           </p:cNvPr>
@@ -22793,7 +22793,7 @@
           <p:cNvPr id="90" name="">
             <a:extLst xmlns:a="http://schemas.openxmlformats.org/drawingml/2006/main">
               <a:ext uri="{FF2B5EF4-FFF2-40B4-BE49-F238E27FC236}">
-                <a16:creationId xmlns:a16="http://schemas.microsoft.com/office/drawing/2014/main" id="{CA37ED5E-8CEF-4AF0-8FA4-1BA34D9B21FB}"/>
+                <a16:creationId xmlns:a16="http://schemas.microsoft.com/office/drawing/2014/main" id="{6FF80C5E-0E82-455C-91C2-09313E5AB6BC}"/>
               </a:ext>
             </a:extLst>
           </p:cNvPr>
@@ -22838,7 +22838,7 @@
           <p:cNvPr id="91" name="">
             <a:extLst xmlns:a="http://schemas.openxmlformats.org/drawingml/2006/main">
               <a:ext uri="{FF2B5EF4-FFF2-40B4-BE49-F238E27FC236}">
-                <a16:creationId xmlns:a16="http://schemas.microsoft.com/office/drawing/2014/main" id="{17B933B9-0B84-4FB7-A725-BFD33969A7E0}"/>
+                <a16:creationId xmlns:a16="http://schemas.microsoft.com/office/drawing/2014/main" id="{151DDF1F-CA33-486D-B8DB-51EE7F8E6088}"/>
               </a:ext>
             </a:extLst>
           </p:cNvPr>
@@ -22881,7 +22881,7 @@
     </p:spTree>
     <p:extLst>
       <p:ext uri="{BB962C8B-B14F-4D97-AF65-F5344CB8AC3E}">
-        <p14:creationId xmlns:p14="http://schemas.microsoft.com/office/powerpoint/2010/main" val="1595281099"/>
+        <p14:creationId xmlns:p14="http://schemas.microsoft.com/office/powerpoint/2010/main" val="1398199504"/>
       </p:ext>
     </p:extLst>
   </p:cSld>
@@ -22905,7 +22905,7 @@
           <p:cNvPr id="44" name="">
             <a:extLst xmlns:a="http://schemas.openxmlformats.org/drawingml/2006/main">
               <a:ext uri="{FF2B5EF4-FFF2-40B4-BE49-F238E27FC236}">
-                <a16:creationId xmlns:a16="http://schemas.microsoft.com/office/drawing/2014/main" id="{3A7385BF-AE3A-4541-A55F-BB875310CD76}"/>
+                <a16:creationId xmlns:a16="http://schemas.microsoft.com/office/drawing/2014/main" id="{46FB3F36-42F2-4F6C-83C2-6A3D328C9CBB}"/>
               </a:ext>
             </a:extLst>
           </p:cNvPr>
@@ -22936,7 +22936,7 @@
           <p:cNvPr id="2" name="">
             <a:extLst xmlns:a="http://schemas.openxmlformats.org/drawingml/2006/main">
               <a:ext uri="{FF2B5EF4-FFF2-40B4-BE49-F238E27FC236}">
-                <a16:creationId xmlns:a16="http://schemas.microsoft.com/office/drawing/2014/main" id="{11A63AE1-357A-497B-A6EA-DDD4753DCDDC}"/>
+                <a16:creationId xmlns:a16="http://schemas.microsoft.com/office/drawing/2014/main" id="{A7A3C792-38CC-4A4E-AF28-5217F510F36E}"/>
               </a:ext>
             </a:extLst>
           </p:cNvPr>
@@ -22981,7 +22981,7 @@
           <p:cNvPr id="3" name="">
             <a:extLst xmlns:a="http://schemas.openxmlformats.org/drawingml/2006/main">
               <a:ext uri="{FF2B5EF4-FFF2-40B4-BE49-F238E27FC236}">
-                <a16:creationId xmlns:a16="http://schemas.microsoft.com/office/drawing/2014/main" id="{D9BACD2A-1BE0-491B-A6AD-09C5789318F8}"/>
+                <a16:creationId xmlns:a16="http://schemas.microsoft.com/office/drawing/2014/main" id="{FE974773-D3C6-4A21-86F8-77739AB9E479}"/>
               </a:ext>
             </a:extLst>
           </p:cNvPr>
@@ -23026,7 +23026,7 @@
           <p:cNvPr id="4" name="">
             <a:extLst xmlns:a="http://schemas.openxmlformats.org/drawingml/2006/main">
               <a:ext uri="{FF2B5EF4-FFF2-40B4-BE49-F238E27FC236}">
-                <a16:creationId xmlns:a16="http://schemas.microsoft.com/office/drawing/2014/main" id="{21CBAA00-2FC4-4C1F-AEFB-5FC7D313907D}"/>
+                <a16:creationId xmlns:a16="http://schemas.microsoft.com/office/drawing/2014/main" id="{08AB50C7-D340-4C74-AA24-2B2BF66E0260}"/>
               </a:ext>
             </a:extLst>
           </p:cNvPr>
@@ -23071,7 +23071,7 @@
           <p:cNvPr id="5" name="">
             <a:extLst xmlns:a="http://schemas.openxmlformats.org/drawingml/2006/main">
               <a:ext uri="{FF2B5EF4-FFF2-40B4-BE49-F238E27FC236}">
-                <a16:creationId xmlns:a16="http://schemas.microsoft.com/office/drawing/2014/main" id="{F9A09BA9-1D03-42B2-94AF-FD1CF1A43841}"/>
+                <a16:creationId xmlns:a16="http://schemas.microsoft.com/office/drawing/2014/main" id="{EC9D8626-1265-46E5-830A-ACBC3B114FA8}"/>
               </a:ext>
             </a:extLst>
           </p:cNvPr>
@@ -23102,7 +23102,7 @@
           <p:cNvPr id="6" name="">
             <a:extLst xmlns:a="http://schemas.openxmlformats.org/drawingml/2006/main">
               <a:ext uri="{FF2B5EF4-FFF2-40B4-BE49-F238E27FC236}">
-                <a16:creationId xmlns:a16="http://schemas.microsoft.com/office/drawing/2014/main" id="{48FF1DDE-21DE-4C10-81E2-B449C269297D}"/>
+                <a16:creationId xmlns:a16="http://schemas.microsoft.com/office/drawing/2014/main" id="{253C02E5-ED17-4AA0-BCE5-6C7FE06D77D7}"/>
               </a:ext>
             </a:extLst>
           </p:cNvPr>
@@ -23133,7 +23133,7 @@
           <p:cNvPr id="7" name="">
             <a:extLst xmlns:a="http://schemas.openxmlformats.org/drawingml/2006/main">
               <a:ext uri="{FF2B5EF4-FFF2-40B4-BE49-F238E27FC236}">
-                <a16:creationId xmlns:a16="http://schemas.microsoft.com/office/drawing/2014/main" id="{71AA32B3-4A6F-48F8-A57F-9670AC84AF36}"/>
+                <a16:creationId xmlns:a16="http://schemas.microsoft.com/office/drawing/2014/main" id="{3489959A-F204-4E47-AA49-94F59C585127}"/>
               </a:ext>
             </a:extLst>
           </p:cNvPr>
@@ -23178,7 +23178,7 @@
           <p:cNvPr id="8" name="">
             <a:extLst xmlns:a="http://schemas.openxmlformats.org/drawingml/2006/main">
               <a:ext uri="{FF2B5EF4-FFF2-40B4-BE49-F238E27FC236}">
-                <a16:creationId xmlns:a16="http://schemas.microsoft.com/office/drawing/2014/main" id="{E56D5490-1766-48A5-9EA3-F468D7700FD7}"/>
+                <a16:creationId xmlns:a16="http://schemas.microsoft.com/office/drawing/2014/main" id="{49C4F590-BC83-4F3E-8B42-AA667F953E3C}"/>
               </a:ext>
             </a:extLst>
           </p:cNvPr>
@@ -23223,7 +23223,7 @@
           <p:cNvPr id="9" name="">
             <a:extLst xmlns:a="http://schemas.openxmlformats.org/drawingml/2006/main">
               <a:ext uri="{FF2B5EF4-FFF2-40B4-BE49-F238E27FC236}">
-                <a16:creationId xmlns:a16="http://schemas.microsoft.com/office/drawing/2014/main" id="{4A66AC89-D872-4C7C-9A3F-A6E1EB75961E}"/>
+                <a16:creationId xmlns:a16="http://schemas.microsoft.com/office/drawing/2014/main" id="{EAEB0C0C-0590-4C07-AA83-769B15EAB895}"/>
               </a:ext>
             </a:extLst>
           </p:cNvPr>
@@ -23256,7 +23256,7 @@
           <p:cNvPr id="10" name="">
             <a:extLst xmlns:a="http://schemas.openxmlformats.org/drawingml/2006/main">
               <a:ext uri="{FF2B5EF4-FFF2-40B4-BE49-F238E27FC236}">
-                <a16:creationId xmlns:a16="http://schemas.microsoft.com/office/drawing/2014/main" id="{8C92F0AC-C7E0-424A-8AEB-3A4C246B42EC}"/>
+                <a16:creationId xmlns:a16="http://schemas.microsoft.com/office/drawing/2014/main" id="{B4311F8E-D931-41F7-92CC-14944A3C7520}"/>
               </a:ext>
             </a:extLst>
           </p:cNvPr>
@@ -23287,7 +23287,7 @@
           <p:cNvPr id="11" name="">
             <a:extLst xmlns:a="http://schemas.openxmlformats.org/drawingml/2006/main">
               <a:ext uri="{FF2B5EF4-FFF2-40B4-BE49-F238E27FC236}">
-                <a16:creationId xmlns:a16="http://schemas.microsoft.com/office/drawing/2014/main" id="{8AA8E246-3988-41BB-9AE2-B97D4B34CD8A}"/>
+                <a16:creationId xmlns:a16="http://schemas.microsoft.com/office/drawing/2014/main" id="{121BE9DC-FA2F-4894-821C-01EE591B3A50}"/>
               </a:ext>
             </a:extLst>
           </p:cNvPr>
@@ -23332,7 +23332,7 @@
           <p:cNvPr id="12" name="">
             <a:extLst xmlns:a="http://schemas.openxmlformats.org/drawingml/2006/main">
               <a:ext uri="{FF2B5EF4-FFF2-40B4-BE49-F238E27FC236}">
-                <a16:creationId xmlns:a16="http://schemas.microsoft.com/office/drawing/2014/main" id="{8658B603-9F54-475A-961B-050F378AAB8D}"/>
+                <a16:creationId xmlns:a16="http://schemas.microsoft.com/office/drawing/2014/main" id="{C59C7F0E-78A8-414D-BC34-AFB8BB2A0790}"/>
               </a:ext>
             </a:extLst>
           </p:cNvPr>
@@ -23377,7 +23377,7 @@
           <p:cNvPr id="13" name="">
             <a:extLst xmlns:a="http://schemas.openxmlformats.org/drawingml/2006/main">
               <a:ext uri="{FF2B5EF4-FFF2-40B4-BE49-F238E27FC236}">
-                <a16:creationId xmlns:a16="http://schemas.microsoft.com/office/drawing/2014/main" id="{61F9C1E5-E25C-41A2-8DBC-854F8093BC0A}"/>
+                <a16:creationId xmlns:a16="http://schemas.microsoft.com/office/drawing/2014/main" id="{6F94D1FB-66E8-4468-90BE-53FC5C5D5F6F}"/>
               </a:ext>
             </a:extLst>
           </p:cNvPr>
@@ -23410,7 +23410,7 @@
           <p:cNvPr id="14" name="">
             <a:extLst xmlns:a="http://schemas.openxmlformats.org/drawingml/2006/main">
               <a:ext uri="{FF2B5EF4-FFF2-40B4-BE49-F238E27FC236}">
-                <a16:creationId xmlns:a16="http://schemas.microsoft.com/office/drawing/2014/main" id="{653B3B02-E315-443B-A1F4-EBEE6D99EBA8}"/>
+                <a16:creationId xmlns:a16="http://schemas.microsoft.com/office/drawing/2014/main" id="{78EF9173-DC16-4232-824A-CE9109207A58}"/>
               </a:ext>
             </a:extLst>
           </p:cNvPr>
@@ -23443,7 +23443,7 @@
           <p:cNvPr id="15" name="">
             <a:extLst xmlns:a="http://schemas.openxmlformats.org/drawingml/2006/main">
               <a:ext uri="{FF2B5EF4-FFF2-40B4-BE49-F238E27FC236}">
-                <a16:creationId xmlns:a16="http://schemas.microsoft.com/office/drawing/2014/main" id="{A04265B1-BC24-4356-AFB0-8602BBBCF295}"/>
+                <a16:creationId xmlns:a16="http://schemas.microsoft.com/office/drawing/2014/main" id="{2605A780-868E-4A7F-B443-529B8F8395AA}"/>
               </a:ext>
             </a:extLst>
           </p:cNvPr>
@@ -23474,7 +23474,7 @@
           <p:cNvPr id="16" name="">
             <a:extLst xmlns:a="http://schemas.openxmlformats.org/drawingml/2006/main">
               <a:ext uri="{FF2B5EF4-FFF2-40B4-BE49-F238E27FC236}">
-                <a16:creationId xmlns:a16="http://schemas.microsoft.com/office/drawing/2014/main" id="{C0F0E822-A268-4740-BE46-99F395EF7062}"/>
+                <a16:creationId xmlns:a16="http://schemas.microsoft.com/office/drawing/2014/main" id="{95165EBB-7B91-4015-A6DC-FE217E3C3FF3}"/>
               </a:ext>
             </a:extLst>
           </p:cNvPr>
@@ -23519,7 +23519,7 @@
           <p:cNvPr id="17" name="">
             <a:extLst xmlns:a="http://schemas.openxmlformats.org/drawingml/2006/main">
               <a:ext uri="{FF2B5EF4-FFF2-40B4-BE49-F238E27FC236}">
-                <a16:creationId xmlns:a16="http://schemas.microsoft.com/office/drawing/2014/main" id="{651C0DD5-EF49-44AE-8996-2B698C31384B}"/>
+                <a16:creationId xmlns:a16="http://schemas.microsoft.com/office/drawing/2014/main" id="{55C3A1AE-52E2-4C56-BF00-FD26F34B2210}"/>
               </a:ext>
             </a:extLst>
           </p:cNvPr>
@@ -23564,7 +23564,7 @@
           <p:cNvPr id="18" name="">
             <a:extLst xmlns:a="http://schemas.openxmlformats.org/drawingml/2006/main">
               <a:ext uri="{FF2B5EF4-FFF2-40B4-BE49-F238E27FC236}">
-                <a16:creationId xmlns:a16="http://schemas.microsoft.com/office/drawing/2014/main" id="{7CC97A69-FC42-4386-8EDF-9D017B517C6E}"/>
+                <a16:creationId xmlns:a16="http://schemas.microsoft.com/office/drawing/2014/main" id="{BF45FC79-30E0-427B-A80F-FE465B279111}"/>
               </a:ext>
             </a:extLst>
           </p:cNvPr>
@@ -23597,7 +23597,7 @@
           <p:cNvPr id="19" name="">
             <a:extLst xmlns:a="http://schemas.openxmlformats.org/drawingml/2006/main">
               <a:ext uri="{FF2B5EF4-FFF2-40B4-BE49-F238E27FC236}">
-                <a16:creationId xmlns:a16="http://schemas.microsoft.com/office/drawing/2014/main" id="{C6490EBC-194B-4709-8F82-5C82182496A4}"/>
+                <a16:creationId xmlns:a16="http://schemas.microsoft.com/office/drawing/2014/main" id="{C9723D9D-448A-4452-9D2A-EC30C68D3F7F}"/>
               </a:ext>
             </a:extLst>
           </p:cNvPr>
@@ -23630,7 +23630,7 @@
           <p:cNvPr id="20" name="">
             <a:extLst xmlns:a="http://schemas.openxmlformats.org/drawingml/2006/main">
               <a:ext uri="{FF2B5EF4-FFF2-40B4-BE49-F238E27FC236}">
-                <a16:creationId xmlns:a16="http://schemas.microsoft.com/office/drawing/2014/main" id="{07122B2A-2FED-4D2B-8BAA-3583CB24A006}"/>
+                <a16:creationId xmlns:a16="http://schemas.microsoft.com/office/drawing/2014/main" id="{63282555-71A6-4F5C-8D23-CB587598B8EE}"/>
               </a:ext>
             </a:extLst>
           </p:cNvPr>
@@ -23661,7 +23661,7 @@
           <p:cNvPr id="21" name="">
             <a:extLst xmlns:a="http://schemas.openxmlformats.org/drawingml/2006/main">
               <a:ext uri="{FF2B5EF4-FFF2-40B4-BE49-F238E27FC236}">
-                <a16:creationId xmlns:a16="http://schemas.microsoft.com/office/drawing/2014/main" id="{417AEE6C-EFF3-4B6D-94CF-6E96387C69F2}"/>
+                <a16:creationId xmlns:a16="http://schemas.microsoft.com/office/drawing/2014/main" id="{8C84EA84-2B2D-47EC-AF53-1D0788A9DD66}"/>
               </a:ext>
             </a:extLst>
           </p:cNvPr>
@@ -23706,7 +23706,7 @@
           <p:cNvPr id="22" name="">
             <a:extLst xmlns:a="http://schemas.openxmlformats.org/drawingml/2006/main">
               <a:ext uri="{FF2B5EF4-FFF2-40B4-BE49-F238E27FC236}">
-                <a16:creationId xmlns:a16="http://schemas.microsoft.com/office/drawing/2014/main" id="{C40CDF0B-4380-403D-B005-011B98354989}"/>
+                <a16:creationId xmlns:a16="http://schemas.microsoft.com/office/drawing/2014/main" id="{86598A7F-75F0-41E2-BAA3-DB3F46CAF3F7}"/>
               </a:ext>
             </a:extLst>
           </p:cNvPr>
@@ -23751,7 +23751,7 @@
           <p:cNvPr id="23" name="">
             <a:extLst xmlns:a="http://schemas.openxmlformats.org/drawingml/2006/main">
               <a:ext uri="{FF2B5EF4-FFF2-40B4-BE49-F238E27FC236}">
-                <a16:creationId xmlns:a16="http://schemas.microsoft.com/office/drawing/2014/main" id="{17D6B736-4F24-4367-860B-83C2812CC56E}"/>
+                <a16:creationId xmlns:a16="http://schemas.microsoft.com/office/drawing/2014/main" id="{F931B92B-00AA-4A4F-9B62-9674CEFEF1FE}"/>
               </a:ext>
             </a:extLst>
           </p:cNvPr>
@@ -23786,7 +23786,7 @@
           <p:cNvPr id="24" name="">
             <a:extLst xmlns:a="http://schemas.openxmlformats.org/drawingml/2006/main">
               <a:ext uri="{FF2B5EF4-FFF2-40B4-BE49-F238E27FC236}">
-                <a16:creationId xmlns:a16="http://schemas.microsoft.com/office/drawing/2014/main" id="{E0A90373-ADC0-46C8-A764-14C6B596C2B5}"/>
+                <a16:creationId xmlns:a16="http://schemas.microsoft.com/office/drawing/2014/main" id="{3221BAC2-7631-4C01-A4FC-620F629A3370}"/>
               </a:ext>
             </a:extLst>
           </p:cNvPr>
@@ -23817,7 +23817,7 @@
           <p:cNvPr id="25" name="">
             <a:extLst xmlns:a="http://schemas.openxmlformats.org/drawingml/2006/main">
               <a:ext uri="{FF2B5EF4-FFF2-40B4-BE49-F238E27FC236}">
-                <a16:creationId xmlns:a16="http://schemas.microsoft.com/office/drawing/2014/main" id="{82E6E28E-2B15-457E-9D3D-C888B1A0145F}"/>
+                <a16:creationId xmlns:a16="http://schemas.microsoft.com/office/drawing/2014/main" id="{5CEC91F1-8189-40A3-AFE2-085BE86B6C59}"/>
               </a:ext>
             </a:extLst>
           </p:cNvPr>
@@ -23862,7 +23862,7 @@
           <p:cNvPr id="26" name="">
             <a:extLst xmlns:a="http://schemas.openxmlformats.org/drawingml/2006/main">
               <a:ext uri="{FF2B5EF4-FFF2-40B4-BE49-F238E27FC236}">
-                <a16:creationId xmlns:a16="http://schemas.microsoft.com/office/drawing/2014/main" id="{7B104262-490C-42BF-ACA4-55CE4FC23225}"/>
+                <a16:creationId xmlns:a16="http://schemas.microsoft.com/office/drawing/2014/main" id="{4A36388C-B238-4710-9123-D3A48A15B4A7}"/>
               </a:ext>
             </a:extLst>
           </p:cNvPr>
@@ -23907,7 +23907,7 @@
           <p:cNvPr id="27" name="">
             <a:extLst xmlns:a="http://schemas.openxmlformats.org/drawingml/2006/main">
               <a:ext uri="{FF2B5EF4-FFF2-40B4-BE49-F238E27FC236}">
-                <a16:creationId xmlns:a16="http://schemas.microsoft.com/office/drawing/2014/main" id="{3FC1AB06-50FD-4BD5-98F2-18875EF17E31}"/>
+                <a16:creationId xmlns:a16="http://schemas.microsoft.com/office/drawing/2014/main" id="{EE052DD9-C9F1-4E6D-BA59-66618B1A20BA}"/>
               </a:ext>
             </a:extLst>
           </p:cNvPr>
@@ -23942,7 +23942,7 @@
           <p:cNvPr id="28" name="">
             <a:extLst xmlns:a="http://schemas.openxmlformats.org/drawingml/2006/main">
               <a:ext uri="{FF2B5EF4-FFF2-40B4-BE49-F238E27FC236}">
-                <a16:creationId xmlns:a16="http://schemas.microsoft.com/office/drawing/2014/main" id="{9A245365-2218-4EF9-92E3-CBBBDEF9BEB5}"/>
+                <a16:creationId xmlns:a16="http://schemas.microsoft.com/office/drawing/2014/main" id="{67E2FE8A-C194-408E-BADB-484BBC31E8E5}"/>
               </a:ext>
             </a:extLst>
           </p:cNvPr>
@@ -23973,7 +23973,7 @@
           <p:cNvPr id="29" name="">
             <a:extLst xmlns:a="http://schemas.openxmlformats.org/drawingml/2006/main">
               <a:ext uri="{FF2B5EF4-FFF2-40B4-BE49-F238E27FC236}">
-                <a16:creationId xmlns:a16="http://schemas.microsoft.com/office/drawing/2014/main" id="{98F0A72A-E509-4F63-A150-0704AB08EA9F}"/>
+                <a16:creationId xmlns:a16="http://schemas.microsoft.com/office/drawing/2014/main" id="{DDC98C7C-9198-49B7-A9BD-4757538BAEA3}"/>
               </a:ext>
             </a:extLst>
           </p:cNvPr>
@@ -24018,7 +24018,7 @@
           <p:cNvPr id="30" name="">
             <a:extLst xmlns:a="http://schemas.openxmlformats.org/drawingml/2006/main">
               <a:ext uri="{FF2B5EF4-FFF2-40B4-BE49-F238E27FC236}">
-                <a16:creationId xmlns:a16="http://schemas.microsoft.com/office/drawing/2014/main" id="{22D633BF-21C1-4236-B0D1-487B2EB17CDE}"/>
+                <a16:creationId xmlns:a16="http://schemas.microsoft.com/office/drawing/2014/main" id="{350D7FBD-8DCD-4FE9-9C88-B27768C072F5}"/>
               </a:ext>
             </a:extLst>
           </p:cNvPr>
@@ -24063,7 +24063,7 @@
           <p:cNvPr id="31" name="">
             <a:extLst xmlns:a="http://schemas.openxmlformats.org/drawingml/2006/main">
               <a:ext uri="{FF2B5EF4-FFF2-40B4-BE49-F238E27FC236}">
-                <a16:creationId xmlns:a16="http://schemas.microsoft.com/office/drawing/2014/main" id="{46EDA11F-BA82-4F87-8B4B-C9B7FB281D68}"/>
+                <a16:creationId xmlns:a16="http://schemas.microsoft.com/office/drawing/2014/main" id="{6256EB2F-39C3-4FA4-BAC1-6BB7D2188AEE}"/>
               </a:ext>
             </a:extLst>
           </p:cNvPr>
@@ -24098,7 +24098,7 @@
           <p:cNvPr id="32" name="">
             <a:extLst xmlns:a="http://schemas.openxmlformats.org/drawingml/2006/main">
               <a:ext uri="{FF2B5EF4-FFF2-40B4-BE49-F238E27FC236}">
-                <a16:creationId xmlns:a16="http://schemas.microsoft.com/office/drawing/2014/main" id="{A6DD8B9F-5D94-4BF7-9455-DE7927C02863}"/>
+                <a16:creationId xmlns:a16="http://schemas.microsoft.com/office/drawing/2014/main" id="{1D5E1CB6-B253-495F-8392-80FB39D109D8}"/>
               </a:ext>
             </a:extLst>
           </p:cNvPr>
@@ -24143,7 +24143,7 @@
           <p:cNvPr id="33" name="">
             <a:extLst xmlns:a="http://schemas.openxmlformats.org/drawingml/2006/main">
               <a:ext uri="{FF2B5EF4-FFF2-40B4-BE49-F238E27FC236}">
-                <a16:creationId xmlns:a16="http://schemas.microsoft.com/office/drawing/2014/main" id="{16862466-E4B2-4C86-A6B7-F58CE3FECB71}"/>
+                <a16:creationId xmlns:a16="http://schemas.microsoft.com/office/drawing/2014/main" id="{309D4B05-7205-43D8-821D-B4A7673AB45D}"/>
               </a:ext>
             </a:extLst>
           </p:cNvPr>
@@ -24188,7 +24188,7 @@
           <p:cNvPr id="34" name="">
             <a:extLst xmlns:a="http://schemas.openxmlformats.org/drawingml/2006/main">
               <a:ext uri="{FF2B5EF4-FFF2-40B4-BE49-F238E27FC236}">
-                <a16:creationId xmlns:a16="http://schemas.microsoft.com/office/drawing/2014/main" id="{8BBDFFE2-BD43-4590-8DCE-38C801D8D999}"/>
+                <a16:creationId xmlns:a16="http://schemas.microsoft.com/office/drawing/2014/main" id="{2933A3FD-115D-4145-A21C-AB8372BE7F94}"/>
               </a:ext>
             </a:extLst>
           </p:cNvPr>
@@ -24233,7 +24233,7 @@
           <p:cNvPr id="35" name="">
             <a:extLst xmlns:a="http://schemas.openxmlformats.org/drawingml/2006/main">
               <a:ext uri="{FF2B5EF4-FFF2-40B4-BE49-F238E27FC236}">
-                <a16:creationId xmlns:a16="http://schemas.microsoft.com/office/drawing/2014/main" id="{D4C6BF5E-66D5-4295-B41A-94EEC74F5A5B}"/>
+                <a16:creationId xmlns:a16="http://schemas.microsoft.com/office/drawing/2014/main" id="{4515C91C-7806-4B40-A73D-284BA0752A8F}"/>
               </a:ext>
             </a:extLst>
           </p:cNvPr>
@@ -24268,7 +24268,7 @@
           <p:cNvPr id="36" name="">
             <a:extLst xmlns:a="http://schemas.openxmlformats.org/drawingml/2006/main">
               <a:ext uri="{FF2B5EF4-FFF2-40B4-BE49-F238E27FC236}">
-                <a16:creationId xmlns:a16="http://schemas.microsoft.com/office/drawing/2014/main" id="{1DD76D2C-EFF1-4D1F-9828-7EF01FA6DBD5}"/>
+                <a16:creationId xmlns:a16="http://schemas.microsoft.com/office/drawing/2014/main" id="{5D6F90E3-9099-432F-86F8-46EB3BD75A53}"/>
               </a:ext>
             </a:extLst>
           </p:cNvPr>
@@ -24313,7 +24313,7 @@
           <p:cNvPr id="37" name="">
             <a:extLst xmlns:a="http://schemas.openxmlformats.org/drawingml/2006/main">
               <a:ext uri="{FF2B5EF4-FFF2-40B4-BE49-F238E27FC236}">
-                <a16:creationId xmlns:a16="http://schemas.microsoft.com/office/drawing/2014/main" id="{2E3438A2-4B28-4A82-A4C1-4F5A81409CF9}"/>
+                <a16:creationId xmlns:a16="http://schemas.microsoft.com/office/drawing/2014/main" id="{816C6FE9-BADC-4A01-86F8-367C92FF0A77}"/>
               </a:ext>
             </a:extLst>
           </p:cNvPr>
@@ -24358,7 +24358,7 @@
           <p:cNvPr id="38" name="">
             <a:extLst xmlns:a="http://schemas.openxmlformats.org/drawingml/2006/main">
               <a:ext uri="{FF2B5EF4-FFF2-40B4-BE49-F238E27FC236}">
-                <a16:creationId xmlns:a16="http://schemas.microsoft.com/office/drawing/2014/main" id="{8D34A708-814A-42A6-B642-144D567915ED}"/>
+                <a16:creationId xmlns:a16="http://schemas.microsoft.com/office/drawing/2014/main" id="{B8DFD305-C8B4-478E-9B63-53396FDC72D8}"/>
               </a:ext>
             </a:extLst>
           </p:cNvPr>
@@ -24403,7 +24403,7 @@
           <p:cNvPr id="39" name="">
             <a:extLst xmlns:a="http://schemas.openxmlformats.org/drawingml/2006/main">
               <a:ext uri="{FF2B5EF4-FFF2-40B4-BE49-F238E27FC236}">
-                <a16:creationId xmlns:a16="http://schemas.microsoft.com/office/drawing/2014/main" id="{CFD7E31E-3111-47B7-9F98-50DCB49FF441}"/>
+                <a16:creationId xmlns:a16="http://schemas.microsoft.com/office/drawing/2014/main" id="{2DDE6671-C5E1-4823-BFDD-296749B9E739}"/>
               </a:ext>
             </a:extLst>
           </p:cNvPr>
@@ -24438,7 +24438,7 @@
           <p:cNvPr id="40" name="">
             <a:extLst xmlns:a="http://schemas.openxmlformats.org/drawingml/2006/main">
               <a:ext uri="{FF2B5EF4-FFF2-40B4-BE49-F238E27FC236}">
-                <a16:creationId xmlns:a16="http://schemas.microsoft.com/office/drawing/2014/main" id="{2201C230-AF44-47B9-9E70-E1DAC92A36A0}"/>
+                <a16:creationId xmlns:a16="http://schemas.microsoft.com/office/drawing/2014/main" id="{375C7809-E026-4FEB-90D7-AC1D3CCE8280}"/>
               </a:ext>
             </a:extLst>
           </p:cNvPr>
@@ -24483,7 +24483,7 @@
           <p:cNvPr id="41" name="">
             <a:extLst xmlns:a="http://schemas.openxmlformats.org/drawingml/2006/main">
               <a:ext uri="{FF2B5EF4-FFF2-40B4-BE49-F238E27FC236}">
-                <a16:creationId xmlns:a16="http://schemas.microsoft.com/office/drawing/2014/main" id="{D0DBA497-4749-4712-8D48-BBB33E48DE5F}"/>
+                <a16:creationId xmlns:a16="http://schemas.microsoft.com/office/drawing/2014/main" id="{461093FC-E5E0-46F7-B15E-243712753C2D}"/>
               </a:ext>
             </a:extLst>
           </p:cNvPr>
@@ -24528,7 +24528,7 @@
           <p:cNvPr id="42" name="">
             <a:extLst xmlns:a="http://schemas.openxmlformats.org/drawingml/2006/main">
               <a:ext uri="{FF2B5EF4-FFF2-40B4-BE49-F238E27FC236}">
-                <a16:creationId xmlns:a16="http://schemas.microsoft.com/office/drawing/2014/main" id="{AEEB2020-6746-41E1-AB73-F901AEB3C8DD}"/>
+                <a16:creationId xmlns:a16="http://schemas.microsoft.com/office/drawing/2014/main" id="{73365779-F127-4AFC-A38C-2FE48577F540}"/>
               </a:ext>
             </a:extLst>
           </p:cNvPr>
@@ -24573,7 +24573,7 @@
           <p:cNvPr id="43" name="">
             <a:extLst xmlns:a="http://schemas.openxmlformats.org/drawingml/2006/main">
               <a:ext uri="{FF2B5EF4-FFF2-40B4-BE49-F238E27FC236}">
-                <a16:creationId xmlns:a16="http://schemas.microsoft.com/office/drawing/2014/main" id="{6C09CD72-C66E-4E2B-AD98-B969A4AD5C8D}"/>
+                <a16:creationId xmlns:a16="http://schemas.microsoft.com/office/drawing/2014/main" id="{CAED9D26-AB36-4FF8-9908-A174809F7E30}"/>
               </a:ext>
             </a:extLst>
           </p:cNvPr>
@@ -24616,7 +24616,7 @@
     </p:spTree>
     <p:extLst>
       <p:ext uri="{BB962C8B-B14F-4D97-AF65-F5344CB8AC3E}">
-        <p14:creationId xmlns:p14="http://schemas.microsoft.com/office/powerpoint/2010/main" val="1387784770"/>
+        <p14:creationId xmlns:p14="http://schemas.microsoft.com/office/powerpoint/2010/main" val="234425323"/>
       </p:ext>
     </p:extLst>
   </p:cSld>
